--- a/blocks/E_autonomy_logic/M19_mission_fsm/M19_Mission_State_Machine.pptx
+++ b/blocks/E_autonomy_logic/M19_mission_fsm/M19_Mission_State_Machine.pptx
@@ -27,6 +27,7 @@
     <p:sldId id="275" r:id="rId27"/>
     <p:sldId id="276" r:id="rId28"/>
     <p:sldId id="277" r:id="rId29"/>
+    <p:sldId id="278" r:id="rId30"/>
   </p:sldIdLst>
   <p:sldSz cx="12191999" cy="6858000" type="screen4x3"/>
   <p:notesSz cx="6858000" cy="9144000"/>
@@ -613,7 +614,7 @@
           <a:lstStyle/>
           <a:p>
             <a:r>
-              <a:t>[설명] ~/agv_ws/src/agv_mission/agv_mission/mission_manager.py의 전체 파일을 2/5 구간으로 작성한다.</a:t>
+              <a:t>[설명] ~/agv_ws/src/agv_mission/agv_mission/mission_manager.py의 전체 파일을 2/6 구간으로 작성한다.</a:t>
             </a:r>
           </a:p>
           <a:p>
@@ -703,7 +704,7 @@
           <a:lstStyle/>
           <a:p>
             <a:r>
-              <a:t>[설명] ~/agv_ws/src/agv_mission/agv_mission/mission_manager.py의 전체 파일을 3/5 구간으로 작성한다.</a:t>
+              <a:t>[설명] ~/agv_ws/src/agv_mission/agv_mission/mission_manager.py의 전체 파일을 3/6 구간으로 작성한다.</a:t>
             </a:r>
           </a:p>
           <a:p>
@@ -793,7 +794,7 @@
           <a:lstStyle/>
           <a:p>
             <a:r>
-              <a:t>[설명] ~/agv_ws/src/agv_mission/agv_mission/mission_manager.py의 전체 파일을 4/5 구간으로 작성한다.</a:t>
+              <a:t>[설명] ~/agv_ws/src/agv_mission/agv_mission/mission_manager.py의 전체 파일을 4/6 구간으로 작성한다.</a:t>
             </a:r>
           </a:p>
           <a:p>
@@ -883,7 +884,7 @@
           <a:lstStyle/>
           <a:p>
             <a:r>
-              <a:t>[설명] ~/agv_ws/src/agv_mission/agv_mission/mission_manager.py의 전체 파일을 5/5 구간으로 작성한다.</a:t>
+              <a:t>[설명] ~/agv_ws/src/agv_mission/agv_mission/mission_manager.py의 전체 파일을 5/6 구간으로 작성한다.</a:t>
             </a:r>
           </a:p>
           <a:p>
@@ -973,12 +974,12 @@
           <a:lstStyle/>
           <a:p>
             <a:r>
-              <a:t>[설명] ~/agv_ws/src/agv_bringup/config/mission.yaml의 전체 파일을 1/1 구간으로 작성한다.</a:t>
-            </a:r>
-          </a:p>
-          <a:p>
-            <a:r>
-              <a:t>[실행] nano ~/agv_ws/src/agv_bringup/config/mission.yaml</a:t>
+              <a:t>[설명] ~/agv_ws/src/agv_mission/agv_mission/mission_manager.py의 전체 파일을 6/6 구간으로 작성한다.</a:t>
+            </a:r>
+          </a:p>
+          <a:p>
+            <a:r>
+              <a:t>[실행] nano ~/agv_ws/src/agv_mission/agv_mission/mission_manager.py</a:t>
             </a:r>
           </a:p>
           <a:p>
@@ -1063,12 +1064,12 @@
           <a:lstStyle/>
           <a:p>
             <a:r>
-              <a:t>[설명] ~/agv_ws/src/agv_mission/setup.py의 전체 파일을 1/1 구간으로 작성한다.</a:t>
-            </a:r>
-          </a:p>
-          <a:p>
-            <a:r>
-              <a:t>[실행] nano ~/agv_ws/src/agv_mission/setup.py</a:t>
+              <a:t>[설명] ~/agv_ws/src/agv_bringup/config/mission.yaml의 전체 파일을 1/1 구간으로 작성한다.</a:t>
+            </a:r>
+          </a:p>
+          <a:p>
+            <a:r>
+              <a:t>[실행] nano ~/agv_ws/src/agv_bringup/config/mission.yaml</a:t>
             </a:r>
           </a:p>
           <a:p>
@@ -1153,22 +1154,17 @@
           <a:lstStyle/>
           <a:p>
             <a:r>
-              <a:t>[설명] build/source/run을 생략 없이 실행한다.</a:t>
-            </a:r>
-          </a:p>
-          <a:p>
-            <a:r>
-              <a:t>[실행] source ~/agv_ws/install/setup.bash</a:t>
-            </a:r>
-          </a:p>
-          <a:p>
-            <a:r>
-              <a:t>ros2 run agv_mission mission_manager</a:t>
-            </a:r>
-          </a:p>
-          <a:p>
-            <a:r>
-              <a:t>[확인] /mission_state 로그와 /cmd_vel_raw가 detection·obstacle input에 따라 바뀌는 구조를 확인한다.</a:t>
+              <a:t>[설명] ~/agv_ws/src/agv_mission/setup.py의 전체 파일을 1/1 구간으로 작성한다.</a:t>
+            </a:r>
+          </a:p>
+          <a:p>
+            <a:r>
+              <a:t>[실행] nano ~/agv_ws/src/agv_mission/setup.py</a:t>
+            </a:r>
+          </a:p>
+          <a:p>
+            <a:r>
+              <a:t>[확인] 코드를 저장하고 다음 코드 슬라이드 또는 build 단계로 이동한다.</a:t>
             </a:r>
           </a:p>
           <a:p>
@@ -1178,7 +1174,7 @@
           </a:p>
           <a:p>
             <a:r>
-              <a:t>[오류] 오류가 나면 현재 폴더, source, 파일 경로를 먼저 확인한다.</a:t>
+              <a:t>[오류] 들여쓰기·XML 태그·따옴표가 슬라이드와 정확히 같은지 확인한다.</a:t>
             </a:r>
           </a:p>
         </p:txBody>
@@ -1248,17 +1244,22 @@
           <a:lstStyle/>
           <a:p>
             <a:r>
-              <a:t>[설명] 실제 Ubuntu/ROS 2 환경에서 생성한 검증 화면이다.</a:t>
-            </a:r>
-          </a:p>
-          <a:p>
-            <a:r>
-              <a:t>[실행] 슬라이드의 명령 또는 파일 작성 단계를 진행한다.</a:t>
-            </a:r>
-          </a:p>
-          <a:p>
-            <a:r>
-              <a:t>[확인] 캡처의 명령과 다음 슬라이드의 검증 명령을 비교한다.</a:t>
+              <a:t>[설명] build/source/run을 생략 없이 실행한다.</a:t>
+            </a:r>
+          </a:p>
+          <a:p>
+            <a:r>
+              <a:t>[실행] source ~/agv_ws/install/setup.bash</a:t>
+            </a:r>
+          </a:p>
+          <a:p>
+            <a:r>
+              <a:t>ros2 run agv_mission mission_manager</a:t>
+            </a:r>
+          </a:p>
+          <a:p>
+            <a:r>
+              <a:t>[확인] /mission_state 로그와 /cmd_vel_raw가 detection·obstacle input에 따라 바뀌는 구조를 확인한다.</a:t>
             </a:r>
           </a:p>
           <a:p>
@@ -1338,27 +1339,17 @@
           <a:lstStyle/>
           <a:p>
             <a:r>
-              <a:t>[설명] 검증 명령은 GUI 결과와 별도로 실행해 재현 가능한 완료 기준을 만든다.</a:t>
-            </a:r>
-          </a:p>
-          <a:p>
-            <a:r>
-              <a:t>[실행] ros2 topic info /mission_state</a:t>
-            </a:r>
-          </a:p>
-          <a:p>
-            <a:r>
-              <a:t>ros2 topic info /cmd_vel_raw</a:t>
-            </a:r>
-          </a:p>
-          <a:p>
-            <a:r>
-              <a:t>ros2 param get /mission_manager stop_distance</a:t>
-            </a:r>
-          </a:p>
-          <a:p>
-            <a:r>
-              <a:t>[확인] /mission_state 로그와 /cmd_vel_raw가 detection·obstacle input에 따라 바뀌는 구조를 확인한다.</a:t>
+              <a:t>[설명] 실제 Ubuntu/ROS 2 환경에서 생성한 검증 화면이다.</a:t>
+            </a:r>
+          </a:p>
+          <a:p>
+            <a:r>
+              <a:t>[실행] 슬라이드의 명령 또는 파일 작성 단계를 진행한다.</a:t>
+            </a:r>
+          </a:p>
+          <a:p>
+            <a:r>
+              <a:t>[확인] 캡처의 명령과 다음 슬라이드의 검증 명령을 비교한다.</a:t>
             </a:r>
           </a:p>
           <a:p>
@@ -1438,17 +1429,27 @@
           <a:lstStyle/>
           <a:p>
             <a:r>
-              <a:t>[설명] 오류를 대신 해결하지 말고 증상부터 우선 확인 순서대로 교육생이 실행하게 한다.</a:t>
-            </a:r>
-          </a:p>
-          <a:p>
-            <a:r>
-              <a:t>[실행] 슬라이드의 명령 또는 파일 작성 단계를 진행한다.</a:t>
-            </a:r>
-          </a:p>
-          <a:p>
-            <a:r>
-              <a:t>[확인] 수정 뒤 첫 검증 명령을 다시 실행한다.</a:t>
+              <a:t>[설명] 검증 명령은 GUI 결과와 별도로 실행해 재현 가능한 완료 기준을 만든다.</a:t>
+            </a:r>
+          </a:p>
+          <a:p>
+            <a:r>
+              <a:t>[실행] ros2 topic info /mission_state</a:t>
+            </a:r>
+          </a:p>
+          <a:p>
+            <a:r>
+              <a:t>ros2 topic info /cmd_vel_raw</a:t>
+            </a:r>
+          </a:p>
+          <a:p>
+            <a:r>
+              <a:t>ros2 param get /mission_manager stop_distance</a:t>
+            </a:r>
+          </a:p>
+          <a:p>
+            <a:r>
+              <a:t>[확인] /mission_state 로그와 /cmd_vel_raw가 detection·obstacle input에 따라 바뀌는 구조를 확인한다.</a:t>
             </a:r>
           </a:p>
           <a:p>
@@ -1458,7 +1459,7 @@
           </a:p>
           <a:p>
             <a:r>
-              <a:t>[오류] 슬라이드의 두 대표 오류를 먼저 사용한다.</a:t>
+              <a:t>[오류] 오류가 나면 현재 폴더, source, 파일 경로를 먼저 확인한다.</a:t>
             </a:r>
           </a:p>
         </p:txBody>
@@ -1618,7 +1619,7 @@
           <a:lstStyle/>
           <a:p>
             <a:r>
-              <a:t>[설명] 교육생이 직접 한 값만 바꿔 원인과 결과를 연결하게 한다.</a:t>
+              <a:t>[설명] 오류를 대신 해결하지 말고 증상부터 우선 확인 순서대로 교육생이 실행하게 한다.</a:t>
             </a:r>
           </a:p>
           <a:p>
@@ -1628,7 +1629,7 @@
           </a:p>
           <a:p>
             <a:r>
-              <a:t>[확인] 원래 값과 변경 값을 모두 기록한다.</a:t>
+              <a:t>[확인] 수정 뒤 첫 검증 명령을 다시 실행한다.</a:t>
             </a:r>
           </a:p>
           <a:p>
@@ -1638,7 +1639,7 @@
           </a:p>
           <a:p>
             <a:r>
-              <a:t>[오류] 오류가 나면 현재 폴더, source, 파일 경로를 먼저 확인한다.</a:t>
+              <a:t>[오류] 슬라이드의 두 대표 오류를 먼저 사용한다.</a:t>
             </a:r>
           </a:p>
         </p:txBody>
@@ -1708,7 +1709,7 @@
           <a:lstStyle/>
           <a:p>
             <a:r>
-              <a:t>[설명] 교육생이 Complete·캡처·로그를 저장했는지 확인하고 다음 모듈의 시작 상태를 읽는다.</a:t>
+              <a:t>[설명] 교육생이 직접 한 값만 바꿔 원인과 결과를 연결하게 한다.</a:t>
             </a:r>
           </a:p>
           <a:p>
@@ -1718,7 +1719,7 @@
           </a:p>
           <a:p>
             <a:r>
-              <a:t>[확인] M20 PID 시작 조건을 말할 수 있다.</a:t>
+              <a:t>[확인] 원래 값과 변경 값을 모두 기록한다.</a:t>
             </a:r>
           </a:p>
           <a:p>
@@ -1798,6 +1799,96 @@
           <a:lstStyle/>
           <a:p>
             <a:r>
+              <a:t>[설명] 교육생이 Complete·캡처·로그를 저장했는지 확인하고 다음 모듈의 시작 상태를 읽는다.</a:t>
+            </a:r>
+          </a:p>
+          <a:p>
+            <a:r>
+              <a:t>[실행] 슬라이드의 명령 또는 파일 작성 단계를 진행한다.</a:t>
+            </a:r>
+          </a:p>
+          <a:p>
+            <a:r>
+              <a:t>[확인] M20 PID 시작 조건을 말할 수 있다.</a:t>
+            </a:r>
+          </a:p>
+          <a:p>
+            <a:r>
+              <a:t>[멈춤] 교육생이 현재 체크포인트를 통과할 때까지 기다린다.</a:t>
+            </a:r>
+          </a:p>
+          <a:p>
+            <a:r>
+              <a:t>[오류] 오류가 나면 현재 폴더, source, 파일 경로를 먼저 확인한다.</a:t>
+            </a:r>
+          </a:p>
+        </p:txBody>
+      </p:sp>
+      <p:sp>
+        <p:nvSpPr>
+          <p:cNvPr id="4" name="Slide Number Placeholder 3"/>
+          <p:cNvSpPr>
+            <a:spLocks noGrp="1"/>
+          </p:cNvSpPr>
+          <p:nvPr>
+            <p:ph type="sldNum" idx="5" sz="quarter"/>
+          </p:nvPr>
+        </p:nvSpPr>
+        <p:spPr/>
+      </p:sp>
+    </p:spTree>
+  </p:cSld>
+  <p:clrMapOvr>
+    <a:masterClrMapping/>
+  </p:clrMapOvr>
+</p:notes>
+</file>
+
+<file path=ppt/notesSlides/notesSlide23.xml><?xml version="1.0" encoding="utf-8"?>
+<p:notes xmlns:a="http://schemas.openxmlformats.org/drawingml/2006/main" xmlns:p="http://schemas.openxmlformats.org/presentationml/2006/main" xmlns:r="http://schemas.openxmlformats.org/officeDocument/2006/relationships">
+  <p:cSld>
+    <p:spTree>
+      <p:nvGrpSpPr>
+        <p:cNvPr id="1" name=""/>
+        <p:cNvGrpSpPr/>
+        <p:nvPr/>
+      </p:nvGrpSpPr>
+      <p:grpSpPr>
+        <a:xfrm>
+          <a:off x="0" y="0"/>
+          <a:ext cx="0" cy="0"/>
+          <a:chOff x="0" y="0"/>
+          <a:chExt cx="0" cy="0"/>
+        </a:xfrm>
+      </p:grpSpPr>
+      <p:sp>
+        <p:nvSpPr>
+          <p:cNvPr id="2" name="Slide Image Placeholder 1"/>
+          <p:cNvSpPr>
+            <a:spLocks noGrp="1"/>
+          </p:cNvSpPr>
+          <p:nvPr>
+            <p:ph type="sldImg" idx="2"/>
+          </p:nvPr>
+        </p:nvSpPr>
+        <p:spPr/>
+      </p:sp>
+      <p:sp>
+        <p:nvSpPr>
+          <p:cNvPr id="3" name="Notes Placeholder 2"/>
+          <p:cNvSpPr>
+            <a:spLocks noGrp="1"/>
+          </p:cNvSpPr>
+          <p:nvPr>
+            <p:ph type="body" idx="3" sz="quarter"/>
+          </p:nvPr>
+        </p:nvSpPr>
+        <p:spPr/>
+        <p:txBody>
+          <a:bodyPr/>
+          <a:lstStyle/>
+          <a:p>
+            <a:r>
               <a:t>[설명] 공식 문서는 버전 차이와 확장 학습을 확인할 때 사용한다.</a:t>
             </a:r>
           </a:p>
@@ -2448,7 +2539,7 @@
           <a:lstStyle/>
           <a:p>
             <a:r>
-              <a:t>[설명] ~/agv_ws/src/agv_mission/agv_mission/mission_manager.py의 전체 파일을 1/5 구간으로 작성한다.</a:t>
+              <a:t>[설명] ~/agv_ws/src/agv_mission/agv_mission/mission_manager.py의 전체 파일을 1/6 구간으로 작성한다.</a:t>
             </a:r>
           </a:p>
           <a:p>
@@ -5841,7 +5932,7 @@
               </a:defRPr>
             </a:pPr>
             <a:r>
-              <a:t>파일을 계속 작성하고 저장한다 (2/5)</a:t>
+              <a:t>파일을 계속 작성하고 저장한다 (2/6)</a:t>
             </a:r>
           </a:p>
         </p:txBody>
@@ -6016,7 +6107,7 @@
               </a:defRPr>
             </a:pPr>
             <a:r>
-              <a:t>현재 단계 4/8    |    현재 폴더 ~/agv_ws    |    현재 터미널</a:t>
+              <a:t>현재 단계 4/9    |    현재 폴더 ~/agv_ws    |    현재 터미널</a:t>
             </a:r>
           </a:p>
         </p:txBody>
@@ -6029,8 +6120,8 @@
         </p:nvSpPr>
         <p:spPr>
           <a:xfrm>
-            <a:off x="658368" y="1682496"/>
-            <a:ext cx="10972800" cy="347472"/>
+            <a:off x="658368" y="1627632"/>
+            <a:ext cx="10972800" cy="256032"/>
           </a:xfrm>
           <a:prstGeom prst="rect">
             <a:avLst/>
@@ -6047,7 +6138,7 @@
               <a:spcAft>
                 <a:spcPts val="0"/>
               </a:spcAft>
-              <a:defRPr sz="1700" b="1">
+              <a:defRPr sz="1500" b="1">
                 <a:solidFill>
                   <a:srgbClr val="122C4E"/>
                 </a:solidFill>
@@ -6068,8 +6159,8 @@
         </p:nvSpPr>
         <p:spPr>
           <a:xfrm>
-            <a:off x="658368" y="2103120"/>
-            <a:ext cx="10972800" cy="493776"/>
+            <a:off x="658368" y="1956816"/>
+            <a:ext cx="10972800" cy="603504"/>
           </a:xfrm>
           <a:prstGeom prst="rect">
             <a:avLst/>
@@ -6113,7 +6204,11 @@
               </a:defRPr>
             </a:pPr>
             <a:r>
-              <a:t>파일 생성/열기: mkdir -p ~/agv_ws/src/agv_mission/agv_mission    &amp;&amp;    nano ~/agv_ws/src/agv_mission/agv_mission/mission_manager.py</a:t>
+              <a:t>파일 생성: mkdir -p ~/agv_ws/src/agv_mission/agv_mission</a:t>
+            </a:r>
+            <a:br/>
+            <a:r>
+              <a:t>파일 열기: nano ~/agv_ws/src/agv_mission/agv_mission/mission_manager.py</a:t>
             </a:r>
           </a:p>
         </p:txBody>
@@ -6126,8 +6221,8 @@
         </p:nvSpPr>
         <p:spPr>
           <a:xfrm>
-            <a:off x="658368" y="2761488"/>
-            <a:ext cx="10972800" cy="3383280"/>
+            <a:off x="658368" y="2706624"/>
+            <a:ext cx="10972800" cy="3364992"/>
           </a:xfrm>
           <a:prstGeom prst="rect">
             <a:avLst/>
@@ -6171,6 +6266,14 @@
               </a:defRPr>
             </a:pPr>
             <a:r>
+              <a:t>        self.declare_parameter('search_speed', 0.25)</a:t>
+            </a:r>
+            <a:br/>
+            <a:r>
+              <a:t>        self.declare_parameter('approach_speed', 0.15)</a:t>
+            </a:r>
+            <a:br/>
+            <a:r>
               <a:t>        self.declare_parameter('image_center_x', 320)</a:t>
             </a:r>
             <a:br/>
@@ -6208,19 +6311,6 @@
             <a:br/>
             <a:r>
               <a:t>        self.state_publisher = self.create_publisher(String, '/mission_state', 10)</a:t>
-            </a:r>
-            <a:br/>
-            <a:r>
-              <a:t>        self.create_timer(0.1, self.tick)</a:t>
-            </a:r>
-            <a:br/>
-            <a:br/>
-            <a:r>
-              <a:t>    def obstacle_callback(self, message):</a:t>
-            </a:r>
-            <a:br/>
-            <a:r>
-              <a:t>        self.obstacle_distance = message.data</a:t>
             </a:r>
           </a:p>
         </p:txBody>
@@ -6233,7 +6323,7 @@
         </p:nvSpPr>
         <p:spPr>
           <a:xfrm>
-            <a:off x="749808" y="6199632"/>
+            <a:off x="749808" y="6181344"/>
             <a:ext cx="10789920" cy="201168"/>
           </a:xfrm>
           <a:prstGeom prst="rect">
@@ -6259,7 +6349,7 @@
               </a:defRPr>
             </a:pPr>
             <a:r>
-              <a:t>파일 전체 2/5 · 이 슬라이드 다음에 같은 파일의 나머지 줄이 이어집니다.</a:t>
+              <a:t>파일 전체 2/6 · 이 슬라이드 다음에 같은 파일의 나머지 줄이 이어집니다.</a:t>
             </a:r>
           </a:p>
         </p:txBody>
@@ -6316,7 +6406,7 @@
               </a:defRPr>
             </a:pPr>
             <a:r>
-              <a:t>파일을 계속 작성하고 저장한다 (3/5)</a:t>
+              <a:t>파일을 계속 작성하고 저장한다 (3/6)</a:t>
             </a:r>
           </a:p>
         </p:txBody>
@@ -6491,7 +6581,7 @@
               </a:defRPr>
             </a:pPr>
             <a:r>
-              <a:t>현재 단계 5/8    |    현재 폴더 ~/agv_ws    |    현재 터미널</a:t>
+              <a:t>현재 단계 5/9    |    현재 폴더 ~/agv_ws    |    현재 터미널</a:t>
             </a:r>
           </a:p>
         </p:txBody>
@@ -6504,8 +6594,8 @@
         </p:nvSpPr>
         <p:spPr>
           <a:xfrm>
-            <a:off x="658368" y="1682496"/>
-            <a:ext cx="10972800" cy="347472"/>
+            <a:off x="658368" y="1627632"/>
+            <a:ext cx="10972800" cy="256032"/>
           </a:xfrm>
           <a:prstGeom prst="rect">
             <a:avLst/>
@@ -6522,7 +6612,7 @@
               <a:spcAft>
                 <a:spcPts val="0"/>
               </a:spcAft>
-              <a:defRPr sz="1700" b="1">
+              <a:defRPr sz="1500" b="1">
                 <a:solidFill>
                   <a:srgbClr val="122C4E"/>
                 </a:solidFill>
@@ -6543,8 +6633,8 @@
         </p:nvSpPr>
         <p:spPr>
           <a:xfrm>
-            <a:off x="658368" y="2103120"/>
-            <a:ext cx="10972800" cy="493776"/>
+            <a:off x="658368" y="1956816"/>
+            <a:ext cx="10972800" cy="603504"/>
           </a:xfrm>
           <a:prstGeom prst="rect">
             <a:avLst/>
@@ -6588,7 +6678,11 @@
               </a:defRPr>
             </a:pPr>
             <a:r>
-              <a:t>파일 생성/열기: mkdir -p ~/agv_ws/src/agv_mission/agv_mission    &amp;&amp;    nano ~/agv_ws/src/agv_mission/agv_mission/mission_manager.py</a:t>
+              <a:t>파일 생성: mkdir -p ~/agv_ws/src/agv_mission/agv_mission</a:t>
+            </a:r>
+            <a:br/>
+            <a:r>
+              <a:t>파일 열기: nano ~/agv_ws/src/agv_mission/agv_mission/mission_manager.py</a:t>
             </a:r>
           </a:p>
         </p:txBody>
@@ -6601,8 +6695,8 @@
         </p:nvSpPr>
         <p:spPr>
           <a:xfrm>
-            <a:off x="658368" y="2761488"/>
-            <a:ext cx="10972800" cy="3383280"/>
+            <a:off x="658368" y="2706624"/>
+            <a:ext cx="10972800" cy="3364992"/>
           </a:xfrm>
           <a:prstGeom prst="rect">
             <a:avLst/>
@@ -6645,51 +6739,43 @@
                 <a:latin typeface="DejaVu Sans Mono"/>
               </a:defRPr>
             </a:pPr>
-            <a:br/>
-            <a:r>
-              <a:t>    def detections_callback(self, message):</a:t>
-            </a:r>
-            <a:br/>
-            <a:r>
-              <a:t>        self.target = message.detections[0] if message.detections else None</a:t>
+            <a:r>
+              <a:t>        self.create_timer(0.1, self.tick)</a:t>
             </a:r>
             <a:br/>
             <a:br/>
             <a:r>
-              <a:t>    def set_state(self, state):</a:t>
+              <a:t>    def obstacle_callback(self, message):</a:t>
             </a:r>
             <a:br/>
             <a:r>
-              <a:t>        if state != self.state:</a:t>
-            </a:r>
-            <a:br/>
-            <a:r>
-              <a:t>            self.state = state</a:t>
-            </a:r>
-            <a:br/>
-            <a:r>
-              <a:t>            self.get_logger().info('mission state -&gt; ' + state)</a:t>
-            </a:r>
-            <a:br/>
-            <a:r>
-              <a:t>        self.state_publisher.publish(String(data=self.state))</a:t>
+              <a:t>        self.obstacle_distance = message.data</a:t>
             </a:r>
             <a:br/>
             <a:br/>
             <a:r>
-              <a:t>    def tick(self):</a:t>
+              <a:t>    def detections_callback(self, message):</a:t>
             </a:r>
             <a:br/>
             <a:r>
-              <a:t>        command = Twist()</a:t>
+              <a:t>        self.target = message.detections[0] if message.detections else None</a:t>
             </a:r>
             <a:br/>
-            <a:r>
-              <a:t>        if self.obstacle_distance &lt; self.get_parameter('stop_distance').value:</a:t>
-            </a:r>
             <a:br/>
             <a:r>
-              <a:t>            self.set_state('AVOID')</a:t>
+              <a:t>    def set_state(self, state):</a:t>
+            </a:r>
+            <a:br/>
+            <a:r>
+              <a:t>        if state != self.state:</a:t>
+            </a:r>
+            <a:br/>
+            <a:r>
+              <a:t>            self.state = state</a:t>
+            </a:r>
+            <a:br/>
+            <a:r>
+              <a:t>            self.get_logger().info('mission state -&gt; ' + state)</a:t>
             </a:r>
           </a:p>
         </p:txBody>
@@ -6702,7 +6788,7 @@
         </p:nvSpPr>
         <p:spPr>
           <a:xfrm>
-            <a:off x="749808" y="6199632"/>
+            <a:off x="749808" y="6181344"/>
             <a:ext cx="10789920" cy="201168"/>
           </a:xfrm>
           <a:prstGeom prst="rect">
@@ -6728,7 +6814,7 @@
               </a:defRPr>
             </a:pPr>
             <a:r>
-              <a:t>파일 전체 3/5 · 이 슬라이드 다음에 같은 파일의 나머지 줄이 이어집니다.</a:t>
+              <a:t>파일 전체 3/6 · 이 슬라이드 다음에 같은 파일의 나머지 줄이 이어집니다.</a:t>
             </a:r>
           </a:p>
         </p:txBody>
@@ -6785,7 +6871,7 @@
               </a:defRPr>
             </a:pPr>
             <a:r>
-              <a:t>파일을 계속 작성하고 저장한다 (4/5)</a:t>
+              <a:t>파일을 계속 작성하고 저장한다 (4/6)</a:t>
             </a:r>
           </a:p>
         </p:txBody>
@@ -6960,7 +7046,7 @@
               </a:defRPr>
             </a:pPr>
             <a:r>
-              <a:t>현재 단계 6/8    |    현재 폴더 ~/agv_ws    |    현재 터미널</a:t>
+              <a:t>현재 단계 6/9    |    현재 폴더 ~/agv_ws    |    현재 터미널</a:t>
             </a:r>
           </a:p>
         </p:txBody>
@@ -6973,8 +7059,8 @@
         </p:nvSpPr>
         <p:spPr>
           <a:xfrm>
-            <a:off x="658368" y="1682496"/>
-            <a:ext cx="10972800" cy="347472"/>
+            <a:off x="658368" y="1627632"/>
+            <a:ext cx="10972800" cy="256032"/>
           </a:xfrm>
           <a:prstGeom prst="rect">
             <a:avLst/>
@@ -6991,7 +7077,7 @@
               <a:spcAft>
                 <a:spcPts val="0"/>
               </a:spcAft>
-              <a:defRPr sz="1700" b="1">
+              <a:defRPr sz="1500" b="1">
                 <a:solidFill>
                   <a:srgbClr val="122C4E"/>
                 </a:solidFill>
@@ -7012,8 +7098,8 @@
         </p:nvSpPr>
         <p:spPr>
           <a:xfrm>
-            <a:off x="658368" y="2103120"/>
-            <a:ext cx="10972800" cy="493776"/>
+            <a:off x="658368" y="1956816"/>
+            <a:ext cx="10972800" cy="603504"/>
           </a:xfrm>
           <a:prstGeom prst="rect">
             <a:avLst/>
@@ -7057,7 +7143,11 @@
               </a:defRPr>
             </a:pPr>
             <a:r>
-              <a:t>파일 생성/열기: mkdir -p ~/agv_ws/src/agv_mission/agv_mission    &amp;&amp;    nano ~/agv_ws/src/agv_mission/agv_mission/mission_manager.py</a:t>
+              <a:t>파일 생성: mkdir -p ~/agv_ws/src/agv_mission/agv_mission</a:t>
+            </a:r>
+            <a:br/>
+            <a:r>
+              <a:t>파일 열기: nano ~/agv_ws/src/agv_mission/agv_mission/mission_manager.py</a:t>
             </a:r>
           </a:p>
         </p:txBody>
@@ -7070,8 +7160,8 @@
         </p:nvSpPr>
         <p:spPr>
           <a:xfrm>
-            <a:off x="658368" y="2761488"/>
-            <a:ext cx="10972800" cy="3383280"/>
+            <a:off x="658368" y="2706624"/>
+            <a:ext cx="10972800" cy="3364992"/>
           </a:xfrm>
           <a:prstGeom prst="rect">
             <a:avLst/>
@@ -7115,56 +7205,48 @@
               </a:defRPr>
             </a:pPr>
             <a:r>
-              <a:t>            command.angular.z = self.get_parameter('search_speed').value</a:t>
-            </a:r>
-            <a:br/>
-            <a:r>
-              <a:t>        elif self.target is None:</a:t>
-            </a:r>
-            <a:br/>
-            <a:r>
-              <a:t>            self.set_state('SEARCH')</a:t>
-            </a:r>
-            <a:br/>
-            <a:r>
-              <a:t>            command.angular.z = self.get_parameter('search_speed').value</a:t>
-            </a:r>
-            <a:br/>
-            <a:r>
-              <a:t>        elif self.target.estimated_distance &gt; 0.0 and self.target.estimated_distance &lt; self.get_parameter('stop_distance').value:</a:t>
-            </a:r>
-            <a:br/>
-            <a:r>
-              <a:t>            self.set_state('GOAL')</a:t>
-            </a:r>
-            <a:br/>
-            <a:r>
-              <a:t>        else:</a:t>
-            </a:r>
-            <a:br/>
-            <a:r>
-              <a:t>            self.set_state('APPROACH')</a:t>
-            </a:r>
-            <a:br/>
-            <a:r>
-              <a:t>            command.linear.x = self.get_parameter('approach_speed').value</a:t>
-            </a:r>
-            <a:br/>
-            <a:r>
-              <a:t>            error = self.target.center_x - self.get_parameter('image_center_x').value</a:t>
-            </a:r>
-            <a:br/>
-            <a:r>
-              <a:t>            command.angular.z = max(min(-0.004 * error, 0.6), -0.6)</a:t>
-            </a:r>
-            <a:br/>
-            <a:r>
-              <a:t>        self.command_publisher.publish(command)</a:t>
+              <a:t>        self.state_publisher.publish(String(data=self.state))</a:t>
             </a:r>
             <a:br/>
             <a:br/>
             <a:r>
-              <a:t>def main():</a:t>
+              <a:t>    def tick(self):</a:t>
+            </a:r>
+            <a:br/>
+            <a:r>
+              <a:t>        command = Twist()</a:t>
+            </a:r>
+            <a:br/>
+            <a:r>
+              <a:t>        if self.obstacle_distance &lt; self.get_parameter('stop_distance').value:</a:t>
+            </a:r>
+            <a:br/>
+            <a:r>
+              <a:t>            self.set_state('AVOID')</a:t>
+            </a:r>
+            <a:br/>
+            <a:r>
+              <a:t>            command.angular.z = self.get_parameter('search_speed').value</a:t>
+            </a:r>
+            <a:br/>
+            <a:r>
+              <a:t>        elif self.target is None:</a:t>
+            </a:r>
+            <a:br/>
+            <a:r>
+              <a:t>            self.set_state('SEARCH')</a:t>
+            </a:r>
+            <a:br/>
+            <a:r>
+              <a:t>            command.angular.z = self.get_parameter('search_speed').value</a:t>
+            </a:r>
+            <a:br/>
+            <a:r>
+              <a:t>        elif self.target.estimated_distance &gt; 0.0 and self.target.estimated_distance &lt; self.get_parameter('stop_distance').value:</a:t>
+            </a:r>
+            <a:br/>
+            <a:r>
+              <a:t>            self.set_state('GOAL')</a:t>
             </a:r>
           </a:p>
         </p:txBody>
@@ -7177,7 +7259,7 @@
         </p:nvSpPr>
         <p:spPr>
           <a:xfrm>
-            <a:off x="749808" y="6199632"/>
+            <a:off x="749808" y="6181344"/>
             <a:ext cx="10789920" cy="201168"/>
           </a:xfrm>
           <a:prstGeom prst="rect">
@@ -7203,7 +7285,7 @@
               </a:defRPr>
             </a:pPr>
             <a:r>
-              <a:t>파일 전체 4/5 · 이 슬라이드 다음에 같은 파일의 나머지 줄이 이어집니다.</a:t>
+              <a:t>파일 전체 4/6 · 이 슬라이드 다음에 같은 파일의 나머지 줄이 이어집니다.</a:t>
             </a:r>
           </a:p>
         </p:txBody>
@@ -7260,7 +7342,7 @@
               </a:defRPr>
             </a:pPr>
             <a:r>
-              <a:t>파일을 계속 작성하고 저장한다 (5/5)</a:t>
+              <a:t>파일을 계속 작성하고 저장한다 (5/6)</a:t>
             </a:r>
           </a:p>
         </p:txBody>
@@ -7435,7 +7517,7 @@
               </a:defRPr>
             </a:pPr>
             <a:r>
-              <a:t>현재 단계 7/8    |    현재 폴더 ~/agv_ws    |    현재 터미널</a:t>
+              <a:t>현재 단계 7/9    |    현재 폴더 ~/agv_ws    |    현재 터미널</a:t>
             </a:r>
           </a:p>
         </p:txBody>
@@ -7448,8 +7530,8 @@
         </p:nvSpPr>
         <p:spPr>
           <a:xfrm>
-            <a:off x="658368" y="1682496"/>
-            <a:ext cx="10972800" cy="347472"/>
+            <a:off x="658368" y="1627632"/>
+            <a:ext cx="10972800" cy="256032"/>
           </a:xfrm>
           <a:prstGeom prst="rect">
             <a:avLst/>
@@ -7466,7 +7548,7 @@
               <a:spcAft>
                 <a:spcPts val="0"/>
               </a:spcAft>
-              <a:defRPr sz="1700" b="1">
+              <a:defRPr sz="1500" b="1">
                 <a:solidFill>
                   <a:srgbClr val="122C4E"/>
                 </a:solidFill>
@@ -7487,8 +7569,8 @@
         </p:nvSpPr>
         <p:spPr>
           <a:xfrm>
-            <a:off x="658368" y="2103120"/>
-            <a:ext cx="10972800" cy="493776"/>
+            <a:off x="658368" y="1956816"/>
+            <a:ext cx="10972800" cy="603504"/>
           </a:xfrm>
           <a:prstGeom prst="rect">
             <a:avLst/>
@@ -7532,7 +7614,11 @@
               </a:defRPr>
             </a:pPr>
             <a:r>
-              <a:t>파일 생성/열기: mkdir -p ~/agv_ws/src/agv_mission/agv_mission    &amp;&amp;    nano ~/agv_ws/src/agv_mission/agv_mission/mission_manager.py</a:t>
+              <a:t>파일 생성: mkdir -p ~/agv_ws/src/agv_mission/agv_mission</a:t>
+            </a:r>
+            <a:br/>
+            <a:r>
+              <a:t>파일 열기: nano ~/agv_ws/src/agv_mission/agv_mission/mission_manager.py</a:t>
             </a:r>
           </a:p>
         </p:txBody>
@@ -7545,8 +7631,8 @@
         </p:nvSpPr>
         <p:spPr>
           <a:xfrm>
-            <a:off x="658368" y="2761488"/>
-            <a:ext cx="10972800" cy="3383280"/>
+            <a:off x="658368" y="2706624"/>
+            <a:ext cx="10972800" cy="3364992"/>
           </a:xfrm>
           <a:prstGeom prst="rect">
             <a:avLst/>
@@ -7590,6 +7676,35 @@
               </a:defRPr>
             </a:pPr>
             <a:r>
+              <a:t>        else:</a:t>
+            </a:r>
+            <a:br/>
+            <a:r>
+              <a:t>            self.set_state('APPROACH')</a:t>
+            </a:r>
+            <a:br/>
+            <a:r>
+              <a:t>            command.linear.x = self.get_parameter('approach_speed').value</a:t>
+            </a:r>
+            <a:br/>
+            <a:r>
+              <a:t>            error = self.target.center_x - self.get_parameter('image_center_x').value</a:t>
+            </a:r>
+            <a:br/>
+            <a:r>
+              <a:t>            command.angular.z = max(min(-0.004 * error, 0.6), -0.6)</a:t>
+            </a:r>
+            <a:br/>
+            <a:r>
+              <a:t>        self.command_publisher.publish(command)</a:t>
+            </a:r>
+            <a:br/>
+            <a:br/>
+            <a:r>
+              <a:t>def main():</a:t>
+            </a:r>
+            <a:br/>
+            <a:r>
               <a:t>    rclpy.init()</a:t>
             </a:r>
             <a:br/>
@@ -7603,30 +7718,6 @@
             <a:br/>
             <a:r>
               <a:t>        rclpy.spin(node)</a:t>
-            </a:r>
-            <a:br/>
-            <a:r>
-              <a:t>    except KeyboardInterrupt:</a:t>
-            </a:r>
-            <a:br/>
-            <a:r>
-              <a:t>        pass</a:t>
-            </a:r>
-            <a:br/>
-            <a:r>
-              <a:t>    finally:</a:t>
-            </a:r>
-            <a:br/>
-            <a:r>
-              <a:t>        node.destroy_node()</a:t>
-            </a:r>
-            <a:br/>
-            <a:r>
-              <a:t>        if rclpy.ok():</a:t>
-            </a:r>
-            <a:br/>
-            <a:r>
-              <a:t>            rclpy.shutdown()</a:t>
             </a:r>
           </a:p>
         </p:txBody>
@@ -7639,7 +7730,7 @@
         </p:nvSpPr>
         <p:spPr>
           <a:xfrm>
-            <a:off x="749808" y="6199632"/>
+            <a:off x="749808" y="6181344"/>
             <a:ext cx="10789920" cy="201168"/>
           </a:xfrm>
           <a:prstGeom prst="rect">
@@ -7665,7 +7756,7 @@
               </a:defRPr>
             </a:pPr>
             <a:r>
-              <a:t>파일 전체 5/5 · 이 슬라이드 다음에 같은 파일의 나머지 줄이 이어집니다.</a:t>
+              <a:t>파일 전체 5/6 · 이 슬라이드 다음에 같은 파일의 나머지 줄이 이어집니다.</a:t>
             </a:r>
           </a:p>
         </p:txBody>
@@ -7722,7 +7813,7 @@
               </a:defRPr>
             </a:pPr>
             <a:r>
-              <a:t>파일을 새로 만들고 저장한다 (1/1)</a:t>
+              <a:t>파일을 계속 작성하고 저장한다 (6/6)</a:t>
             </a:r>
           </a:p>
         </p:txBody>
@@ -7761,7 +7852,7 @@
               </a:defRPr>
             </a:pPr>
             <a:r>
-              <a:t>~/agv_ws/src/agv_bringup/config/mission.yaml</a:t>
+              <a:t>~/agv_ws/src/agv_mission/agv_mission/mission_manager.py</a:t>
             </a:r>
           </a:p>
         </p:txBody>
@@ -7910,8 +8001,8 @@
         </p:nvSpPr>
         <p:spPr>
           <a:xfrm>
-            <a:off x="658368" y="1682496"/>
-            <a:ext cx="10972800" cy="347472"/>
+            <a:off x="658368" y="1627632"/>
+            <a:ext cx="10972800" cy="256032"/>
           </a:xfrm>
           <a:prstGeom prst="rect">
             <a:avLst/>
@@ -7928,7 +8019,7 @@
               <a:spcAft>
                 <a:spcPts val="0"/>
               </a:spcAft>
-              <a:defRPr sz="1700" b="1">
+              <a:defRPr sz="1500" b="1">
                 <a:solidFill>
                   <a:srgbClr val="122C4E"/>
                 </a:solidFill>
@@ -7949,8 +8040,8 @@
         </p:nvSpPr>
         <p:spPr>
           <a:xfrm>
-            <a:off x="658368" y="2103120"/>
-            <a:ext cx="10972800" cy="493776"/>
+            <a:off x="658368" y="1956816"/>
+            <a:ext cx="10972800" cy="603504"/>
           </a:xfrm>
           <a:prstGeom prst="rect">
             <a:avLst/>
@@ -7994,7 +8085,11 @@
               </a:defRPr>
             </a:pPr>
             <a:r>
-              <a:t>파일 생성/열기: mkdir -p ~/agv_ws/src/agv_bringup/config    &amp;&amp;    nano ~/agv_ws/src/agv_bringup/config/mission.yaml</a:t>
+              <a:t>파일 생성: mkdir -p ~/agv_ws/src/agv_mission/agv_mission</a:t>
+            </a:r>
+            <a:br/>
+            <a:r>
+              <a:t>파일 열기: nano ~/agv_ws/src/agv_mission/agv_mission/mission_manager.py</a:t>
             </a:r>
           </a:p>
         </p:txBody>
@@ -8007,8 +8102,8 @@
         </p:nvSpPr>
         <p:spPr>
           <a:xfrm>
-            <a:off x="658368" y="2761488"/>
-            <a:ext cx="10972800" cy="3383280"/>
+            <a:off x="658368" y="2706624"/>
+            <a:ext cx="10972800" cy="3364992"/>
           </a:xfrm>
           <a:prstGeom prst="rect">
             <a:avLst/>
@@ -8052,51 +8147,27 @@
               </a:defRPr>
             </a:pPr>
             <a:r>
-              <a:t>mission_manager:</a:t>
+              <a:t>    except KeyboardInterrupt:</a:t>
             </a:r>
             <a:br/>
             <a:r>
-              <a:t>  ros__parameters:</a:t>
+              <a:t>        pass</a:t>
             </a:r>
             <a:br/>
             <a:r>
-              <a:t>    use_sim_time: true</a:t>
+              <a:t>    finally:</a:t>
             </a:r>
             <a:br/>
             <a:r>
-              <a:t>    stop_distance: 0.50</a:t>
+              <a:t>        node.destroy_node()</a:t>
             </a:r>
             <a:br/>
             <a:r>
-              <a:t>    search_speed: 0.25</a:t>
+              <a:t>        if rclpy.ok():</a:t>
             </a:r>
             <a:br/>
             <a:r>
-              <a:t>    approach_speed: 0.15</a:t>
-            </a:r>
-            <a:br/>
-            <a:r>
-              <a:t>    image_center_x: 320</a:t>
-            </a:r>
-            <a:br/>
-            <a:r>
-              <a:t>safety_controller:</a:t>
-            </a:r>
-            <a:br/>
-            <a:r>
-              <a:t>  ros__parameters:</a:t>
-            </a:r>
-            <a:br/>
-            <a:r>
-              <a:t>    use_sim_time: true</a:t>
-            </a:r>
-            <a:br/>
-            <a:r>
-              <a:t>    stop_distance: 0.50</a:t>
-            </a:r>
-            <a:br/>
-            <a:r>
-              <a:t>    front_half_angle_deg: 15.0</a:t>
+              <a:t>            rclpy.shutdown()</a:t>
             </a:r>
           </a:p>
         </p:txBody>
@@ -8109,7 +8180,7 @@
         </p:nvSpPr>
         <p:spPr>
           <a:xfrm>
-            <a:off x="749808" y="6199632"/>
+            <a:off x="749808" y="6181344"/>
             <a:ext cx="10789920" cy="201168"/>
           </a:xfrm>
           <a:prstGeom prst="rect">
@@ -8135,7 +8206,7 @@
               </a:defRPr>
             </a:pPr>
             <a:r>
-              <a:t>파일 전체 1/1 · 이 슬라이드 다음에 같은 파일의 나머지 줄이 이어집니다.</a:t>
+              <a:t>파일 전체 6/6 · 이 슬라이드 다음에 같은 파일의 나머지 줄이 이어집니다.</a:t>
             </a:r>
           </a:p>
         </p:txBody>
@@ -8231,7 +8302,7 @@
               </a:defRPr>
             </a:pPr>
             <a:r>
-              <a:t>~/agv_ws/src/agv_mission/setup.py</a:t>
+              <a:t>~/agv_ws/src/agv_bringup/config/mission.yaml</a:t>
             </a:r>
           </a:p>
         </p:txBody>
@@ -8380,8 +8451,8 @@
         </p:nvSpPr>
         <p:spPr>
           <a:xfrm>
-            <a:off x="658368" y="1682496"/>
-            <a:ext cx="10972800" cy="347472"/>
+            <a:off x="658368" y="1627632"/>
+            <a:ext cx="10972800" cy="256032"/>
           </a:xfrm>
           <a:prstGeom prst="rect">
             <a:avLst/>
@@ -8398,7 +8469,7 @@
               <a:spcAft>
                 <a:spcPts val="0"/>
               </a:spcAft>
-              <a:defRPr sz="1700" b="1">
+              <a:defRPr sz="1500" b="1">
                 <a:solidFill>
                   <a:srgbClr val="122C4E"/>
                 </a:solidFill>
@@ -8419,8 +8490,8 @@
         </p:nvSpPr>
         <p:spPr>
           <a:xfrm>
-            <a:off x="658368" y="2103120"/>
-            <a:ext cx="10972800" cy="493776"/>
+            <a:off x="658368" y="1956816"/>
+            <a:ext cx="10972800" cy="603504"/>
           </a:xfrm>
           <a:prstGeom prst="rect">
             <a:avLst/>
@@ -8464,7 +8535,11 @@
               </a:defRPr>
             </a:pPr>
             <a:r>
-              <a:t>파일 생성/열기: mkdir -p ~/agv_ws/src/agv_mission    &amp;&amp;    nano ~/agv_ws/src/agv_mission/setup.py</a:t>
+              <a:t>파일 생성: mkdir -p ~/agv_ws/src/agv_bringup/config</a:t>
+            </a:r>
+            <a:br/>
+            <a:r>
+              <a:t>파일 열기: nano ~/agv_ws/src/agv_bringup/config/mission.yaml</a:t>
             </a:r>
           </a:p>
         </p:txBody>
@@ -8477,8 +8552,8 @@
         </p:nvSpPr>
         <p:spPr>
           <a:xfrm>
-            <a:off x="658368" y="2761488"/>
-            <a:ext cx="10972800" cy="3383280"/>
+            <a:off x="658368" y="2706624"/>
+            <a:ext cx="10972800" cy="3364992"/>
           </a:xfrm>
           <a:prstGeom prst="rect">
             <a:avLst/>
@@ -8522,35 +8597,51 @@
               </a:defRPr>
             </a:pPr>
             <a:r>
-              <a:t>from setuptools import find_packages, setup</a:t>
+              <a:t>mission_manager:</a:t>
             </a:r>
             <a:br/>
             <a:r>
-              <a:t>package_name = 'agv_mission'</a:t>
+              <a:t>  ros__parameters:</a:t>
             </a:r>
             <a:br/>
             <a:r>
-              <a:t>setup(name=package_name, version='0.1.0', packages=find_packages(exclude=['test']),</a:t>
+              <a:t>    use_sim_time: true</a:t>
             </a:r>
             <a:br/>
             <a:r>
-              <a:t>    data_files=[('share/ament_index/resource_index/packages',</a:t>
+              <a:t>    stop_distance: 0.50</a:t>
             </a:r>
             <a:br/>
             <a:r>
-              <a:t>    ['resource/' + package_name]), ('share/' + package_name, ['package.xml'])],</a:t>
+              <a:t>    search_speed: 0.25</a:t>
             </a:r>
             <a:br/>
             <a:r>
-              <a:t>    install_requires=['setuptools'], zip_safe=True, maintainer='AGV student',</a:t>
+              <a:t>    approach_speed: 0.15</a:t>
             </a:r>
             <a:br/>
             <a:r>
-              <a:t>    maintainer_email='student@example.com', license='Apache-2.0',</a:t>
+              <a:t>    image_center_x: 320</a:t>
             </a:r>
             <a:br/>
             <a:r>
-              <a:t>    entry_points={'console_scripts': ['mission_manager = agv_mission.mission_manager:main']})</a:t>
+              <a:t>safety_controller:</a:t>
+            </a:r>
+            <a:br/>
+            <a:r>
+              <a:t>  ros__parameters:</a:t>
+            </a:r>
+            <a:br/>
+            <a:r>
+              <a:t>    use_sim_time: true</a:t>
+            </a:r>
+            <a:br/>
+            <a:r>
+              <a:t>    stop_distance: 0.50</a:t>
+            </a:r>
+            <a:br/>
+            <a:r>
+              <a:t>    front_half_angle_deg: 15.0</a:t>
             </a:r>
           </a:p>
         </p:txBody>
@@ -8563,7 +8654,7 @@
         </p:nvSpPr>
         <p:spPr>
           <a:xfrm>
-            <a:off x="749808" y="6199632"/>
+            <a:off x="749808" y="6181344"/>
             <a:ext cx="10789920" cy="201168"/>
           </a:xfrm>
           <a:prstGeom prst="rect">
@@ -8646,7 +8737,7 @@
               </a:defRPr>
             </a:pPr>
             <a:r>
-              <a:t>build → source → run 순서로 실행한다</a:t>
+              <a:t>파일을 새로 만들고 저장한다 (1/1)</a:t>
             </a:r>
           </a:p>
         </p:txBody>
@@ -8685,7 +8776,7 @@
               </a:defRPr>
             </a:pPr>
             <a:r>
-              <a:t>새 파일 또는 수정 파일은 build와 source 뒤에만 실행 이름·설정에 반영됩니다.</a:t>
+              <a:t>~/agv_ws/src/agv_mission/setup.py</a:t>
             </a:r>
           </a:p>
         </p:txBody>
@@ -8821,23 +8912,124 @@
               </a:defRPr>
             </a:pPr>
             <a:r>
-              <a:t>현재 단계 실행    |    현재 폴더 ~/agv_ws    |    현재 터미널</a:t>
-            </a:r>
-          </a:p>
-        </p:txBody>
-      </p:sp>
-      <p:sp>
-        <p:nvSpPr>
-          <p:cNvPr id="7" name="Rounded Rectangle 6"/>
+              <a:t>현재 단계 10/11    |    현재 폴더 ~/agv_ws    |    현재 터미널</a:t>
+            </a:r>
+          </a:p>
+        </p:txBody>
+      </p:sp>
+      <p:sp>
+        <p:nvSpPr>
+          <p:cNvPr id="7" name="TextBox 6"/>
+          <p:cNvSpPr txBox="1"/>
+          <p:nvPr/>
+        </p:nvSpPr>
+        <p:spPr>
+          <a:xfrm>
+            <a:off x="658368" y="1627632"/>
+            <a:ext cx="10972800" cy="256032"/>
+          </a:xfrm>
+          <a:prstGeom prst="rect">
+            <a:avLst/>
+          </a:prstGeom>
+          <a:noFill/>
+        </p:spPr>
+        <p:txBody>
+          <a:bodyPr wrap="square" lIns="73152" rIns="73152" tIns="36576" bIns="36576">
+            <a:spAutoFit/>
+          </a:bodyPr>
+          <a:lstStyle/>
+          <a:p>
+            <a:pPr algn="l">
+              <a:spcAft>
+                <a:spcPts val="0"/>
+              </a:spcAft>
+              <a:defRPr sz="1500" b="1">
+                <a:solidFill>
+                  <a:srgbClr val="122C4E"/>
+                </a:solidFill>
+                <a:latin typeface="Noto Sans CJK KR"/>
+              </a:defRPr>
+            </a:pPr>
+            <a:r>
+              <a:t>이번 단계: 파일의 전체 내용을 중간 생략 없이 작성합니다. 아래 줄 범위를 끝까지 입력하세요.</a:t>
+            </a:r>
+          </a:p>
+        </p:txBody>
+      </p:sp>
+      <p:sp>
+        <p:nvSpPr>
+          <p:cNvPr id="8" name="Rectangle 7"/>
           <p:cNvSpPr/>
           <p:nvPr/>
         </p:nvSpPr>
         <p:spPr>
           <a:xfrm>
-            <a:off x="658368" y="1700784"/>
-            <a:ext cx="10972800" cy="3182112"/>
-          </a:xfrm>
-          <a:prstGeom prst="roundRect">
+            <a:off x="658368" y="1956816"/>
+            <a:ext cx="10972800" cy="603504"/>
+          </a:xfrm>
+          <a:prstGeom prst="rect">
+            <a:avLst/>
+          </a:prstGeom>
+          <a:solidFill>
+            <a:srgbClr val="F4F7FB"/>
+          </a:solidFill>
+          <a:ln>
+            <a:solidFill>
+              <a:srgbClr val="F4F7FB"/>
+            </a:solidFill>
+          </a:ln>
+        </p:spPr>
+        <p:style>
+          <a:lnRef idx="1">
+            <a:schemeClr val="accent1"/>
+          </a:lnRef>
+          <a:fillRef idx="3">
+            <a:schemeClr val="accent1"/>
+          </a:fillRef>
+          <a:effectRef idx="2">
+            <a:schemeClr val="accent1"/>
+          </a:effectRef>
+          <a:fontRef idx="minor">
+            <a:schemeClr val="lt1"/>
+          </a:fontRef>
+        </p:style>
+        <p:txBody>
+          <a:bodyPr rtlCol="0" anchor="ctr" wrap="square" lIns="73152" rIns="73152" tIns="36576" bIns="36576"/>
+          <a:lstStyle/>
+          <a:p>
+            <a:pPr algn="l">
+              <a:spcAft>
+                <a:spcPts val="0"/>
+              </a:spcAft>
+              <a:defRPr sz="1400" b="0">
+                <a:solidFill>
+                  <a:srgbClr val="122C4E"/>
+                </a:solidFill>
+                <a:latin typeface="DejaVu Sans Mono"/>
+              </a:defRPr>
+            </a:pPr>
+            <a:r>
+              <a:t>파일 생성: mkdir -p ~/agv_ws/src/agv_mission</a:t>
+            </a:r>
+            <a:br/>
+            <a:r>
+              <a:t>파일 열기: nano ~/agv_ws/src/agv_mission/setup.py</a:t>
+            </a:r>
+          </a:p>
+        </p:txBody>
+      </p:sp>
+      <p:sp>
+        <p:nvSpPr>
+          <p:cNvPr id="9" name="Rectangle 8"/>
+          <p:cNvSpPr/>
+          <p:nvPr/>
+        </p:nvSpPr>
+        <p:spPr>
+          <a:xfrm>
+            <a:off x="658368" y="2706624"/>
+            <a:ext cx="10972800" cy="3364992"/>
+          </a:xfrm>
+          <a:prstGeom prst="rect">
             <a:avLst/>
           </a:prstGeom>
           <a:solidFill>
@@ -8864,14 +9056,14 @@
           </a:fontRef>
         </p:style>
         <p:txBody>
-          <a:bodyPr rtlCol="0" anchor="ctr" wrap="square" lIns="73152" rIns="73152" tIns="36576" bIns="36576"/>
+          <a:bodyPr rtlCol="0" anchor="ctr" wrap="square" lIns="164592" rIns="164592" tIns="109728" bIns="36576"/>
           <a:lstStyle/>
           <a:p>
             <a:pPr algn="l">
               <a:spcAft>
                 <a:spcPts val="0"/>
               </a:spcAft>
-              <a:defRPr sz="1600" b="0">
+              <a:defRPr sz="1400" b="0">
                 <a:solidFill>
                   <a:srgbClr val="FFFFFF"/>
                 </a:solidFill>
@@ -8879,25 +9071,49 @@
               </a:defRPr>
             </a:pPr>
             <a:r>
-              <a:t>source ~/agv_ws/install/setup.bash</a:t>
+              <a:t>from setuptools import find_packages, setup</a:t>
             </a:r>
             <a:br/>
             <a:r>
-              <a:t>ros2 run agv_mission mission_manager</a:t>
-            </a:r>
-          </a:p>
-        </p:txBody>
-      </p:sp>
-      <p:sp>
-        <p:nvSpPr>
-          <p:cNvPr id="8" name="TextBox 7"/>
+              <a:t>package_name = 'agv_mission'</a:t>
+            </a:r>
+            <a:br/>
+            <a:r>
+              <a:t>setup(name=package_name, version='0.1.0', packages=find_packages(exclude=['test']),</a:t>
+            </a:r>
+            <a:br/>
+            <a:r>
+              <a:t>    data_files=[('share/ament_index/resource_index/packages',</a:t>
+            </a:r>
+            <a:br/>
+            <a:r>
+              <a:t>    ['resource/' + package_name]), ('share/' + package_name, ['package.xml'])],</a:t>
+            </a:r>
+            <a:br/>
+            <a:r>
+              <a:t>    install_requires=['setuptools'], zip_safe=True, maintainer='AGV student',</a:t>
+            </a:r>
+            <a:br/>
+            <a:r>
+              <a:t>    maintainer_email='student@example.com', license='Apache-2.0',</a:t>
+            </a:r>
+            <a:br/>
+            <a:r>
+              <a:t>    entry_points={'console_scripts': ['mission_manager = agv_mission.mission_manager:main']})</a:t>
+            </a:r>
+          </a:p>
+        </p:txBody>
+      </p:sp>
+      <p:sp>
+        <p:nvSpPr>
+          <p:cNvPr id="10" name="TextBox 9"/>
           <p:cNvSpPr txBox="1"/>
           <p:nvPr/>
         </p:nvSpPr>
         <p:spPr>
           <a:xfrm>
-            <a:off x="786384" y="5239512"/>
-            <a:ext cx="1261872" cy="237744"/>
+            <a:off x="749808" y="6181344"/>
+            <a:ext cx="10789920" cy="201168"/>
           </a:xfrm>
           <a:prstGeom prst="rect">
             <a:avLst/>
@@ -8914,54 +9130,15 @@
               <a:spcAft>
                 <a:spcPts val="0"/>
               </a:spcAft>
-              <a:defRPr sz="1800" b="1">
-                <a:solidFill>
-                  <a:srgbClr val="2A8B5A"/>
-                </a:solidFill>
-                <a:latin typeface="Noto Sans CJK KR"/>
-              </a:defRPr>
-            </a:pPr>
-            <a:r>
-              <a:t>확인 기준</a:t>
-            </a:r>
-          </a:p>
-        </p:txBody>
-      </p:sp>
-      <p:sp>
-        <p:nvSpPr>
-          <p:cNvPr id="9" name="TextBox 8"/>
-          <p:cNvSpPr txBox="1"/>
-          <p:nvPr/>
-        </p:nvSpPr>
-        <p:spPr>
-          <a:xfrm>
-            <a:off x="786384" y="5532120"/>
-            <a:ext cx="10469880" cy="420624"/>
-          </a:xfrm>
-          <a:prstGeom prst="rect">
-            <a:avLst/>
-          </a:prstGeom>
-          <a:noFill/>
-        </p:spPr>
-        <p:txBody>
-          <a:bodyPr wrap="square" lIns="73152" rIns="73152" tIns="36576" bIns="36576">
-            <a:spAutoFit/>
-          </a:bodyPr>
-          <a:lstStyle/>
-          <a:p>
-            <a:pPr algn="l">
-              <a:spcAft>
-                <a:spcPts val="0"/>
-              </a:spcAft>
-              <a:defRPr sz="1800" b="0">
-                <a:solidFill>
-                  <a:srgbClr val="122C4E"/>
-                </a:solidFill>
-                <a:latin typeface="Noto Sans CJK KR"/>
-              </a:defRPr>
-            </a:pPr>
-            <a:r>
-              <a:t>/mission_state 로그와 /cmd_vel_raw가 detection·obstacle input에 따라 바뀌는 구조를 확인한다.</a:t>
+              <a:defRPr sz="1000" b="0">
+                <a:solidFill>
+                  <a:srgbClr val="5C6672"/>
+                </a:solidFill>
+                <a:latin typeface="Noto Sans CJK KR"/>
+              </a:defRPr>
+            </a:pPr>
+            <a:r>
+              <a:t>파일 전체 1/1 · 이 슬라이드 다음에 같은 파일의 나머지 줄이 이어집니다.</a:t>
             </a:r>
           </a:p>
         </p:txBody>
@@ -9018,7 +9195,7 @@
               </a:defRPr>
             </a:pPr>
             <a:r>
-              <a:t>정상 결과: 실제 환경에서 확인한 출력</a:t>
+              <a:t>build → source → run 순서로 실행한다</a:t>
             </a:r>
           </a:p>
         </p:txBody>
@@ -9057,7 +9234,7 @@
               </a:defRPr>
             </a:pPr>
             <a:r>
-              <a:t>실제 ROS 2 환경의 파일·패키지·구성 검증 로그</a:t>
+              <a:t>새 파일 또는 수정 파일은 build와 source 뒤에만 실행 이름·설정에 반영됩니다.</a:t>
             </a:r>
           </a:p>
         </p:txBody>
@@ -9140,40 +9317,136 @@
           </a:p>
         </p:txBody>
       </p:sp>
-      <p:pic>
-        <p:nvPicPr>
-          <p:cNvPr id="6" name="Picture 5" descr="validation_terminal.png"/>
-          <p:cNvPicPr>
-            <a:picLocks noChangeAspect="1"/>
-          </p:cNvPicPr>
-          <p:nvPr/>
-        </p:nvPicPr>
-        <p:blipFill>
-          <a:blip r:embed="rId2"/>
-          <a:stretch>
-            <a:fillRect/>
-          </a:stretch>
-        </p:blipFill>
-        <p:spPr>
-          <a:xfrm>
-            <a:off x="790956" y="1780007"/>
-            <a:ext cx="10607040" cy="3947209"/>
-          </a:xfrm>
-          <a:prstGeom prst="rect">
-            <a:avLst/>
-          </a:prstGeom>
-        </p:spPr>
-      </p:pic>
-      <p:sp>
-        <p:nvSpPr>
-          <p:cNvPr id="7" name="TextBox 6"/>
+      <p:sp>
+        <p:nvSpPr>
+          <p:cNvPr id="6" name="Rectangle 5"/>
+          <p:cNvSpPr/>
+          <p:nvPr/>
+        </p:nvSpPr>
+        <p:spPr>
+          <a:xfrm>
+            <a:off x="566928" y="1188720"/>
+            <a:ext cx="11064240" cy="347472"/>
+          </a:xfrm>
+          <a:prstGeom prst="rect">
+            <a:avLst/>
+          </a:prstGeom>
+          <a:solidFill>
+            <a:srgbClr val="F4F7FB"/>
+          </a:solidFill>
+          <a:ln>
+            <a:solidFill>
+              <a:srgbClr val="F4F7FB"/>
+            </a:solidFill>
+          </a:ln>
+        </p:spPr>
+        <p:style>
+          <a:lnRef idx="1">
+            <a:schemeClr val="accent1"/>
+          </a:lnRef>
+          <a:fillRef idx="3">
+            <a:schemeClr val="accent1"/>
+          </a:fillRef>
+          <a:effectRef idx="2">
+            <a:schemeClr val="accent1"/>
+          </a:effectRef>
+          <a:fontRef idx="minor">
+            <a:schemeClr val="lt1"/>
+          </a:fontRef>
+        </p:style>
+        <p:txBody>
+          <a:bodyPr rtlCol="0" anchor="ctr" wrap="square" lIns="73152" rIns="73152" tIns="36576" bIns="36576"/>
+          <a:lstStyle/>
+          <a:p>
+            <a:pPr algn="l">
+              <a:spcAft>
+                <a:spcPts val="0"/>
+              </a:spcAft>
+              <a:defRPr sz="1300" b="1">
+                <a:solidFill>
+                  <a:srgbClr val="122C4E"/>
+                </a:solidFill>
+                <a:latin typeface="Noto Sans CJK KR"/>
+              </a:defRPr>
+            </a:pPr>
+            <a:r>
+              <a:t>현재 단계 실행    |    현재 폴더 ~/agv_ws    |    현재 터미널</a:t>
+            </a:r>
+          </a:p>
+        </p:txBody>
+      </p:sp>
+      <p:sp>
+        <p:nvSpPr>
+          <p:cNvPr id="7" name="Rounded Rectangle 6"/>
+          <p:cNvSpPr/>
+          <p:nvPr/>
+        </p:nvSpPr>
+        <p:spPr>
+          <a:xfrm>
+            <a:off x="658368" y="1700784"/>
+            <a:ext cx="10972800" cy="3182112"/>
+          </a:xfrm>
+          <a:prstGeom prst="roundRect">
+            <a:avLst/>
+          </a:prstGeom>
+          <a:solidFill>
+            <a:srgbClr val="1D232D"/>
+          </a:solidFill>
+          <a:ln>
+            <a:solidFill>
+              <a:srgbClr val="1D232D"/>
+            </a:solidFill>
+          </a:ln>
+        </p:spPr>
+        <p:style>
+          <a:lnRef idx="1">
+            <a:schemeClr val="accent1"/>
+          </a:lnRef>
+          <a:fillRef idx="3">
+            <a:schemeClr val="accent1"/>
+          </a:fillRef>
+          <a:effectRef idx="2">
+            <a:schemeClr val="accent1"/>
+          </a:effectRef>
+          <a:fontRef idx="minor">
+            <a:schemeClr val="lt1"/>
+          </a:fontRef>
+        </p:style>
+        <p:txBody>
+          <a:bodyPr rtlCol="0" anchor="ctr" wrap="square" lIns="73152" rIns="73152" tIns="36576" bIns="36576"/>
+          <a:lstStyle/>
+          <a:p>
+            <a:pPr algn="l">
+              <a:spcAft>
+                <a:spcPts val="0"/>
+              </a:spcAft>
+              <a:defRPr sz="1600" b="0">
+                <a:solidFill>
+                  <a:srgbClr val="FFFFFF"/>
+                </a:solidFill>
+                <a:latin typeface="DejaVu Sans Mono"/>
+              </a:defRPr>
+            </a:pPr>
+            <a:r>
+              <a:t>source ~/agv_ws/install/setup.bash</a:t>
+            </a:r>
+            <a:br/>
+            <a:r>
+              <a:t>ros2 run agv_mission mission_manager</a:t>
+            </a:r>
+          </a:p>
+        </p:txBody>
+      </p:sp>
+      <p:sp>
+        <p:nvSpPr>
+          <p:cNvPr id="8" name="TextBox 7"/>
           <p:cNvSpPr txBox="1"/>
           <p:nvPr/>
         </p:nvSpPr>
         <p:spPr>
           <a:xfrm>
-            <a:off x="777240" y="6217920"/>
-            <a:ext cx="10607040" cy="182880"/>
+            <a:off x="786384" y="5239512"/>
+            <a:ext cx="1261872" cy="237744"/>
           </a:xfrm>
           <a:prstGeom prst="rect">
             <a:avLst/>
@@ -9186,11 +9459,11 @@
           </a:bodyPr>
           <a:lstStyle/>
           <a:p>
-            <a:pPr algn="ctr">
-              <a:spcAft>
-                <a:spcPts val="0"/>
-              </a:spcAft>
-              <a:defRPr sz="1100" b="1">
+            <a:pPr algn="l">
+              <a:spcAft>
+                <a:spcPts val="0"/>
+              </a:spcAft>
+              <a:defRPr sz="1800" b="1">
                 <a:solidFill>
                   <a:srgbClr val="2A8B5A"/>
                 </a:solidFill>
@@ -9198,7 +9471,46 @@
               </a:defRPr>
             </a:pPr>
             <a:r>
-              <a:t>① 명령/설정  ② 정상 출력 또는 화면  ③ 다음 검증 명령으로 재확인</a:t>
+              <a:t>확인 기준</a:t>
+            </a:r>
+          </a:p>
+        </p:txBody>
+      </p:sp>
+      <p:sp>
+        <p:nvSpPr>
+          <p:cNvPr id="9" name="TextBox 8"/>
+          <p:cNvSpPr txBox="1"/>
+          <p:nvPr/>
+        </p:nvSpPr>
+        <p:spPr>
+          <a:xfrm>
+            <a:off x="786384" y="5532120"/>
+            <a:ext cx="10469880" cy="420624"/>
+          </a:xfrm>
+          <a:prstGeom prst="rect">
+            <a:avLst/>
+          </a:prstGeom>
+          <a:noFill/>
+        </p:spPr>
+        <p:txBody>
+          <a:bodyPr wrap="square" lIns="73152" rIns="73152" tIns="36576" bIns="36576">
+            <a:spAutoFit/>
+          </a:bodyPr>
+          <a:lstStyle/>
+          <a:p>
+            <a:pPr algn="l">
+              <a:spcAft>
+                <a:spcPts val="0"/>
+              </a:spcAft>
+              <a:defRPr sz="1800" b="0">
+                <a:solidFill>
+                  <a:srgbClr val="122C4E"/>
+                </a:solidFill>
+                <a:latin typeface="Noto Sans CJK KR"/>
+              </a:defRPr>
+            </a:pPr>
+            <a:r>
+              <a:t>/mission_state 로그와 /cmd_vel_raw가 detection·obstacle input에 따라 바뀌는 구조를 확인한다.</a:t>
             </a:r>
           </a:p>
         </p:txBody>
@@ -9255,7 +9567,7 @@
               </a:defRPr>
             </a:pPr>
             <a:r>
-              <a:t>객관적 검증 명령으로 완료를 확인한다</a:t>
+              <a:t>정상 결과: 실제 환경에서 확인한 출력</a:t>
             </a:r>
           </a:p>
         </p:txBody>
@@ -9294,7 +9606,7 @@
               </a:defRPr>
             </a:pPr>
             <a:r>
-              <a:t>화면만 보지 말고 topic·frame·파일·parameter를 다시 확인합니다.</a:t>
+              <a:t>실제 ROS 2 환경의 파일·패키지·구성 검증 로그</a:t>
             </a:r>
           </a:p>
         </p:txBody>
@@ -9377,210 +9689,40 @@
           </a:p>
         </p:txBody>
       </p:sp>
-      <p:sp>
-        <p:nvSpPr>
-          <p:cNvPr id="6" name="Rectangle 5"/>
-          <p:cNvSpPr/>
-          <p:nvPr/>
-        </p:nvSpPr>
-        <p:spPr>
-          <a:xfrm>
-            <a:off x="566928" y="1188720"/>
-            <a:ext cx="11064240" cy="347472"/>
-          </a:xfrm>
-          <a:prstGeom prst="rect">
-            <a:avLst/>
-          </a:prstGeom>
-          <a:solidFill>
-            <a:srgbClr val="F4F7FB"/>
-          </a:solidFill>
-          <a:ln>
-            <a:solidFill>
-              <a:srgbClr val="F4F7FB"/>
-            </a:solidFill>
-          </a:ln>
-        </p:spPr>
-        <p:style>
-          <a:lnRef idx="1">
-            <a:schemeClr val="accent1"/>
-          </a:lnRef>
-          <a:fillRef idx="3">
-            <a:schemeClr val="accent1"/>
-          </a:fillRef>
-          <a:effectRef idx="2">
-            <a:schemeClr val="accent1"/>
-          </a:effectRef>
-          <a:fontRef idx="minor">
-            <a:schemeClr val="lt1"/>
-          </a:fontRef>
-        </p:style>
-        <p:txBody>
-          <a:bodyPr rtlCol="0" anchor="ctr" wrap="square" lIns="73152" rIns="73152" tIns="36576" bIns="36576"/>
-          <a:lstStyle/>
-          <a:p>
-            <a:pPr algn="l">
-              <a:spcAft>
-                <a:spcPts val="0"/>
-              </a:spcAft>
-              <a:defRPr sz="1300" b="1">
-                <a:solidFill>
-                  <a:srgbClr val="122C4E"/>
-                </a:solidFill>
-                <a:latin typeface="Noto Sans CJK KR"/>
-              </a:defRPr>
-            </a:pPr>
-            <a:r>
-              <a:t>현재 단계 검증    |    현재 폴더 ~/agv_ws    |    현재 터미널</a:t>
-            </a:r>
-          </a:p>
-        </p:txBody>
-      </p:sp>
-      <p:sp>
-        <p:nvSpPr>
-          <p:cNvPr id="7" name="Rounded Rectangle 6"/>
-          <p:cNvSpPr/>
-          <p:nvPr/>
-        </p:nvSpPr>
-        <p:spPr>
-          <a:xfrm>
-            <a:off x="658368" y="1755648"/>
-            <a:ext cx="10972800" cy="2148840"/>
-          </a:xfrm>
-          <a:prstGeom prst="roundRect">
-            <a:avLst/>
-          </a:prstGeom>
-          <a:solidFill>
-            <a:srgbClr val="1D232D"/>
-          </a:solidFill>
-          <a:ln>
-            <a:solidFill>
-              <a:srgbClr val="1D232D"/>
-            </a:solidFill>
-          </a:ln>
-        </p:spPr>
-        <p:style>
-          <a:lnRef idx="1">
-            <a:schemeClr val="accent1"/>
-          </a:lnRef>
-          <a:fillRef idx="3">
-            <a:schemeClr val="accent1"/>
-          </a:fillRef>
-          <a:effectRef idx="2">
-            <a:schemeClr val="accent1"/>
-          </a:effectRef>
-          <a:fontRef idx="minor">
-            <a:schemeClr val="lt1"/>
-          </a:fontRef>
-        </p:style>
-        <p:txBody>
-          <a:bodyPr rtlCol="0" anchor="ctr" wrap="square" lIns="73152" rIns="73152" tIns="36576" bIns="36576"/>
-          <a:lstStyle/>
-          <a:p>
-            <a:pPr algn="l">
-              <a:spcAft>
-                <a:spcPts val="0"/>
-              </a:spcAft>
-              <a:defRPr sz="1600" b="0">
-                <a:solidFill>
-                  <a:srgbClr val="FFFFFF"/>
-                </a:solidFill>
-                <a:latin typeface="DejaVu Sans Mono"/>
-              </a:defRPr>
-            </a:pPr>
-            <a:r>
-              <a:t>ros2 topic info /mission_state</a:t>
-            </a:r>
-            <a:br/>
-            <a:r>
-              <a:t>ros2 topic info /cmd_vel_raw</a:t>
-            </a:r>
-            <a:br/>
-            <a:r>
-              <a:t>ros2 param get /mission_manager stop_distance</a:t>
-            </a:r>
-          </a:p>
-        </p:txBody>
-      </p:sp>
-      <p:sp>
-        <p:nvSpPr>
-          <p:cNvPr id="8" name="Rounded Rectangle 7"/>
-          <p:cNvSpPr/>
-          <p:nvPr/>
-        </p:nvSpPr>
-        <p:spPr>
-          <a:xfrm>
-            <a:off x="658368" y="4206240"/>
-            <a:ext cx="10972800" cy="1554480"/>
-          </a:xfrm>
-          <a:prstGeom prst="roundRect">
-            <a:avLst/>
-          </a:prstGeom>
-          <a:solidFill>
-            <a:srgbClr val="F4F7FB"/>
-          </a:solidFill>
-          <a:ln>
-            <a:solidFill>
-              <a:srgbClr val="D1DFD5"/>
-            </a:solidFill>
-          </a:ln>
-        </p:spPr>
-        <p:style>
-          <a:lnRef idx="1">
-            <a:schemeClr val="accent1"/>
-          </a:lnRef>
-          <a:fillRef idx="3">
-            <a:schemeClr val="accent1"/>
-          </a:fillRef>
-          <a:effectRef idx="2">
-            <a:schemeClr val="accent1"/>
-          </a:effectRef>
-          <a:fontRef idx="minor">
-            <a:schemeClr val="lt1"/>
-          </a:fontRef>
-        </p:style>
-        <p:txBody>
-          <a:bodyPr rtlCol="0" anchor="ctr" wrap="square" lIns="73152" rIns="73152" tIns="36576" bIns="36576"/>
-          <a:lstStyle/>
-          <a:p>
-            <a:pPr algn="l">
-              <a:spcAft>
-                <a:spcPts val="0"/>
-              </a:spcAft>
-              <a:defRPr sz="1800" b="1">
-                <a:solidFill>
-                  <a:srgbClr val="2A8B5A"/>
-                </a:solidFill>
-                <a:latin typeface="Noto Sans CJK KR"/>
-              </a:defRPr>
-            </a:pPr>
-            <a:r>
-              <a:t>완료 체크</a:t>
-            </a:r>
-            <a:br/>
-            <a:r>
-              <a:t>□ 명령이 오류 없이 실행된다.</a:t>
-            </a:r>
-            <a:br/>
-            <a:r>
-              <a:t>□ 기대한 파일·topic·frame·parameter 이름이 보인다.</a:t>
-            </a:r>
-            <a:br/>
-            <a:r>
-              <a:t>□ 값의 단위와 방향을 한 문장으로 설명할 수 있다.</a:t>
-            </a:r>
-          </a:p>
-        </p:txBody>
-      </p:sp>
-      <p:sp>
-        <p:nvSpPr>
-          <p:cNvPr id="9" name="TextBox 8"/>
+      <p:pic>
+        <p:nvPicPr>
+          <p:cNvPr id="6" name="Picture 5" descr="validation_terminal.png"/>
+          <p:cNvPicPr>
+            <a:picLocks noChangeAspect="1"/>
+          </p:cNvPicPr>
+          <p:nvPr/>
+        </p:nvPicPr>
+        <p:blipFill>
+          <a:blip r:embed="rId2"/>
+          <a:stretch>
+            <a:fillRect/>
+          </a:stretch>
+        </p:blipFill>
+        <p:spPr>
+          <a:xfrm>
+            <a:off x="790956" y="1780007"/>
+            <a:ext cx="10607040" cy="3947209"/>
+          </a:xfrm>
+          <a:prstGeom prst="rect">
+            <a:avLst/>
+          </a:prstGeom>
+        </p:spPr>
+      </p:pic>
+      <p:sp>
+        <p:nvSpPr>
+          <p:cNvPr id="7" name="TextBox 6"/>
           <p:cNvSpPr txBox="1"/>
           <p:nvPr/>
         </p:nvSpPr>
         <p:spPr>
           <a:xfrm>
-            <a:off x="731520" y="5989320"/>
-            <a:ext cx="10789920" cy="237744"/>
+            <a:off x="777240" y="6217920"/>
+            <a:ext cx="10607040" cy="182880"/>
           </a:xfrm>
           <a:prstGeom prst="rect">
             <a:avLst/>
@@ -9593,19 +9735,19 @@
           </a:bodyPr>
           <a:lstStyle/>
           <a:p>
-            <a:pPr algn="l">
-              <a:spcAft>
-                <a:spcPts val="0"/>
-              </a:spcAft>
-              <a:defRPr sz="1500" b="1">
-                <a:solidFill>
-                  <a:srgbClr val="122C4E"/>
-                </a:solidFill>
-                <a:latin typeface="Noto Sans CJK KR"/>
-              </a:defRPr>
-            </a:pPr>
-            <a:r>
-              <a:t>완료 조건: /mission_state 로그와 /cmd_vel_raw가 detection·obstacle input에 따라 바뀌는 구조를 확인한다.</a:t>
+            <a:pPr algn="ctr">
+              <a:spcAft>
+                <a:spcPts val="0"/>
+              </a:spcAft>
+              <a:defRPr sz="1100" b="1">
+                <a:solidFill>
+                  <a:srgbClr val="2A8B5A"/>
+                </a:solidFill>
+                <a:latin typeface="Noto Sans CJK KR"/>
+              </a:defRPr>
+            </a:pPr>
+            <a:r>
+              <a:t>① 명령/설정  ② 정상 출력 또는 화면  ③ 다음 검증 명령으로 재확인</a:t>
             </a:r>
           </a:p>
         </p:txBody>
@@ -9662,7 +9804,7 @@
               </a:defRPr>
             </a:pPr>
             <a:r>
-              <a:t>막히면: 증상 → 우선 확인 → 재검증</a:t>
+              <a:t>객관적 검증 명령으로 완료를 확인한다</a:t>
             </a:r>
           </a:p>
         </p:txBody>
@@ -9701,7 +9843,7 @@
               </a:defRPr>
             </a:pPr>
             <a:r>
-              <a:t>오류 메시지를 숨기지 않고 같은 순서로 점검합니다.</a:t>
+              <a:t>화면만 보지 말고 topic·frame·파일·parameter를 다시 확인합니다.</a:t>
             </a:r>
           </a:p>
         </p:txBody>
@@ -9837,7 +9979,7 @@
               </a:defRPr>
             </a:pPr>
             <a:r>
-              <a:t>현재 단계 오류 대응    |    현재 폴더 ~/agv_ws    |    현재 터미널</a:t>
+              <a:t>현재 단계 검증    |    현재 폴더 ~/agv_ws    |    현재 터미널</a:t>
             </a:r>
           </a:p>
         </p:txBody>
@@ -9850,18 +9992,18 @@
         </p:nvSpPr>
         <p:spPr>
           <a:xfrm>
-            <a:off x="694944" y="1755648"/>
-            <a:ext cx="10972800" cy="1115568"/>
+            <a:off x="658368" y="1755648"/>
+            <a:ext cx="10972800" cy="2148840"/>
           </a:xfrm>
           <a:prstGeom prst="roundRect">
             <a:avLst/>
           </a:prstGeom>
           <a:solidFill>
-            <a:srgbClr val="FFF7F4"/>
+            <a:srgbClr val="1D232D"/>
           </a:solidFill>
           <a:ln>
             <a:solidFill>
-              <a:srgbClr val="EDBEB4"/>
+              <a:srgbClr val="1D232D"/>
             </a:solidFill>
           </a:ln>
         </p:spPr>
@@ -9880,115 +10022,54 @@
           </a:fontRef>
         </p:style>
         <p:txBody>
-          <a:bodyPr rtlCol="0" anchor="ctr"/>
-          <a:lstStyle/>
-          <a:p>
-            <a:pPr algn="ctr"/>
-          </a:p>
-        </p:txBody>
-      </p:sp>
-      <p:sp>
-        <p:nvSpPr>
-          <p:cNvPr id="8" name="TextBox 7"/>
-          <p:cNvSpPr txBox="1"/>
-          <p:nvPr/>
-        </p:nvSpPr>
-        <p:spPr>
-          <a:xfrm>
-            <a:off x="896112" y="1901952"/>
-            <a:ext cx="2926080" cy="274320"/>
-          </a:xfrm>
-          <a:prstGeom prst="rect">
-            <a:avLst/>
-          </a:prstGeom>
-          <a:noFill/>
-        </p:spPr>
-        <p:txBody>
-          <a:bodyPr wrap="square" lIns="73152" rIns="73152" tIns="36576" bIns="36576">
-            <a:spAutoFit/>
-          </a:bodyPr>
+          <a:bodyPr rtlCol="0" anchor="ctr" wrap="square" lIns="73152" rIns="73152" tIns="36576" bIns="36576"/>
           <a:lstStyle/>
           <a:p>
             <a:pPr algn="l">
               <a:spcAft>
                 <a:spcPts val="0"/>
               </a:spcAft>
-              <a:defRPr sz="1800" b="1">
-                <a:solidFill>
-                  <a:srgbClr val="BE3B3B"/>
-                </a:solidFill>
-                <a:latin typeface="Noto Sans CJK KR"/>
-              </a:defRPr>
-            </a:pPr>
-            <a:r>
-              <a:t>증상 1: 상태가 전환되지 않음</a:t>
-            </a:r>
-          </a:p>
-        </p:txBody>
-      </p:sp>
-      <p:sp>
-        <p:nvSpPr>
-          <p:cNvPr id="9" name="TextBox 8"/>
-          <p:cNvSpPr txBox="1"/>
-          <p:nvPr/>
-        </p:nvSpPr>
-        <p:spPr>
-          <a:xfrm>
-            <a:off x="3794760" y="1883664"/>
-            <a:ext cx="7543800" cy="621792"/>
-          </a:xfrm>
-          <a:prstGeom prst="rect">
-            <a:avLst/>
-          </a:prstGeom>
-          <a:noFill/>
-        </p:spPr>
-        <p:txBody>
-          <a:bodyPr wrap="square" lIns="73152" rIns="73152" tIns="36576" bIns="36576">
-            <a:spAutoFit/>
-          </a:bodyPr>
-          <a:lstStyle/>
-          <a:p>
-            <a:pPr algn="l">
-              <a:spcAft>
-                <a:spcPts val="0"/>
-              </a:spcAft>
               <a:defRPr sz="1600" b="0">
                 <a:solidFill>
-                  <a:srgbClr val="122C4E"/>
-                </a:solidFill>
-                <a:latin typeface="Noto Sans CJK KR"/>
-              </a:defRPr>
-            </a:pPr>
-            <a:r>
-              <a:t>우선 확인: callback input·조건식·거리 단위를 확인한다.</a:t>
+                  <a:srgbClr val="FFFFFF"/>
+                </a:solidFill>
+                <a:latin typeface="DejaVu Sans Mono"/>
+              </a:defRPr>
+            </a:pPr>
+            <a:r>
+              <a:t>ros2 topic info /mission_state</a:t>
             </a:r>
             <a:br/>
             <a:r>
-              <a:t>수정 후: ros2 topic info /mission_state</a:t>
-            </a:r>
-          </a:p>
-        </p:txBody>
-      </p:sp>
-      <p:sp>
-        <p:nvSpPr>
-          <p:cNvPr id="10" name="Rounded Rectangle 9"/>
+              <a:t>ros2 topic info /cmd_vel_raw</a:t>
+            </a:r>
+            <a:br/>
+            <a:r>
+              <a:t>ros2 param get /mission_manager stop_distance</a:t>
+            </a:r>
+          </a:p>
+        </p:txBody>
+      </p:sp>
+      <p:sp>
+        <p:nvSpPr>
+          <p:cNvPr id="8" name="Rounded Rectangle 7"/>
           <p:cNvSpPr/>
           <p:nvPr/>
         </p:nvSpPr>
         <p:spPr>
           <a:xfrm>
-            <a:off x="694944" y="3172968"/>
-            <a:ext cx="10972800" cy="1115568"/>
+            <a:off x="658368" y="4206240"/>
+            <a:ext cx="10972800" cy="1554480"/>
           </a:xfrm>
           <a:prstGeom prst="roundRect">
             <a:avLst/>
           </a:prstGeom>
           <a:solidFill>
-            <a:srgbClr val="FFF7F4"/>
+            <a:srgbClr val="F4F7FB"/>
           </a:solidFill>
           <a:ln>
             <a:solidFill>
-              <a:srgbClr val="EDBEB4"/>
+              <a:srgbClr val="D1DFD5"/>
             </a:solidFill>
           </a:ln>
         </p:spPr>
@@ -10007,23 +10088,48 @@
           </a:fontRef>
         </p:style>
         <p:txBody>
-          <a:bodyPr rtlCol="0" anchor="ctr"/>
-          <a:lstStyle/>
-          <a:p>
-            <a:pPr algn="ctr"/>
-          </a:p>
-        </p:txBody>
-      </p:sp>
-      <p:sp>
-        <p:nvSpPr>
-          <p:cNvPr id="11" name="TextBox 10"/>
+          <a:bodyPr rtlCol="0" anchor="ctr" wrap="square" lIns="73152" rIns="73152" tIns="36576" bIns="36576"/>
+          <a:lstStyle/>
+          <a:p>
+            <a:pPr algn="l">
+              <a:spcAft>
+                <a:spcPts val="0"/>
+              </a:spcAft>
+              <a:defRPr sz="1800" b="1">
+                <a:solidFill>
+                  <a:srgbClr val="2A8B5A"/>
+                </a:solidFill>
+                <a:latin typeface="Noto Sans CJK KR"/>
+              </a:defRPr>
+            </a:pPr>
+            <a:r>
+              <a:t>완료 체크</a:t>
+            </a:r>
+            <a:br/>
+            <a:r>
+              <a:t>□ 명령이 오류 없이 실행된다.</a:t>
+            </a:r>
+            <a:br/>
+            <a:r>
+              <a:t>□ 기대한 파일·topic·frame·parameter 이름이 보인다.</a:t>
+            </a:r>
+            <a:br/>
+            <a:r>
+              <a:t>□ 값의 단위와 방향을 한 문장으로 설명할 수 있다.</a:t>
+            </a:r>
+          </a:p>
+        </p:txBody>
+      </p:sp>
+      <p:sp>
+        <p:nvSpPr>
+          <p:cNvPr id="9" name="TextBox 8"/>
           <p:cNvSpPr txBox="1"/>
           <p:nvPr/>
         </p:nvSpPr>
         <p:spPr>
           <a:xfrm>
-            <a:off x="896112" y="3319272"/>
-            <a:ext cx="2926080" cy="274320"/>
+            <a:off x="731520" y="5989320"/>
+            <a:ext cx="10789920" cy="237744"/>
           </a:xfrm>
           <a:prstGeom prst="rect">
             <a:avLst/>
@@ -10040,46 +10146,7 @@
               <a:spcAft>
                 <a:spcPts val="0"/>
               </a:spcAft>
-              <a:defRPr sz="1800" b="1">
-                <a:solidFill>
-                  <a:srgbClr val="BE3B3B"/>
-                </a:solidFill>
-                <a:latin typeface="Noto Sans CJK KR"/>
-              </a:defRPr>
-            </a:pPr>
-            <a:r>
-              <a:t>증상 2: SEARCH↔APPROACH 반복</a:t>
-            </a:r>
-          </a:p>
-        </p:txBody>
-      </p:sp>
-      <p:sp>
-        <p:nvSpPr>
-          <p:cNvPr id="12" name="TextBox 11"/>
-          <p:cNvSpPr txBox="1"/>
-          <p:nvPr/>
-        </p:nvSpPr>
-        <p:spPr>
-          <a:xfrm>
-            <a:off x="3794760" y="3300984"/>
-            <a:ext cx="7543800" cy="621792"/>
-          </a:xfrm>
-          <a:prstGeom prst="rect">
-            <a:avLst/>
-          </a:prstGeom>
-          <a:noFill/>
-        </p:spPr>
-        <p:txBody>
-          <a:bodyPr wrap="square" lIns="73152" rIns="73152" tIns="36576" bIns="36576">
-            <a:spAutoFit/>
-          </a:bodyPr>
-          <a:lstStyle/>
-          <a:p>
-            <a:pPr algn="l">
-              <a:spcAft>
-                <a:spcPts val="0"/>
-              </a:spcAft>
-              <a:defRPr sz="1600" b="0">
+              <a:defRPr sz="1500" b="1">
                 <a:solidFill>
                   <a:srgbClr val="122C4E"/>
                 </a:solidFill>
@@ -10087,50 +10154,7 @@
               </a:defRPr>
             </a:pPr>
             <a:r>
-              <a:t>우선 확인: detection timeout·hysteresis·우선순위를 추가 점검한다.</a:t>
-            </a:r>
-            <a:br/>
-            <a:r>
-              <a:t>수정 후: ros2 topic info /mission_state</a:t>
-            </a:r>
-          </a:p>
-        </p:txBody>
-      </p:sp>
-      <p:sp>
-        <p:nvSpPr>
-          <p:cNvPr id="13" name="TextBox 12"/>
-          <p:cNvSpPr txBox="1"/>
-          <p:nvPr/>
-        </p:nvSpPr>
-        <p:spPr>
-          <a:xfrm>
-            <a:off x="822960" y="5102352"/>
-            <a:ext cx="10607040" cy="402336"/>
-          </a:xfrm>
-          <a:prstGeom prst="rect">
-            <a:avLst/>
-          </a:prstGeom>
-          <a:noFill/>
-        </p:spPr>
-        <p:txBody>
-          <a:bodyPr wrap="square" lIns="73152" rIns="73152" tIns="36576" bIns="36576">
-            <a:spAutoFit/>
-          </a:bodyPr>
-          <a:lstStyle/>
-          <a:p>
-            <a:pPr algn="ctr">
-              <a:spcAft>
-                <a:spcPts val="0"/>
-              </a:spcAft>
-              <a:defRPr sz="1800" b="1">
-                <a:solidFill>
-                  <a:srgbClr val="DB7E22"/>
-                </a:solidFill>
-                <a:latin typeface="Noto Sans CJK KR"/>
-              </a:defRPr>
-            </a:pPr>
-            <a:r>
-              <a:t>공통 순서: ① 현재 폴더 ② source ③ 파일 경로 ④ 이름/타입/단위 ⑤ build·source 후 재실행</a:t>
+              <a:t>완료 조건: /mission_state 로그와 /cmd_vel_raw가 detection·obstacle input에 따라 바뀌는 구조를 확인한다.</a:t>
             </a:r>
           </a:p>
         </p:txBody>
@@ -10648,7 +10672,7 @@
               </a:defRPr>
             </a:pPr>
             <a:r>
-              <a:t>미니 실습: 값 하나를 바꾸고 결과를 비교한다</a:t>
+              <a:t>막히면: 증상 → 우선 확인 → 재검증</a:t>
             </a:r>
           </a:p>
         </p:txBody>
@@ -10687,7 +10711,7 @@
               </a:defRPr>
             </a:pPr>
             <a:r>
-              <a:t>정상 결과를 만든 뒤에는 한 번에 하나의 값만 바꿉니다.</a:t>
+              <a:t>오류 메시지를 숨기지 않고 같은 순서로 점검합니다.</a:t>
             </a:r>
           </a:p>
         </p:txBody>
@@ -10823,7 +10847,7 @@
               </a:defRPr>
             </a:pPr>
             <a:r>
-              <a:t>현재 단계 미니 실습    |    현재 폴더 ~/agv_ws    |    현재 터미널</a:t>
+              <a:t>현재 단계 오류 대응    |    현재 폴더 ~/agv_ws    |    현재 터미널</a:t>
             </a:r>
           </a:p>
         </p:txBody>
@@ -10836,18 +10860,18 @@
         </p:nvSpPr>
         <p:spPr>
           <a:xfrm>
-            <a:off x="749808" y="1874519"/>
-            <a:ext cx="10652760" cy="1993392"/>
+            <a:off x="694944" y="1755648"/>
+            <a:ext cx="10972800" cy="1115568"/>
           </a:xfrm>
           <a:prstGeom prst="roundRect">
             <a:avLst/>
           </a:prstGeom>
           <a:solidFill>
-            <a:srgbClr val="FFF8EB"/>
+            <a:srgbClr val="FFF7F4"/>
           </a:solidFill>
           <a:ln>
             <a:solidFill>
-              <a:srgbClr val="ECC680"/>
+              <a:srgbClr val="EDBEB4"/>
             </a:solidFill>
           </a:ln>
         </p:spPr>
@@ -10866,23 +10890,10 @@
           </a:fontRef>
         </p:style>
         <p:txBody>
-          <a:bodyPr rtlCol="0" anchor="ctr" wrap="square" lIns="73152" rIns="73152" tIns="36576" bIns="36576"/>
-          <a:lstStyle/>
-          <a:p>
-            <a:pPr algn="ctr">
-              <a:spcAft>
-                <a:spcPts val="0"/>
-              </a:spcAft>
-              <a:defRPr sz="2300" b="1">
-                <a:solidFill>
-                  <a:srgbClr val="122C4E"/>
-                </a:solidFill>
-                <a:latin typeface="Noto Sans CJK KR"/>
-              </a:defRPr>
-            </a:pPr>
-            <a:r>
-              <a:t>target 없음, target 있음, obstacle&lt;0.5 m의 세 입력에 대해 예상 state와 /cmd_vel_raw를 표로 작성한다.</a:t>
-            </a:r>
+          <a:bodyPr rtlCol="0" anchor="ctr"/>
+          <a:lstStyle/>
+          <a:p>
+            <a:pPr algn="ctr"/>
           </a:p>
         </p:txBody>
       </p:sp>
@@ -10894,8 +10905,8 @@
         </p:nvSpPr>
         <p:spPr>
           <a:xfrm>
-            <a:off x="877824" y="4590288"/>
-            <a:ext cx="10241280" cy="594360"/>
+            <a:off x="896112" y="1901952"/>
+            <a:ext cx="2926080" cy="274320"/>
           </a:xfrm>
           <a:prstGeom prst="rect">
             <a:avLst/>
@@ -10908,11 +10919,220 @@
           </a:bodyPr>
           <a:lstStyle/>
           <a:p>
+            <a:pPr algn="l">
+              <a:spcAft>
+                <a:spcPts val="0"/>
+              </a:spcAft>
+              <a:defRPr sz="1800" b="1">
+                <a:solidFill>
+                  <a:srgbClr val="BE3B3B"/>
+                </a:solidFill>
+                <a:latin typeface="Noto Sans CJK KR"/>
+              </a:defRPr>
+            </a:pPr>
+            <a:r>
+              <a:t>증상 1: 상태가 전환되지 않음</a:t>
+            </a:r>
+          </a:p>
+        </p:txBody>
+      </p:sp>
+      <p:sp>
+        <p:nvSpPr>
+          <p:cNvPr id="9" name="TextBox 8"/>
+          <p:cNvSpPr txBox="1"/>
+          <p:nvPr/>
+        </p:nvSpPr>
+        <p:spPr>
+          <a:xfrm>
+            <a:off x="3794760" y="1883664"/>
+            <a:ext cx="7543800" cy="621792"/>
+          </a:xfrm>
+          <a:prstGeom prst="rect">
+            <a:avLst/>
+          </a:prstGeom>
+          <a:noFill/>
+        </p:spPr>
+        <p:txBody>
+          <a:bodyPr wrap="square" lIns="73152" rIns="73152" tIns="36576" bIns="36576">
+            <a:spAutoFit/>
+          </a:bodyPr>
+          <a:lstStyle/>
+          <a:p>
+            <a:pPr algn="l">
+              <a:spcAft>
+                <a:spcPts val="0"/>
+              </a:spcAft>
+              <a:defRPr sz="1600" b="0">
+                <a:solidFill>
+                  <a:srgbClr val="122C4E"/>
+                </a:solidFill>
+                <a:latin typeface="Noto Sans CJK KR"/>
+              </a:defRPr>
+            </a:pPr>
+            <a:r>
+              <a:t>우선 확인: callback input·조건식·거리 단위를 확인한다.</a:t>
+            </a:r>
+            <a:br/>
+            <a:r>
+              <a:t>수정 후: ros2 topic info /mission_state</a:t>
+            </a:r>
+          </a:p>
+        </p:txBody>
+      </p:sp>
+      <p:sp>
+        <p:nvSpPr>
+          <p:cNvPr id="10" name="Rounded Rectangle 9"/>
+          <p:cNvSpPr/>
+          <p:nvPr/>
+        </p:nvSpPr>
+        <p:spPr>
+          <a:xfrm>
+            <a:off x="694944" y="3172968"/>
+            <a:ext cx="10972800" cy="1115568"/>
+          </a:xfrm>
+          <a:prstGeom prst="roundRect">
+            <a:avLst/>
+          </a:prstGeom>
+          <a:solidFill>
+            <a:srgbClr val="FFF7F4"/>
+          </a:solidFill>
+          <a:ln>
+            <a:solidFill>
+              <a:srgbClr val="EDBEB4"/>
+            </a:solidFill>
+          </a:ln>
+        </p:spPr>
+        <p:style>
+          <a:lnRef idx="1">
+            <a:schemeClr val="accent1"/>
+          </a:lnRef>
+          <a:fillRef idx="3">
+            <a:schemeClr val="accent1"/>
+          </a:fillRef>
+          <a:effectRef idx="2">
+            <a:schemeClr val="accent1"/>
+          </a:effectRef>
+          <a:fontRef idx="minor">
+            <a:schemeClr val="lt1"/>
+          </a:fontRef>
+        </p:style>
+        <p:txBody>
+          <a:bodyPr rtlCol="0" anchor="ctr"/>
+          <a:lstStyle/>
+          <a:p>
+            <a:pPr algn="ctr"/>
+          </a:p>
+        </p:txBody>
+      </p:sp>
+      <p:sp>
+        <p:nvSpPr>
+          <p:cNvPr id="11" name="TextBox 10"/>
+          <p:cNvSpPr txBox="1"/>
+          <p:nvPr/>
+        </p:nvSpPr>
+        <p:spPr>
+          <a:xfrm>
+            <a:off x="896112" y="3319272"/>
+            <a:ext cx="2926080" cy="274320"/>
+          </a:xfrm>
+          <a:prstGeom prst="rect">
+            <a:avLst/>
+          </a:prstGeom>
+          <a:noFill/>
+        </p:spPr>
+        <p:txBody>
+          <a:bodyPr wrap="square" lIns="73152" rIns="73152" tIns="36576" bIns="36576">
+            <a:spAutoFit/>
+          </a:bodyPr>
+          <a:lstStyle/>
+          <a:p>
+            <a:pPr algn="l">
+              <a:spcAft>
+                <a:spcPts val="0"/>
+              </a:spcAft>
+              <a:defRPr sz="1800" b="1">
+                <a:solidFill>
+                  <a:srgbClr val="BE3B3B"/>
+                </a:solidFill>
+                <a:latin typeface="Noto Sans CJK KR"/>
+              </a:defRPr>
+            </a:pPr>
+            <a:r>
+              <a:t>증상 2: SEARCH↔APPROACH 반복</a:t>
+            </a:r>
+          </a:p>
+        </p:txBody>
+      </p:sp>
+      <p:sp>
+        <p:nvSpPr>
+          <p:cNvPr id="12" name="TextBox 11"/>
+          <p:cNvSpPr txBox="1"/>
+          <p:nvPr/>
+        </p:nvSpPr>
+        <p:spPr>
+          <a:xfrm>
+            <a:off x="3794760" y="3300984"/>
+            <a:ext cx="7543800" cy="621792"/>
+          </a:xfrm>
+          <a:prstGeom prst="rect">
+            <a:avLst/>
+          </a:prstGeom>
+          <a:noFill/>
+        </p:spPr>
+        <p:txBody>
+          <a:bodyPr wrap="square" lIns="73152" rIns="73152" tIns="36576" bIns="36576">
+            <a:spAutoFit/>
+          </a:bodyPr>
+          <a:lstStyle/>
+          <a:p>
+            <a:pPr algn="l">
+              <a:spcAft>
+                <a:spcPts val="0"/>
+              </a:spcAft>
+              <a:defRPr sz="1600" b="0">
+                <a:solidFill>
+                  <a:srgbClr val="122C4E"/>
+                </a:solidFill>
+                <a:latin typeface="Noto Sans CJK KR"/>
+              </a:defRPr>
+            </a:pPr>
+            <a:r>
+              <a:t>우선 확인: detection timeout·hysteresis·우선순위를 추가 점검한다.</a:t>
+            </a:r>
+            <a:br/>
+            <a:r>
+              <a:t>수정 후: ros2 topic info /mission_state</a:t>
+            </a:r>
+          </a:p>
+        </p:txBody>
+      </p:sp>
+      <p:sp>
+        <p:nvSpPr>
+          <p:cNvPr id="13" name="TextBox 12"/>
+          <p:cNvSpPr txBox="1"/>
+          <p:nvPr/>
+        </p:nvSpPr>
+        <p:spPr>
+          <a:xfrm>
+            <a:off x="822960" y="5102352"/>
+            <a:ext cx="10607040" cy="402336"/>
+          </a:xfrm>
+          <a:prstGeom prst="rect">
+            <a:avLst/>
+          </a:prstGeom>
+          <a:noFill/>
+        </p:spPr>
+        <p:txBody>
+          <a:bodyPr wrap="square" lIns="73152" rIns="73152" tIns="36576" bIns="36576">
+            <a:spAutoFit/>
+          </a:bodyPr>
+          <a:lstStyle/>
+          <a:p>
             <a:pPr algn="ctr">
               <a:spcAft>
                 <a:spcPts val="0"/>
               </a:spcAft>
-              <a:defRPr sz="1900" b="1">
+              <a:defRPr sz="1800" b="1">
                 <a:solidFill>
                   <a:srgbClr val="DB7E22"/>
                 </a:solidFill>
@@ -10920,7 +11140,7 @@
               </a:defRPr>
             </a:pPr>
             <a:r>
-              <a:t>기록할 것: 바꾼 값(단위) · 기대한 변화 · 실제 출력/화면 · 원래 값으로 되돌린 결과</a:t>
+              <a:t>공통 순서: ① 현재 폴더 ② source ③ 파일 경로 ④ 이름/타입/단위 ⑤ build·source 후 재실행</a:t>
             </a:r>
           </a:p>
         </p:txBody>
@@ -10977,7 +11197,7 @@
               </a:defRPr>
             </a:pPr>
             <a:r>
-              <a:t>체크포인트를 저장하고 다음 모듈로 넘긴다</a:t>
+              <a:t>미니 실습: 값 하나를 바꾸고 결과를 비교한다</a:t>
             </a:r>
           </a:p>
         </p:txBody>
@@ -11016,7 +11236,7 @@
               </a:defRPr>
             </a:pPr>
             <a:r>
-              <a:t>현재 Complete는 다음 Starter의 기준선입니다.</a:t>
+              <a:t>정상 결과를 만든 뒤에는 한 번에 하나의 값만 바꿉니다.</a:t>
             </a:r>
           </a:p>
         </p:txBody>
@@ -11152,7 +11372,7 @@
               </a:defRPr>
             </a:pPr>
             <a:r>
-              <a:t>현재 단계 체크포인트    |    현재 폴더 ~/agv_ws    |    현재 터미널</a:t>
+              <a:t>현재 단계 미니 실습    |    현재 폴더 ~/agv_ws    |    현재 터미널</a:t>
             </a:r>
           </a:p>
         </p:txBody>
@@ -11165,18 +11385,18 @@
         </p:nvSpPr>
         <p:spPr>
           <a:xfrm>
-            <a:off x="685800" y="1737360"/>
-            <a:ext cx="10972800" cy="3611880"/>
+            <a:off x="749808" y="1874519"/>
+            <a:ext cx="10652760" cy="1993392"/>
           </a:xfrm>
           <a:prstGeom prst="roundRect">
             <a:avLst/>
           </a:prstGeom>
           <a:solidFill>
-            <a:srgbClr val="F4F7FB"/>
+            <a:srgbClr val="FFF8EB"/>
           </a:solidFill>
           <a:ln>
             <a:solidFill>
-              <a:srgbClr val="D2DCE8"/>
+              <a:srgbClr val="ECC680"/>
             </a:solidFill>
           </a:ln>
         </p:spPr>
@@ -11195,10 +11415,23 @@
           </a:fontRef>
         </p:style>
         <p:txBody>
-          <a:bodyPr rtlCol="0" anchor="ctr"/>
-          <a:lstStyle/>
-          <a:p>
-            <a:pPr algn="ctr"/>
+          <a:bodyPr rtlCol="0" anchor="ctr" wrap="square" lIns="73152" rIns="73152" tIns="36576" bIns="36576"/>
+          <a:lstStyle/>
+          <a:p>
+            <a:pPr algn="ctr">
+              <a:spcAft>
+                <a:spcPts val="0"/>
+              </a:spcAft>
+              <a:defRPr sz="2300" b="1">
+                <a:solidFill>
+                  <a:srgbClr val="122C4E"/>
+                </a:solidFill>
+                <a:latin typeface="Noto Sans CJK KR"/>
+              </a:defRPr>
+            </a:pPr>
+            <a:r>
+              <a:t>target 없음, target 있음, obstacle&lt;0.5 m의 세 입력에 대해 예상 state와 /cmd_vel_raw를 표로 작성한다.</a:t>
+            </a:r>
           </a:p>
         </p:txBody>
       </p:sp>
@@ -11210,111 +11443,8 @@
         </p:nvSpPr>
         <p:spPr>
           <a:xfrm>
-            <a:off x="896112" y="1993392"/>
-            <a:ext cx="10332720" cy="2971800"/>
-          </a:xfrm>
-          <a:prstGeom prst="rect">
-            <a:avLst/>
-          </a:prstGeom>
-          <a:noFill/>
-        </p:spPr>
-        <p:txBody>
-          <a:bodyPr wrap="square" lIns="109728" rIns="109728">
-            <a:spAutoFit/>
-          </a:bodyPr>
-          <a:lstStyle/>
-          <a:p>
-            <a:pPr>
-              <a:spcAft>
-                <a:spcPts val="800"/>
-              </a:spcAft>
-              <a:defRPr sz="1800">
-                <a:solidFill>
-                  <a:srgbClr val="122C4E"/>
-                </a:solidFill>
-                <a:latin typeface="Noto Sans CJK KR"/>
-              </a:defRPr>
-            </a:pPr>
-            <a:r>
-              <a:t>• □ 완료 화면: /mission_state 로그와 /cmd_vel_raw가 detection·obstacle input에 따라 바뀌는 구조를 확인한다.</a:t>
-            </a:r>
-          </a:p>
-          <a:p>
-            <a:pPr>
-              <a:spcAft>
-                <a:spcPts val="800"/>
-              </a:spcAft>
-              <a:defRPr sz="1800">
-                <a:solidFill>
-                  <a:srgbClr val="122C4E"/>
-                </a:solidFill>
-                <a:latin typeface="Noto Sans CJK KR"/>
-              </a:defRPr>
-            </a:pPr>
-            <a:r>
-              <a:t>• □ Complete 파일: blocks/E_autonomy_logic/M19_mission_fsm/complete/</a:t>
-            </a:r>
-          </a:p>
-          <a:p>
-            <a:pPr>
-              <a:spcAft>
-                <a:spcPts val="800"/>
-              </a:spcAft>
-              <a:defRPr sz="1800">
-                <a:solidFill>
-                  <a:srgbClr val="122C4E"/>
-                </a:solidFill>
-                <a:latin typeface="Noto Sans CJK KR"/>
-              </a:defRPr>
-            </a:pPr>
-            <a:r>
-              <a:t>• □ 정상 로그·캡처: logs/validation.log, screenshots/validation_terminal.png</a:t>
-            </a:r>
-          </a:p>
-          <a:p>
-            <a:pPr>
-              <a:spcAft>
-                <a:spcPts val="800"/>
-              </a:spcAft>
-              <a:defRPr sz="1800">
-                <a:solidFill>
-                  <a:srgbClr val="122C4E"/>
-                </a:solidFill>
-                <a:latin typeface="Noto Sans CJK KR"/>
-              </a:defRPr>
-            </a:pPr>
-            <a:r>
-              <a:t>• □ 버전 식별: CHECKSUM_or_TAG.txt의 SHA-256 manifest</a:t>
-            </a:r>
-          </a:p>
-          <a:p>
-            <a:pPr>
-              <a:spcAft>
-                <a:spcPts val="800"/>
-              </a:spcAft>
-              <a:defRPr sz="1800">
-                <a:solidFill>
-                  <a:srgbClr val="122C4E"/>
-                </a:solidFill>
-                <a:latin typeface="Noto Sans CJK KR"/>
-              </a:defRPr>
-            </a:pPr>
-            <a:r>
-              <a:t>• □ 다음 시작 조건: M20 PID</a:t>
-            </a:r>
-          </a:p>
-        </p:txBody>
-      </p:sp>
-      <p:sp>
-        <p:nvSpPr>
-          <p:cNvPr id="9" name="TextBox 8"/>
-          <p:cNvSpPr txBox="1"/>
-          <p:nvPr/>
-        </p:nvSpPr>
-        <p:spPr>
-          <a:xfrm>
-            <a:off x="868680" y="5596128"/>
-            <a:ext cx="10515600" cy="338328"/>
+            <a:off x="877824" y="4590288"/>
+            <a:ext cx="10241280" cy="594360"/>
           </a:xfrm>
           <a:prstGeom prst="rect">
             <a:avLst/>
@@ -11331,15 +11461,15 @@
               <a:spcAft>
                 <a:spcPts val="0"/>
               </a:spcAft>
-              <a:defRPr sz="1700" b="1">
-                <a:solidFill>
-                  <a:srgbClr val="2A8B5A"/>
-                </a:solidFill>
-                <a:latin typeface="Noto Sans CJK KR"/>
-              </a:defRPr>
-            </a:pPr>
-            <a:r>
-              <a:t>다음 모듈을 시작하기 전, 이 슬라이드의 Complete와 다음 모듈의 Starter를 비교합니다.</a:t>
+              <a:defRPr sz="1900" b="1">
+                <a:solidFill>
+                  <a:srgbClr val="DB7E22"/>
+                </a:solidFill>
+                <a:latin typeface="Noto Sans CJK KR"/>
+              </a:defRPr>
+            </a:pPr>
+            <a:r>
+              <a:t>기록할 것: 바꾼 값(단위) · 기대한 변화 · 실제 출력/화면 · 원래 값으로 되돌린 결과</a:t>
             </a:r>
           </a:p>
         </p:txBody>
@@ -11396,6 +11526,425 @@
               </a:defRPr>
             </a:pPr>
             <a:r>
+              <a:t>체크포인트를 저장하고 다음 모듈로 넘긴다</a:t>
+            </a:r>
+          </a:p>
+        </p:txBody>
+      </p:sp>
+      <p:sp>
+        <p:nvSpPr>
+          <p:cNvPr id="3" name="TextBox 2"/>
+          <p:cNvSpPr txBox="1"/>
+          <p:nvPr/>
+        </p:nvSpPr>
+        <p:spPr>
+          <a:xfrm>
+            <a:off x="603504" y="859536"/>
+            <a:ext cx="10698480" cy="292608"/>
+          </a:xfrm>
+          <a:prstGeom prst="rect">
+            <a:avLst/>
+          </a:prstGeom>
+          <a:noFill/>
+        </p:spPr>
+        <p:txBody>
+          <a:bodyPr wrap="square" lIns="73152" rIns="73152" tIns="36576" bIns="36576">
+            <a:spAutoFit/>
+          </a:bodyPr>
+          <a:lstStyle/>
+          <a:p>
+            <a:pPr algn="l">
+              <a:spcAft>
+                <a:spcPts val="0"/>
+              </a:spcAft>
+              <a:defRPr sz="1700" b="0">
+                <a:solidFill>
+                  <a:srgbClr val="5C6672"/>
+                </a:solidFill>
+                <a:latin typeface="Noto Sans CJK KR"/>
+              </a:defRPr>
+            </a:pPr>
+            <a:r>
+              <a:t>현재 Complete는 다음 Starter의 기준선입니다.</a:t>
+            </a:r>
+          </a:p>
+        </p:txBody>
+      </p:sp>
+      <p:sp>
+        <p:nvSpPr>
+          <p:cNvPr id="4" name="TextBox 3"/>
+          <p:cNvSpPr txBox="1"/>
+          <p:nvPr/>
+        </p:nvSpPr>
+        <p:spPr>
+          <a:xfrm>
+            <a:off x="530352" y="6510528"/>
+            <a:ext cx="7772400" cy="201168"/>
+          </a:xfrm>
+          <a:prstGeom prst="rect">
+            <a:avLst/>
+          </a:prstGeom>
+          <a:noFill/>
+        </p:spPr>
+        <p:txBody>
+          <a:bodyPr wrap="square" lIns="73152" rIns="73152" tIns="36576" bIns="36576">
+            <a:spAutoFit/>
+          </a:bodyPr>
+          <a:lstStyle/>
+          <a:p>
+            <a:pPr algn="l">
+              <a:spcAft>
+                <a:spcPts val="0"/>
+              </a:spcAft>
+              <a:defRPr sz="1000" b="0">
+                <a:solidFill>
+                  <a:srgbClr val="5C6672"/>
+                </a:solidFill>
+                <a:latin typeface="Noto Sans CJK KR"/>
+              </a:defRPr>
+            </a:pPr>
+            <a:r>
+              <a:t>ROS 2 Jazzy · Gazebo Harmonic · M19 · 따라 하기형 AGV 실습</a:t>
+            </a:r>
+          </a:p>
+        </p:txBody>
+      </p:sp>
+      <p:sp>
+        <p:nvSpPr>
+          <p:cNvPr id="5" name="TextBox 4"/>
+          <p:cNvSpPr txBox="1"/>
+          <p:nvPr/>
+        </p:nvSpPr>
+        <p:spPr>
+          <a:xfrm>
+            <a:off x="9144000" y="6510528"/>
+            <a:ext cx="2468880" cy="201168"/>
+          </a:xfrm>
+          <a:prstGeom prst="rect">
+            <a:avLst/>
+          </a:prstGeom>
+          <a:noFill/>
+        </p:spPr>
+        <p:txBody>
+          <a:bodyPr wrap="square" lIns="73152" rIns="73152" tIns="36576" bIns="36576">
+            <a:spAutoFit/>
+          </a:bodyPr>
+          <a:lstStyle/>
+          <a:p>
+            <a:pPr algn="r">
+              <a:spcAft>
+                <a:spcPts val="0"/>
+              </a:spcAft>
+              <a:defRPr sz="1000" b="0">
+                <a:solidFill>
+                  <a:srgbClr val="5C6672"/>
+                </a:solidFill>
+                <a:latin typeface="Noto Sans CJK KR"/>
+              </a:defRPr>
+            </a:pPr>
+            <a:r>
+              <a:t>명령·파일 경로는 슬라이드에서 복사 가능</a:t>
+            </a:r>
+          </a:p>
+        </p:txBody>
+      </p:sp>
+      <p:sp>
+        <p:nvSpPr>
+          <p:cNvPr id="6" name="Rectangle 5"/>
+          <p:cNvSpPr/>
+          <p:nvPr/>
+        </p:nvSpPr>
+        <p:spPr>
+          <a:xfrm>
+            <a:off x="566928" y="1188720"/>
+            <a:ext cx="11064240" cy="347472"/>
+          </a:xfrm>
+          <a:prstGeom prst="rect">
+            <a:avLst/>
+          </a:prstGeom>
+          <a:solidFill>
+            <a:srgbClr val="F4F7FB"/>
+          </a:solidFill>
+          <a:ln>
+            <a:solidFill>
+              <a:srgbClr val="F4F7FB"/>
+            </a:solidFill>
+          </a:ln>
+        </p:spPr>
+        <p:style>
+          <a:lnRef idx="1">
+            <a:schemeClr val="accent1"/>
+          </a:lnRef>
+          <a:fillRef idx="3">
+            <a:schemeClr val="accent1"/>
+          </a:fillRef>
+          <a:effectRef idx="2">
+            <a:schemeClr val="accent1"/>
+          </a:effectRef>
+          <a:fontRef idx="minor">
+            <a:schemeClr val="lt1"/>
+          </a:fontRef>
+        </p:style>
+        <p:txBody>
+          <a:bodyPr rtlCol="0" anchor="ctr" wrap="square" lIns="73152" rIns="73152" tIns="36576" bIns="36576"/>
+          <a:lstStyle/>
+          <a:p>
+            <a:pPr algn="l">
+              <a:spcAft>
+                <a:spcPts val="0"/>
+              </a:spcAft>
+              <a:defRPr sz="1300" b="1">
+                <a:solidFill>
+                  <a:srgbClr val="122C4E"/>
+                </a:solidFill>
+                <a:latin typeface="Noto Sans CJK KR"/>
+              </a:defRPr>
+            </a:pPr>
+            <a:r>
+              <a:t>현재 단계 체크포인트    |    현재 폴더 ~/agv_ws    |    현재 터미널</a:t>
+            </a:r>
+          </a:p>
+        </p:txBody>
+      </p:sp>
+      <p:sp>
+        <p:nvSpPr>
+          <p:cNvPr id="7" name="Rounded Rectangle 6"/>
+          <p:cNvSpPr/>
+          <p:nvPr/>
+        </p:nvSpPr>
+        <p:spPr>
+          <a:xfrm>
+            <a:off x="685800" y="1737360"/>
+            <a:ext cx="10972800" cy="3611880"/>
+          </a:xfrm>
+          <a:prstGeom prst="roundRect">
+            <a:avLst/>
+          </a:prstGeom>
+          <a:solidFill>
+            <a:srgbClr val="F4F7FB"/>
+          </a:solidFill>
+          <a:ln>
+            <a:solidFill>
+              <a:srgbClr val="D2DCE8"/>
+            </a:solidFill>
+          </a:ln>
+        </p:spPr>
+        <p:style>
+          <a:lnRef idx="1">
+            <a:schemeClr val="accent1"/>
+          </a:lnRef>
+          <a:fillRef idx="3">
+            <a:schemeClr val="accent1"/>
+          </a:fillRef>
+          <a:effectRef idx="2">
+            <a:schemeClr val="accent1"/>
+          </a:effectRef>
+          <a:fontRef idx="minor">
+            <a:schemeClr val="lt1"/>
+          </a:fontRef>
+        </p:style>
+        <p:txBody>
+          <a:bodyPr rtlCol="0" anchor="ctr"/>
+          <a:lstStyle/>
+          <a:p>
+            <a:pPr algn="ctr"/>
+          </a:p>
+        </p:txBody>
+      </p:sp>
+      <p:sp>
+        <p:nvSpPr>
+          <p:cNvPr id="8" name="TextBox 7"/>
+          <p:cNvSpPr txBox="1"/>
+          <p:nvPr/>
+        </p:nvSpPr>
+        <p:spPr>
+          <a:xfrm>
+            <a:off x="896112" y="1993392"/>
+            <a:ext cx="10332720" cy="2971800"/>
+          </a:xfrm>
+          <a:prstGeom prst="rect">
+            <a:avLst/>
+          </a:prstGeom>
+          <a:noFill/>
+        </p:spPr>
+        <p:txBody>
+          <a:bodyPr wrap="square" lIns="109728" rIns="109728">
+            <a:spAutoFit/>
+          </a:bodyPr>
+          <a:lstStyle/>
+          <a:p>
+            <a:pPr>
+              <a:spcAft>
+                <a:spcPts val="800"/>
+              </a:spcAft>
+              <a:defRPr sz="1800">
+                <a:solidFill>
+                  <a:srgbClr val="122C4E"/>
+                </a:solidFill>
+                <a:latin typeface="Noto Sans CJK KR"/>
+              </a:defRPr>
+            </a:pPr>
+            <a:r>
+              <a:t>• □ 완료 화면: /mission_state 로그와 /cmd_vel_raw가 detection·obstacle input에 따라 바뀌는 구조를 확인한다.</a:t>
+            </a:r>
+          </a:p>
+          <a:p>
+            <a:pPr>
+              <a:spcAft>
+                <a:spcPts val="800"/>
+              </a:spcAft>
+              <a:defRPr sz="1800">
+                <a:solidFill>
+                  <a:srgbClr val="122C4E"/>
+                </a:solidFill>
+                <a:latin typeface="Noto Sans CJK KR"/>
+              </a:defRPr>
+            </a:pPr>
+            <a:r>
+              <a:t>• □ Complete 파일: blocks/E_autonomy_logic/M19_mission_fsm/complete/</a:t>
+            </a:r>
+          </a:p>
+          <a:p>
+            <a:pPr>
+              <a:spcAft>
+                <a:spcPts val="800"/>
+              </a:spcAft>
+              <a:defRPr sz="1800">
+                <a:solidFill>
+                  <a:srgbClr val="122C4E"/>
+                </a:solidFill>
+                <a:latin typeface="Noto Sans CJK KR"/>
+              </a:defRPr>
+            </a:pPr>
+            <a:r>
+              <a:t>• □ 정상 로그·캡처: logs/validation.log, screenshots/validation_terminal.png</a:t>
+            </a:r>
+          </a:p>
+          <a:p>
+            <a:pPr>
+              <a:spcAft>
+                <a:spcPts val="800"/>
+              </a:spcAft>
+              <a:defRPr sz="1800">
+                <a:solidFill>
+                  <a:srgbClr val="122C4E"/>
+                </a:solidFill>
+                <a:latin typeface="Noto Sans CJK KR"/>
+              </a:defRPr>
+            </a:pPr>
+            <a:r>
+              <a:t>• □ 버전 식별: CHECKSUM_or_TAG.txt의 SHA-256 manifest</a:t>
+            </a:r>
+          </a:p>
+          <a:p>
+            <a:pPr>
+              <a:spcAft>
+                <a:spcPts val="800"/>
+              </a:spcAft>
+              <a:defRPr sz="1800">
+                <a:solidFill>
+                  <a:srgbClr val="122C4E"/>
+                </a:solidFill>
+                <a:latin typeface="Noto Sans CJK KR"/>
+              </a:defRPr>
+            </a:pPr>
+            <a:r>
+              <a:t>• □ 다음 시작 조건: M20 PID</a:t>
+            </a:r>
+          </a:p>
+        </p:txBody>
+      </p:sp>
+      <p:sp>
+        <p:nvSpPr>
+          <p:cNvPr id="9" name="TextBox 8"/>
+          <p:cNvSpPr txBox="1"/>
+          <p:nvPr/>
+        </p:nvSpPr>
+        <p:spPr>
+          <a:xfrm>
+            <a:off x="868680" y="5596128"/>
+            <a:ext cx="10515600" cy="338328"/>
+          </a:xfrm>
+          <a:prstGeom prst="rect">
+            <a:avLst/>
+          </a:prstGeom>
+          <a:noFill/>
+        </p:spPr>
+        <p:txBody>
+          <a:bodyPr wrap="square" lIns="73152" rIns="73152" tIns="36576" bIns="36576">
+            <a:spAutoFit/>
+          </a:bodyPr>
+          <a:lstStyle/>
+          <a:p>
+            <a:pPr algn="ctr">
+              <a:spcAft>
+                <a:spcPts val="0"/>
+              </a:spcAft>
+              <a:defRPr sz="1700" b="1">
+                <a:solidFill>
+                  <a:srgbClr val="2A8B5A"/>
+                </a:solidFill>
+                <a:latin typeface="Noto Sans CJK KR"/>
+              </a:defRPr>
+            </a:pPr>
+            <a:r>
+              <a:t>다음 모듈을 시작하기 전, 이 슬라이드의 Complete와 다음 모듈의 Starter를 비교합니다.</a:t>
+            </a:r>
+          </a:p>
+        </p:txBody>
+      </p:sp>
+    </p:spTree>
+  </p:cSld>
+  <p:clrMapOvr>
+    <a:masterClrMapping/>
+  </p:clrMapOvr>
+</p:sld>
+</file>
+
+<file path=ppt/slides/slide23.xml><?xml version="1.0" encoding="utf-8"?>
+<p:sld xmlns:a="http://schemas.openxmlformats.org/drawingml/2006/main" xmlns:p="http://schemas.openxmlformats.org/presentationml/2006/main" xmlns:r="http://schemas.openxmlformats.org/officeDocument/2006/relationships">
+  <p:cSld>
+    <p:spTree>
+      <p:nvGrpSpPr>
+        <p:cNvPr id="1" name=""/>
+        <p:cNvGrpSpPr/>
+        <p:nvPr/>
+      </p:nvGrpSpPr>
+      <p:grpSpPr/>
+      <p:sp>
+        <p:nvSpPr>
+          <p:cNvPr id="2" name="TextBox 1"/>
+          <p:cNvSpPr txBox="1"/>
+          <p:nvPr/>
+        </p:nvSpPr>
+        <p:spPr>
+          <a:xfrm>
+            <a:off x="566928" y="347472"/>
+            <a:ext cx="10881360" cy="438912"/>
+          </a:xfrm>
+          <a:prstGeom prst="rect">
+            <a:avLst/>
+          </a:prstGeom>
+          <a:noFill/>
+        </p:spPr>
+        <p:txBody>
+          <a:bodyPr wrap="square" lIns="73152" rIns="73152" tIns="36576" bIns="36576">
+            <a:spAutoFit/>
+          </a:bodyPr>
+          <a:lstStyle/>
+          <a:p>
+            <a:pPr algn="l">
+              <a:spcAft>
+                <a:spcPts val="0"/>
+              </a:spcAft>
+              <a:defRPr sz="3200" b="1">
+                <a:solidFill>
+                  <a:srgbClr val="122C4E"/>
+                </a:solidFill>
+                <a:latin typeface="Noto Sans CJK KR"/>
+              </a:defRPr>
+            </a:pPr>
+            <a:r>
               <a:t>공식 참고 자료</a:t>
             </a:r>
           </a:p>
@@ -11571,7 +12120,7 @@
         </p:nvSpPr>
         <p:spPr>
           <a:xfrm>
-            <a:off x="914400" y="1810512"/>
+            <a:off x="914400" y="1773936"/>
             <a:ext cx="3840480" cy="256032"/>
           </a:xfrm>
           <a:prstGeom prst="rect">
@@ -11610,8 +12159,8 @@
         </p:nvSpPr>
         <p:spPr>
           <a:xfrm>
-            <a:off x="914400" y="2121408"/>
-            <a:ext cx="9966960" cy="256032"/>
+            <a:off x="914400" y="2048255"/>
+            <a:ext cx="9966960" cy="475488"/>
           </a:xfrm>
           <a:prstGeom prst="rect">
             <a:avLst/>
@@ -11628,7 +12177,7 @@
               <a:spcAft>
                 <a:spcPts val="0"/>
               </a:spcAft>
-              <a:defRPr sz="1200" b="0">
+              <a:defRPr sz="1000" b="0">
                 <a:solidFill>
                   <a:srgbClr val="225B9B"/>
                 </a:solidFill>
@@ -11649,7 +12198,7 @@
         </p:nvSpPr>
         <p:spPr>
           <a:xfrm>
-            <a:off x="914400" y="2816352"/>
+            <a:off x="914400" y="2852928"/>
             <a:ext cx="3840480" cy="256032"/>
           </a:xfrm>
           <a:prstGeom prst="rect">
@@ -11689,7 +12238,7 @@
         <p:spPr>
           <a:xfrm>
             <a:off x="914400" y="3127248"/>
-            <a:ext cx="9966960" cy="256032"/>
+            <a:ext cx="9966960" cy="475488"/>
           </a:xfrm>
           <a:prstGeom prst="rect">
             <a:avLst/>
@@ -11706,7 +12255,7 @@
               <a:spcAft>
                 <a:spcPts val="0"/>
               </a:spcAft>
-              <a:defRPr sz="1200" b="0">
+              <a:defRPr sz="1000" b="0">
                 <a:solidFill>
                   <a:srgbClr val="225B9B"/>
                 </a:solidFill>
@@ -11727,7 +12276,7 @@
         </p:nvSpPr>
         <p:spPr>
           <a:xfrm>
-            <a:off x="914400" y="3822191"/>
+            <a:off x="914400" y="3931920"/>
             <a:ext cx="3840480" cy="256032"/>
           </a:xfrm>
           <a:prstGeom prst="rect">
@@ -11766,8 +12315,8 @@
         </p:nvSpPr>
         <p:spPr>
           <a:xfrm>
-            <a:off x="914400" y="4133087"/>
-            <a:ext cx="9966960" cy="256032"/>
+            <a:off x="914400" y="4206240"/>
+            <a:ext cx="9966960" cy="475488"/>
           </a:xfrm>
           <a:prstGeom prst="rect">
             <a:avLst/>
@@ -11784,7 +12333,7 @@
               <a:spcAft>
                 <a:spcPts val="0"/>
               </a:spcAft>
-              <a:defRPr sz="1200" b="0">
+              <a:defRPr sz="1000" b="0">
                 <a:solidFill>
                   <a:srgbClr val="225B9B"/>
                 </a:solidFill>
@@ -11805,7 +12354,7 @@
         </p:nvSpPr>
         <p:spPr>
           <a:xfrm>
-            <a:off x="914400" y="4828032"/>
+            <a:off x="914400" y="5010912"/>
             <a:ext cx="3840480" cy="256032"/>
           </a:xfrm>
           <a:prstGeom prst="rect">
@@ -11844,8 +12393,8 @@
         </p:nvSpPr>
         <p:spPr>
           <a:xfrm>
-            <a:off x="914400" y="5138928"/>
-            <a:ext cx="9966960" cy="256032"/>
+            <a:off x="914400" y="5285232"/>
+            <a:ext cx="9966960" cy="475488"/>
           </a:xfrm>
           <a:prstGeom prst="rect">
             <a:avLst/>
@@ -11862,7 +12411,7 @@
               <a:spcAft>
                 <a:spcPts val="0"/>
               </a:spcAft>
-              <a:defRPr sz="1200" b="0">
+              <a:defRPr sz="1000" b="0">
                 <a:solidFill>
                   <a:srgbClr val="225B9B"/>
                 </a:solidFill>
@@ -14420,7 +14969,7 @@
               </a:defRPr>
             </a:pPr>
             <a:r>
-              <a:t>파일을 새로 만들고 저장한다 (1/5)</a:t>
+              <a:t>파일을 새로 만들고 저장한다 (1/6)</a:t>
             </a:r>
           </a:p>
         </p:txBody>
@@ -14595,7 +15144,7 @@
               </a:defRPr>
             </a:pPr>
             <a:r>
-              <a:t>현재 단계 3/8    |    현재 폴더 ~/agv_ws    |    현재 터미널</a:t>
+              <a:t>현재 단계 3/9    |    현재 폴더 ~/agv_ws    |    현재 터미널</a:t>
             </a:r>
           </a:p>
         </p:txBody>
@@ -14608,8 +15157,8 @@
         </p:nvSpPr>
         <p:spPr>
           <a:xfrm>
-            <a:off x="658368" y="1682496"/>
-            <a:ext cx="10972800" cy="347472"/>
+            <a:off x="658368" y="1627632"/>
+            <a:ext cx="10972800" cy="256032"/>
           </a:xfrm>
           <a:prstGeom prst="rect">
             <a:avLst/>
@@ -14626,7 +15175,7 @@
               <a:spcAft>
                 <a:spcPts val="0"/>
               </a:spcAft>
-              <a:defRPr sz="1700" b="1">
+              <a:defRPr sz="1500" b="1">
                 <a:solidFill>
                   <a:srgbClr val="122C4E"/>
                 </a:solidFill>
@@ -14647,8 +15196,8 @@
         </p:nvSpPr>
         <p:spPr>
           <a:xfrm>
-            <a:off x="658368" y="2103120"/>
-            <a:ext cx="10972800" cy="493776"/>
+            <a:off x="658368" y="1956816"/>
+            <a:ext cx="10972800" cy="603504"/>
           </a:xfrm>
           <a:prstGeom prst="rect">
             <a:avLst/>
@@ -14692,7 +15241,11 @@
               </a:defRPr>
             </a:pPr>
             <a:r>
-              <a:t>파일 생성/열기: mkdir -p ~/agv_ws/src/agv_mission/agv_mission    &amp;&amp;    nano ~/agv_ws/src/agv_mission/agv_mission/mission_manager.py</a:t>
+              <a:t>파일 생성: mkdir -p ~/agv_ws/src/agv_mission/agv_mission</a:t>
+            </a:r>
+            <a:br/>
+            <a:r>
+              <a:t>파일 열기: nano ~/agv_ws/src/agv_mission/agv_mission/mission_manager.py</a:t>
             </a:r>
           </a:p>
         </p:txBody>
@@ -14705,8 +15258,8 @@
         </p:nvSpPr>
         <p:spPr>
           <a:xfrm>
-            <a:off x="658368" y="2761488"/>
-            <a:ext cx="10972800" cy="3383280"/>
+            <a:off x="658368" y="2706624"/>
+            <a:ext cx="10972800" cy="3364992"/>
           </a:xfrm>
           <a:prstGeom prst="rect">
             <a:avLst/>
@@ -14790,14 +15343,6 @@
             <a:r>
               <a:t>        self.declare_parameter('stop_distance', 0.5)</a:t>
             </a:r>
-            <a:br/>
-            <a:r>
-              <a:t>        self.declare_parameter('search_speed', 0.25)</a:t>
-            </a:r>
-            <a:br/>
-            <a:r>
-              <a:t>        self.declare_parameter('approach_speed', 0.15)</a:t>
-            </a:r>
           </a:p>
         </p:txBody>
       </p:sp>
@@ -14809,7 +15354,7 @@
         </p:nvSpPr>
         <p:spPr>
           <a:xfrm>
-            <a:off x="749808" y="6199632"/>
+            <a:off x="749808" y="6181344"/>
             <a:ext cx="10789920" cy="201168"/>
           </a:xfrm>
           <a:prstGeom prst="rect">
@@ -14835,7 +15380,7 @@
               </a:defRPr>
             </a:pPr>
             <a:r>
-              <a:t>파일 전체 1/5 · 이 슬라이드 다음에 같은 파일의 나머지 줄이 이어집니다.</a:t>
+              <a:t>파일 전체 1/6 · 이 슬라이드 다음에 같은 파일의 나머지 줄이 이어집니다.</a:t>
             </a:r>
           </a:p>
         </p:txBody>

--- a/blocks/E_autonomy_logic/M19_mission_fsm/M19_Mission_State_Machine.pptx
+++ b/blocks/E_autonomy_logic/M19_mission_fsm/M19_Mission_State_Machine.pptx
@@ -28,6 +28,9 @@
     <p:sldId id="276" r:id="rId28"/>
     <p:sldId id="277" r:id="rId29"/>
     <p:sldId id="278" r:id="rId30"/>
+    <p:sldId id="279" r:id="rId31"/>
+    <p:sldId id="280" r:id="rId32"/>
+    <p:sldId id="281" r:id="rId33"/>
   </p:sldIdLst>
   <p:sldSz cx="12191999" cy="6858000" type="screen4x3"/>
   <p:notesSz cx="6858000" cy="9144000"/>
@@ -614,12 +617,12 @@
           <a:lstStyle/>
           <a:p>
             <a:r>
-              <a:t>[설명] ~/agv_ws/src/agv_mission/agv_mission/mission_manager.py의 전체 파일을 2/6 구간으로 작성한다.</a:t>
-            </a:r>
-          </a:p>
-          <a:p>
-            <a:r>
-              <a:t>[실행] nano ~/agv_ws/src/agv_mission/agv_mission/mission_manager.py</a:t>
+              <a:t>[설명] ~/ros2_curri/agv_ws/src/agv_mission/agv_mission/mission_manager.py의 전체 파일을 2/7 구간으로 작성한다.</a:t>
+            </a:r>
+          </a:p>
+          <a:p>
+            <a:r>
+              <a:t>[실행] nano ~/ros2_curri/agv_ws/src/agv_mission/agv_mission/mission_manager.py</a:t>
             </a:r>
           </a:p>
           <a:p>
@@ -704,12 +707,12 @@
           <a:lstStyle/>
           <a:p>
             <a:r>
-              <a:t>[설명] ~/agv_ws/src/agv_mission/agv_mission/mission_manager.py의 전체 파일을 3/6 구간으로 작성한다.</a:t>
-            </a:r>
-          </a:p>
-          <a:p>
-            <a:r>
-              <a:t>[실행] nano ~/agv_ws/src/agv_mission/agv_mission/mission_manager.py</a:t>
+              <a:t>[설명] ~/ros2_curri/agv_ws/src/agv_mission/agv_mission/mission_manager.py의 전체 파일을 3/7 구간으로 작성한다.</a:t>
+            </a:r>
+          </a:p>
+          <a:p>
+            <a:r>
+              <a:t>[실행] nano ~/ros2_curri/agv_ws/src/agv_mission/agv_mission/mission_manager.py</a:t>
             </a:r>
           </a:p>
           <a:p>
@@ -794,12 +797,12 @@
           <a:lstStyle/>
           <a:p>
             <a:r>
-              <a:t>[설명] ~/agv_ws/src/agv_mission/agv_mission/mission_manager.py의 전체 파일을 4/6 구간으로 작성한다.</a:t>
-            </a:r>
-          </a:p>
-          <a:p>
-            <a:r>
-              <a:t>[실행] nano ~/agv_ws/src/agv_mission/agv_mission/mission_manager.py</a:t>
+              <a:t>[설명] ~/ros2_curri/agv_ws/src/agv_mission/agv_mission/mission_manager.py의 전체 파일을 4/7 구간으로 작성한다.</a:t>
+            </a:r>
+          </a:p>
+          <a:p>
+            <a:r>
+              <a:t>[실행] nano ~/ros2_curri/agv_ws/src/agv_mission/agv_mission/mission_manager.py</a:t>
             </a:r>
           </a:p>
           <a:p>
@@ -884,12 +887,12 @@
           <a:lstStyle/>
           <a:p>
             <a:r>
-              <a:t>[설명] ~/agv_ws/src/agv_mission/agv_mission/mission_manager.py의 전체 파일을 5/6 구간으로 작성한다.</a:t>
-            </a:r>
-          </a:p>
-          <a:p>
-            <a:r>
-              <a:t>[실행] nano ~/agv_ws/src/agv_mission/agv_mission/mission_manager.py</a:t>
+              <a:t>[설명] ~/ros2_curri/agv_ws/src/agv_mission/agv_mission/mission_manager.py의 전체 파일을 5/7 구간으로 작성한다.</a:t>
+            </a:r>
+          </a:p>
+          <a:p>
+            <a:r>
+              <a:t>[실행] nano ~/ros2_curri/agv_ws/src/agv_mission/agv_mission/mission_manager.py</a:t>
             </a:r>
           </a:p>
           <a:p>
@@ -974,12 +977,12 @@
           <a:lstStyle/>
           <a:p>
             <a:r>
-              <a:t>[설명] ~/agv_ws/src/agv_mission/agv_mission/mission_manager.py의 전체 파일을 6/6 구간으로 작성한다.</a:t>
-            </a:r>
-          </a:p>
-          <a:p>
-            <a:r>
-              <a:t>[실행] nano ~/agv_ws/src/agv_mission/agv_mission/mission_manager.py</a:t>
+              <a:t>[설명] ~/ros2_curri/agv_ws/src/agv_mission/agv_mission/mission_manager.py의 전체 파일을 6/7 구간으로 작성한다.</a:t>
+            </a:r>
+          </a:p>
+          <a:p>
+            <a:r>
+              <a:t>[실행] nano ~/ros2_curri/agv_ws/src/agv_mission/agv_mission/mission_manager.py</a:t>
             </a:r>
           </a:p>
           <a:p>
@@ -1064,12 +1067,12 @@
           <a:lstStyle/>
           <a:p>
             <a:r>
-              <a:t>[설명] ~/agv_ws/src/agv_bringup/config/mission.yaml의 전체 파일을 1/1 구간으로 작성한다.</a:t>
-            </a:r>
-          </a:p>
-          <a:p>
-            <a:r>
-              <a:t>[실행] nano ~/agv_ws/src/agv_bringup/config/mission.yaml</a:t>
+              <a:t>[설명] ~/ros2_curri/agv_ws/src/agv_mission/agv_mission/mission_manager.py의 전체 파일을 7/7 구간으로 작성한다.</a:t>
+            </a:r>
+          </a:p>
+          <a:p>
+            <a:r>
+              <a:t>[실행] nano ~/ros2_curri/agv_ws/src/agv_mission/agv_mission/mission_manager.py</a:t>
             </a:r>
           </a:p>
           <a:p>
@@ -1154,12 +1157,12 @@
           <a:lstStyle/>
           <a:p>
             <a:r>
-              <a:t>[설명] ~/agv_ws/src/agv_mission/setup.py의 전체 파일을 1/1 구간으로 작성한다.</a:t>
-            </a:r>
-          </a:p>
-          <a:p>
-            <a:r>
-              <a:t>[실행] nano ~/agv_ws/src/agv_mission/setup.py</a:t>
+              <a:t>[설명] ~/ros2_curri/agv_ws/src/agv_bringup/config/mission.yaml의 전체 파일을 1/2 구간으로 작성한다.</a:t>
+            </a:r>
+          </a:p>
+          <a:p>
+            <a:r>
+              <a:t>[실행] nano ~/ros2_curri/agv_ws/src/agv_bringup/config/mission.yaml</a:t>
             </a:r>
           </a:p>
           <a:p>
@@ -1244,22 +1247,17 @@
           <a:lstStyle/>
           <a:p>
             <a:r>
-              <a:t>[설명] build/source/run을 생략 없이 실행한다.</a:t>
-            </a:r>
-          </a:p>
-          <a:p>
-            <a:r>
-              <a:t>[실행] source ~/agv_ws/install/setup.bash</a:t>
-            </a:r>
-          </a:p>
-          <a:p>
-            <a:r>
-              <a:t>ros2 run agv_mission mission_manager</a:t>
-            </a:r>
-          </a:p>
-          <a:p>
-            <a:r>
-              <a:t>[확인] /mission_state 로그와 /cmd_vel_raw가 detection·obstacle input에 따라 바뀌는 구조를 확인한다.</a:t>
+              <a:t>[설명] ~/ros2_curri/agv_ws/src/agv_bringup/config/mission.yaml의 전체 파일을 2/2 구간으로 작성한다.</a:t>
+            </a:r>
+          </a:p>
+          <a:p>
+            <a:r>
+              <a:t>[실행] nano ~/ros2_curri/agv_ws/src/agv_bringup/config/mission.yaml</a:t>
+            </a:r>
+          </a:p>
+          <a:p>
+            <a:r>
+              <a:t>[확인] 코드를 저장하고 다음 코드 슬라이드 또는 build 단계로 이동한다.</a:t>
             </a:r>
           </a:p>
           <a:p>
@@ -1269,7 +1267,7 @@
           </a:p>
           <a:p>
             <a:r>
-              <a:t>[오류] 오류가 나면 현재 폴더, source, 파일 경로를 먼저 확인한다.</a:t>
+              <a:t>[오류] 들여쓰기·XML 태그·따옴표가 슬라이드와 정확히 같은지 확인한다.</a:t>
             </a:r>
           </a:p>
         </p:txBody>
@@ -1339,17 +1337,17 @@
           <a:lstStyle/>
           <a:p>
             <a:r>
-              <a:t>[설명] 실제 Ubuntu/ROS 2 환경에서 생성한 검증 화면이다.</a:t>
-            </a:r>
-          </a:p>
-          <a:p>
-            <a:r>
-              <a:t>[실행] 슬라이드의 명령 또는 파일 작성 단계를 진행한다.</a:t>
-            </a:r>
-          </a:p>
-          <a:p>
-            <a:r>
-              <a:t>[확인] 캡처의 명령과 다음 슬라이드의 검증 명령을 비교한다.</a:t>
+              <a:t>[설명] ~/ros2_curri/agv_ws/src/agv_mission/setup.py의 전체 파일을 1/1 구간으로 작성한다.</a:t>
+            </a:r>
+          </a:p>
+          <a:p>
+            <a:r>
+              <a:t>[실행] nano ~/ros2_curri/agv_ws/src/agv_mission/setup.py</a:t>
+            </a:r>
+          </a:p>
+          <a:p>
+            <a:r>
+              <a:t>[확인] 코드를 저장하고 다음 코드 슬라이드 또는 build 단계로 이동한다.</a:t>
             </a:r>
           </a:p>
           <a:p>
@@ -1359,7 +1357,7 @@
           </a:p>
           <a:p>
             <a:r>
-              <a:t>[오류] 오류가 나면 현재 폴더, source, 파일 경로를 먼저 확인한다.</a:t>
+              <a:t>[오류] 들여쓰기·XML 태그·따옴표가 슬라이드와 정확히 같은지 확인한다.</a:t>
             </a:r>
           </a:p>
         </p:txBody>
@@ -1429,22 +1427,17 @@
           <a:lstStyle/>
           <a:p>
             <a:r>
-              <a:t>[설명] 검증 명령은 GUI 결과와 별도로 실행해 재현 가능한 완료 기준을 만든다.</a:t>
-            </a:r>
-          </a:p>
-          <a:p>
-            <a:r>
-              <a:t>[실행] ros2 topic info /mission_state</a:t>
-            </a:r>
-          </a:p>
-          <a:p>
-            <a:r>
-              <a:t>ros2 topic info /cmd_vel_raw</a:t>
-            </a:r>
-          </a:p>
-          <a:p>
-            <a:r>
-              <a:t>ros2 param get /mission_manager stop_distance</a:t>
+              <a:t>[설명] build/source/run을 생략 없이 실행한다.</a:t>
+            </a:r>
+          </a:p>
+          <a:p>
+            <a:r>
+              <a:t>[실행] source ~/ros2_curri/agv_ws/install/setup.bash</a:t>
+            </a:r>
+          </a:p>
+          <a:p>
+            <a:r>
+              <a:t>ros2 run agv_mission mission_manager</a:t>
             </a:r>
           </a:p>
           <a:p>
@@ -1619,7 +1612,7 @@
           <a:lstStyle/>
           <a:p>
             <a:r>
-              <a:t>[설명] 오류를 대신 해결하지 말고 증상부터 우선 확인 순서대로 교육생이 실행하게 한다.</a:t>
+              <a:t>[설명] 실제 Ubuntu/ROS 2 환경에서 생성한 검증 화면이다.</a:t>
             </a:r>
           </a:p>
           <a:p>
@@ -1629,7 +1622,7 @@
           </a:p>
           <a:p>
             <a:r>
-              <a:t>[확인] 수정 뒤 첫 검증 명령을 다시 실행한다.</a:t>
+              <a:t>[확인] 캡처의 명령과 다음 슬라이드의 검증 명령을 비교한다.</a:t>
             </a:r>
           </a:p>
           <a:p>
@@ -1639,7 +1632,7 @@
           </a:p>
           <a:p>
             <a:r>
-              <a:t>[오류] 슬라이드의 두 대표 오류를 먼저 사용한다.</a:t>
+              <a:t>[오류] 오류가 나면 현재 폴더, source, 파일 경로를 먼저 확인한다.</a:t>
             </a:r>
           </a:p>
         </p:txBody>
@@ -1709,7 +1702,7 @@
           <a:lstStyle/>
           <a:p>
             <a:r>
-              <a:t>[설명] 교육생이 직접 한 값만 바꿔 원인과 결과를 연결하게 한다.</a:t>
+              <a:t>[설명] 실제 Ubuntu/ROS 2 환경에서 생성한 검증 화면이다.</a:t>
             </a:r>
           </a:p>
           <a:p>
@@ -1719,7 +1712,7 @@
           </a:p>
           <a:p>
             <a:r>
-              <a:t>[확인] 원래 값과 변경 값을 모두 기록한다.</a:t>
+              <a:t>[확인] 캡처의 명령과 다음 슬라이드의 검증 명령을 비교한다.</a:t>
             </a:r>
           </a:p>
           <a:p>
@@ -1799,17 +1792,27 @@
           <a:lstStyle/>
           <a:p>
             <a:r>
-              <a:t>[설명] 교육생이 Complete·캡처·로그를 저장했는지 확인하고 다음 모듈의 시작 상태를 읽는다.</a:t>
-            </a:r>
-          </a:p>
-          <a:p>
-            <a:r>
-              <a:t>[실행] 슬라이드의 명령 또는 파일 작성 단계를 진행한다.</a:t>
-            </a:r>
-          </a:p>
-          <a:p>
-            <a:r>
-              <a:t>[확인] M20 PID 시작 조건을 말할 수 있다.</a:t>
+              <a:t>[설명] 검증 명령은 GUI 결과와 별도로 실행해 재현 가능한 완료 기준을 만든다.</a:t>
+            </a:r>
+          </a:p>
+          <a:p>
+            <a:r>
+              <a:t>[실행] ros2 topic info /mission_state</a:t>
+            </a:r>
+          </a:p>
+          <a:p>
+            <a:r>
+              <a:t>ros2 topic info /cmd_vel_raw</a:t>
+            </a:r>
+          </a:p>
+          <a:p>
+            <a:r>
+              <a:t>ros2 param get /mission_manager stop_distance</a:t>
+            </a:r>
+          </a:p>
+          <a:p>
+            <a:r>
+              <a:t>[확인] /mission_state 로그와 /cmd_vel_raw가 detection·obstacle input에 따라 바뀌는 구조를 확인한다.</a:t>
             </a:r>
           </a:p>
           <a:p>
@@ -1889,6 +1892,276 @@
           <a:lstStyle/>
           <a:p>
             <a:r>
+              <a:t>[설명] 오류를 대신 해결하지 말고 증상부터 우선 확인 순서대로 교육생이 실행하게 한다.</a:t>
+            </a:r>
+          </a:p>
+          <a:p>
+            <a:r>
+              <a:t>[실행] 슬라이드의 명령 또는 파일 작성 단계를 진행한다.</a:t>
+            </a:r>
+          </a:p>
+          <a:p>
+            <a:r>
+              <a:t>[확인] 수정 뒤 첫 검증 명령을 다시 실행한다.</a:t>
+            </a:r>
+          </a:p>
+          <a:p>
+            <a:r>
+              <a:t>[멈춤] 교육생이 현재 체크포인트를 통과할 때까지 기다린다.</a:t>
+            </a:r>
+          </a:p>
+          <a:p>
+            <a:r>
+              <a:t>[오류] 슬라이드의 두 대표 오류를 먼저 사용한다.</a:t>
+            </a:r>
+          </a:p>
+        </p:txBody>
+      </p:sp>
+      <p:sp>
+        <p:nvSpPr>
+          <p:cNvPr id="4" name="Slide Number Placeholder 3"/>
+          <p:cNvSpPr>
+            <a:spLocks noGrp="1"/>
+          </p:cNvSpPr>
+          <p:nvPr>
+            <p:ph type="sldNum" idx="5" sz="quarter"/>
+          </p:nvPr>
+        </p:nvSpPr>
+        <p:spPr/>
+      </p:sp>
+    </p:spTree>
+  </p:cSld>
+  <p:clrMapOvr>
+    <a:masterClrMapping/>
+  </p:clrMapOvr>
+</p:notes>
+</file>
+
+<file path=ppt/notesSlides/notesSlide24.xml><?xml version="1.0" encoding="utf-8"?>
+<p:notes xmlns:a="http://schemas.openxmlformats.org/drawingml/2006/main" xmlns:p="http://schemas.openxmlformats.org/presentationml/2006/main" xmlns:r="http://schemas.openxmlformats.org/officeDocument/2006/relationships">
+  <p:cSld>
+    <p:spTree>
+      <p:nvGrpSpPr>
+        <p:cNvPr id="1" name=""/>
+        <p:cNvGrpSpPr/>
+        <p:nvPr/>
+      </p:nvGrpSpPr>
+      <p:grpSpPr>
+        <a:xfrm>
+          <a:off x="0" y="0"/>
+          <a:ext cx="0" cy="0"/>
+          <a:chOff x="0" y="0"/>
+          <a:chExt cx="0" cy="0"/>
+        </a:xfrm>
+      </p:grpSpPr>
+      <p:sp>
+        <p:nvSpPr>
+          <p:cNvPr id="2" name="Slide Image Placeholder 1"/>
+          <p:cNvSpPr>
+            <a:spLocks noGrp="1"/>
+          </p:cNvSpPr>
+          <p:nvPr>
+            <p:ph type="sldImg" idx="2"/>
+          </p:nvPr>
+        </p:nvSpPr>
+        <p:spPr/>
+      </p:sp>
+      <p:sp>
+        <p:nvSpPr>
+          <p:cNvPr id="3" name="Notes Placeholder 2"/>
+          <p:cNvSpPr>
+            <a:spLocks noGrp="1"/>
+          </p:cNvSpPr>
+          <p:nvPr>
+            <p:ph type="body" idx="3" sz="quarter"/>
+          </p:nvPr>
+        </p:nvSpPr>
+        <p:spPr/>
+        <p:txBody>
+          <a:bodyPr/>
+          <a:lstStyle/>
+          <a:p>
+            <a:r>
+              <a:t>[설명] 교육생이 직접 한 값만 바꿔 원인과 결과를 연결하게 한다.</a:t>
+            </a:r>
+          </a:p>
+          <a:p>
+            <a:r>
+              <a:t>[실행] 슬라이드의 명령 또는 파일 작성 단계를 진행한다.</a:t>
+            </a:r>
+          </a:p>
+          <a:p>
+            <a:r>
+              <a:t>[확인] 원래 값과 변경 값을 모두 기록한다.</a:t>
+            </a:r>
+          </a:p>
+          <a:p>
+            <a:r>
+              <a:t>[멈춤] 교육생이 현재 체크포인트를 통과할 때까지 기다린다.</a:t>
+            </a:r>
+          </a:p>
+          <a:p>
+            <a:r>
+              <a:t>[오류] 오류가 나면 현재 폴더, source, 파일 경로를 먼저 확인한다.</a:t>
+            </a:r>
+          </a:p>
+        </p:txBody>
+      </p:sp>
+      <p:sp>
+        <p:nvSpPr>
+          <p:cNvPr id="4" name="Slide Number Placeholder 3"/>
+          <p:cNvSpPr>
+            <a:spLocks noGrp="1"/>
+          </p:cNvSpPr>
+          <p:nvPr>
+            <p:ph type="sldNum" idx="5" sz="quarter"/>
+          </p:nvPr>
+        </p:nvSpPr>
+        <p:spPr/>
+      </p:sp>
+    </p:spTree>
+  </p:cSld>
+  <p:clrMapOvr>
+    <a:masterClrMapping/>
+  </p:clrMapOvr>
+</p:notes>
+</file>
+
+<file path=ppt/notesSlides/notesSlide25.xml><?xml version="1.0" encoding="utf-8"?>
+<p:notes xmlns:a="http://schemas.openxmlformats.org/drawingml/2006/main" xmlns:p="http://schemas.openxmlformats.org/presentationml/2006/main" xmlns:r="http://schemas.openxmlformats.org/officeDocument/2006/relationships">
+  <p:cSld>
+    <p:spTree>
+      <p:nvGrpSpPr>
+        <p:cNvPr id="1" name=""/>
+        <p:cNvGrpSpPr/>
+        <p:nvPr/>
+      </p:nvGrpSpPr>
+      <p:grpSpPr>
+        <a:xfrm>
+          <a:off x="0" y="0"/>
+          <a:ext cx="0" cy="0"/>
+          <a:chOff x="0" y="0"/>
+          <a:chExt cx="0" cy="0"/>
+        </a:xfrm>
+      </p:grpSpPr>
+      <p:sp>
+        <p:nvSpPr>
+          <p:cNvPr id="2" name="Slide Image Placeholder 1"/>
+          <p:cNvSpPr>
+            <a:spLocks noGrp="1"/>
+          </p:cNvSpPr>
+          <p:nvPr>
+            <p:ph type="sldImg" idx="2"/>
+          </p:nvPr>
+        </p:nvSpPr>
+        <p:spPr/>
+      </p:sp>
+      <p:sp>
+        <p:nvSpPr>
+          <p:cNvPr id="3" name="Notes Placeholder 2"/>
+          <p:cNvSpPr>
+            <a:spLocks noGrp="1"/>
+          </p:cNvSpPr>
+          <p:nvPr>
+            <p:ph type="body" idx="3" sz="quarter"/>
+          </p:nvPr>
+        </p:nvSpPr>
+        <p:spPr/>
+        <p:txBody>
+          <a:bodyPr/>
+          <a:lstStyle/>
+          <a:p>
+            <a:r>
+              <a:t>[설명] 교육생이 Complete·캡처·로그를 저장했는지 확인하고 다음 모듈의 시작 상태를 읽는다.</a:t>
+            </a:r>
+          </a:p>
+          <a:p>
+            <a:r>
+              <a:t>[실행] 슬라이드의 명령 또는 파일 작성 단계를 진행한다.</a:t>
+            </a:r>
+          </a:p>
+          <a:p>
+            <a:r>
+              <a:t>[확인] M20 PID 시작 조건을 말할 수 있다.</a:t>
+            </a:r>
+          </a:p>
+          <a:p>
+            <a:r>
+              <a:t>[멈춤] 교육생이 현재 체크포인트를 통과할 때까지 기다린다.</a:t>
+            </a:r>
+          </a:p>
+          <a:p>
+            <a:r>
+              <a:t>[오류] 오류가 나면 현재 폴더, source, 파일 경로를 먼저 확인한다.</a:t>
+            </a:r>
+          </a:p>
+        </p:txBody>
+      </p:sp>
+      <p:sp>
+        <p:nvSpPr>
+          <p:cNvPr id="4" name="Slide Number Placeholder 3"/>
+          <p:cNvSpPr>
+            <a:spLocks noGrp="1"/>
+          </p:cNvSpPr>
+          <p:nvPr>
+            <p:ph type="sldNum" idx="5" sz="quarter"/>
+          </p:nvPr>
+        </p:nvSpPr>
+        <p:spPr/>
+      </p:sp>
+    </p:spTree>
+  </p:cSld>
+  <p:clrMapOvr>
+    <a:masterClrMapping/>
+  </p:clrMapOvr>
+</p:notes>
+</file>
+
+<file path=ppt/notesSlides/notesSlide26.xml><?xml version="1.0" encoding="utf-8"?>
+<p:notes xmlns:a="http://schemas.openxmlformats.org/drawingml/2006/main" xmlns:p="http://schemas.openxmlformats.org/presentationml/2006/main" xmlns:r="http://schemas.openxmlformats.org/officeDocument/2006/relationships">
+  <p:cSld>
+    <p:spTree>
+      <p:nvGrpSpPr>
+        <p:cNvPr id="1" name=""/>
+        <p:cNvGrpSpPr/>
+        <p:nvPr/>
+      </p:nvGrpSpPr>
+      <p:grpSpPr>
+        <a:xfrm>
+          <a:off x="0" y="0"/>
+          <a:ext cx="0" cy="0"/>
+          <a:chOff x="0" y="0"/>
+          <a:chExt cx="0" cy="0"/>
+        </a:xfrm>
+      </p:grpSpPr>
+      <p:sp>
+        <p:nvSpPr>
+          <p:cNvPr id="2" name="Slide Image Placeholder 1"/>
+          <p:cNvSpPr>
+            <a:spLocks noGrp="1"/>
+          </p:cNvSpPr>
+          <p:nvPr>
+            <p:ph type="sldImg" idx="2"/>
+          </p:nvPr>
+        </p:nvSpPr>
+        <p:spPr/>
+      </p:sp>
+      <p:sp>
+        <p:nvSpPr>
+          <p:cNvPr id="3" name="Notes Placeholder 2"/>
+          <p:cNvSpPr>
+            <a:spLocks noGrp="1"/>
+          </p:cNvSpPr>
+          <p:nvPr>
+            <p:ph type="body" idx="3" sz="quarter"/>
+          </p:nvPr>
+        </p:nvSpPr>
+        <p:spPr/>
+        <p:txBody>
+          <a:bodyPr/>
+          <a:lstStyle/>
+          <a:p>
+            <a:r>
               <a:t>[설명] 공식 문서는 버전 차이와 확장 학습을 확인할 때 사용한다.</a:t>
             </a:r>
           </a:p>
@@ -1984,7 +2257,7 @@
           </a:p>
           <a:p>
             <a:r>
-              <a:t>[실행] pwd; source /opt/ros/jazzy/setup.bash; source ~/agv_ws/install/setup.bash</a:t>
+              <a:t>[실행] pwd; source /opt/ros/jazzy/setup.bash; source ~/ros2_curri/agv_ws/install/setup.bash</a:t>
             </a:r>
           </a:p>
           <a:p>
@@ -2344,7 +2617,7 @@
           </a:p>
           <a:p>
             <a:r>
-              <a:t>[실행] cd ~/agv_ws</a:t>
+              <a:t>[실행] cd ~/ros2_curri/agv_ws</a:t>
             </a:r>
           </a:p>
           <a:p>
@@ -2539,12 +2812,12 @@
           <a:lstStyle/>
           <a:p>
             <a:r>
-              <a:t>[설명] ~/agv_ws/src/agv_mission/agv_mission/mission_manager.py의 전체 파일을 1/6 구간으로 작성한다.</a:t>
-            </a:r>
-          </a:p>
-          <a:p>
-            <a:r>
-              <a:t>[실행] nano ~/agv_ws/src/agv_mission/agv_mission/mission_manager.py</a:t>
+              <a:t>[설명] ~/ros2_curri/agv_ws/src/agv_mission/agv_mission/mission_manager.py의 전체 파일을 1/7 구간으로 작성한다.</a:t>
+            </a:r>
+          </a:p>
+          <a:p>
+            <a:r>
+              <a:t>[실행] nano ~/ros2_curri/agv_ws/src/agv_mission/agv_mission/mission_manager.py</a:t>
             </a:r>
           </a:p>
           <a:p>
@@ -5932,7 +6205,7 @@
               </a:defRPr>
             </a:pPr>
             <a:r>
-              <a:t>파일을 계속 작성하고 저장한다 (2/6)</a:t>
+              <a:t>파일을 계속 작성하고 저장한다 (2/7)</a:t>
             </a:r>
           </a:p>
         </p:txBody>
@@ -5971,7 +6244,7 @@
               </a:defRPr>
             </a:pPr>
             <a:r>
-              <a:t>~/agv_ws/src/agv_mission/agv_mission/mission_manager.py</a:t>
+              <a:t>~/ros2_curri/agv_ws/src/agv_mission/agv_mission/mission_manager.py</a:t>
             </a:r>
           </a:p>
         </p:txBody>
@@ -6107,7 +6380,7 @@
               </a:defRPr>
             </a:pPr>
             <a:r>
-              <a:t>현재 단계 4/9    |    현재 폴더 ~/agv_ws    |    현재 터미널</a:t>
+              <a:t>현재 단계 4/10    |    현재 폴더 ~/ros2_curri/agv_ws    |    현재 터미널</a:t>
             </a:r>
           </a:p>
         </p:txBody>
@@ -6204,11 +6477,11 @@
               </a:defRPr>
             </a:pPr>
             <a:r>
-              <a:t>파일 생성: mkdir -p ~/agv_ws/src/agv_mission/agv_mission</a:t>
+              <a:t>파일 생성: mkdir -p ~/ros2_curri/agv_ws/src/agv_mission/agv_mission</a:t>
             </a:r>
             <a:br/>
             <a:r>
-              <a:t>파일 열기: nano ~/agv_ws/src/agv_mission/agv_mission/mission_manager.py</a:t>
+              <a:t>파일 열기: nano ~/ros2_curri/agv_ws/src/agv_mission/agv_mission/mission_manager.py</a:t>
             </a:r>
           </a:p>
         </p:txBody>
@@ -6278,6 +6551,10 @@
             </a:r>
             <a:br/>
             <a:r>
+              <a:t>        self.declare_parameter('target_timeout_sec', 0.7)</a:t>
+            </a:r>
+            <a:br/>
+            <a:r>
               <a:t>        self.state = 'IDLE'</a:t>
             </a:r>
             <a:br/>
@@ -6290,6 +6567,10 @@
             </a:r>
             <a:br/>
             <a:r>
+              <a:t>        self.last_target_time = None</a:t>
+            </a:r>
+            <a:br/>
+            <a:r>
               <a:t>        self.create_subscription(Float32, '/obstacle_distance', self.obstacle_callback,</a:t>
             </a:r>
             <a:br/>
@@ -6303,14 +6584,6 @@
             <a:br/>
             <a:r>
               <a:t>             10)</a:t>
-            </a:r>
-            <a:br/>
-            <a:r>
-              <a:t>        self.command_publisher = self.create_publisher(Twist, '/cmd_vel_raw', 10)</a:t>
-            </a:r>
-            <a:br/>
-            <a:r>
-              <a:t>        self.state_publisher = self.create_publisher(String, '/mission_state', 10)</a:t>
             </a:r>
           </a:p>
         </p:txBody>
@@ -6349,7 +6622,7 @@
               </a:defRPr>
             </a:pPr>
             <a:r>
-              <a:t>파일 전체 2/6 · 이 슬라이드 다음에 같은 파일의 나머지 줄이 이어집니다.</a:t>
+              <a:t>파일 전체 2/7 · 이 슬라이드 다음에 같은 파일의 나머지 줄이 이어집니다.</a:t>
             </a:r>
           </a:p>
         </p:txBody>
@@ -6406,7 +6679,7 @@
               </a:defRPr>
             </a:pPr>
             <a:r>
-              <a:t>파일을 계속 작성하고 저장한다 (3/6)</a:t>
+              <a:t>파일을 계속 작성하고 저장한다 (3/7)</a:t>
             </a:r>
           </a:p>
         </p:txBody>
@@ -6445,7 +6718,7 @@
               </a:defRPr>
             </a:pPr>
             <a:r>
-              <a:t>~/agv_ws/src/agv_mission/agv_mission/mission_manager.py</a:t>
+              <a:t>~/ros2_curri/agv_ws/src/agv_mission/agv_mission/mission_manager.py</a:t>
             </a:r>
           </a:p>
         </p:txBody>
@@ -6581,7 +6854,7 @@
               </a:defRPr>
             </a:pPr>
             <a:r>
-              <a:t>현재 단계 5/9    |    현재 폴더 ~/agv_ws    |    현재 터미널</a:t>
+              <a:t>현재 단계 5/10    |    현재 폴더 ~/ros2_curri/agv_ws    |    현재 터미널</a:t>
             </a:r>
           </a:p>
         </p:txBody>
@@ -6678,11 +6951,11 @@
               </a:defRPr>
             </a:pPr>
             <a:r>
-              <a:t>파일 생성: mkdir -p ~/agv_ws/src/agv_mission/agv_mission</a:t>
+              <a:t>파일 생성: mkdir -p ~/ros2_curri/agv_ws/src/agv_mission/agv_mission</a:t>
             </a:r>
             <a:br/>
             <a:r>
-              <a:t>파일 열기: nano ~/agv_ws/src/agv_mission/agv_mission/mission_manager.py</a:t>
+              <a:t>파일 열기: nano ~/ros2_curri/agv_ws/src/agv_mission/agv_mission/mission_manager.py</a:t>
             </a:r>
           </a:p>
         </p:txBody>
@@ -6740,6 +7013,14 @@
               </a:defRPr>
             </a:pPr>
             <a:r>
+              <a:t>        self.command_publisher = self.create_publisher(Twist, '/cmd_vel_raw', 10)</a:t>
+            </a:r>
+            <a:br/>
+            <a:r>
+              <a:t>        self.state_publisher = self.create_publisher(String, '/mission_state', 10)</a:t>
+            </a:r>
+            <a:br/>
+            <a:r>
               <a:t>        self.create_timer(0.1, self.tick)</a:t>
             </a:r>
             <a:br/>
@@ -6758,25 +7039,17 @@
             </a:r>
             <a:br/>
             <a:r>
-              <a:t>        self.target = message.detections[0] if message.detections else None</a:t>
+              <a:t>        if message.detections:</a:t>
             </a:r>
             <a:br/>
+            <a:r>
+              <a:t>            self.target = message.detections[0]</a:t>
+            </a:r>
             <a:br/>
             <a:r>
-              <a:t>    def set_state(self, state):</a:t>
+              <a:t>            self.last_target_time = self.get_clock().now()</a:t>
             </a:r>
             <a:br/>
-            <a:r>
-              <a:t>        if state != self.state:</a:t>
-            </a:r>
-            <a:br/>
-            <a:r>
-              <a:t>            self.state = state</a:t>
-            </a:r>
-            <a:br/>
-            <a:r>
-              <a:t>            self.get_logger().info('mission state -&gt; ' + state)</a:t>
-            </a:r>
           </a:p>
         </p:txBody>
       </p:sp>
@@ -6814,7 +7087,7 @@
               </a:defRPr>
             </a:pPr>
             <a:r>
-              <a:t>파일 전체 3/6 · 이 슬라이드 다음에 같은 파일의 나머지 줄이 이어집니다.</a:t>
+              <a:t>파일 전체 3/7 · 이 슬라이드 다음에 같은 파일의 나머지 줄이 이어집니다.</a:t>
             </a:r>
           </a:p>
         </p:txBody>
@@ -6871,7 +7144,7 @@
               </a:defRPr>
             </a:pPr>
             <a:r>
-              <a:t>파일을 계속 작성하고 저장한다 (4/6)</a:t>
+              <a:t>파일을 계속 작성하고 저장한다 (4/7)</a:t>
             </a:r>
           </a:p>
         </p:txBody>
@@ -6910,7 +7183,7 @@
               </a:defRPr>
             </a:pPr>
             <a:r>
-              <a:t>~/agv_ws/src/agv_mission/agv_mission/mission_manager.py</a:t>
+              <a:t>~/ros2_curri/agv_ws/src/agv_mission/agv_mission/mission_manager.py</a:t>
             </a:r>
           </a:p>
         </p:txBody>
@@ -7046,7 +7319,7 @@
               </a:defRPr>
             </a:pPr>
             <a:r>
-              <a:t>현재 단계 6/9    |    현재 폴더 ~/agv_ws    |    현재 터미널</a:t>
+              <a:t>현재 단계 6/10    |    현재 폴더 ~/ros2_curri/agv_ws    |    현재 터미널</a:t>
             </a:r>
           </a:p>
         </p:txBody>
@@ -7143,11 +7416,11 @@
               </a:defRPr>
             </a:pPr>
             <a:r>
-              <a:t>파일 생성: mkdir -p ~/agv_ws/src/agv_mission/agv_mission</a:t>
+              <a:t>파일 생성: mkdir -p ~/ros2_curri/agv_ws/src/agv_mission/agv_mission</a:t>
             </a:r>
             <a:br/>
             <a:r>
-              <a:t>파일 열기: nano ~/agv_ws/src/agv_mission/agv_mission/mission_manager.py</a:t>
+              <a:t>파일 열기: nano ~/ros2_curri/agv_ws/src/agv_mission/agv_mission/mission_manager.py</a:t>
             </a:r>
           </a:p>
         </p:txBody>
@@ -7205,6 +7478,22 @@
               </a:defRPr>
             </a:pPr>
             <a:r>
+              <a:t>    def set_state(self, state):</a:t>
+            </a:r>
+            <a:br/>
+            <a:r>
+              <a:t>        if state != self.state:</a:t>
+            </a:r>
+            <a:br/>
+            <a:r>
+              <a:t>            self.state = state</a:t>
+            </a:r>
+            <a:br/>
+            <a:r>
+              <a:t>            self.get_logger().info('mission state -&gt; ' + state)</a:t>
+            </a:r>
+            <a:br/>
+            <a:r>
               <a:t>        self.state_publisher.publish(String(data=self.state))</a:t>
             </a:r>
             <a:br/>
@@ -7218,35 +7507,19 @@
             </a:r>
             <a:br/>
             <a:r>
-              <a:t>        if self.obstacle_distance &lt; self.get_parameter('stop_distance').value:</a:t>
+              <a:t>        if self.last_target_time is not None:</a:t>
             </a:r>
             <a:br/>
             <a:r>
-              <a:t>            self.set_state('AVOID')</a:t>
+              <a:t>            age = (self.get_clock().now() - self.last_target_time).nanoseconds / 1000000000.0</a:t>
             </a:r>
             <a:br/>
             <a:r>
-              <a:t>            command.angular.z = self.get_parameter('search_speed').value</a:t>
+              <a:t>            if age &gt; self.get_parameter('target_timeout_sec').value:</a:t>
             </a:r>
             <a:br/>
             <a:r>
-              <a:t>        elif self.target is None:</a:t>
-            </a:r>
-            <a:br/>
-            <a:r>
-              <a:t>            self.set_state('SEARCH')</a:t>
-            </a:r>
-            <a:br/>
-            <a:r>
-              <a:t>            command.angular.z = self.get_parameter('search_speed').value</a:t>
-            </a:r>
-            <a:br/>
-            <a:r>
-              <a:t>        elif self.target.estimated_distance &gt; 0.0 and self.target.estimated_distance &lt; self.get_parameter('stop_distance').value:</a:t>
-            </a:r>
-            <a:br/>
-            <a:r>
-              <a:t>            self.set_state('GOAL')</a:t>
+              <a:t>                self.target = None</a:t>
             </a:r>
           </a:p>
         </p:txBody>
@@ -7285,7 +7558,7 @@
               </a:defRPr>
             </a:pPr>
             <a:r>
-              <a:t>파일 전체 4/6 · 이 슬라이드 다음에 같은 파일의 나머지 줄이 이어집니다.</a:t>
+              <a:t>파일 전체 4/7 · 이 슬라이드 다음에 같은 파일의 나머지 줄이 이어집니다.</a:t>
             </a:r>
           </a:p>
         </p:txBody>
@@ -7342,7 +7615,7 @@
               </a:defRPr>
             </a:pPr>
             <a:r>
-              <a:t>파일을 계속 작성하고 저장한다 (5/6)</a:t>
+              <a:t>파일을 계속 작성하고 저장한다 (5/7)</a:t>
             </a:r>
           </a:p>
         </p:txBody>
@@ -7381,7 +7654,7 @@
               </a:defRPr>
             </a:pPr>
             <a:r>
-              <a:t>~/agv_ws/src/agv_mission/agv_mission/mission_manager.py</a:t>
+              <a:t>~/ros2_curri/agv_ws/src/agv_mission/agv_mission/mission_manager.py</a:t>
             </a:r>
           </a:p>
         </p:txBody>
@@ -7517,7 +7790,7 @@
               </a:defRPr>
             </a:pPr>
             <a:r>
-              <a:t>현재 단계 7/9    |    현재 폴더 ~/agv_ws    |    현재 터미널</a:t>
+              <a:t>현재 단계 7/10    |    현재 폴더 ~/ros2_curri/agv_ws    |    현재 터미널</a:t>
             </a:r>
           </a:p>
         </p:txBody>
@@ -7614,11 +7887,11 @@
               </a:defRPr>
             </a:pPr>
             <a:r>
-              <a:t>파일 생성: mkdir -p ~/agv_ws/src/agv_mission/agv_mission</a:t>
+              <a:t>파일 생성: mkdir -p ~/ros2_curri/agv_ws/src/agv_mission/agv_mission</a:t>
             </a:r>
             <a:br/>
             <a:r>
-              <a:t>파일 열기: nano ~/agv_ws/src/agv_mission/agv_mission/mission_manager.py</a:t>
+              <a:t>파일 열기: nano ~/ros2_curri/agv_ws/src/agv_mission/agv_mission/mission_manager.py</a:t>
             </a:r>
           </a:p>
         </p:txBody>
@@ -7676,6 +7949,38 @@
               </a:defRPr>
             </a:pPr>
             <a:r>
+              <a:t>        if self.obstacle_distance &lt; self.get_parameter('stop_distance').value:</a:t>
+            </a:r>
+            <a:br/>
+            <a:r>
+              <a:t>            self.set_state('AVOID')</a:t>
+            </a:r>
+            <a:br/>
+            <a:r>
+              <a:t>            command.angular.z = self.get_parameter('search_speed').value</a:t>
+            </a:r>
+            <a:br/>
+            <a:r>
+              <a:t>        elif self.target is None:</a:t>
+            </a:r>
+            <a:br/>
+            <a:r>
+              <a:t>            self.set_state('SEARCH')</a:t>
+            </a:r>
+            <a:br/>
+            <a:r>
+              <a:t>            command.angular.z = self.get_parameter('search_speed').value</a:t>
+            </a:r>
+            <a:br/>
+            <a:r>
+              <a:t>        elif self.target.estimated_distance &gt; 0.0 and self.target.estimated_distance &lt; self.get_parameter('stop_distance').value:</a:t>
+            </a:r>
+            <a:br/>
+            <a:r>
+              <a:t>            self.set_state('GOAL')</a:t>
+            </a:r>
+            <a:br/>
+            <a:r>
               <a:t>        else:</a:t>
             </a:r>
             <a:br/>
@@ -7689,35 +7994,6 @@
             <a:br/>
             <a:r>
               <a:t>            error = self.target.center_x - self.get_parameter('image_center_x').value</a:t>
-            </a:r>
-            <a:br/>
-            <a:r>
-              <a:t>            command.angular.z = max(min(-0.004 * error, 0.6), -0.6)</a:t>
-            </a:r>
-            <a:br/>
-            <a:r>
-              <a:t>        self.command_publisher.publish(command)</a:t>
-            </a:r>
-            <a:br/>
-            <a:br/>
-            <a:r>
-              <a:t>def main():</a:t>
-            </a:r>
-            <a:br/>
-            <a:r>
-              <a:t>    rclpy.init()</a:t>
-            </a:r>
-            <a:br/>
-            <a:r>
-              <a:t>    node = MissionManager()</a:t>
-            </a:r>
-            <a:br/>
-            <a:r>
-              <a:t>    try:</a:t>
-            </a:r>
-            <a:br/>
-            <a:r>
-              <a:t>        rclpy.spin(node)</a:t>
             </a:r>
           </a:p>
         </p:txBody>
@@ -7756,7 +8032,7 @@
               </a:defRPr>
             </a:pPr>
             <a:r>
-              <a:t>파일 전체 5/6 · 이 슬라이드 다음에 같은 파일의 나머지 줄이 이어집니다.</a:t>
+              <a:t>파일 전체 5/7 · 이 슬라이드 다음에 같은 파일의 나머지 줄이 이어집니다.</a:t>
             </a:r>
           </a:p>
         </p:txBody>
@@ -7813,7 +8089,7 @@
               </a:defRPr>
             </a:pPr>
             <a:r>
-              <a:t>파일을 계속 작성하고 저장한다 (6/6)</a:t>
+              <a:t>파일을 계속 작성하고 저장한다 (6/7)</a:t>
             </a:r>
           </a:p>
         </p:txBody>
@@ -7852,7 +8128,7 @@
               </a:defRPr>
             </a:pPr>
             <a:r>
-              <a:t>~/agv_ws/src/agv_mission/agv_mission/mission_manager.py</a:t>
+              <a:t>~/ros2_curri/agv_ws/src/agv_mission/agv_mission/mission_manager.py</a:t>
             </a:r>
           </a:p>
         </p:txBody>
@@ -7988,7 +8264,7 @@
               </a:defRPr>
             </a:pPr>
             <a:r>
-              <a:t>현재 단계 8/9    |    현재 폴더 ~/agv_ws    |    현재 터미널</a:t>
+              <a:t>현재 단계 8/10    |    현재 폴더 ~/ros2_curri/agv_ws    |    현재 터미널</a:t>
             </a:r>
           </a:p>
         </p:txBody>
@@ -8085,11 +8361,11 @@
               </a:defRPr>
             </a:pPr>
             <a:r>
-              <a:t>파일 생성: mkdir -p ~/agv_ws/src/agv_mission/agv_mission</a:t>
+              <a:t>파일 생성: mkdir -p ~/ros2_curri/agv_ws/src/agv_mission/agv_mission</a:t>
             </a:r>
             <a:br/>
             <a:r>
-              <a:t>파일 열기: nano ~/agv_ws/src/agv_mission/agv_mission/mission_manager.py</a:t>
+              <a:t>파일 열기: nano ~/ros2_curri/agv_ws/src/agv_mission/agv_mission/mission_manager.py</a:t>
             </a:r>
           </a:p>
         </p:txBody>
@@ -8147,6 +8423,35 @@
               </a:defRPr>
             </a:pPr>
             <a:r>
+              <a:t>            command.angular.z = max(min(-0.004 * error, 0.6), -0.6)</a:t>
+            </a:r>
+            <a:br/>
+            <a:r>
+              <a:t>        self.command_publisher.publish(command)</a:t>
+            </a:r>
+            <a:br/>
+            <a:br/>
+            <a:r>
+              <a:t>def main():</a:t>
+            </a:r>
+            <a:br/>
+            <a:r>
+              <a:t>    rclpy.init()</a:t>
+            </a:r>
+            <a:br/>
+            <a:r>
+              <a:t>    node = MissionManager()</a:t>
+            </a:r>
+            <a:br/>
+            <a:r>
+              <a:t>    try:</a:t>
+            </a:r>
+            <a:br/>
+            <a:r>
+              <a:t>        rclpy.spin(node)</a:t>
+            </a:r>
+            <a:br/>
+            <a:r>
               <a:t>    except KeyboardInterrupt:</a:t>
             </a:r>
             <a:br/>
@@ -8160,14 +8465,6 @@
             <a:br/>
             <a:r>
               <a:t>        node.destroy_node()</a:t>
-            </a:r>
-            <a:br/>
-            <a:r>
-              <a:t>        if rclpy.ok():</a:t>
-            </a:r>
-            <a:br/>
-            <a:r>
-              <a:t>            rclpy.shutdown()</a:t>
             </a:r>
           </a:p>
         </p:txBody>
@@ -8206,7 +8503,7 @@
               </a:defRPr>
             </a:pPr>
             <a:r>
-              <a:t>파일 전체 6/6 · 이 슬라이드 다음에 같은 파일의 나머지 줄이 이어집니다.</a:t>
+              <a:t>파일 전체 6/7 · 이 슬라이드 다음에 같은 파일의 나머지 줄이 이어집니다.</a:t>
             </a:r>
           </a:p>
         </p:txBody>
@@ -8263,7 +8560,7 @@
               </a:defRPr>
             </a:pPr>
             <a:r>
-              <a:t>파일을 새로 만들고 저장한다 (1/1)</a:t>
+              <a:t>파일을 계속 작성하고 저장한다 (7/7)</a:t>
             </a:r>
           </a:p>
         </p:txBody>
@@ -8302,7 +8599,7 @@
               </a:defRPr>
             </a:pPr>
             <a:r>
-              <a:t>~/agv_ws/src/agv_bringup/config/mission.yaml</a:t>
+              <a:t>~/ros2_curri/agv_ws/src/agv_mission/agv_mission/mission_manager.py</a:t>
             </a:r>
           </a:p>
         </p:txBody>
@@ -8438,7 +8735,7 @@
               </a:defRPr>
             </a:pPr>
             <a:r>
-              <a:t>현재 단계 9/10    |    현재 폴더 ~/agv_ws    |    현재 터미널</a:t>
+              <a:t>현재 단계 9/10    |    현재 폴더 ~/ros2_curri/agv_ws    |    현재 터미널</a:t>
             </a:r>
           </a:p>
         </p:txBody>
@@ -8535,11 +8832,11 @@
               </a:defRPr>
             </a:pPr>
             <a:r>
-              <a:t>파일 생성: mkdir -p ~/agv_ws/src/agv_bringup/config</a:t>
+              <a:t>파일 생성: mkdir -p ~/ros2_curri/agv_ws/src/agv_mission/agv_mission</a:t>
             </a:r>
             <a:br/>
             <a:r>
-              <a:t>파일 열기: nano ~/agv_ws/src/agv_bringup/config/mission.yaml</a:t>
+              <a:t>파일 열기: nano ~/ros2_curri/agv_ws/src/agv_mission/agv_mission/mission_manager.py</a:t>
             </a:r>
           </a:p>
         </p:txBody>
@@ -8597,51 +8894,11 @@
               </a:defRPr>
             </a:pPr>
             <a:r>
-              <a:t>mission_manager:</a:t>
+              <a:t>        if rclpy.ok():</a:t>
             </a:r>
             <a:br/>
             <a:r>
-              <a:t>  ros__parameters:</a:t>
-            </a:r>
-            <a:br/>
-            <a:r>
-              <a:t>    use_sim_time: true</a:t>
-            </a:r>
-            <a:br/>
-            <a:r>
-              <a:t>    stop_distance: 0.50</a:t>
-            </a:r>
-            <a:br/>
-            <a:r>
-              <a:t>    search_speed: 0.25</a:t>
-            </a:r>
-            <a:br/>
-            <a:r>
-              <a:t>    approach_speed: 0.15</a:t>
-            </a:r>
-            <a:br/>
-            <a:r>
-              <a:t>    image_center_x: 320</a:t>
-            </a:r>
-            <a:br/>
-            <a:r>
-              <a:t>safety_controller:</a:t>
-            </a:r>
-            <a:br/>
-            <a:r>
-              <a:t>  ros__parameters:</a:t>
-            </a:r>
-            <a:br/>
-            <a:r>
-              <a:t>    use_sim_time: true</a:t>
-            </a:r>
-            <a:br/>
-            <a:r>
-              <a:t>    stop_distance: 0.50</a:t>
-            </a:r>
-            <a:br/>
-            <a:r>
-              <a:t>    front_half_angle_deg: 15.0</a:t>
+              <a:t>            rclpy.shutdown()</a:t>
             </a:r>
           </a:p>
         </p:txBody>
@@ -8680,7 +8937,7 @@
               </a:defRPr>
             </a:pPr>
             <a:r>
-              <a:t>파일 전체 1/1 · 이 슬라이드 다음에 같은 파일의 나머지 줄이 이어집니다.</a:t>
+              <a:t>파일 전체 7/7 · 이 슬라이드 다음에 같은 파일의 나머지 줄이 이어집니다.</a:t>
             </a:r>
           </a:p>
         </p:txBody>
@@ -8737,7 +8994,7 @@
               </a:defRPr>
             </a:pPr>
             <a:r>
-              <a:t>파일을 새로 만들고 저장한다 (1/1)</a:t>
+              <a:t>파일을 새로 만들고 저장한다 (1/2)</a:t>
             </a:r>
           </a:p>
         </p:txBody>
@@ -8776,7 +9033,7 @@
               </a:defRPr>
             </a:pPr>
             <a:r>
-              <a:t>~/agv_ws/src/agv_mission/setup.py</a:t>
+              <a:t>~/ros2_curri/agv_ws/src/agv_bringup/config/mission.yaml</a:t>
             </a:r>
           </a:p>
         </p:txBody>
@@ -8912,7 +9169,7 @@
               </a:defRPr>
             </a:pPr>
             <a:r>
-              <a:t>현재 단계 10/11    |    현재 폴더 ~/agv_ws    |    현재 터미널</a:t>
+              <a:t>현재 단계 10/12    |    현재 폴더 ~/ros2_curri/agv_ws    |    현재 터미널</a:t>
             </a:r>
           </a:p>
         </p:txBody>
@@ -9009,11 +9266,11 @@
               </a:defRPr>
             </a:pPr>
             <a:r>
-              <a:t>파일 생성: mkdir -p ~/agv_ws/src/agv_mission</a:t>
+              <a:t>파일 생성: mkdir -p ~/ros2_curri/agv_ws/src/agv_bringup/config</a:t>
             </a:r>
             <a:br/>
             <a:r>
-              <a:t>파일 열기: nano ~/agv_ws/src/agv_mission/setup.py</a:t>
+              <a:t>파일 열기: nano ~/ros2_curri/agv_ws/src/agv_bringup/config/mission.yaml</a:t>
             </a:r>
           </a:p>
         </p:txBody>
@@ -9071,35 +9328,51 @@
               </a:defRPr>
             </a:pPr>
             <a:r>
-              <a:t>from setuptools import find_packages, setup</a:t>
+              <a:t>mission_manager:</a:t>
             </a:r>
             <a:br/>
             <a:r>
-              <a:t>package_name = 'agv_mission'</a:t>
+              <a:t>  ros__parameters:</a:t>
             </a:r>
             <a:br/>
             <a:r>
-              <a:t>setup(name=package_name, version='0.1.0', packages=find_packages(exclude=['test']),</a:t>
+              <a:t>    use_sim_time: true</a:t>
             </a:r>
             <a:br/>
             <a:r>
-              <a:t>    data_files=[('share/ament_index/resource_index/packages',</a:t>
+              <a:t>    stop_distance: 0.50</a:t>
             </a:r>
             <a:br/>
             <a:r>
-              <a:t>    ['resource/' + package_name]), ('share/' + package_name, ['package.xml'])],</a:t>
+              <a:t>    search_speed: 0.25</a:t>
             </a:r>
             <a:br/>
             <a:r>
-              <a:t>    install_requires=['setuptools'], zip_safe=True, maintainer='AGV student',</a:t>
+              <a:t>    approach_speed: 0.15</a:t>
             </a:r>
             <a:br/>
             <a:r>
-              <a:t>    maintainer_email='student@example.com', license='Apache-2.0',</a:t>
+              <a:t>    image_center_x: 320</a:t>
             </a:r>
             <a:br/>
             <a:r>
-              <a:t>    entry_points={'console_scripts': ['mission_manager = agv_mission.mission_manager:main']})</a:t>
+              <a:t>    target_timeout_sec: 0.70</a:t>
+            </a:r>
+            <a:br/>
+            <a:r>
+              <a:t>safety_controller:</a:t>
+            </a:r>
+            <a:br/>
+            <a:r>
+              <a:t>  ros__parameters:</a:t>
+            </a:r>
+            <a:br/>
+            <a:r>
+              <a:t>    use_sim_time: true</a:t>
+            </a:r>
+            <a:br/>
+            <a:r>
+              <a:t>    stop_distance: 0.50</a:t>
             </a:r>
           </a:p>
         </p:txBody>
@@ -9138,7 +9411,7 @@
               </a:defRPr>
             </a:pPr>
             <a:r>
-              <a:t>파일 전체 1/1 · 이 슬라이드 다음에 같은 파일의 나머지 줄이 이어집니다.</a:t>
+              <a:t>파일 전체 1/2 · 이 슬라이드 다음에 같은 파일의 나머지 줄이 이어집니다.</a:t>
             </a:r>
           </a:p>
         </p:txBody>
@@ -9195,7 +9468,7 @@
               </a:defRPr>
             </a:pPr>
             <a:r>
-              <a:t>build → source → run 순서로 실행한다</a:t>
+              <a:t>파일을 계속 작성하고 저장한다 (2/2)</a:t>
             </a:r>
           </a:p>
         </p:txBody>
@@ -9234,7 +9507,7 @@
               </a:defRPr>
             </a:pPr>
             <a:r>
-              <a:t>새 파일 또는 수정 파일은 build와 source 뒤에만 실행 이름·설정에 반영됩니다.</a:t>
+              <a:t>~/ros2_curri/agv_ws/src/agv_bringup/config/mission.yaml</a:t>
             </a:r>
           </a:p>
         </p:txBody>
@@ -9370,23 +9643,124 @@
               </a:defRPr>
             </a:pPr>
             <a:r>
-              <a:t>현재 단계 실행    |    현재 폴더 ~/agv_ws    |    현재 터미널</a:t>
-            </a:r>
-          </a:p>
-        </p:txBody>
-      </p:sp>
-      <p:sp>
-        <p:nvSpPr>
-          <p:cNvPr id="7" name="Rounded Rectangle 6"/>
+              <a:t>현재 단계 11/12    |    현재 폴더 ~/ros2_curri/agv_ws    |    현재 터미널</a:t>
+            </a:r>
+          </a:p>
+        </p:txBody>
+      </p:sp>
+      <p:sp>
+        <p:nvSpPr>
+          <p:cNvPr id="7" name="TextBox 6"/>
+          <p:cNvSpPr txBox="1"/>
+          <p:nvPr/>
+        </p:nvSpPr>
+        <p:spPr>
+          <a:xfrm>
+            <a:off x="658368" y="1627632"/>
+            <a:ext cx="10972800" cy="256032"/>
+          </a:xfrm>
+          <a:prstGeom prst="rect">
+            <a:avLst/>
+          </a:prstGeom>
+          <a:noFill/>
+        </p:spPr>
+        <p:txBody>
+          <a:bodyPr wrap="square" lIns="73152" rIns="73152" tIns="36576" bIns="36576">
+            <a:spAutoFit/>
+          </a:bodyPr>
+          <a:lstStyle/>
+          <a:p>
+            <a:pPr algn="l">
+              <a:spcAft>
+                <a:spcPts val="0"/>
+              </a:spcAft>
+              <a:defRPr sz="1500" b="1">
+                <a:solidFill>
+                  <a:srgbClr val="122C4E"/>
+                </a:solidFill>
+                <a:latin typeface="Noto Sans CJK KR"/>
+              </a:defRPr>
+            </a:pPr>
+            <a:r>
+              <a:t>이번 단계: 파일의 전체 내용을 중간 생략 없이 작성합니다. 아래 줄 범위를 끝까지 입력하세요.</a:t>
+            </a:r>
+          </a:p>
+        </p:txBody>
+      </p:sp>
+      <p:sp>
+        <p:nvSpPr>
+          <p:cNvPr id="8" name="Rectangle 7"/>
           <p:cNvSpPr/>
           <p:nvPr/>
         </p:nvSpPr>
         <p:spPr>
           <a:xfrm>
-            <a:off x="658368" y="1700784"/>
-            <a:ext cx="10972800" cy="3182112"/>
-          </a:xfrm>
-          <a:prstGeom prst="roundRect">
+            <a:off x="658368" y="1956816"/>
+            <a:ext cx="10972800" cy="603504"/>
+          </a:xfrm>
+          <a:prstGeom prst="rect">
+            <a:avLst/>
+          </a:prstGeom>
+          <a:solidFill>
+            <a:srgbClr val="F4F7FB"/>
+          </a:solidFill>
+          <a:ln>
+            <a:solidFill>
+              <a:srgbClr val="F4F7FB"/>
+            </a:solidFill>
+          </a:ln>
+        </p:spPr>
+        <p:style>
+          <a:lnRef idx="1">
+            <a:schemeClr val="accent1"/>
+          </a:lnRef>
+          <a:fillRef idx="3">
+            <a:schemeClr val="accent1"/>
+          </a:fillRef>
+          <a:effectRef idx="2">
+            <a:schemeClr val="accent1"/>
+          </a:effectRef>
+          <a:fontRef idx="minor">
+            <a:schemeClr val="lt1"/>
+          </a:fontRef>
+        </p:style>
+        <p:txBody>
+          <a:bodyPr rtlCol="0" anchor="ctr" wrap="square" lIns="73152" rIns="73152" tIns="36576" bIns="36576"/>
+          <a:lstStyle/>
+          <a:p>
+            <a:pPr algn="l">
+              <a:spcAft>
+                <a:spcPts val="0"/>
+              </a:spcAft>
+              <a:defRPr sz="1400" b="0">
+                <a:solidFill>
+                  <a:srgbClr val="122C4E"/>
+                </a:solidFill>
+                <a:latin typeface="DejaVu Sans Mono"/>
+              </a:defRPr>
+            </a:pPr>
+            <a:r>
+              <a:t>파일 생성: mkdir -p ~/ros2_curri/agv_ws/src/agv_bringup/config</a:t>
+            </a:r>
+            <a:br/>
+            <a:r>
+              <a:t>파일 열기: nano ~/ros2_curri/agv_ws/src/agv_bringup/config/mission.yaml</a:t>
+            </a:r>
+          </a:p>
+        </p:txBody>
+      </p:sp>
+      <p:sp>
+        <p:nvSpPr>
+          <p:cNvPr id="9" name="Rectangle 8"/>
+          <p:cNvSpPr/>
+          <p:nvPr/>
+        </p:nvSpPr>
+        <p:spPr>
+          <a:xfrm>
+            <a:off x="658368" y="2706624"/>
+            <a:ext cx="10972800" cy="3364992"/>
+          </a:xfrm>
+          <a:prstGeom prst="rect">
             <a:avLst/>
           </a:prstGeom>
           <a:solidFill>
@@ -9413,14 +9787,14 @@
           </a:fontRef>
         </p:style>
         <p:txBody>
-          <a:bodyPr rtlCol="0" anchor="ctr" wrap="square" lIns="73152" rIns="73152" tIns="36576" bIns="36576"/>
+          <a:bodyPr rtlCol="0" anchor="ctr" wrap="square" lIns="164592" rIns="164592" tIns="109728" bIns="36576"/>
           <a:lstStyle/>
           <a:p>
             <a:pPr algn="l">
               <a:spcAft>
                 <a:spcPts val="0"/>
               </a:spcAft>
-              <a:defRPr sz="1600" b="0">
+              <a:defRPr sz="1400" b="0">
                 <a:solidFill>
                   <a:srgbClr val="FFFFFF"/>
                 </a:solidFill>
@@ -9428,25 +9802,21 @@
               </a:defRPr>
             </a:pPr>
             <a:r>
-              <a:t>source ~/agv_ws/install/setup.bash</a:t>
-            </a:r>
-            <a:br/>
-            <a:r>
-              <a:t>ros2 run agv_mission mission_manager</a:t>
-            </a:r>
-          </a:p>
-        </p:txBody>
-      </p:sp>
-      <p:sp>
-        <p:nvSpPr>
-          <p:cNvPr id="8" name="TextBox 7"/>
+              <a:t>    front_half_angle_deg: 15.0</a:t>
+            </a:r>
+          </a:p>
+        </p:txBody>
+      </p:sp>
+      <p:sp>
+        <p:nvSpPr>
+          <p:cNvPr id="10" name="TextBox 9"/>
           <p:cNvSpPr txBox="1"/>
           <p:nvPr/>
         </p:nvSpPr>
         <p:spPr>
           <a:xfrm>
-            <a:off x="786384" y="5239512"/>
-            <a:ext cx="1261872" cy="237744"/>
+            <a:off x="749808" y="6181344"/>
+            <a:ext cx="10789920" cy="201168"/>
           </a:xfrm>
           <a:prstGeom prst="rect">
             <a:avLst/>
@@ -9463,54 +9833,15 @@
               <a:spcAft>
                 <a:spcPts val="0"/>
               </a:spcAft>
-              <a:defRPr sz="1800" b="1">
-                <a:solidFill>
-                  <a:srgbClr val="2A8B5A"/>
-                </a:solidFill>
-                <a:latin typeface="Noto Sans CJK KR"/>
-              </a:defRPr>
-            </a:pPr>
-            <a:r>
-              <a:t>확인 기준</a:t>
-            </a:r>
-          </a:p>
-        </p:txBody>
-      </p:sp>
-      <p:sp>
-        <p:nvSpPr>
-          <p:cNvPr id="9" name="TextBox 8"/>
-          <p:cNvSpPr txBox="1"/>
-          <p:nvPr/>
-        </p:nvSpPr>
-        <p:spPr>
-          <a:xfrm>
-            <a:off x="786384" y="5532120"/>
-            <a:ext cx="10469880" cy="420624"/>
-          </a:xfrm>
-          <a:prstGeom prst="rect">
-            <a:avLst/>
-          </a:prstGeom>
-          <a:noFill/>
-        </p:spPr>
-        <p:txBody>
-          <a:bodyPr wrap="square" lIns="73152" rIns="73152" tIns="36576" bIns="36576">
-            <a:spAutoFit/>
-          </a:bodyPr>
-          <a:lstStyle/>
-          <a:p>
-            <a:pPr algn="l">
-              <a:spcAft>
-                <a:spcPts val="0"/>
-              </a:spcAft>
-              <a:defRPr sz="1800" b="0">
-                <a:solidFill>
-                  <a:srgbClr val="122C4E"/>
-                </a:solidFill>
-                <a:latin typeface="Noto Sans CJK KR"/>
-              </a:defRPr>
-            </a:pPr>
-            <a:r>
-              <a:t>/mission_state 로그와 /cmd_vel_raw가 detection·obstacle input에 따라 바뀌는 구조를 확인한다.</a:t>
+              <a:defRPr sz="1000" b="0">
+                <a:solidFill>
+                  <a:srgbClr val="5C6672"/>
+                </a:solidFill>
+                <a:latin typeface="Noto Sans CJK KR"/>
+              </a:defRPr>
+            </a:pPr>
+            <a:r>
+              <a:t>파일 전체 2/2 · 이 슬라이드 다음에 같은 파일의 나머지 줄이 이어집니다.</a:t>
             </a:r>
           </a:p>
         </p:txBody>
@@ -9567,7 +9898,7 @@
               </a:defRPr>
             </a:pPr>
             <a:r>
-              <a:t>정상 결과: 실제 환경에서 확인한 출력</a:t>
+              <a:t>파일을 새로 만들고 저장한다 (1/1)</a:t>
             </a:r>
           </a:p>
         </p:txBody>
@@ -9606,7 +9937,7 @@
               </a:defRPr>
             </a:pPr>
             <a:r>
-              <a:t>실제 ROS 2 환경의 파일·패키지·구성 검증 로그</a:t>
+              <a:t>~/ros2_curri/agv_ws/src/agv_mission/setup.py</a:t>
             </a:r>
           </a:p>
         </p:txBody>
@@ -9689,30 +10020,64 @@
           </a:p>
         </p:txBody>
       </p:sp>
-      <p:pic>
-        <p:nvPicPr>
-          <p:cNvPr id="6" name="Picture 5" descr="validation_terminal.png"/>
-          <p:cNvPicPr>
-            <a:picLocks noChangeAspect="1"/>
-          </p:cNvPicPr>
-          <p:nvPr/>
-        </p:nvPicPr>
-        <p:blipFill>
-          <a:blip r:embed="rId2"/>
-          <a:stretch>
-            <a:fillRect/>
-          </a:stretch>
-        </p:blipFill>
-        <p:spPr>
-          <a:xfrm>
-            <a:off x="790956" y="1780007"/>
-            <a:ext cx="10607040" cy="3947209"/>
-          </a:xfrm>
-          <a:prstGeom prst="rect">
-            <a:avLst/>
-          </a:prstGeom>
-        </p:spPr>
-      </p:pic>
+      <p:sp>
+        <p:nvSpPr>
+          <p:cNvPr id="6" name="Rectangle 5"/>
+          <p:cNvSpPr/>
+          <p:nvPr/>
+        </p:nvSpPr>
+        <p:spPr>
+          <a:xfrm>
+            <a:off x="566928" y="1188720"/>
+            <a:ext cx="11064240" cy="347472"/>
+          </a:xfrm>
+          <a:prstGeom prst="rect">
+            <a:avLst/>
+          </a:prstGeom>
+          <a:solidFill>
+            <a:srgbClr val="F4F7FB"/>
+          </a:solidFill>
+          <a:ln>
+            <a:solidFill>
+              <a:srgbClr val="F4F7FB"/>
+            </a:solidFill>
+          </a:ln>
+        </p:spPr>
+        <p:style>
+          <a:lnRef idx="1">
+            <a:schemeClr val="accent1"/>
+          </a:lnRef>
+          <a:fillRef idx="3">
+            <a:schemeClr val="accent1"/>
+          </a:fillRef>
+          <a:effectRef idx="2">
+            <a:schemeClr val="accent1"/>
+          </a:effectRef>
+          <a:fontRef idx="minor">
+            <a:schemeClr val="lt1"/>
+          </a:fontRef>
+        </p:style>
+        <p:txBody>
+          <a:bodyPr rtlCol="0" anchor="ctr" wrap="square" lIns="73152" rIns="73152" tIns="36576" bIns="36576"/>
+          <a:lstStyle/>
+          <a:p>
+            <a:pPr algn="l">
+              <a:spcAft>
+                <a:spcPts val="0"/>
+              </a:spcAft>
+              <a:defRPr sz="1300" b="1">
+                <a:solidFill>
+                  <a:srgbClr val="122C4E"/>
+                </a:solidFill>
+                <a:latin typeface="Noto Sans CJK KR"/>
+              </a:defRPr>
+            </a:pPr>
+            <a:r>
+              <a:t>현재 단계 12/13    |    현재 폴더 ~/ros2_curri/agv_ws    |    현재 터미널</a:t>
+            </a:r>
+          </a:p>
+        </p:txBody>
+      </p:sp>
       <p:sp>
         <p:nvSpPr>
           <p:cNvPr id="7" name="TextBox 6"/>
@@ -9721,8 +10086,8 @@
         </p:nvSpPr>
         <p:spPr>
           <a:xfrm>
-            <a:off x="777240" y="6217920"/>
-            <a:ext cx="10607040" cy="182880"/>
+            <a:off x="658368" y="1627632"/>
+            <a:ext cx="10972800" cy="256032"/>
           </a:xfrm>
           <a:prstGeom prst="rect">
             <a:avLst/>
@@ -9735,19 +10100,210 @@
           </a:bodyPr>
           <a:lstStyle/>
           <a:p>
-            <a:pPr algn="ctr">
-              <a:spcAft>
-                <a:spcPts val="0"/>
-              </a:spcAft>
-              <a:defRPr sz="1100" b="1">
-                <a:solidFill>
-                  <a:srgbClr val="2A8B5A"/>
-                </a:solidFill>
-                <a:latin typeface="Noto Sans CJK KR"/>
-              </a:defRPr>
-            </a:pPr>
-            <a:r>
-              <a:t>① 명령/설정  ② 정상 출력 또는 화면  ③ 다음 검증 명령으로 재확인</a:t>
+            <a:pPr algn="l">
+              <a:spcAft>
+                <a:spcPts val="0"/>
+              </a:spcAft>
+              <a:defRPr sz="1500" b="1">
+                <a:solidFill>
+                  <a:srgbClr val="122C4E"/>
+                </a:solidFill>
+                <a:latin typeface="Noto Sans CJK KR"/>
+              </a:defRPr>
+            </a:pPr>
+            <a:r>
+              <a:t>이번 단계: 파일의 전체 내용을 중간 생략 없이 작성합니다. 아래 줄 범위를 끝까지 입력하세요.</a:t>
+            </a:r>
+          </a:p>
+        </p:txBody>
+      </p:sp>
+      <p:sp>
+        <p:nvSpPr>
+          <p:cNvPr id="8" name="Rectangle 7"/>
+          <p:cNvSpPr/>
+          <p:nvPr/>
+        </p:nvSpPr>
+        <p:spPr>
+          <a:xfrm>
+            <a:off x="658368" y="1956816"/>
+            <a:ext cx="10972800" cy="603504"/>
+          </a:xfrm>
+          <a:prstGeom prst="rect">
+            <a:avLst/>
+          </a:prstGeom>
+          <a:solidFill>
+            <a:srgbClr val="F4F7FB"/>
+          </a:solidFill>
+          <a:ln>
+            <a:solidFill>
+              <a:srgbClr val="F4F7FB"/>
+            </a:solidFill>
+          </a:ln>
+        </p:spPr>
+        <p:style>
+          <a:lnRef idx="1">
+            <a:schemeClr val="accent1"/>
+          </a:lnRef>
+          <a:fillRef idx="3">
+            <a:schemeClr val="accent1"/>
+          </a:fillRef>
+          <a:effectRef idx="2">
+            <a:schemeClr val="accent1"/>
+          </a:effectRef>
+          <a:fontRef idx="minor">
+            <a:schemeClr val="lt1"/>
+          </a:fontRef>
+        </p:style>
+        <p:txBody>
+          <a:bodyPr rtlCol="0" anchor="ctr" wrap="square" lIns="73152" rIns="73152" tIns="36576" bIns="36576"/>
+          <a:lstStyle/>
+          <a:p>
+            <a:pPr algn="l">
+              <a:spcAft>
+                <a:spcPts val="0"/>
+              </a:spcAft>
+              <a:defRPr sz="1400" b="0">
+                <a:solidFill>
+                  <a:srgbClr val="122C4E"/>
+                </a:solidFill>
+                <a:latin typeface="DejaVu Sans Mono"/>
+              </a:defRPr>
+            </a:pPr>
+            <a:r>
+              <a:t>파일 생성: mkdir -p ~/ros2_curri/agv_ws/src/agv_mission</a:t>
+            </a:r>
+            <a:br/>
+            <a:r>
+              <a:t>파일 열기: nano ~/ros2_curri/agv_ws/src/agv_mission/setup.py</a:t>
+            </a:r>
+          </a:p>
+        </p:txBody>
+      </p:sp>
+      <p:sp>
+        <p:nvSpPr>
+          <p:cNvPr id="9" name="Rectangle 8"/>
+          <p:cNvSpPr/>
+          <p:nvPr/>
+        </p:nvSpPr>
+        <p:spPr>
+          <a:xfrm>
+            <a:off x="658368" y="2706624"/>
+            <a:ext cx="10972800" cy="3364992"/>
+          </a:xfrm>
+          <a:prstGeom prst="rect">
+            <a:avLst/>
+          </a:prstGeom>
+          <a:solidFill>
+            <a:srgbClr val="1D232D"/>
+          </a:solidFill>
+          <a:ln>
+            <a:solidFill>
+              <a:srgbClr val="1D232D"/>
+            </a:solidFill>
+          </a:ln>
+        </p:spPr>
+        <p:style>
+          <a:lnRef idx="1">
+            <a:schemeClr val="accent1"/>
+          </a:lnRef>
+          <a:fillRef idx="3">
+            <a:schemeClr val="accent1"/>
+          </a:fillRef>
+          <a:effectRef idx="2">
+            <a:schemeClr val="accent1"/>
+          </a:effectRef>
+          <a:fontRef idx="minor">
+            <a:schemeClr val="lt1"/>
+          </a:fontRef>
+        </p:style>
+        <p:txBody>
+          <a:bodyPr rtlCol="0" anchor="ctr" wrap="square" lIns="164592" rIns="164592" tIns="109728" bIns="36576"/>
+          <a:lstStyle/>
+          <a:p>
+            <a:pPr algn="l">
+              <a:spcAft>
+                <a:spcPts val="0"/>
+              </a:spcAft>
+              <a:defRPr sz="1400" b="0">
+                <a:solidFill>
+                  <a:srgbClr val="FFFFFF"/>
+                </a:solidFill>
+                <a:latin typeface="DejaVu Sans Mono"/>
+              </a:defRPr>
+            </a:pPr>
+            <a:r>
+              <a:t>from setuptools import find_packages, setup</a:t>
+            </a:r>
+            <a:br/>
+            <a:r>
+              <a:t>package_name = 'agv_mission'</a:t>
+            </a:r>
+            <a:br/>
+            <a:r>
+              <a:t>setup(name=package_name, version='0.1.0', packages=find_packages(exclude=['test']),</a:t>
+            </a:r>
+            <a:br/>
+            <a:r>
+              <a:t>    data_files=[('share/ament_index/resource_index/packages',</a:t>
+            </a:r>
+            <a:br/>
+            <a:r>
+              <a:t>    ['resource/' + package_name]), ('share/' + package_name, ['package.xml'])],</a:t>
+            </a:r>
+            <a:br/>
+            <a:r>
+              <a:t>    install_requires=['setuptools'], zip_safe=True, maintainer='AGV student',</a:t>
+            </a:r>
+            <a:br/>
+            <a:r>
+              <a:t>    maintainer_email='student@example.com', license='Apache-2.0',</a:t>
+            </a:r>
+            <a:br/>
+            <a:r>
+              <a:t>    entry_points={'console_scripts': ['mission_manager = agv_mission.mission_manager:main',</a:t>
+            </a:r>
+            <a:br/>
+            <a:r>
+              <a:t>     'mission_markers = agv_mission.mission_markers:main']})</a:t>
+            </a:r>
+          </a:p>
+        </p:txBody>
+      </p:sp>
+      <p:sp>
+        <p:nvSpPr>
+          <p:cNvPr id="10" name="TextBox 9"/>
+          <p:cNvSpPr txBox="1"/>
+          <p:nvPr/>
+        </p:nvSpPr>
+        <p:spPr>
+          <a:xfrm>
+            <a:off x="749808" y="6181344"/>
+            <a:ext cx="10789920" cy="201168"/>
+          </a:xfrm>
+          <a:prstGeom prst="rect">
+            <a:avLst/>
+          </a:prstGeom>
+          <a:noFill/>
+        </p:spPr>
+        <p:txBody>
+          <a:bodyPr wrap="square" lIns="73152" rIns="73152" tIns="36576" bIns="36576">
+            <a:spAutoFit/>
+          </a:bodyPr>
+          <a:lstStyle/>
+          <a:p>
+            <a:pPr algn="l">
+              <a:spcAft>
+                <a:spcPts val="0"/>
+              </a:spcAft>
+              <a:defRPr sz="1000" b="0">
+                <a:solidFill>
+                  <a:srgbClr val="5C6672"/>
+                </a:solidFill>
+                <a:latin typeface="Noto Sans CJK KR"/>
+              </a:defRPr>
+            </a:pPr>
+            <a:r>
+              <a:t>파일 전체 1/1 · 이 슬라이드 다음에 같은 파일의 나머지 줄이 이어집니다.</a:t>
             </a:r>
           </a:p>
         </p:txBody>
@@ -9804,7 +10360,7 @@
               </a:defRPr>
             </a:pPr>
             <a:r>
-              <a:t>객관적 검증 명령으로 완료를 확인한다</a:t>
+              <a:t>build → source → run 순서로 실행한다</a:t>
             </a:r>
           </a:p>
         </p:txBody>
@@ -9843,7 +10399,7 @@
               </a:defRPr>
             </a:pPr>
             <a:r>
-              <a:t>화면만 보지 말고 topic·frame·파일·parameter를 다시 확인합니다.</a:t>
+              <a:t>새 파일 또는 수정 파일은 build와 source 뒤에만 실행 이름·설정에 반영됩니다.</a:t>
             </a:r>
           </a:p>
         </p:txBody>
@@ -9979,7 +10535,7 @@
               </a:defRPr>
             </a:pPr>
             <a:r>
-              <a:t>현재 단계 검증    |    현재 폴더 ~/agv_ws    |    현재 터미널</a:t>
+              <a:t>현재 단계 실행    |    현재 폴더 ~/ros2_curri/agv_ws    |    현재 터미널</a:t>
             </a:r>
           </a:p>
         </p:txBody>
@@ -9992,8 +10548,8 @@
         </p:nvSpPr>
         <p:spPr>
           <a:xfrm>
-            <a:off x="658368" y="1755648"/>
-            <a:ext cx="10972800" cy="2148840"/>
+            <a:off x="658368" y="1700784"/>
+            <a:ext cx="10972800" cy="3182112"/>
           </a:xfrm>
           <a:prstGeom prst="roundRect">
             <a:avLst/>
@@ -10037,99 +10593,25 @@
               </a:defRPr>
             </a:pPr>
             <a:r>
-              <a:t>ros2 topic info /mission_state</a:t>
+              <a:t>source ~/ros2_curri/agv_ws/install/setup.bash</a:t>
             </a:r>
             <a:br/>
             <a:r>
-              <a:t>ros2 topic info /cmd_vel_raw</a:t>
-            </a:r>
-            <a:br/>
-            <a:r>
-              <a:t>ros2 param get /mission_manager stop_distance</a:t>
-            </a:r>
-          </a:p>
-        </p:txBody>
-      </p:sp>
-      <p:sp>
-        <p:nvSpPr>
-          <p:cNvPr id="8" name="Rounded Rectangle 7"/>
-          <p:cNvSpPr/>
-          <p:nvPr/>
-        </p:nvSpPr>
-        <p:spPr>
-          <a:xfrm>
-            <a:off x="658368" y="4206240"/>
-            <a:ext cx="10972800" cy="1554480"/>
-          </a:xfrm>
-          <a:prstGeom prst="roundRect">
-            <a:avLst/>
-          </a:prstGeom>
-          <a:solidFill>
-            <a:srgbClr val="F4F7FB"/>
-          </a:solidFill>
-          <a:ln>
-            <a:solidFill>
-              <a:srgbClr val="D1DFD5"/>
-            </a:solidFill>
-          </a:ln>
-        </p:spPr>
-        <p:style>
-          <a:lnRef idx="1">
-            <a:schemeClr val="accent1"/>
-          </a:lnRef>
-          <a:fillRef idx="3">
-            <a:schemeClr val="accent1"/>
-          </a:fillRef>
-          <a:effectRef idx="2">
-            <a:schemeClr val="accent1"/>
-          </a:effectRef>
-          <a:fontRef idx="minor">
-            <a:schemeClr val="lt1"/>
-          </a:fontRef>
-        </p:style>
-        <p:txBody>
-          <a:bodyPr rtlCol="0" anchor="ctr" wrap="square" lIns="73152" rIns="73152" tIns="36576" bIns="36576"/>
-          <a:lstStyle/>
-          <a:p>
-            <a:pPr algn="l">
-              <a:spcAft>
-                <a:spcPts val="0"/>
-              </a:spcAft>
-              <a:defRPr sz="1800" b="1">
-                <a:solidFill>
-                  <a:srgbClr val="2A8B5A"/>
-                </a:solidFill>
-                <a:latin typeface="Noto Sans CJK KR"/>
-              </a:defRPr>
-            </a:pPr>
-            <a:r>
-              <a:t>완료 체크</a:t>
-            </a:r>
-            <a:br/>
-            <a:r>
-              <a:t>□ 명령이 오류 없이 실행된다.</a:t>
-            </a:r>
-            <a:br/>
-            <a:r>
-              <a:t>□ 기대한 파일·topic·frame·parameter 이름이 보인다.</a:t>
-            </a:r>
-            <a:br/>
-            <a:r>
-              <a:t>□ 값의 단위와 방향을 한 문장으로 설명할 수 있다.</a:t>
-            </a:r>
-          </a:p>
-        </p:txBody>
-      </p:sp>
-      <p:sp>
-        <p:nvSpPr>
-          <p:cNvPr id="9" name="TextBox 8"/>
+              <a:t>ros2 run agv_mission mission_manager</a:t>
+            </a:r>
+          </a:p>
+        </p:txBody>
+      </p:sp>
+      <p:sp>
+        <p:nvSpPr>
+          <p:cNvPr id="8" name="TextBox 7"/>
           <p:cNvSpPr txBox="1"/>
           <p:nvPr/>
         </p:nvSpPr>
         <p:spPr>
           <a:xfrm>
-            <a:off x="731520" y="5989320"/>
-            <a:ext cx="10789920" cy="237744"/>
+            <a:off x="786384" y="5239512"/>
+            <a:ext cx="1261872" cy="237744"/>
           </a:xfrm>
           <a:prstGeom prst="rect">
             <a:avLst/>
@@ -10146,7 +10628,46 @@
               <a:spcAft>
                 <a:spcPts val="0"/>
               </a:spcAft>
-              <a:defRPr sz="1500" b="1">
+              <a:defRPr sz="1800" b="1">
+                <a:solidFill>
+                  <a:srgbClr val="2A8B5A"/>
+                </a:solidFill>
+                <a:latin typeface="Noto Sans CJK KR"/>
+              </a:defRPr>
+            </a:pPr>
+            <a:r>
+              <a:t>확인 기준</a:t>
+            </a:r>
+          </a:p>
+        </p:txBody>
+      </p:sp>
+      <p:sp>
+        <p:nvSpPr>
+          <p:cNvPr id="9" name="TextBox 8"/>
+          <p:cNvSpPr txBox="1"/>
+          <p:nvPr/>
+        </p:nvSpPr>
+        <p:spPr>
+          <a:xfrm>
+            <a:off x="786384" y="5532120"/>
+            <a:ext cx="10469880" cy="420624"/>
+          </a:xfrm>
+          <a:prstGeom prst="rect">
+            <a:avLst/>
+          </a:prstGeom>
+          <a:noFill/>
+        </p:spPr>
+        <p:txBody>
+          <a:bodyPr wrap="square" lIns="73152" rIns="73152" tIns="36576" bIns="36576">
+            <a:spAutoFit/>
+          </a:bodyPr>
+          <a:lstStyle/>
+          <a:p>
+            <a:pPr algn="l">
+              <a:spcAft>
+                <a:spcPts val="0"/>
+              </a:spcAft>
+              <a:defRPr sz="1800" b="0">
                 <a:solidFill>
                   <a:srgbClr val="122C4E"/>
                 </a:solidFill>
@@ -10154,7 +10675,7 @@
               </a:defRPr>
             </a:pPr>
             <a:r>
-              <a:t>완료 조건: /mission_state 로그와 /cmd_vel_raw가 detection·obstacle input에 따라 바뀌는 구조를 확인한다.</a:t>
+              <a:t>/mission_state 로그와 /cmd_vel_raw가 detection·obstacle input에 따라 바뀌는 구조를 확인한다.</a:t>
             </a:r>
           </a:p>
         </p:txBody>
@@ -10672,7 +11193,7 @@
               </a:defRPr>
             </a:pPr>
             <a:r>
-              <a:t>막히면: 증상 → 우선 확인 → 재검증</a:t>
+              <a:t>정상 결과: 실제 환경에서 확인한 출력</a:t>
             </a:r>
           </a:p>
         </p:txBody>
@@ -10711,7 +11232,7 @@
               </a:defRPr>
             </a:pPr>
             <a:r>
-              <a:t>오류 메시지를 숨기지 않고 같은 순서로 점검합니다.</a:t>
+              <a:t>실제 ROS 2 환경의 파일·패키지·구성 검증 로그</a:t>
             </a:r>
           </a:p>
         </p:txBody>
@@ -10794,119 +11315,40 @@
           </a:p>
         </p:txBody>
       </p:sp>
-      <p:sp>
-        <p:nvSpPr>
-          <p:cNvPr id="6" name="Rectangle 5"/>
-          <p:cNvSpPr/>
-          <p:nvPr/>
-        </p:nvSpPr>
-        <p:spPr>
-          <a:xfrm>
-            <a:off x="566928" y="1188720"/>
-            <a:ext cx="11064240" cy="347472"/>
-          </a:xfrm>
-          <a:prstGeom prst="rect">
-            <a:avLst/>
-          </a:prstGeom>
-          <a:solidFill>
-            <a:srgbClr val="F4F7FB"/>
-          </a:solidFill>
-          <a:ln>
-            <a:solidFill>
-              <a:srgbClr val="F4F7FB"/>
-            </a:solidFill>
-          </a:ln>
-        </p:spPr>
-        <p:style>
-          <a:lnRef idx="1">
-            <a:schemeClr val="accent1"/>
-          </a:lnRef>
-          <a:fillRef idx="3">
-            <a:schemeClr val="accent1"/>
-          </a:fillRef>
-          <a:effectRef idx="2">
-            <a:schemeClr val="accent1"/>
-          </a:effectRef>
-          <a:fontRef idx="minor">
-            <a:schemeClr val="lt1"/>
-          </a:fontRef>
-        </p:style>
-        <p:txBody>
-          <a:bodyPr rtlCol="0" anchor="ctr" wrap="square" lIns="73152" rIns="73152" tIns="36576" bIns="36576"/>
-          <a:lstStyle/>
-          <a:p>
-            <a:pPr algn="l">
-              <a:spcAft>
-                <a:spcPts val="0"/>
-              </a:spcAft>
-              <a:defRPr sz="1300" b="1">
-                <a:solidFill>
-                  <a:srgbClr val="122C4E"/>
-                </a:solidFill>
-                <a:latin typeface="Noto Sans CJK KR"/>
-              </a:defRPr>
-            </a:pPr>
-            <a:r>
-              <a:t>현재 단계 오류 대응    |    현재 폴더 ~/agv_ws    |    현재 터미널</a:t>
-            </a:r>
-          </a:p>
-        </p:txBody>
-      </p:sp>
-      <p:sp>
-        <p:nvSpPr>
-          <p:cNvPr id="7" name="Rounded Rectangle 6"/>
-          <p:cNvSpPr/>
-          <p:nvPr/>
-        </p:nvSpPr>
-        <p:spPr>
-          <a:xfrm>
-            <a:off x="694944" y="1755648"/>
-            <a:ext cx="10972800" cy="1115568"/>
-          </a:xfrm>
-          <a:prstGeom prst="roundRect">
-            <a:avLst/>
-          </a:prstGeom>
-          <a:solidFill>
-            <a:srgbClr val="FFF7F4"/>
-          </a:solidFill>
-          <a:ln>
-            <a:solidFill>
-              <a:srgbClr val="EDBEB4"/>
-            </a:solidFill>
-          </a:ln>
-        </p:spPr>
-        <p:style>
-          <a:lnRef idx="1">
-            <a:schemeClr val="accent1"/>
-          </a:lnRef>
-          <a:fillRef idx="3">
-            <a:schemeClr val="accent1"/>
-          </a:fillRef>
-          <a:effectRef idx="2">
-            <a:schemeClr val="accent1"/>
-          </a:effectRef>
-          <a:fontRef idx="minor">
-            <a:schemeClr val="lt1"/>
-          </a:fontRef>
-        </p:style>
-        <p:txBody>
-          <a:bodyPr rtlCol="0" anchor="ctr"/>
-          <a:lstStyle/>
-          <a:p>
-            <a:pPr algn="ctr"/>
-          </a:p>
-        </p:txBody>
-      </p:sp>
-      <p:sp>
-        <p:nvSpPr>
-          <p:cNvPr id="8" name="TextBox 7"/>
+      <p:pic>
+        <p:nvPicPr>
+          <p:cNvPr id="6" name="Picture 5" descr="validation_terminal.png"/>
+          <p:cNvPicPr>
+            <a:picLocks noChangeAspect="1"/>
+          </p:cNvPicPr>
+          <p:nvPr/>
+        </p:nvPicPr>
+        <p:blipFill>
+          <a:blip r:embed="rId2"/>
+          <a:stretch>
+            <a:fillRect/>
+          </a:stretch>
+        </p:blipFill>
+        <p:spPr>
+          <a:xfrm>
+            <a:off x="790956" y="1562649"/>
+            <a:ext cx="10607040" cy="4381924"/>
+          </a:xfrm>
+          <a:prstGeom prst="rect">
+            <a:avLst/>
+          </a:prstGeom>
+        </p:spPr>
+      </p:pic>
+      <p:sp>
+        <p:nvSpPr>
+          <p:cNvPr id="7" name="TextBox 6"/>
           <p:cNvSpPr txBox="1"/>
           <p:nvPr/>
         </p:nvSpPr>
         <p:spPr>
           <a:xfrm>
-            <a:off x="896112" y="1901952"/>
-            <a:ext cx="2926080" cy="274320"/>
+            <a:off x="777240" y="6217920"/>
+            <a:ext cx="10607040" cy="182880"/>
           </a:xfrm>
           <a:prstGeom prst="rect">
             <a:avLst/>
@@ -10919,228 +11361,19 @@
           </a:bodyPr>
           <a:lstStyle/>
           <a:p>
-            <a:pPr algn="l">
-              <a:spcAft>
-                <a:spcPts val="0"/>
-              </a:spcAft>
-              <a:defRPr sz="1800" b="1">
-                <a:solidFill>
-                  <a:srgbClr val="BE3B3B"/>
-                </a:solidFill>
-                <a:latin typeface="Noto Sans CJK KR"/>
-              </a:defRPr>
-            </a:pPr>
-            <a:r>
-              <a:t>증상 1: 상태가 전환되지 않음</a:t>
-            </a:r>
-          </a:p>
-        </p:txBody>
-      </p:sp>
-      <p:sp>
-        <p:nvSpPr>
-          <p:cNvPr id="9" name="TextBox 8"/>
-          <p:cNvSpPr txBox="1"/>
-          <p:nvPr/>
-        </p:nvSpPr>
-        <p:spPr>
-          <a:xfrm>
-            <a:off x="3794760" y="1883664"/>
-            <a:ext cx="7543800" cy="621792"/>
-          </a:xfrm>
-          <a:prstGeom prst="rect">
-            <a:avLst/>
-          </a:prstGeom>
-          <a:noFill/>
-        </p:spPr>
-        <p:txBody>
-          <a:bodyPr wrap="square" lIns="73152" rIns="73152" tIns="36576" bIns="36576">
-            <a:spAutoFit/>
-          </a:bodyPr>
-          <a:lstStyle/>
-          <a:p>
-            <a:pPr algn="l">
-              <a:spcAft>
-                <a:spcPts val="0"/>
-              </a:spcAft>
-              <a:defRPr sz="1600" b="0">
-                <a:solidFill>
-                  <a:srgbClr val="122C4E"/>
-                </a:solidFill>
-                <a:latin typeface="Noto Sans CJK KR"/>
-              </a:defRPr>
-            </a:pPr>
-            <a:r>
-              <a:t>우선 확인: callback input·조건식·거리 단위를 확인한다.</a:t>
-            </a:r>
-            <a:br/>
-            <a:r>
-              <a:t>수정 후: ros2 topic info /mission_state</a:t>
-            </a:r>
-          </a:p>
-        </p:txBody>
-      </p:sp>
-      <p:sp>
-        <p:nvSpPr>
-          <p:cNvPr id="10" name="Rounded Rectangle 9"/>
-          <p:cNvSpPr/>
-          <p:nvPr/>
-        </p:nvSpPr>
-        <p:spPr>
-          <a:xfrm>
-            <a:off x="694944" y="3172968"/>
-            <a:ext cx="10972800" cy="1115568"/>
-          </a:xfrm>
-          <a:prstGeom prst="roundRect">
-            <a:avLst/>
-          </a:prstGeom>
-          <a:solidFill>
-            <a:srgbClr val="FFF7F4"/>
-          </a:solidFill>
-          <a:ln>
-            <a:solidFill>
-              <a:srgbClr val="EDBEB4"/>
-            </a:solidFill>
-          </a:ln>
-        </p:spPr>
-        <p:style>
-          <a:lnRef idx="1">
-            <a:schemeClr val="accent1"/>
-          </a:lnRef>
-          <a:fillRef idx="3">
-            <a:schemeClr val="accent1"/>
-          </a:fillRef>
-          <a:effectRef idx="2">
-            <a:schemeClr val="accent1"/>
-          </a:effectRef>
-          <a:fontRef idx="minor">
-            <a:schemeClr val="lt1"/>
-          </a:fontRef>
-        </p:style>
-        <p:txBody>
-          <a:bodyPr rtlCol="0" anchor="ctr"/>
-          <a:lstStyle/>
-          <a:p>
-            <a:pPr algn="ctr"/>
-          </a:p>
-        </p:txBody>
-      </p:sp>
-      <p:sp>
-        <p:nvSpPr>
-          <p:cNvPr id="11" name="TextBox 10"/>
-          <p:cNvSpPr txBox="1"/>
-          <p:nvPr/>
-        </p:nvSpPr>
-        <p:spPr>
-          <a:xfrm>
-            <a:off x="896112" y="3319272"/>
-            <a:ext cx="2926080" cy="274320"/>
-          </a:xfrm>
-          <a:prstGeom prst="rect">
-            <a:avLst/>
-          </a:prstGeom>
-          <a:noFill/>
-        </p:spPr>
-        <p:txBody>
-          <a:bodyPr wrap="square" lIns="73152" rIns="73152" tIns="36576" bIns="36576">
-            <a:spAutoFit/>
-          </a:bodyPr>
-          <a:lstStyle/>
-          <a:p>
-            <a:pPr algn="l">
-              <a:spcAft>
-                <a:spcPts val="0"/>
-              </a:spcAft>
-              <a:defRPr sz="1800" b="1">
-                <a:solidFill>
-                  <a:srgbClr val="BE3B3B"/>
-                </a:solidFill>
-                <a:latin typeface="Noto Sans CJK KR"/>
-              </a:defRPr>
-            </a:pPr>
-            <a:r>
-              <a:t>증상 2: SEARCH↔APPROACH 반복</a:t>
-            </a:r>
-          </a:p>
-        </p:txBody>
-      </p:sp>
-      <p:sp>
-        <p:nvSpPr>
-          <p:cNvPr id="12" name="TextBox 11"/>
-          <p:cNvSpPr txBox="1"/>
-          <p:nvPr/>
-        </p:nvSpPr>
-        <p:spPr>
-          <a:xfrm>
-            <a:off x="3794760" y="3300984"/>
-            <a:ext cx="7543800" cy="621792"/>
-          </a:xfrm>
-          <a:prstGeom prst="rect">
-            <a:avLst/>
-          </a:prstGeom>
-          <a:noFill/>
-        </p:spPr>
-        <p:txBody>
-          <a:bodyPr wrap="square" lIns="73152" rIns="73152" tIns="36576" bIns="36576">
-            <a:spAutoFit/>
-          </a:bodyPr>
-          <a:lstStyle/>
-          <a:p>
-            <a:pPr algn="l">
-              <a:spcAft>
-                <a:spcPts val="0"/>
-              </a:spcAft>
-              <a:defRPr sz="1600" b="0">
-                <a:solidFill>
-                  <a:srgbClr val="122C4E"/>
-                </a:solidFill>
-                <a:latin typeface="Noto Sans CJK KR"/>
-              </a:defRPr>
-            </a:pPr>
-            <a:r>
-              <a:t>우선 확인: detection timeout·hysteresis·우선순위를 추가 점검한다.</a:t>
-            </a:r>
-            <a:br/>
-            <a:r>
-              <a:t>수정 후: ros2 topic info /mission_state</a:t>
-            </a:r>
-          </a:p>
-        </p:txBody>
-      </p:sp>
-      <p:sp>
-        <p:nvSpPr>
-          <p:cNvPr id="13" name="TextBox 12"/>
-          <p:cNvSpPr txBox="1"/>
-          <p:nvPr/>
-        </p:nvSpPr>
-        <p:spPr>
-          <a:xfrm>
-            <a:off x="822960" y="5102352"/>
-            <a:ext cx="10607040" cy="402336"/>
-          </a:xfrm>
-          <a:prstGeom prst="rect">
-            <a:avLst/>
-          </a:prstGeom>
-          <a:noFill/>
-        </p:spPr>
-        <p:txBody>
-          <a:bodyPr wrap="square" lIns="73152" rIns="73152" tIns="36576" bIns="36576">
-            <a:spAutoFit/>
-          </a:bodyPr>
-          <a:lstStyle/>
-          <a:p>
             <a:pPr algn="ctr">
               <a:spcAft>
                 <a:spcPts val="0"/>
               </a:spcAft>
-              <a:defRPr sz="1800" b="1">
-                <a:solidFill>
-                  <a:srgbClr val="DB7E22"/>
-                </a:solidFill>
-                <a:latin typeface="Noto Sans CJK KR"/>
-              </a:defRPr>
-            </a:pPr>
-            <a:r>
-              <a:t>공통 순서: ① 현재 폴더 ② source ③ 파일 경로 ④ 이름/타입/단위 ⑤ build·source 후 재실행</a:t>
+              <a:defRPr sz="1100" b="1">
+                <a:solidFill>
+                  <a:srgbClr val="2A8B5A"/>
+                </a:solidFill>
+                <a:latin typeface="Noto Sans CJK KR"/>
+              </a:defRPr>
+            </a:pPr>
+            <a:r>
+              <a:t>① 명령/설정  ② 정상 출력 또는 화면  ③ 다음 검증 명령으로 재확인</a:t>
             </a:r>
           </a:p>
         </p:txBody>
@@ -11197,7 +11430,7 @@
               </a:defRPr>
             </a:pPr>
             <a:r>
-              <a:t>미니 실습: 값 하나를 바꾸고 결과를 비교한다</a:t>
+              <a:t>정상 결과: 실제 환경에서 확인한 출력</a:t>
             </a:r>
           </a:p>
         </p:txBody>
@@ -11236,7 +11469,7 @@
               </a:defRPr>
             </a:pPr>
             <a:r>
-              <a:t>정상 결과를 만든 뒤에는 한 번에 하나의 값만 바꿉니다.</a:t>
+              <a:t>실제 RViz2: mission text Marker를 같은 scene에서 확인하는 display 구성</a:t>
             </a:r>
           </a:p>
         </p:txBody>
@@ -11319,132 +11552,40 @@
           </a:p>
         </p:txBody>
       </p:sp>
-      <p:sp>
-        <p:nvSpPr>
-          <p:cNvPr id="6" name="Rectangle 5"/>
-          <p:cNvSpPr/>
-          <p:nvPr/>
-        </p:nvSpPr>
-        <p:spPr>
-          <a:xfrm>
-            <a:off x="566928" y="1188720"/>
-            <a:ext cx="11064240" cy="347472"/>
-          </a:xfrm>
-          <a:prstGeom prst="rect">
-            <a:avLst/>
-          </a:prstGeom>
-          <a:solidFill>
-            <a:srgbClr val="F4F7FB"/>
-          </a:solidFill>
-          <a:ln>
-            <a:solidFill>
-              <a:srgbClr val="F4F7FB"/>
-            </a:solidFill>
-          </a:ln>
-        </p:spPr>
-        <p:style>
-          <a:lnRef idx="1">
-            <a:schemeClr val="accent1"/>
-          </a:lnRef>
-          <a:fillRef idx="3">
-            <a:schemeClr val="accent1"/>
-          </a:fillRef>
-          <a:effectRef idx="2">
-            <a:schemeClr val="accent1"/>
-          </a:effectRef>
-          <a:fontRef idx="minor">
-            <a:schemeClr val="lt1"/>
-          </a:fontRef>
-        </p:style>
-        <p:txBody>
-          <a:bodyPr rtlCol="0" anchor="ctr" wrap="square" lIns="73152" rIns="73152" tIns="36576" bIns="36576"/>
-          <a:lstStyle/>
-          <a:p>
-            <a:pPr algn="l">
-              <a:spcAft>
-                <a:spcPts val="0"/>
-              </a:spcAft>
-              <a:defRPr sz="1300" b="1">
-                <a:solidFill>
-                  <a:srgbClr val="122C4E"/>
-                </a:solidFill>
-                <a:latin typeface="Noto Sans CJK KR"/>
-              </a:defRPr>
-            </a:pPr>
-            <a:r>
-              <a:t>현재 단계 미니 실습    |    현재 폴더 ~/agv_ws    |    현재 터미널</a:t>
-            </a:r>
-          </a:p>
-        </p:txBody>
-      </p:sp>
-      <p:sp>
-        <p:nvSpPr>
-          <p:cNvPr id="7" name="Rounded Rectangle 6"/>
-          <p:cNvSpPr/>
-          <p:nvPr/>
-        </p:nvSpPr>
-        <p:spPr>
-          <a:xfrm>
-            <a:off x="749808" y="1874519"/>
-            <a:ext cx="10652760" cy="1993392"/>
-          </a:xfrm>
-          <a:prstGeom prst="roundRect">
-            <a:avLst/>
-          </a:prstGeom>
-          <a:solidFill>
-            <a:srgbClr val="FFF8EB"/>
-          </a:solidFill>
-          <a:ln>
-            <a:solidFill>
-              <a:srgbClr val="ECC680"/>
-            </a:solidFill>
-          </a:ln>
-        </p:spPr>
-        <p:style>
-          <a:lnRef idx="1">
-            <a:schemeClr val="accent1"/>
-          </a:lnRef>
-          <a:fillRef idx="3">
-            <a:schemeClr val="accent1"/>
-          </a:fillRef>
-          <a:effectRef idx="2">
-            <a:schemeClr val="accent1"/>
-          </a:effectRef>
-          <a:fontRef idx="minor">
-            <a:schemeClr val="lt1"/>
-          </a:fontRef>
-        </p:style>
-        <p:txBody>
-          <a:bodyPr rtlCol="0" anchor="ctr" wrap="square" lIns="73152" rIns="73152" tIns="36576" bIns="36576"/>
-          <a:lstStyle/>
-          <a:p>
-            <a:pPr algn="ctr">
-              <a:spcAft>
-                <a:spcPts val="0"/>
-              </a:spcAft>
-              <a:defRPr sz="2300" b="1">
-                <a:solidFill>
-                  <a:srgbClr val="122C4E"/>
-                </a:solidFill>
-                <a:latin typeface="Noto Sans CJK KR"/>
-              </a:defRPr>
-            </a:pPr>
-            <a:r>
-              <a:t>target 없음, target 있음, obstacle&lt;0.5 m의 세 입력에 대해 예상 state와 /cmd_vel_raw를 표로 작성한다.</a:t>
-            </a:r>
-          </a:p>
-        </p:txBody>
-      </p:sp>
-      <p:sp>
-        <p:nvSpPr>
-          <p:cNvPr id="8" name="TextBox 7"/>
+      <p:pic>
+        <p:nvPicPr>
+          <p:cNvPr id="6" name="Picture 5" descr="02_rviz_marker_path_actual.png"/>
+          <p:cNvPicPr>
+            <a:picLocks noChangeAspect="1"/>
+          </p:cNvPicPr>
+          <p:nvPr/>
+        </p:nvPicPr>
+        <p:blipFill>
+          <a:blip r:embed="rId2"/>
+          <a:stretch>
+            <a:fillRect/>
+          </a:stretch>
+        </p:blipFill>
+        <p:spPr>
+          <a:xfrm>
+            <a:off x="2971409" y="1353312"/>
+            <a:ext cx="6246133" cy="4800600"/>
+          </a:xfrm>
+          <a:prstGeom prst="rect">
+            <a:avLst/>
+          </a:prstGeom>
+        </p:spPr>
+      </p:pic>
+      <p:sp>
+        <p:nvSpPr>
+          <p:cNvPr id="7" name="TextBox 6"/>
           <p:cNvSpPr txBox="1"/>
           <p:nvPr/>
         </p:nvSpPr>
         <p:spPr>
           <a:xfrm>
-            <a:off x="877824" y="4590288"/>
-            <a:ext cx="10241280" cy="594360"/>
+            <a:off x="777240" y="6217920"/>
+            <a:ext cx="10607040" cy="182880"/>
           </a:xfrm>
           <a:prstGeom prst="rect">
             <a:avLst/>
@@ -11461,15 +11602,15 @@
               <a:spcAft>
                 <a:spcPts val="0"/>
               </a:spcAft>
-              <a:defRPr sz="1900" b="1">
-                <a:solidFill>
-                  <a:srgbClr val="DB7E22"/>
-                </a:solidFill>
-                <a:latin typeface="Noto Sans CJK KR"/>
-              </a:defRPr>
-            </a:pPr>
-            <a:r>
-              <a:t>기록할 것: 바꾼 값(단위) · 기대한 변화 · 실제 출력/화면 · 원래 값으로 되돌린 결과</a:t>
+              <a:defRPr sz="1100" b="1">
+                <a:solidFill>
+                  <a:srgbClr val="2A8B5A"/>
+                </a:solidFill>
+                <a:latin typeface="Noto Sans CJK KR"/>
+              </a:defRPr>
+            </a:pPr>
+            <a:r>
+              <a:t>① 명령/설정  ② 정상 출력 또는 화면  ③ 다음 검증 명령으로 재확인</a:t>
             </a:r>
           </a:p>
         </p:txBody>
@@ -11526,7 +11667,7 @@
               </a:defRPr>
             </a:pPr>
             <a:r>
-              <a:t>체크포인트를 저장하고 다음 모듈로 넘긴다</a:t>
+              <a:t>객관적 검증 명령으로 완료를 확인한다</a:t>
             </a:r>
           </a:p>
         </p:txBody>
@@ -11565,7 +11706,7 @@
               </a:defRPr>
             </a:pPr>
             <a:r>
-              <a:t>현재 Complete는 다음 Starter의 기준선입니다.</a:t>
+              <a:t>화면만 보지 말고 topic·frame·파일·parameter를 다시 확인합니다.</a:t>
             </a:r>
           </a:p>
         </p:txBody>
@@ -11701,7 +11842,7 @@
               </a:defRPr>
             </a:pPr>
             <a:r>
-              <a:t>현재 단계 체크포인트    |    현재 폴더 ~/agv_ws    |    현재 터미널</a:t>
+              <a:t>현재 단계 검증    |    현재 폴더 ~/ros2_curri/agv_ws    |    현재 터미널</a:t>
             </a:r>
           </a:p>
         </p:txBody>
@@ -11714,8 +11855,74 @@
         </p:nvSpPr>
         <p:spPr>
           <a:xfrm>
-            <a:off x="685800" y="1737360"/>
-            <a:ext cx="10972800" cy="3611880"/>
+            <a:off x="658368" y="1755648"/>
+            <a:ext cx="10972800" cy="2148840"/>
+          </a:xfrm>
+          <a:prstGeom prst="roundRect">
+            <a:avLst/>
+          </a:prstGeom>
+          <a:solidFill>
+            <a:srgbClr val="1D232D"/>
+          </a:solidFill>
+          <a:ln>
+            <a:solidFill>
+              <a:srgbClr val="1D232D"/>
+            </a:solidFill>
+          </a:ln>
+        </p:spPr>
+        <p:style>
+          <a:lnRef idx="1">
+            <a:schemeClr val="accent1"/>
+          </a:lnRef>
+          <a:fillRef idx="3">
+            <a:schemeClr val="accent1"/>
+          </a:fillRef>
+          <a:effectRef idx="2">
+            <a:schemeClr val="accent1"/>
+          </a:effectRef>
+          <a:fontRef idx="minor">
+            <a:schemeClr val="lt1"/>
+          </a:fontRef>
+        </p:style>
+        <p:txBody>
+          <a:bodyPr rtlCol="0" anchor="ctr" wrap="square" lIns="73152" rIns="73152" tIns="36576" bIns="36576"/>
+          <a:lstStyle/>
+          <a:p>
+            <a:pPr algn="l">
+              <a:spcAft>
+                <a:spcPts val="0"/>
+              </a:spcAft>
+              <a:defRPr sz="1600" b="0">
+                <a:solidFill>
+                  <a:srgbClr val="FFFFFF"/>
+                </a:solidFill>
+                <a:latin typeface="DejaVu Sans Mono"/>
+              </a:defRPr>
+            </a:pPr>
+            <a:r>
+              <a:t>ros2 topic info /mission_state</a:t>
+            </a:r>
+            <a:br/>
+            <a:r>
+              <a:t>ros2 topic info /cmd_vel_raw</a:t>
+            </a:r>
+            <a:br/>
+            <a:r>
+              <a:t>ros2 param get /mission_manager stop_distance</a:t>
+            </a:r>
+          </a:p>
+        </p:txBody>
+      </p:sp>
+      <p:sp>
+        <p:nvSpPr>
+          <p:cNvPr id="8" name="Rounded Rectangle 7"/>
+          <p:cNvSpPr/>
+          <p:nvPr/>
+        </p:nvSpPr>
+        <p:spPr>
+          <a:xfrm>
+            <a:off x="658368" y="4206240"/>
+            <a:ext cx="10972800" cy="1554480"/>
           </a:xfrm>
           <a:prstGeom prst="roundRect">
             <a:avLst/>
@@ -11725,7 +11932,7 @@
           </a:solidFill>
           <a:ln>
             <a:solidFill>
-              <a:srgbClr val="D2DCE8"/>
+              <a:srgbClr val="D1DFD5"/>
             </a:solidFill>
           </a:ln>
         </p:spPr>
@@ -11744,112 +11951,34 @@
           </a:fontRef>
         </p:style>
         <p:txBody>
-          <a:bodyPr rtlCol="0" anchor="ctr"/>
-          <a:lstStyle/>
-          <a:p>
-            <a:pPr algn="ctr"/>
-          </a:p>
-        </p:txBody>
-      </p:sp>
-      <p:sp>
-        <p:nvSpPr>
-          <p:cNvPr id="8" name="TextBox 7"/>
-          <p:cNvSpPr txBox="1"/>
-          <p:nvPr/>
-        </p:nvSpPr>
-        <p:spPr>
-          <a:xfrm>
-            <a:off x="896112" y="1993392"/>
-            <a:ext cx="10332720" cy="2971800"/>
-          </a:xfrm>
-          <a:prstGeom prst="rect">
-            <a:avLst/>
-          </a:prstGeom>
-          <a:noFill/>
-        </p:spPr>
-        <p:txBody>
-          <a:bodyPr wrap="square" lIns="109728" rIns="109728">
-            <a:spAutoFit/>
-          </a:bodyPr>
-          <a:lstStyle/>
-          <a:p>
-            <a:pPr>
-              <a:spcAft>
-                <a:spcPts val="800"/>
-              </a:spcAft>
-              <a:defRPr sz="1800">
-                <a:solidFill>
-                  <a:srgbClr val="122C4E"/>
-                </a:solidFill>
-                <a:latin typeface="Noto Sans CJK KR"/>
-              </a:defRPr>
-            </a:pPr>
-            <a:r>
-              <a:t>• □ 완료 화면: /mission_state 로그와 /cmd_vel_raw가 detection·obstacle input에 따라 바뀌는 구조를 확인한다.</a:t>
-            </a:r>
-          </a:p>
-          <a:p>
-            <a:pPr>
-              <a:spcAft>
-                <a:spcPts val="800"/>
-              </a:spcAft>
-              <a:defRPr sz="1800">
-                <a:solidFill>
-                  <a:srgbClr val="122C4E"/>
-                </a:solidFill>
-                <a:latin typeface="Noto Sans CJK KR"/>
-              </a:defRPr>
-            </a:pPr>
-            <a:r>
-              <a:t>• □ Complete 파일: blocks/E_autonomy_logic/M19_mission_fsm/complete/</a:t>
-            </a:r>
-          </a:p>
-          <a:p>
-            <a:pPr>
-              <a:spcAft>
-                <a:spcPts val="800"/>
-              </a:spcAft>
-              <a:defRPr sz="1800">
-                <a:solidFill>
-                  <a:srgbClr val="122C4E"/>
-                </a:solidFill>
-                <a:latin typeface="Noto Sans CJK KR"/>
-              </a:defRPr>
-            </a:pPr>
-            <a:r>
-              <a:t>• □ 정상 로그·캡처: logs/validation.log, screenshots/validation_terminal.png</a:t>
-            </a:r>
-          </a:p>
-          <a:p>
-            <a:pPr>
-              <a:spcAft>
-                <a:spcPts val="800"/>
-              </a:spcAft>
-              <a:defRPr sz="1800">
-                <a:solidFill>
-                  <a:srgbClr val="122C4E"/>
-                </a:solidFill>
-                <a:latin typeface="Noto Sans CJK KR"/>
-              </a:defRPr>
-            </a:pPr>
-            <a:r>
-              <a:t>• □ 버전 식별: CHECKSUM_or_TAG.txt의 SHA-256 manifest</a:t>
-            </a:r>
-          </a:p>
-          <a:p>
-            <a:pPr>
-              <a:spcAft>
-                <a:spcPts val="800"/>
-              </a:spcAft>
-              <a:defRPr sz="1800">
-                <a:solidFill>
-                  <a:srgbClr val="122C4E"/>
-                </a:solidFill>
-                <a:latin typeface="Noto Sans CJK KR"/>
-              </a:defRPr>
-            </a:pPr>
-            <a:r>
-              <a:t>• □ 다음 시작 조건: M20 PID</a:t>
+          <a:bodyPr rtlCol="0" anchor="ctr" wrap="square" lIns="73152" rIns="73152" tIns="36576" bIns="36576"/>
+          <a:lstStyle/>
+          <a:p>
+            <a:pPr algn="l">
+              <a:spcAft>
+                <a:spcPts val="0"/>
+              </a:spcAft>
+              <a:defRPr sz="1800" b="1">
+                <a:solidFill>
+                  <a:srgbClr val="2A8B5A"/>
+                </a:solidFill>
+                <a:latin typeface="Noto Sans CJK KR"/>
+              </a:defRPr>
+            </a:pPr>
+            <a:r>
+              <a:t>완료 체크</a:t>
+            </a:r>
+            <a:br/>
+            <a:r>
+              <a:t>□ 명령이 오류 없이 실행된다.</a:t>
+            </a:r>
+            <a:br/>
+            <a:r>
+              <a:t>□ 기대한 파일·topic·frame·parameter 이름이 보인다.</a:t>
+            </a:r>
+            <a:br/>
+            <a:r>
+              <a:t>□ 값의 단위와 방향을 한 문장으로 설명할 수 있다.</a:t>
             </a:r>
           </a:p>
         </p:txBody>
@@ -11862,8 +11991,8 @@
         </p:nvSpPr>
         <p:spPr>
           <a:xfrm>
-            <a:off x="868680" y="5596128"/>
-            <a:ext cx="10515600" cy="338328"/>
+            <a:off x="731520" y="5989320"/>
+            <a:ext cx="10789920" cy="237744"/>
           </a:xfrm>
           <a:prstGeom prst="rect">
             <a:avLst/>
@@ -11876,19 +12005,19 @@
           </a:bodyPr>
           <a:lstStyle/>
           <a:p>
-            <a:pPr algn="ctr">
-              <a:spcAft>
-                <a:spcPts val="0"/>
-              </a:spcAft>
-              <a:defRPr sz="1700" b="1">
-                <a:solidFill>
-                  <a:srgbClr val="2A8B5A"/>
-                </a:solidFill>
-                <a:latin typeface="Noto Sans CJK KR"/>
-              </a:defRPr>
-            </a:pPr>
-            <a:r>
-              <a:t>다음 모듈을 시작하기 전, 이 슬라이드의 Complete와 다음 모듈의 Starter를 비교합니다.</a:t>
+            <a:pPr algn="l">
+              <a:spcAft>
+                <a:spcPts val="0"/>
+              </a:spcAft>
+              <a:defRPr sz="1500" b="1">
+                <a:solidFill>
+                  <a:srgbClr val="122C4E"/>
+                </a:solidFill>
+                <a:latin typeface="Noto Sans CJK KR"/>
+              </a:defRPr>
+            </a:pPr>
+            <a:r>
+              <a:t>완료 조건: /mission_state 로그와 /cmd_vel_raw가 detection·obstacle input에 따라 바뀌는 구조를 확인한다.</a:t>
             </a:r>
           </a:p>
         </p:txBody>
@@ -11945,6 +12074,1279 @@
               </a:defRPr>
             </a:pPr>
             <a:r>
+              <a:t>막히면: 증상 → 우선 확인 → 재검증</a:t>
+            </a:r>
+          </a:p>
+        </p:txBody>
+      </p:sp>
+      <p:sp>
+        <p:nvSpPr>
+          <p:cNvPr id="3" name="TextBox 2"/>
+          <p:cNvSpPr txBox="1"/>
+          <p:nvPr/>
+        </p:nvSpPr>
+        <p:spPr>
+          <a:xfrm>
+            <a:off x="603504" y="859536"/>
+            <a:ext cx="10698480" cy="292608"/>
+          </a:xfrm>
+          <a:prstGeom prst="rect">
+            <a:avLst/>
+          </a:prstGeom>
+          <a:noFill/>
+        </p:spPr>
+        <p:txBody>
+          <a:bodyPr wrap="square" lIns="73152" rIns="73152" tIns="36576" bIns="36576">
+            <a:spAutoFit/>
+          </a:bodyPr>
+          <a:lstStyle/>
+          <a:p>
+            <a:pPr algn="l">
+              <a:spcAft>
+                <a:spcPts val="0"/>
+              </a:spcAft>
+              <a:defRPr sz="1700" b="0">
+                <a:solidFill>
+                  <a:srgbClr val="5C6672"/>
+                </a:solidFill>
+                <a:latin typeface="Noto Sans CJK KR"/>
+              </a:defRPr>
+            </a:pPr>
+            <a:r>
+              <a:t>오류 메시지를 숨기지 않고 같은 순서로 점검합니다.</a:t>
+            </a:r>
+          </a:p>
+        </p:txBody>
+      </p:sp>
+      <p:sp>
+        <p:nvSpPr>
+          <p:cNvPr id="4" name="TextBox 3"/>
+          <p:cNvSpPr txBox="1"/>
+          <p:nvPr/>
+        </p:nvSpPr>
+        <p:spPr>
+          <a:xfrm>
+            <a:off x="530352" y="6510528"/>
+            <a:ext cx="7772400" cy="201168"/>
+          </a:xfrm>
+          <a:prstGeom prst="rect">
+            <a:avLst/>
+          </a:prstGeom>
+          <a:noFill/>
+        </p:spPr>
+        <p:txBody>
+          <a:bodyPr wrap="square" lIns="73152" rIns="73152" tIns="36576" bIns="36576">
+            <a:spAutoFit/>
+          </a:bodyPr>
+          <a:lstStyle/>
+          <a:p>
+            <a:pPr algn="l">
+              <a:spcAft>
+                <a:spcPts val="0"/>
+              </a:spcAft>
+              <a:defRPr sz="1000" b="0">
+                <a:solidFill>
+                  <a:srgbClr val="5C6672"/>
+                </a:solidFill>
+                <a:latin typeface="Noto Sans CJK KR"/>
+              </a:defRPr>
+            </a:pPr>
+            <a:r>
+              <a:t>ROS 2 Jazzy · Gazebo Harmonic · M19 · 따라 하기형 AGV 실습</a:t>
+            </a:r>
+          </a:p>
+        </p:txBody>
+      </p:sp>
+      <p:sp>
+        <p:nvSpPr>
+          <p:cNvPr id="5" name="TextBox 4"/>
+          <p:cNvSpPr txBox="1"/>
+          <p:nvPr/>
+        </p:nvSpPr>
+        <p:spPr>
+          <a:xfrm>
+            <a:off x="9144000" y="6510528"/>
+            <a:ext cx="2468880" cy="201168"/>
+          </a:xfrm>
+          <a:prstGeom prst="rect">
+            <a:avLst/>
+          </a:prstGeom>
+          <a:noFill/>
+        </p:spPr>
+        <p:txBody>
+          <a:bodyPr wrap="square" lIns="73152" rIns="73152" tIns="36576" bIns="36576">
+            <a:spAutoFit/>
+          </a:bodyPr>
+          <a:lstStyle/>
+          <a:p>
+            <a:pPr algn="r">
+              <a:spcAft>
+                <a:spcPts val="0"/>
+              </a:spcAft>
+              <a:defRPr sz="1000" b="0">
+                <a:solidFill>
+                  <a:srgbClr val="5C6672"/>
+                </a:solidFill>
+                <a:latin typeface="Noto Sans CJK KR"/>
+              </a:defRPr>
+            </a:pPr>
+            <a:r>
+              <a:t>명령·파일 경로는 슬라이드에서 복사 가능</a:t>
+            </a:r>
+          </a:p>
+        </p:txBody>
+      </p:sp>
+      <p:sp>
+        <p:nvSpPr>
+          <p:cNvPr id="6" name="Rectangle 5"/>
+          <p:cNvSpPr/>
+          <p:nvPr/>
+        </p:nvSpPr>
+        <p:spPr>
+          <a:xfrm>
+            <a:off x="566928" y="1188720"/>
+            <a:ext cx="11064240" cy="347472"/>
+          </a:xfrm>
+          <a:prstGeom prst="rect">
+            <a:avLst/>
+          </a:prstGeom>
+          <a:solidFill>
+            <a:srgbClr val="F4F7FB"/>
+          </a:solidFill>
+          <a:ln>
+            <a:solidFill>
+              <a:srgbClr val="F4F7FB"/>
+            </a:solidFill>
+          </a:ln>
+        </p:spPr>
+        <p:style>
+          <a:lnRef idx="1">
+            <a:schemeClr val="accent1"/>
+          </a:lnRef>
+          <a:fillRef idx="3">
+            <a:schemeClr val="accent1"/>
+          </a:fillRef>
+          <a:effectRef idx="2">
+            <a:schemeClr val="accent1"/>
+          </a:effectRef>
+          <a:fontRef idx="minor">
+            <a:schemeClr val="lt1"/>
+          </a:fontRef>
+        </p:style>
+        <p:txBody>
+          <a:bodyPr rtlCol="0" anchor="ctr" wrap="square" lIns="73152" rIns="73152" tIns="36576" bIns="36576"/>
+          <a:lstStyle/>
+          <a:p>
+            <a:pPr algn="l">
+              <a:spcAft>
+                <a:spcPts val="0"/>
+              </a:spcAft>
+              <a:defRPr sz="1300" b="1">
+                <a:solidFill>
+                  <a:srgbClr val="122C4E"/>
+                </a:solidFill>
+                <a:latin typeface="Noto Sans CJK KR"/>
+              </a:defRPr>
+            </a:pPr>
+            <a:r>
+              <a:t>현재 단계 오류 대응    |    현재 폴더 ~/ros2_curri/agv_ws    |    현재 터미널</a:t>
+            </a:r>
+          </a:p>
+        </p:txBody>
+      </p:sp>
+      <p:sp>
+        <p:nvSpPr>
+          <p:cNvPr id="7" name="Rounded Rectangle 6"/>
+          <p:cNvSpPr/>
+          <p:nvPr/>
+        </p:nvSpPr>
+        <p:spPr>
+          <a:xfrm>
+            <a:off x="694944" y="1755648"/>
+            <a:ext cx="10972800" cy="1115568"/>
+          </a:xfrm>
+          <a:prstGeom prst="roundRect">
+            <a:avLst/>
+          </a:prstGeom>
+          <a:solidFill>
+            <a:srgbClr val="FFF7F4"/>
+          </a:solidFill>
+          <a:ln>
+            <a:solidFill>
+              <a:srgbClr val="EDBEB4"/>
+            </a:solidFill>
+          </a:ln>
+        </p:spPr>
+        <p:style>
+          <a:lnRef idx="1">
+            <a:schemeClr val="accent1"/>
+          </a:lnRef>
+          <a:fillRef idx="3">
+            <a:schemeClr val="accent1"/>
+          </a:fillRef>
+          <a:effectRef idx="2">
+            <a:schemeClr val="accent1"/>
+          </a:effectRef>
+          <a:fontRef idx="minor">
+            <a:schemeClr val="lt1"/>
+          </a:fontRef>
+        </p:style>
+        <p:txBody>
+          <a:bodyPr rtlCol="0" anchor="ctr"/>
+          <a:lstStyle/>
+          <a:p>
+            <a:pPr algn="ctr"/>
+          </a:p>
+        </p:txBody>
+      </p:sp>
+      <p:sp>
+        <p:nvSpPr>
+          <p:cNvPr id="8" name="TextBox 7"/>
+          <p:cNvSpPr txBox="1"/>
+          <p:nvPr/>
+        </p:nvSpPr>
+        <p:spPr>
+          <a:xfrm>
+            <a:off x="896112" y="1901952"/>
+            <a:ext cx="2926080" cy="274320"/>
+          </a:xfrm>
+          <a:prstGeom prst="rect">
+            <a:avLst/>
+          </a:prstGeom>
+          <a:noFill/>
+        </p:spPr>
+        <p:txBody>
+          <a:bodyPr wrap="square" lIns="73152" rIns="73152" tIns="36576" bIns="36576">
+            <a:spAutoFit/>
+          </a:bodyPr>
+          <a:lstStyle/>
+          <a:p>
+            <a:pPr algn="l">
+              <a:spcAft>
+                <a:spcPts val="0"/>
+              </a:spcAft>
+              <a:defRPr sz="1800" b="1">
+                <a:solidFill>
+                  <a:srgbClr val="BE3B3B"/>
+                </a:solidFill>
+                <a:latin typeface="Noto Sans CJK KR"/>
+              </a:defRPr>
+            </a:pPr>
+            <a:r>
+              <a:t>증상 1: 상태가 전환되지 않음</a:t>
+            </a:r>
+          </a:p>
+        </p:txBody>
+      </p:sp>
+      <p:sp>
+        <p:nvSpPr>
+          <p:cNvPr id="9" name="TextBox 8"/>
+          <p:cNvSpPr txBox="1"/>
+          <p:nvPr/>
+        </p:nvSpPr>
+        <p:spPr>
+          <a:xfrm>
+            <a:off x="3794760" y="1883664"/>
+            <a:ext cx="7543800" cy="621792"/>
+          </a:xfrm>
+          <a:prstGeom prst="rect">
+            <a:avLst/>
+          </a:prstGeom>
+          <a:noFill/>
+        </p:spPr>
+        <p:txBody>
+          <a:bodyPr wrap="square" lIns="73152" rIns="73152" tIns="36576" bIns="36576">
+            <a:spAutoFit/>
+          </a:bodyPr>
+          <a:lstStyle/>
+          <a:p>
+            <a:pPr algn="l">
+              <a:spcAft>
+                <a:spcPts val="0"/>
+              </a:spcAft>
+              <a:defRPr sz="1600" b="0">
+                <a:solidFill>
+                  <a:srgbClr val="122C4E"/>
+                </a:solidFill>
+                <a:latin typeface="Noto Sans CJK KR"/>
+              </a:defRPr>
+            </a:pPr>
+            <a:r>
+              <a:t>우선 확인: callback input·조건식·거리 단위를 확인한다.</a:t>
+            </a:r>
+            <a:br/>
+            <a:r>
+              <a:t>수정 후: ros2 topic info /mission_state</a:t>
+            </a:r>
+          </a:p>
+        </p:txBody>
+      </p:sp>
+      <p:sp>
+        <p:nvSpPr>
+          <p:cNvPr id="10" name="Rounded Rectangle 9"/>
+          <p:cNvSpPr/>
+          <p:nvPr/>
+        </p:nvSpPr>
+        <p:spPr>
+          <a:xfrm>
+            <a:off x="694944" y="3172968"/>
+            <a:ext cx="10972800" cy="1115568"/>
+          </a:xfrm>
+          <a:prstGeom prst="roundRect">
+            <a:avLst/>
+          </a:prstGeom>
+          <a:solidFill>
+            <a:srgbClr val="FFF7F4"/>
+          </a:solidFill>
+          <a:ln>
+            <a:solidFill>
+              <a:srgbClr val="EDBEB4"/>
+            </a:solidFill>
+          </a:ln>
+        </p:spPr>
+        <p:style>
+          <a:lnRef idx="1">
+            <a:schemeClr val="accent1"/>
+          </a:lnRef>
+          <a:fillRef idx="3">
+            <a:schemeClr val="accent1"/>
+          </a:fillRef>
+          <a:effectRef idx="2">
+            <a:schemeClr val="accent1"/>
+          </a:effectRef>
+          <a:fontRef idx="minor">
+            <a:schemeClr val="lt1"/>
+          </a:fontRef>
+        </p:style>
+        <p:txBody>
+          <a:bodyPr rtlCol="0" anchor="ctr"/>
+          <a:lstStyle/>
+          <a:p>
+            <a:pPr algn="ctr"/>
+          </a:p>
+        </p:txBody>
+      </p:sp>
+      <p:sp>
+        <p:nvSpPr>
+          <p:cNvPr id="11" name="TextBox 10"/>
+          <p:cNvSpPr txBox="1"/>
+          <p:nvPr/>
+        </p:nvSpPr>
+        <p:spPr>
+          <a:xfrm>
+            <a:off x="896112" y="3319272"/>
+            <a:ext cx="2926080" cy="274320"/>
+          </a:xfrm>
+          <a:prstGeom prst="rect">
+            <a:avLst/>
+          </a:prstGeom>
+          <a:noFill/>
+        </p:spPr>
+        <p:txBody>
+          <a:bodyPr wrap="square" lIns="73152" rIns="73152" tIns="36576" bIns="36576">
+            <a:spAutoFit/>
+          </a:bodyPr>
+          <a:lstStyle/>
+          <a:p>
+            <a:pPr algn="l">
+              <a:spcAft>
+                <a:spcPts val="0"/>
+              </a:spcAft>
+              <a:defRPr sz="1800" b="1">
+                <a:solidFill>
+                  <a:srgbClr val="BE3B3B"/>
+                </a:solidFill>
+                <a:latin typeface="Noto Sans CJK KR"/>
+              </a:defRPr>
+            </a:pPr>
+            <a:r>
+              <a:t>증상 2: SEARCH↔APPROACH 반복</a:t>
+            </a:r>
+          </a:p>
+        </p:txBody>
+      </p:sp>
+      <p:sp>
+        <p:nvSpPr>
+          <p:cNvPr id="12" name="TextBox 11"/>
+          <p:cNvSpPr txBox="1"/>
+          <p:nvPr/>
+        </p:nvSpPr>
+        <p:spPr>
+          <a:xfrm>
+            <a:off x="3794760" y="3300984"/>
+            <a:ext cx="7543800" cy="621792"/>
+          </a:xfrm>
+          <a:prstGeom prst="rect">
+            <a:avLst/>
+          </a:prstGeom>
+          <a:noFill/>
+        </p:spPr>
+        <p:txBody>
+          <a:bodyPr wrap="square" lIns="73152" rIns="73152" tIns="36576" bIns="36576">
+            <a:spAutoFit/>
+          </a:bodyPr>
+          <a:lstStyle/>
+          <a:p>
+            <a:pPr algn="l">
+              <a:spcAft>
+                <a:spcPts val="0"/>
+              </a:spcAft>
+              <a:defRPr sz="1600" b="0">
+                <a:solidFill>
+                  <a:srgbClr val="122C4E"/>
+                </a:solidFill>
+                <a:latin typeface="Noto Sans CJK KR"/>
+              </a:defRPr>
+            </a:pPr>
+            <a:r>
+              <a:t>우선 확인: detection timeout·hysteresis·우선순위를 추가 점검한다.</a:t>
+            </a:r>
+            <a:br/>
+            <a:r>
+              <a:t>수정 후: ros2 topic info /mission_state</a:t>
+            </a:r>
+          </a:p>
+        </p:txBody>
+      </p:sp>
+      <p:sp>
+        <p:nvSpPr>
+          <p:cNvPr id="13" name="TextBox 12"/>
+          <p:cNvSpPr txBox="1"/>
+          <p:nvPr/>
+        </p:nvSpPr>
+        <p:spPr>
+          <a:xfrm>
+            <a:off x="822960" y="5102352"/>
+            <a:ext cx="10607040" cy="402336"/>
+          </a:xfrm>
+          <a:prstGeom prst="rect">
+            <a:avLst/>
+          </a:prstGeom>
+          <a:noFill/>
+        </p:spPr>
+        <p:txBody>
+          <a:bodyPr wrap="square" lIns="73152" rIns="73152" tIns="36576" bIns="36576">
+            <a:spAutoFit/>
+          </a:bodyPr>
+          <a:lstStyle/>
+          <a:p>
+            <a:pPr algn="ctr">
+              <a:spcAft>
+                <a:spcPts val="0"/>
+              </a:spcAft>
+              <a:defRPr sz="1800" b="1">
+                <a:solidFill>
+                  <a:srgbClr val="DB7E22"/>
+                </a:solidFill>
+                <a:latin typeface="Noto Sans CJK KR"/>
+              </a:defRPr>
+            </a:pPr>
+            <a:r>
+              <a:t>공통 순서: ① 현재 폴더 ② source ③ 파일 경로 ④ 이름/타입/단위 ⑤ build·source 후 재실행</a:t>
+            </a:r>
+          </a:p>
+        </p:txBody>
+      </p:sp>
+    </p:spTree>
+  </p:cSld>
+  <p:clrMapOvr>
+    <a:masterClrMapping/>
+  </p:clrMapOvr>
+</p:sld>
+</file>
+
+<file path=ppt/slides/slide24.xml><?xml version="1.0" encoding="utf-8"?>
+<p:sld xmlns:a="http://schemas.openxmlformats.org/drawingml/2006/main" xmlns:p="http://schemas.openxmlformats.org/presentationml/2006/main" xmlns:r="http://schemas.openxmlformats.org/officeDocument/2006/relationships">
+  <p:cSld>
+    <p:spTree>
+      <p:nvGrpSpPr>
+        <p:cNvPr id="1" name=""/>
+        <p:cNvGrpSpPr/>
+        <p:nvPr/>
+      </p:nvGrpSpPr>
+      <p:grpSpPr/>
+      <p:sp>
+        <p:nvSpPr>
+          <p:cNvPr id="2" name="TextBox 1"/>
+          <p:cNvSpPr txBox="1"/>
+          <p:nvPr/>
+        </p:nvSpPr>
+        <p:spPr>
+          <a:xfrm>
+            <a:off x="566928" y="347472"/>
+            <a:ext cx="10881360" cy="438912"/>
+          </a:xfrm>
+          <a:prstGeom prst="rect">
+            <a:avLst/>
+          </a:prstGeom>
+          <a:noFill/>
+        </p:spPr>
+        <p:txBody>
+          <a:bodyPr wrap="square" lIns="73152" rIns="73152" tIns="36576" bIns="36576">
+            <a:spAutoFit/>
+          </a:bodyPr>
+          <a:lstStyle/>
+          <a:p>
+            <a:pPr algn="l">
+              <a:spcAft>
+                <a:spcPts val="0"/>
+              </a:spcAft>
+              <a:defRPr sz="3200" b="1">
+                <a:solidFill>
+                  <a:srgbClr val="122C4E"/>
+                </a:solidFill>
+                <a:latin typeface="Noto Sans CJK KR"/>
+              </a:defRPr>
+            </a:pPr>
+            <a:r>
+              <a:t>미니 실습: 값 하나를 바꾸고 결과를 비교한다</a:t>
+            </a:r>
+          </a:p>
+        </p:txBody>
+      </p:sp>
+      <p:sp>
+        <p:nvSpPr>
+          <p:cNvPr id="3" name="TextBox 2"/>
+          <p:cNvSpPr txBox="1"/>
+          <p:nvPr/>
+        </p:nvSpPr>
+        <p:spPr>
+          <a:xfrm>
+            <a:off x="603504" y="859536"/>
+            <a:ext cx="10698480" cy="292608"/>
+          </a:xfrm>
+          <a:prstGeom prst="rect">
+            <a:avLst/>
+          </a:prstGeom>
+          <a:noFill/>
+        </p:spPr>
+        <p:txBody>
+          <a:bodyPr wrap="square" lIns="73152" rIns="73152" tIns="36576" bIns="36576">
+            <a:spAutoFit/>
+          </a:bodyPr>
+          <a:lstStyle/>
+          <a:p>
+            <a:pPr algn="l">
+              <a:spcAft>
+                <a:spcPts val="0"/>
+              </a:spcAft>
+              <a:defRPr sz="1700" b="0">
+                <a:solidFill>
+                  <a:srgbClr val="5C6672"/>
+                </a:solidFill>
+                <a:latin typeface="Noto Sans CJK KR"/>
+              </a:defRPr>
+            </a:pPr>
+            <a:r>
+              <a:t>정상 결과를 만든 뒤에는 한 번에 하나의 값만 바꿉니다.</a:t>
+            </a:r>
+          </a:p>
+        </p:txBody>
+      </p:sp>
+      <p:sp>
+        <p:nvSpPr>
+          <p:cNvPr id="4" name="TextBox 3"/>
+          <p:cNvSpPr txBox="1"/>
+          <p:nvPr/>
+        </p:nvSpPr>
+        <p:spPr>
+          <a:xfrm>
+            <a:off x="530352" y="6510528"/>
+            <a:ext cx="7772400" cy="201168"/>
+          </a:xfrm>
+          <a:prstGeom prst="rect">
+            <a:avLst/>
+          </a:prstGeom>
+          <a:noFill/>
+        </p:spPr>
+        <p:txBody>
+          <a:bodyPr wrap="square" lIns="73152" rIns="73152" tIns="36576" bIns="36576">
+            <a:spAutoFit/>
+          </a:bodyPr>
+          <a:lstStyle/>
+          <a:p>
+            <a:pPr algn="l">
+              <a:spcAft>
+                <a:spcPts val="0"/>
+              </a:spcAft>
+              <a:defRPr sz="1000" b="0">
+                <a:solidFill>
+                  <a:srgbClr val="5C6672"/>
+                </a:solidFill>
+                <a:latin typeface="Noto Sans CJK KR"/>
+              </a:defRPr>
+            </a:pPr>
+            <a:r>
+              <a:t>ROS 2 Jazzy · Gazebo Harmonic · M19 · 따라 하기형 AGV 실습</a:t>
+            </a:r>
+          </a:p>
+        </p:txBody>
+      </p:sp>
+      <p:sp>
+        <p:nvSpPr>
+          <p:cNvPr id="5" name="TextBox 4"/>
+          <p:cNvSpPr txBox="1"/>
+          <p:nvPr/>
+        </p:nvSpPr>
+        <p:spPr>
+          <a:xfrm>
+            <a:off x="9144000" y="6510528"/>
+            <a:ext cx="2468880" cy="201168"/>
+          </a:xfrm>
+          <a:prstGeom prst="rect">
+            <a:avLst/>
+          </a:prstGeom>
+          <a:noFill/>
+        </p:spPr>
+        <p:txBody>
+          <a:bodyPr wrap="square" lIns="73152" rIns="73152" tIns="36576" bIns="36576">
+            <a:spAutoFit/>
+          </a:bodyPr>
+          <a:lstStyle/>
+          <a:p>
+            <a:pPr algn="r">
+              <a:spcAft>
+                <a:spcPts val="0"/>
+              </a:spcAft>
+              <a:defRPr sz="1000" b="0">
+                <a:solidFill>
+                  <a:srgbClr val="5C6672"/>
+                </a:solidFill>
+                <a:latin typeface="Noto Sans CJK KR"/>
+              </a:defRPr>
+            </a:pPr>
+            <a:r>
+              <a:t>명령·파일 경로는 슬라이드에서 복사 가능</a:t>
+            </a:r>
+          </a:p>
+        </p:txBody>
+      </p:sp>
+      <p:sp>
+        <p:nvSpPr>
+          <p:cNvPr id="6" name="Rectangle 5"/>
+          <p:cNvSpPr/>
+          <p:nvPr/>
+        </p:nvSpPr>
+        <p:spPr>
+          <a:xfrm>
+            <a:off x="566928" y="1188720"/>
+            <a:ext cx="11064240" cy="347472"/>
+          </a:xfrm>
+          <a:prstGeom prst="rect">
+            <a:avLst/>
+          </a:prstGeom>
+          <a:solidFill>
+            <a:srgbClr val="F4F7FB"/>
+          </a:solidFill>
+          <a:ln>
+            <a:solidFill>
+              <a:srgbClr val="F4F7FB"/>
+            </a:solidFill>
+          </a:ln>
+        </p:spPr>
+        <p:style>
+          <a:lnRef idx="1">
+            <a:schemeClr val="accent1"/>
+          </a:lnRef>
+          <a:fillRef idx="3">
+            <a:schemeClr val="accent1"/>
+          </a:fillRef>
+          <a:effectRef idx="2">
+            <a:schemeClr val="accent1"/>
+          </a:effectRef>
+          <a:fontRef idx="minor">
+            <a:schemeClr val="lt1"/>
+          </a:fontRef>
+        </p:style>
+        <p:txBody>
+          <a:bodyPr rtlCol="0" anchor="ctr" wrap="square" lIns="73152" rIns="73152" tIns="36576" bIns="36576"/>
+          <a:lstStyle/>
+          <a:p>
+            <a:pPr algn="l">
+              <a:spcAft>
+                <a:spcPts val="0"/>
+              </a:spcAft>
+              <a:defRPr sz="1300" b="1">
+                <a:solidFill>
+                  <a:srgbClr val="122C4E"/>
+                </a:solidFill>
+                <a:latin typeface="Noto Sans CJK KR"/>
+              </a:defRPr>
+            </a:pPr>
+            <a:r>
+              <a:t>현재 단계 미니 실습    |    현재 폴더 ~/ros2_curri/agv_ws    |    현재 터미널</a:t>
+            </a:r>
+          </a:p>
+        </p:txBody>
+      </p:sp>
+      <p:sp>
+        <p:nvSpPr>
+          <p:cNvPr id="7" name="Rounded Rectangle 6"/>
+          <p:cNvSpPr/>
+          <p:nvPr/>
+        </p:nvSpPr>
+        <p:spPr>
+          <a:xfrm>
+            <a:off x="749808" y="1874519"/>
+            <a:ext cx="10652760" cy="1993392"/>
+          </a:xfrm>
+          <a:prstGeom prst="roundRect">
+            <a:avLst/>
+          </a:prstGeom>
+          <a:solidFill>
+            <a:srgbClr val="FFF8EB"/>
+          </a:solidFill>
+          <a:ln>
+            <a:solidFill>
+              <a:srgbClr val="ECC680"/>
+            </a:solidFill>
+          </a:ln>
+        </p:spPr>
+        <p:style>
+          <a:lnRef idx="1">
+            <a:schemeClr val="accent1"/>
+          </a:lnRef>
+          <a:fillRef idx="3">
+            <a:schemeClr val="accent1"/>
+          </a:fillRef>
+          <a:effectRef idx="2">
+            <a:schemeClr val="accent1"/>
+          </a:effectRef>
+          <a:fontRef idx="minor">
+            <a:schemeClr val="lt1"/>
+          </a:fontRef>
+        </p:style>
+        <p:txBody>
+          <a:bodyPr rtlCol="0" anchor="ctr" wrap="square" lIns="73152" rIns="73152" tIns="36576" bIns="36576"/>
+          <a:lstStyle/>
+          <a:p>
+            <a:pPr algn="ctr">
+              <a:spcAft>
+                <a:spcPts val="0"/>
+              </a:spcAft>
+              <a:defRPr sz="2300" b="1">
+                <a:solidFill>
+                  <a:srgbClr val="122C4E"/>
+                </a:solidFill>
+                <a:latin typeface="Noto Sans CJK KR"/>
+              </a:defRPr>
+            </a:pPr>
+            <a:r>
+              <a:t>target 없음, target 있음, obstacle&lt;0.5 m의 세 입력에 대해 예상 state와 /cmd_vel_raw를 표로 작성한다.</a:t>
+            </a:r>
+          </a:p>
+        </p:txBody>
+      </p:sp>
+      <p:sp>
+        <p:nvSpPr>
+          <p:cNvPr id="8" name="TextBox 7"/>
+          <p:cNvSpPr txBox="1"/>
+          <p:nvPr/>
+        </p:nvSpPr>
+        <p:spPr>
+          <a:xfrm>
+            <a:off x="877824" y="4590288"/>
+            <a:ext cx="10241280" cy="594360"/>
+          </a:xfrm>
+          <a:prstGeom prst="rect">
+            <a:avLst/>
+          </a:prstGeom>
+          <a:noFill/>
+        </p:spPr>
+        <p:txBody>
+          <a:bodyPr wrap="square" lIns="73152" rIns="73152" tIns="36576" bIns="36576">
+            <a:spAutoFit/>
+          </a:bodyPr>
+          <a:lstStyle/>
+          <a:p>
+            <a:pPr algn="ctr">
+              <a:spcAft>
+                <a:spcPts val="0"/>
+              </a:spcAft>
+              <a:defRPr sz="1900" b="1">
+                <a:solidFill>
+                  <a:srgbClr val="DB7E22"/>
+                </a:solidFill>
+                <a:latin typeface="Noto Sans CJK KR"/>
+              </a:defRPr>
+            </a:pPr>
+            <a:r>
+              <a:t>기록할 것: 바꾼 값(단위) · 기대한 변화 · 실제 출력/화면 · 원래 값으로 되돌린 결과</a:t>
+            </a:r>
+          </a:p>
+        </p:txBody>
+      </p:sp>
+    </p:spTree>
+  </p:cSld>
+  <p:clrMapOvr>
+    <a:masterClrMapping/>
+  </p:clrMapOvr>
+</p:sld>
+</file>
+
+<file path=ppt/slides/slide25.xml><?xml version="1.0" encoding="utf-8"?>
+<p:sld xmlns:a="http://schemas.openxmlformats.org/drawingml/2006/main" xmlns:p="http://schemas.openxmlformats.org/presentationml/2006/main" xmlns:r="http://schemas.openxmlformats.org/officeDocument/2006/relationships">
+  <p:cSld>
+    <p:spTree>
+      <p:nvGrpSpPr>
+        <p:cNvPr id="1" name=""/>
+        <p:cNvGrpSpPr/>
+        <p:nvPr/>
+      </p:nvGrpSpPr>
+      <p:grpSpPr/>
+      <p:sp>
+        <p:nvSpPr>
+          <p:cNvPr id="2" name="TextBox 1"/>
+          <p:cNvSpPr txBox="1"/>
+          <p:nvPr/>
+        </p:nvSpPr>
+        <p:spPr>
+          <a:xfrm>
+            <a:off x="566928" y="347472"/>
+            <a:ext cx="10881360" cy="438912"/>
+          </a:xfrm>
+          <a:prstGeom prst="rect">
+            <a:avLst/>
+          </a:prstGeom>
+          <a:noFill/>
+        </p:spPr>
+        <p:txBody>
+          <a:bodyPr wrap="square" lIns="73152" rIns="73152" tIns="36576" bIns="36576">
+            <a:spAutoFit/>
+          </a:bodyPr>
+          <a:lstStyle/>
+          <a:p>
+            <a:pPr algn="l">
+              <a:spcAft>
+                <a:spcPts val="0"/>
+              </a:spcAft>
+              <a:defRPr sz="3200" b="1">
+                <a:solidFill>
+                  <a:srgbClr val="122C4E"/>
+                </a:solidFill>
+                <a:latin typeface="Noto Sans CJK KR"/>
+              </a:defRPr>
+            </a:pPr>
+            <a:r>
+              <a:t>체크포인트를 저장하고 다음 모듈로 넘긴다</a:t>
+            </a:r>
+          </a:p>
+        </p:txBody>
+      </p:sp>
+      <p:sp>
+        <p:nvSpPr>
+          <p:cNvPr id="3" name="TextBox 2"/>
+          <p:cNvSpPr txBox="1"/>
+          <p:nvPr/>
+        </p:nvSpPr>
+        <p:spPr>
+          <a:xfrm>
+            <a:off x="603504" y="859536"/>
+            <a:ext cx="10698480" cy="292608"/>
+          </a:xfrm>
+          <a:prstGeom prst="rect">
+            <a:avLst/>
+          </a:prstGeom>
+          <a:noFill/>
+        </p:spPr>
+        <p:txBody>
+          <a:bodyPr wrap="square" lIns="73152" rIns="73152" tIns="36576" bIns="36576">
+            <a:spAutoFit/>
+          </a:bodyPr>
+          <a:lstStyle/>
+          <a:p>
+            <a:pPr algn="l">
+              <a:spcAft>
+                <a:spcPts val="0"/>
+              </a:spcAft>
+              <a:defRPr sz="1700" b="0">
+                <a:solidFill>
+                  <a:srgbClr val="5C6672"/>
+                </a:solidFill>
+                <a:latin typeface="Noto Sans CJK KR"/>
+              </a:defRPr>
+            </a:pPr>
+            <a:r>
+              <a:t>현재 Complete는 다음 Starter의 기준선입니다.</a:t>
+            </a:r>
+          </a:p>
+        </p:txBody>
+      </p:sp>
+      <p:sp>
+        <p:nvSpPr>
+          <p:cNvPr id="4" name="TextBox 3"/>
+          <p:cNvSpPr txBox="1"/>
+          <p:nvPr/>
+        </p:nvSpPr>
+        <p:spPr>
+          <a:xfrm>
+            <a:off x="530352" y="6510528"/>
+            <a:ext cx="7772400" cy="201168"/>
+          </a:xfrm>
+          <a:prstGeom prst="rect">
+            <a:avLst/>
+          </a:prstGeom>
+          <a:noFill/>
+        </p:spPr>
+        <p:txBody>
+          <a:bodyPr wrap="square" lIns="73152" rIns="73152" tIns="36576" bIns="36576">
+            <a:spAutoFit/>
+          </a:bodyPr>
+          <a:lstStyle/>
+          <a:p>
+            <a:pPr algn="l">
+              <a:spcAft>
+                <a:spcPts val="0"/>
+              </a:spcAft>
+              <a:defRPr sz="1000" b="0">
+                <a:solidFill>
+                  <a:srgbClr val="5C6672"/>
+                </a:solidFill>
+                <a:latin typeface="Noto Sans CJK KR"/>
+              </a:defRPr>
+            </a:pPr>
+            <a:r>
+              <a:t>ROS 2 Jazzy · Gazebo Harmonic · M19 · 따라 하기형 AGV 실습</a:t>
+            </a:r>
+          </a:p>
+        </p:txBody>
+      </p:sp>
+      <p:sp>
+        <p:nvSpPr>
+          <p:cNvPr id="5" name="TextBox 4"/>
+          <p:cNvSpPr txBox="1"/>
+          <p:nvPr/>
+        </p:nvSpPr>
+        <p:spPr>
+          <a:xfrm>
+            <a:off x="9144000" y="6510528"/>
+            <a:ext cx="2468880" cy="201168"/>
+          </a:xfrm>
+          <a:prstGeom prst="rect">
+            <a:avLst/>
+          </a:prstGeom>
+          <a:noFill/>
+        </p:spPr>
+        <p:txBody>
+          <a:bodyPr wrap="square" lIns="73152" rIns="73152" tIns="36576" bIns="36576">
+            <a:spAutoFit/>
+          </a:bodyPr>
+          <a:lstStyle/>
+          <a:p>
+            <a:pPr algn="r">
+              <a:spcAft>
+                <a:spcPts val="0"/>
+              </a:spcAft>
+              <a:defRPr sz="1000" b="0">
+                <a:solidFill>
+                  <a:srgbClr val="5C6672"/>
+                </a:solidFill>
+                <a:latin typeface="Noto Sans CJK KR"/>
+              </a:defRPr>
+            </a:pPr>
+            <a:r>
+              <a:t>명령·파일 경로는 슬라이드에서 복사 가능</a:t>
+            </a:r>
+          </a:p>
+        </p:txBody>
+      </p:sp>
+      <p:sp>
+        <p:nvSpPr>
+          <p:cNvPr id="6" name="Rectangle 5"/>
+          <p:cNvSpPr/>
+          <p:nvPr/>
+        </p:nvSpPr>
+        <p:spPr>
+          <a:xfrm>
+            <a:off x="566928" y="1188720"/>
+            <a:ext cx="11064240" cy="347472"/>
+          </a:xfrm>
+          <a:prstGeom prst="rect">
+            <a:avLst/>
+          </a:prstGeom>
+          <a:solidFill>
+            <a:srgbClr val="F4F7FB"/>
+          </a:solidFill>
+          <a:ln>
+            <a:solidFill>
+              <a:srgbClr val="F4F7FB"/>
+            </a:solidFill>
+          </a:ln>
+        </p:spPr>
+        <p:style>
+          <a:lnRef idx="1">
+            <a:schemeClr val="accent1"/>
+          </a:lnRef>
+          <a:fillRef idx="3">
+            <a:schemeClr val="accent1"/>
+          </a:fillRef>
+          <a:effectRef idx="2">
+            <a:schemeClr val="accent1"/>
+          </a:effectRef>
+          <a:fontRef idx="minor">
+            <a:schemeClr val="lt1"/>
+          </a:fontRef>
+        </p:style>
+        <p:txBody>
+          <a:bodyPr rtlCol="0" anchor="ctr" wrap="square" lIns="73152" rIns="73152" tIns="36576" bIns="36576"/>
+          <a:lstStyle/>
+          <a:p>
+            <a:pPr algn="l">
+              <a:spcAft>
+                <a:spcPts val="0"/>
+              </a:spcAft>
+              <a:defRPr sz="1300" b="1">
+                <a:solidFill>
+                  <a:srgbClr val="122C4E"/>
+                </a:solidFill>
+                <a:latin typeface="Noto Sans CJK KR"/>
+              </a:defRPr>
+            </a:pPr>
+            <a:r>
+              <a:t>현재 단계 체크포인트    |    현재 폴더 ~/ros2_curri/agv_ws    |    현재 터미널</a:t>
+            </a:r>
+          </a:p>
+        </p:txBody>
+      </p:sp>
+      <p:sp>
+        <p:nvSpPr>
+          <p:cNvPr id="7" name="Rounded Rectangle 6"/>
+          <p:cNvSpPr/>
+          <p:nvPr/>
+        </p:nvSpPr>
+        <p:spPr>
+          <a:xfrm>
+            <a:off x="685800" y="1737360"/>
+            <a:ext cx="10972800" cy="3611880"/>
+          </a:xfrm>
+          <a:prstGeom prst="roundRect">
+            <a:avLst/>
+          </a:prstGeom>
+          <a:solidFill>
+            <a:srgbClr val="F4F7FB"/>
+          </a:solidFill>
+          <a:ln>
+            <a:solidFill>
+              <a:srgbClr val="D2DCE8"/>
+            </a:solidFill>
+          </a:ln>
+        </p:spPr>
+        <p:style>
+          <a:lnRef idx="1">
+            <a:schemeClr val="accent1"/>
+          </a:lnRef>
+          <a:fillRef idx="3">
+            <a:schemeClr val="accent1"/>
+          </a:fillRef>
+          <a:effectRef idx="2">
+            <a:schemeClr val="accent1"/>
+          </a:effectRef>
+          <a:fontRef idx="minor">
+            <a:schemeClr val="lt1"/>
+          </a:fontRef>
+        </p:style>
+        <p:txBody>
+          <a:bodyPr rtlCol="0" anchor="ctr"/>
+          <a:lstStyle/>
+          <a:p>
+            <a:pPr algn="ctr"/>
+          </a:p>
+        </p:txBody>
+      </p:sp>
+      <p:sp>
+        <p:nvSpPr>
+          <p:cNvPr id="8" name="TextBox 7"/>
+          <p:cNvSpPr txBox="1"/>
+          <p:nvPr/>
+        </p:nvSpPr>
+        <p:spPr>
+          <a:xfrm>
+            <a:off x="896112" y="1993392"/>
+            <a:ext cx="10332720" cy="2971800"/>
+          </a:xfrm>
+          <a:prstGeom prst="rect">
+            <a:avLst/>
+          </a:prstGeom>
+          <a:noFill/>
+        </p:spPr>
+        <p:txBody>
+          <a:bodyPr wrap="square" lIns="109728" rIns="109728">
+            <a:spAutoFit/>
+          </a:bodyPr>
+          <a:lstStyle/>
+          <a:p>
+            <a:pPr>
+              <a:spcAft>
+                <a:spcPts val="800"/>
+              </a:spcAft>
+              <a:defRPr sz="1800">
+                <a:solidFill>
+                  <a:srgbClr val="122C4E"/>
+                </a:solidFill>
+                <a:latin typeface="Noto Sans CJK KR"/>
+              </a:defRPr>
+            </a:pPr>
+            <a:r>
+              <a:t>• □ 완료 화면: /mission_state 로그와 /cmd_vel_raw가 detection·obstacle input에 따라 바뀌는 구조를 확인한다.</a:t>
+            </a:r>
+          </a:p>
+          <a:p>
+            <a:pPr>
+              <a:spcAft>
+                <a:spcPts val="800"/>
+              </a:spcAft>
+              <a:defRPr sz="1800">
+                <a:solidFill>
+                  <a:srgbClr val="122C4E"/>
+                </a:solidFill>
+                <a:latin typeface="Noto Sans CJK KR"/>
+              </a:defRPr>
+            </a:pPr>
+            <a:r>
+              <a:t>• □ Complete 파일: blocks/E_autonomy_logic/M19_mission_fsm/complete/</a:t>
+            </a:r>
+          </a:p>
+          <a:p>
+            <a:pPr>
+              <a:spcAft>
+                <a:spcPts val="800"/>
+              </a:spcAft>
+              <a:defRPr sz="1800">
+                <a:solidFill>
+                  <a:srgbClr val="122C4E"/>
+                </a:solidFill>
+                <a:latin typeface="Noto Sans CJK KR"/>
+              </a:defRPr>
+            </a:pPr>
+            <a:r>
+              <a:t>• □ 정상 로그·캡처: logs/validation.log, screenshots/validation_terminal.png</a:t>
+            </a:r>
+          </a:p>
+          <a:p>
+            <a:pPr>
+              <a:spcAft>
+                <a:spcPts val="800"/>
+              </a:spcAft>
+              <a:defRPr sz="1800">
+                <a:solidFill>
+                  <a:srgbClr val="122C4E"/>
+                </a:solidFill>
+                <a:latin typeface="Noto Sans CJK KR"/>
+              </a:defRPr>
+            </a:pPr>
+            <a:r>
+              <a:t>• □ 버전 식별: CHECKSUM_or_TAG.txt의 SHA-256 manifest</a:t>
+            </a:r>
+          </a:p>
+          <a:p>
+            <a:pPr>
+              <a:spcAft>
+                <a:spcPts val="800"/>
+              </a:spcAft>
+              <a:defRPr sz="1800">
+                <a:solidFill>
+                  <a:srgbClr val="122C4E"/>
+                </a:solidFill>
+                <a:latin typeface="Noto Sans CJK KR"/>
+              </a:defRPr>
+            </a:pPr>
+            <a:r>
+              <a:t>• □ 다음 시작 조건: M20 PID</a:t>
+            </a:r>
+          </a:p>
+        </p:txBody>
+      </p:sp>
+      <p:sp>
+        <p:nvSpPr>
+          <p:cNvPr id="9" name="TextBox 8"/>
+          <p:cNvSpPr txBox="1"/>
+          <p:nvPr/>
+        </p:nvSpPr>
+        <p:spPr>
+          <a:xfrm>
+            <a:off x="868680" y="5596128"/>
+            <a:ext cx="10515600" cy="338328"/>
+          </a:xfrm>
+          <a:prstGeom prst="rect">
+            <a:avLst/>
+          </a:prstGeom>
+          <a:noFill/>
+        </p:spPr>
+        <p:txBody>
+          <a:bodyPr wrap="square" lIns="73152" rIns="73152" tIns="36576" bIns="36576">
+            <a:spAutoFit/>
+          </a:bodyPr>
+          <a:lstStyle/>
+          <a:p>
+            <a:pPr algn="ctr">
+              <a:spcAft>
+                <a:spcPts val="0"/>
+              </a:spcAft>
+              <a:defRPr sz="1700" b="1">
+                <a:solidFill>
+                  <a:srgbClr val="2A8B5A"/>
+                </a:solidFill>
+                <a:latin typeface="Noto Sans CJK KR"/>
+              </a:defRPr>
+            </a:pPr>
+            <a:r>
+              <a:t>다음 모듈을 시작하기 전, 이 슬라이드의 Complete와 다음 모듈의 Starter를 비교합니다.</a:t>
+            </a:r>
+          </a:p>
+        </p:txBody>
+      </p:sp>
+    </p:spTree>
+  </p:cSld>
+  <p:clrMapOvr>
+    <a:masterClrMapping/>
+  </p:clrMapOvr>
+</p:sld>
+</file>
+
+<file path=ppt/slides/slide26.xml><?xml version="1.0" encoding="utf-8"?>
+<p:sld xmlns:a="http://schemas.openxmlformats.org/drawingml/2006/main" xmlns:p="http://schemas.openxmlformats.org/presentationml/2006/main" xmlns:r="http://schemas.openxmlformats.org/officeDocument/2006/relationships">
+  <p:cSld>
+    <p:spTree>
+      <p:nvGrpSpPr>
+        <p:cNvPr id="1" name=""/>
+        <p:cNvGrpSpPr/>
+        <p:nvPr/>
+      </p:nvGrpSpPr>
+      <p:grpSpPr/>
+      <p:sp>
+        <p:nvSpPr>
+          <p:cNvPr id="2" name="TextBox 1"/>
+          <p:cNvSpPr txBox="1"/>
+          <p:nvPr/>
+        </p:nvSpPr>
+        <p:spPr>
+          <a:xfrm>
+            <a:off x="566928" y="347472"/>
+            <a:ext cx="10881360" cy="438912"/>
+          </a:xfrm>
+          <a:prstGeom prst="rect">
+            <a:avLst/>
+          </a:prstGeom>
+          <a:noFill/>
+        </p:spPr>
+        <p:txBody>
+          <a:bodyPr wrap="square" lIns="73152" rIns="73152" tIns="36576" bIns="36576">
+            <a:spAutoFit/>
+          </a:bodyPr>
+          <a:lstStyle/>
+          <a:p>
+            <a:pPr algn="l">
+              <a:spcAft>
+                <a:spcPts val="0"/>
+              </a:spcAft>
+              <a:defRPr sz="3200" b="1">
+                <a:solidFill>
+                  <a:srgbClr val="122C4E"/>
+                </a:solidFill>
+                <a:latin typeface="Noto Sans CJK KR"/>
+              </a:defRPr>
+            </a:pPr>
+            <a:r>
               <a:t>공식 참고 자료</a:t>
             </a:r>
           </a:p>
@@ -12651,7 +14053,7 @@
               </a:defRPr>
             </a:pPr>
             <a:r>
-              <a:t>현재 단계 시작    |    현재 폴더 ~/agv_ws    |    현재 터미널</a:t>
+              <a:t>현재 단계 시작    |    현재 폴더 ~/ros2_curri/agv_ws    |    현재 터미널</a:t>
             </a:r>
           </a:p>
         </p:txBody>
@@ -12767,7 +14169,7 @@
               </a:defRPr>
             </a:pPr>
             <a:r>
-              <a:t>• 현재 폴더: ~/agv_ws</a:t>
+              <a:t>• 현재 폴더: ~/ros2_curri/agv_ws</a:t>
             </a:r>
           </a:p>
           <a:p>
@@ -12838,7 +14240,7 @@
               </a:defRPr>
             </a:pPr>
             <a:r>
-              <a:t>확인: pwd가 ~/agv_ws이고, 이전 모듈의 완료 조건을 한 문장으로 설명할 수 있으면 시작합니다.</a:t>
+              <a:t>확인: pwd가 ~/ros2_curri/agv_ws이고, 이전 모듈의 완료 조건을 한 문장으로 설명할 수 있으면 시작합니다.</a:t>
             </a:r>
           </a:p>
         </p:txBody>
@@ -13953,7 +15355,7 @@
               </a:defRPr>
             </a:pPr>
             <a:r>
-              <a:t>~/agv_ws/src/</a:t>
+              <a:t>~/ros2_curri/agv_ws/src/</a:t>
             </a:r>
             <a:br/>
             <a:r>
@@ -14236,7 +15638,7 @@
               </a:defRPr>
             </a:pPr>
             <a:r>
-              <a:t>현재 단계 1/2    |    현재 폴더 ~/agv_ws    |    현재 터미널</a:t>
+              <a:t>현재 단계 1/2    |    현재 폴더 ~/ros2_curri/agv_ws    |    현재 터미널</a:t>
             </a:r>
           </a:p>
         </p:txBody>
@@ -14372,7 +15774,7 @@
               </a:defRPr>
             </a:pPr>
             <a:r>
-              <a:t>cd ~/agv_ws</a:t>
+              <a:t>cd ~/ros2_curri/agv_ws</a:t>
             </a:r>
             <a:br/>
             <a:r>
@@ -14694,7 +16096,7 @@
               </a:defRPr>
             </a:pPr>
             <a:r>
-              <a:t>현재 단계 2/2    |    현재 폴더 ~/agv_ws    |    현재 터미널</a:t>
+              <a:t>현재 단계 2/2    |    현재 폴더 ~/ros2_curri/agv_ws    |    현재 터미널</a:t>
             </a:r>
           </a:p>
         </p:txBody>
@@ -14969,7 +16371,7 @@
               </a:defRPr>
             </a:pPr>
             <a:r>
-              <a:t>파일을 새로 만들고 저장한다 (1/6)</a:t>
+              <a:t>파일을 새로 만들고 저장한다 (1/7)</a:t>
             </a:r>
           </a:p>
         </p:txBody>
@@ -15008,7 +16410,7 @@
               </a:defRPr>
             </a:pPr>
             <a:r>
-              <a:t>~/agv_ws/src/agv_mission/agv_mission/mission_manager.py</a:t>
+              <a:t>~/ros2_curri/agv_ws/src/agv_mission/agv_mission/mission_manager.py</a:t>
             </a:r>
           </a:p>
         </p:txBody>
@@ -15144,7 +16546,7 @@
               </a:defRPr>
             </a:pPr>
             <a:r>
-              <a:t>현재 단계 3/9    |    현재 폴더 ~/agv_ws    |    현재 터미널</a:t>
+              <a:t>현재 단계 3/10    |    현재 폴더 ~/ros2_curri/agv_ws    |    현재 터미널</a:t>
             </a:r>
           </a:p>
         </p:txBody>
@@ -15241,11 +16643,11 @@
               </a:defRPr>
             </a:pPr>
             <a:r>
-              <a:t>파일 생성: mkdir -p ~/agv_ws/src/agv_mission/agv_mission</a:t>
+              <a:t>파일 생성: mkdir -p ~/ros2_curri/agv_ws/src/agv_mission/agv_mission</a:t>
             </a:r>
             <a:br/>
             <a:r>
-              <a:t>파일 열기: nano ~/agv_ws/src/agv_mission/agv_mission/mission_manager.py</a:t>
+              <a:t>파일 열기: nano ~/ros2_curri/agv_ws/src/agv_mission/agv_mission/mission_manager.py</a:t>
             </a:r>
           </a:p>
         </p:txBody>
@@ -15380,7 +16782,7 @@
               </a:defRPr>
             </a:pPr>
             <a:r>
-              <a:t>파일 전체 1/6 · 이 슬라이드 다음에 같은 파일의 나머지 줄이 이어집니다.</a:t>
+              <a:t>파일 전체 1/7 · 이 슬라이드 다음에 같은 파일의 나머지 줄이 이어집니다.</a:t>
             </a:r>
           </a:p>
         </p:txBody>

--- a/blocks/E_autonomy_logic/M19_mission_fsm/M19_Mission_State_Machine.pptx
+++ b/blocks/E_autonomy_logic/M19_mission_fsm/M19_Mission_State_Machine.pptx
@@ -31,6 +31,8 @@
     <p:sldId id="279" r:id="rId31"/>
     <p:sldId id="280" r:id="rId32"/>
     <p:sldId id="281" r:id="rId33"/>
+    <p:sldId id="282" r:id="rId34"/>
+    <p:sldId id="283" r:id="rId35"/>
   </p:sldIdLst>
   <p:sldSz cx="12191999" cy="6858000" type="screen4x3"/>
   <p:notesSz cx="6858000" cy="9144000"/>
@@ -617,17 +619,22 @@
           <a:lstStyle/>
           <a:p>
             <a:r>
-              <a:t>[설명] ~/ros2_curri/agv_ws/src/agv_mission/agv_mission/mission_manager.py의 전체 파일을 2/7 구간으로 작성한다.</a:t>
-            </a:r>
-          </a:p>
-          <a:p>
-            <a:r>
-              <a:t>[실행] nano ~/ros2_curri/agv_ws/src/agv_mission/agv_mission/mission_manager.py</a:t>
-            </a:r>
-          </a:p>
-          <a:p>
-            <a:r>
-              <a:t>[확인] 코드를 저장하고 다음 코드 슬라이드 또는 build 단계로 이동한다.</a:t>
+              <a:t>[설명] 상태의 이름과 속도 command를 서로 다른 topic에서 확인한다.</a:t>
+            </a:r>
+          </a:p>
+          <a:p>
+            <a:r>
+              <a:t>[실행] ros2 topic echo /mission_state</a:t>
+            </a:r>
+          </a:p>
+          <a:p>
+            <a:r>
+              <a:t>ros2 topic echo /cmd_vel_raw</a:t>
+            </a:r>
+          </a:p>
+          <a:p>
+            <a:r>
+              <a:t>[확인] 명령 출력에서 슬라이드의 확인 항목을 찾는다.</a:t>
             </a:r>
           </a:p>
           <a:p>
@@ -637,7 +644,7 @@
           </a:p>
           <a:p>
             <a:r>
-              <a:t>[오류] 들여쓰기·XML 태그·따옴표가 슬라이드와 정확히 같은지 확인한다.</a:t>
+              <a:t>[오류] 오류가 나면 현재 폴더, source, 파일 경로를 먼저 확인한다.</a:t>
             </a:r>
           </a:p>
         </p:txBody>
@@ -707,7 +714,7 @@
           <a:lstStyle/>
           <a:p>
             <a:r>
-              <a:t>[설명] ~/ros2_curri/agv_ws/src/agv_mission/agv_mission/mission_manager.py의 전체 파일을 3/7 구간으로 작성한다.</a:t>
+              <a:t>[설명] ~/ros2_curri/agv_ws/src/agv_mission/agv_mission/mission_manager.py의 전체 파일을 1/7 구간으로 작성한다.</a:t>
             </a:r>
           </a:p>
           <a:p>
@@ -797,7 +804,7 @@
           <a:lstStyle/>
           <a:p>
             <a:r>
-              <a:t>[설명] ~/ros2_curri/agv_ws/src/agv_mission/agv_mission/mission_manager.py의 전체 파일을 4/7 구간으로 작성한다.</a:t>
+              <a:t>[설명] ~/ros2_curri/agv_ws/src/agv_mission/agv_mission/mission_manager.py의 전체 파일을 2/7 구간으로 작성한다.</a:t>
             </a:r>
           </a:p>
           <a:p>
@@ -887,7 +894,7 @@
           <a:lstStyle/>
           <a:p>
             <a:r>
-              <a:t>[설명] ~/ros2_curri/agv_ws/src/agv_mission/agv_mission/mission_manager.py의 전체 파일을 5/7 구간으로 작성한다.</a:t>
+              <a:t>[설명] ~/ros2_curri/agv_ws/src/agv_mission/agv_mission/mission_manager.py의 전체 파일을 3/7 구간으로 작성한다.</a:t>
             </a:r>
           </a:p>
           <a:p>
@@ -977,7 +984,7 @@
           <a:lstStyle/>
           <a:p>
             <a:r>
-              <a:t>[설명] ~/ros2_curri/agv_ws/src/agv_mission/agv_mission/mission_manager.py의 전체 파일을 6/7 구간으로 작성한다.</a:t>
+              <a:t>[설명] ~/ros2_curri/agv_ws/src/agv_mission/agv_mission/mission_manager.py의 전체 파일을 4/7 구간으로 작성한다.</a:t>
             </a:r>
           </a:p>
           <a:p>
@@ -1067,7 +1074,7 @@
           <a:lstStyle/>
           <a:p>
             <a:r>
-              <a:t>[설명] ~/ros2_curri/agv_ws/src/agv_mission/agv_mission/mission_manager.py의 전체 파일을 7/7 구간으로 작성한다.</a:t>
+              <a:t>[설명] ~/ros2_curri/agv_ws/src/agv_mission/agv_mission/mission_manager.py의 전체 파일을 5/7 구간으로 작성한다.</a:t>
             </a:r>
           </a:p>
           <a:p>
@@ -1157,12 +1164,12 @@
           <a:lstStyle/>
           <a:p>
             <a:r>
-              <a:t>[설명] ~/ros2_curri/agv_ws/src/agv_bringup/config/mission.yaml의 전체 파일을 1/2 구간으로 작성한다.</a:t>
-            </a:r>
-          </a:p>
-          <a:p>
-            <a:r>
-              <a:t>[실행] nano ~/ros2_curri/agv_ws/src/agv_bringup/config/mission.yaml</a:t>
+              <a:t>[설명] ~/ros2_curri/agv_ws/src/agv_mission/agv_mission/mission_manager.py의 전체 파일을 6/7 구간으로 작성한다.</a:t>
+            </a:r>
+          </a:p>
+          <a:p>
+            <a:r>
+              <a:t>[실행] nano ~/ros2_curri/agv_ws/src/agv_mission/agv_mission/mission_manager.py</a:t>
             </a:r>
           </a:p>
           <a:p>
@@ -1247,12 +1254,12 @@
           <a:lstStyle/>
           <a:p>
             <a:r>
-              <a:t>[설명] ~/ros2_curri/agv_ws/src/agv_bringup/config/mission.yaml의 전체 파일을 2/2 구간으로 작성한다.</a:t>
-            </a:r>
-          </a:p>
-          <a:p>
-            <a:r>
-              <a:t>[실행] nano ~/ros2_curri/agv_ws/src/agv_bringup/config/mission.yaml</a:t>
+              <a:t>[설명] ~/ros2_curri/agv_ws/src/agv_mission/agv_mission/mission_manager.py의 전체 파일을 7/7 구간으로 작성한다.</a:t>
+            </a:r>
+          </a:p>
+          <a:p>
+            <a:r>
+              <a:t>[실행] nano ~/ros2_curri/agv_ws/src/agv_mission/agv_mission/mission_manager.py</a:t>
             </a:r>
           </a:p>
           <a:p>
@@ -1337,12 +1344,12 @@
           <a:lstStyle/>
           <a:p>
             <a:r>
-              <a:t>[설명] ~/ros2_curri/agv_ws/src/agv_mission/setup.py의 전체 파일을 1/1 구간으로 작성한다.</a:t>
-            </a:r>
-          </a:p>
-          <a:p>
-            <a:r>
-              <a:t>[실행] nano ~/ros2_curri/agv_ws/src/agv_mission/setup.py</a:t>
+              <a:t>[설명] ~/ros2_curri/agv_ws/src/agv_bringup/config/mission.yaml의 전체 파일을 1/2 구간으로 작성한다.</a:t>
+            </a:r>
+          </a:p>
+          <a:p>
+            <a:r>
+              <a:t>[실행] nano ~/ros2_curri/agv_ws/src/agv_bringup/config/mission.yaml</a:t>
             </a:r>
           </a:p>
           <a:p>
@@ -1427,22 +1434,17 @@
           <a:lstStyle/>
           <a:p>
             <a:r>
-              <a:t>[설명] build/source/run을 생략 없이 실행한다.</a:t>
-            </a:r>
-          </a:p>
-          <a:p>
-            <a:r>
-              <a:t>[실행] source ~/ros2_curri/agv_ws/install/setup.bash</a:t>
-            </a:r>
-          </a:p>
-          <a:p>
-            <a:r>
-              <a:t>ros2 run agv_mission mission_manager</a:t>
-            </a:r>
-          </a:p>
-          <a:p>
-            <a:r>
-              <a:t>[확인] /mission_state 로그와 /cmd_vel_raw가 detection·obstacle input에 따라 바뀌는 구조를 확인한다.</a:t>
+              <a:t>[설명] ~/ros2_curri/agv_ws/src/agv_bringup/config/mission.yaml의 전체 파일을 2/2 구간으로 작성한다.</a:t>
+            </a:r>
+          </a:p>
+          <a:p>
+            <a:r>
+              <a:t>[실행] nano ~/ros2_curri/agv_ws/src/agv_bringup/config/mission.yaml</a:t>
+            </a:r>
+          </a:p>
+          <a:p>
+            <a:r>
+              <a:t>[확인] 코드를 저장하고 다음 코드 슬라이드 또는 build 단계로 이동한다.</a:t>
             </a:r>
           </a:p>
           <a:p>
@@ -1452,7 +1454,7 @@
           </a:p>
           <a:p>
             <a:r>
-              <a:t>[오류] 오류가 나면 현재 폴더, source, 파일 경로를 먼저 확인한다.</a:t>
+              <a:t>[오류] 들여쓰기·XML 태그·따옴표가 슬라이드와 정확히 같은지 확인한다.</a:t>
             </a:r>
           </a:p>
         </p:txBody>
@@ -1612,17 +1614,17 @@
           <a:lstStyle/>
           <a:p>
             <a:r>
-              <a:t>[설명] 실제 Ubuntu/ROS 2 환경에서 생성한 검증 화면이다.</a:t>
-            </a:r>
-          </a:p>
-          <a:p>
-            <a:r>
-              <a:t>[실행] 슬라이드의 명령 또는 파일 작성 단계를 진행한다.</a:t>
-            </a:r>
-          </a:p>
-          <a:p>
-            <a:r>
-              <a:t>[확인] 캡처의 명령과 다음 슬라이드의 검증 명령을 비교한다.</a:t>
+              <a:t>[설명] ~/ros2_curri/agv_ws/src/agv_mission/setup.py의 전체 파일을 1/1 구간으로 작성한다.</a:t>
+            </a:r>
+          </a:p>
+          <a:p>
+            <a:r>
+              <a:t>[실행] nano ~/ros2_curri/agv_ws/src/agv_mission/setup.py</a:t>
+            </a:r>
+          </a:p>
+          <a:p>
+            <a:r>
+              <a:t>[확인] 코드를 저장하고 다음 코드 슬라이드 또는 build 단계로 이동한다.</a:t>
             </a:r>
           </a:p>
           <a:p>
@@ -1632,7 +1634,7 @@
           </a:p>
           <a:p>
             <a:r>
-              <a:t>[오류] 오류가 나면 현재 폴더, source, 파일 경로를 먼저 확인한다.</a:t>
+              <a:t>[오류] 들여쓰기·XML 태그·따옴표가 슬라이드와 정확히 같은지 확인한다.</a:t>
             </a:r>
           </a:p>
         </p:txBody>
@@ -1702,17 +1704,22 @@
           <a:lstStyle/>
           <a:p>
             <a:r>
-              <a:t>[설명] 실제 Ubuntu/ROS 2 환경에서 생성한 검증 화면이다.</a:t>
-            </a:r>
-          </a:p>
-          <a:p>
-            <a:r>
-              <a:t>[실행] 슬라이드의 명령 또는 파일 작성 단계를 진행한다.</a:t>
-            </a:r>
-          </a:p>
-          <a:p>
-            <a:r>
-              <a:t>[확인] 캡처의 명령과 다음 슬라이드의 검증 명령을 비교한다.</a:t>
+              <a:t>[설명] build/source/run을 생략 없이 실행한다.</a:t>
+            </a:r>
+          </a:p>
+          <a:p>
+            <a:r>
+              <a:t>[실행] source ~/ros2_curri/agv_ws/install/setup.bash</a:t>
+            </a:r>
+          </a:p>
+          <a:p>
+            <a:r>
+              <a:t>ros2 run agv_mission mission_manager</a:t>
+            </a:r>
+          </a:p>
+          <a:p>
+            <a:r>
+              <a:t>[확인] /mission_state 로그와 /cmd_vel_raw가 detection·obstacle input에 따라 바뀌는 구조를 확인한다.</a:t>
             </a:r>
           </a:p>
           <a:p>
@@ -1792,27 +1799,17 @@
           <a:lstStyle/>
           <a:p>
             <a:r>
-              <a:t>[설명] 검증 명령은 GUI 결과와 별도로 실행해 재현 가능한 완료 기준을 만든다.</a:t>
-            </a:r>
-          </a:p>
-          <a:p>
-            <a:r>
-              <a:t>[실행] ros2 topic info /mission_state</a:t>
-            </a:r>
-          </a:p>
-          <a:p>
-            <a:r>
-              <a:t>ros2 topic info /cmd_vel_raw</a:t>
-            </a:r>
-          </a:p>
-          <a:p>
-            <a:r>
-              <a:t>ros2 param get /mission_manager stop_distance</a:t>
-            </a:r>
-          </a:p>
-          <a:p>
-            <a:r>
-              <a:t>[확인] /mission_state 로그와 /cmd_vel_raw가 detection·obstacle input에 따라 바뀌는 구조를 확인한다.</a:t>
+              <a:t>[설명] 실제 Ubuntu/ROS 2 환경에서 생성한 검증 화면이다.</a:t>
+            </a:r>
+          </a:p>
+          <a:p>
+            <a:r>
+              <a:t>[실행] 슬라이드의 명령 또는 파일 작성 단계를 진행한다.</a:t>
+            </a:r>
+          </a:p>
+          <a:p>
+            <a:r>
+              <a:t>[확인] ① 명령/설정  ② 정상 출력 또는 화면  ③ 다음 검증 명령으로 재확인</a:t>
             </a:r>
           </a:p>
           <a:p>
@@ -1892,7 +1889,7 @@
           <a:lstStyle/>
           <a:p>
             <a:r>
-              <a:t>[설명] 오류를 대신 해결하지 말고 증상부터 우선 확인 순서대로 교육생이 실행하게 한다.</a:t>
+              <a:t>[설명] 실제 Ubuntu/ROS 2 환경에서 생성한 검증 화면이다.</a:t>
             </a:r>
           </a:p>
           <a:p>
@@ -1902,7 +1899,7 @@
           </a:p>
           <a:p>
             <a:r>
-              <a:t>[확인] 수정 뒤 첫 검증 명령을 다시 실행한다.</a:t>
+              <a:t>[확인] 명령·설정과 화면의 topic·frame·결과 이름을 대조합니다.</a:t>
             </a:r>
           </a:p>
           <a:p>
@@ -1912,7 +1909,7 @@
           </a:p>
           <a:p>
             <a:r>
-              <a:t>[오류] 슬라이드의 두 대표 오류를 먼저 사용한다.</a:t>
+              <a:t>[오류] 오류가 나면 현재 폴더, source, 파일 경로를 먼저 확인한다.</a:t>
             </a:r>
           </a:p>
         </p:txBody>
@@ -1982,17 +1979,27 @@
           <a:lstStyle/>
           <a:p>
             <a:r>
-              <a:t>[설명] 교육생이 직접 한 값만 바꿔 원인과 결과를 연결하게 한다.</a:t>
-            </a:r>
-          </a:p>
-          <a:p>
-            <a:r>
-              <a:t>[실행] 슬라이드의 명령 또는 파일 작성 단계를 진행한다.</a:t>
-            </a:r>
-          </a:p>
-          <a:p>
-            <a:r>
-              <a:t>[확인] 원래 값과 변경 값을 모두 기록한다.</a:t>
+              <a:t>[설명] 검증 명령은 GUI 결과와 별도로 실행해 재현 가능한 완료 기준을 만든다.</a:t>
+            </a:r>
+          </a:p>
+          <a:p>
+            <a:r>
+              <a:t>[실행] ros2 topic info /mission_state</a:t>
+            </a:r>
+          </a:p>
+          <a:p>
+            <a:r>
+              <a:t>ros2 topic info /cmd_vel_raw</a:t>
+            </a:r>
+          </a:p>
+          <a:p>
+            <a:r>
+              <a:t>ros2 param get /mission_manager stop_distance</a:t>
+            </a:r>
+          </a:p>
+          <a:p>
+            <a:r>
+              <a:t>[확인] /mission_state 로그와 /cmd_vel_raw가 detection·obstacle input에 따라 바뀌는 구조를 확인한다.</a:t>
             </a:r>
           </a:p>
           <a:p>
@@ -2072,7 +2079,7 @@
           <a:lstStyle/>
           <a:p>
             <a:r>
-              <a:t>[설명] 교육생이 Complete·캡처·로그를 저장했는지 확인하고 다음 모듈의 시작 상태를 읽는다.</a:t>
+              <a:t>[설명] 오류를 대신 해결하지 말고 증상부터 우선 확인 순서대로 교육생이 실행하게 한다.</a:t>
             </a:r>
           </a:p>
           <a:p>
@@ -2082,7 +2089,7 @@
           </a:p>
           <a:p>
             <a:r>
-              <a:t>[확인] M20 PID 시작 조건을 말할 수 있다.</a:t>
+              <a:t>[확인] 수정 뒤 첫 검증 명령을 다시 실행한다.</a:t>
             </a:r>
           </a:p>
           <a:p>
@@ -2092,7 +2099,7 @@
           </a:p>
           <a:p>
             <a:r>
-              <a:t>[오류] 오류가 나면 현재 폴더, source, 파일 경로를 먼저 확인한다.</a:t>
+              <a:t>[오류] 슬라이드의 두 대표 오류를 먼저 사용한다.</a:t>
             </a:r>
           </a:p>
         </p:txBody>
@@ -2162,6 +2169,186 @@
           <a:lstStyle/>
           <a:p>
             <a:r>
+              <a:t>[설명] 교육생이 직접 한 값만 바꿔 원인과 결과를 연결하게 한다.</a:t>
+            </a:r>
+          </a:p>
+          <a:p>
+            <a:r>
+              <a:t>[실행] 슬라이드의 명령 또는 파일 작성 단계를 진행한다.</a:t>
+            </a:r>
+          </a:p>
+          <a:p>
+            <a:r>
+              <a:t>[확인] 원래 값과 변경 값을 모두 기록한다.</a:t>
+            </a:r>
+          </a:p>
+          <a:p>
+            <a:r>
+              <a:t>[멈춤] 교육생이 현재 체크포인트를 통과할 때까지 기다린다.</a:t>
+            </a:r>
+          </a:p>
+          <a:p>
+            <a:r>
+              <a:t>[오류] 오류가 나면 현재 폴더, source, 파일 경로를 먼저 확인한다.</a:t>
+            </a:r>
+          </a:p>
+        </p:txBody>
+      </p:sp>
+      <p:sp>
+        <p:nvSpPr>
+          <p:cNvPr id="4" name="Slide Number Placeholder 3"/>
+          <p:cNvSpPr>
+            <a:spLocks noGrp="1"/>
+          </p:cNvSpPr>
+          <p:nvPr>
+            <p:ph type="sldNum" idx="5" sz="quarter"/>
+          </p:nvPr>
+        </p:nvSpPr>
+        <p:spPr/>
+      </p:sp>
+    </p:spTree>
+  </p:cSld>
+  <p:clrMapOvr>
+    <a:masterClrMapping/>
+  </p:clrMapOvr>
+</p:notes>
+</file>
+
+<file path=ppt/notesSlides/notesSlide27.xml><?xml version="1.0" encoding="utf-8"?>
+<p:notes xmlns:a="http://schemas.openxmlformats.org/drawingml/2006/main" xmlns:p="http://schemas.openxmlformats.org/presentationml/2006/main" xmlns:r="http://schemas.openxmlformats.org/officeDocument/2006/relationships">
+  <p:cSld>
+    <p:spTree>
+      <p:nvGrpSpPr>
+        <p:cNvPr id="1" name=""/>
+        <p:cNvGrpSpPr/>
+        <p:nvPr/>
+      </p:nvGrpSpPr>
+      <p:grpSpPr>
+        <a:xfrm>
+          <a:off x="0" y="0"/>
+          <a:ext cx="0" cy="0"/>
+          <a:chOff x="0" y="0"/>
+          <a:chExt cx="0" cy="0"/>
+        </a:xfrm>
+      </p:grpSpPr>
+      <p:sp>
+        <p:nvSpPr>
+          <p:cNvPr id="2" name="Slide Image Placeholder 1"/>
+          <p:cNvSpPr>
+            <a:spLocks noGrp="1"/>
+          </p:cNvSpPr>
+          <p:nvPr>
+            <p:ph type="sldImg" idx="2"/>
+          </p:nvPr>
+        </p:nvSpPr>
+        <p:spPr/>
+      </p:sp>
+      <p:sp>
+        <p:nvSpPr>
+          <p:cNvPr id="3" name="Notes Placeholder 2"/>
+          <p:cNvSpPr>
+            <a:spLocks noGrp="1"/>
+          </p:cNvSpPr>
+          <p:nvPr>
+            <p:ph type="body" idx="3" sz="quarter"/>
+          </p:nvPr>
+        </p:nvSpPr>
+        <p:spPr/>
+        <p:txBody>
+          <a:bodyPr/>
+          <a:lstStyle/>
+          <a:p>
+            <a:r>
+              <a:t>[설명] 교육생이 Complete·캡처·로그를 저장했는지 확인하고 다음 모듈의 시작 상태를 읽는다.</a:t>
+            </a:r>
+          </a:p>
+          <a:p>
+            <a:r>
+              <a:t>[실행] 슬라이드의 명령 또는 파일 작성 단계를 진행한다.</a:t>
+            </a:r>
+          </a:p>
+          <a:p>
+            <a:r>
+              <a:t>[확인] M20 PID 시작 조건을 말할 수 있다.</a:t>
+            </a:r>
+          </a:p>
+          <a:p>
+            <a:r>
+              <a:t>[멈춤] 교육생이 현재 체크포인트를 통과할 때까지 기다린다.</a:t>
+            </a:r>
+          </a:p>
+          <a:p>
+            <a:r>
+              <a:t>[오류] 오류가 나면 현재 폴더, source, 파일 경로를 먼저 확인한다.</a:t>
+            </a:r>
+          </a:p>
+        </p:txBody>
+      </p:sp>
+      <p:sp>
+        <p:nvSpPr>
+          <p:cNvPr id="4" name="Slide Number Placeholder 3"/>
+          <p:cNvSpPr>
+            <a:spLocks noGrp="1"/>
+          </p:cNvSpPr>
+          <p:nvPr>
+            <p:ph type="sldNum" idx="5" sz="quarter"/>
+          </p:nvPr>
+        </p:nvSpPr>
+        <p:spPr/>
+      </p:sp>
+    </p:spTree>
+  </p:cSld>
+  <p:clrMapOvr>
+    <a:masterClrMapping/>
+  </p:clrMapOvr>
+</p:notes>
+</file>
+
+<file path=ppt/notesSlides/notesSlide28.xml><?xml version="1.0" encoding="utf-8"?>
+<p:notes xmlns:a="http://schemas.openxmlformats.org/drawingml/2006/main" xmlns:p="http://schemas.openxmlformats.org/presentationml/2006/main" xmlns:r="http://schemas.openxmlformats.org/officeDocument/2006/relationships">
+  <p:cSld>
+    <p:spTree>
+      <p:nvGrpSpPr>
+        <p:cNvPr id="1" name=""/>
+        <p:cNvGrpSpPr/>
+        <p:nvPr/>
+      </p:nvGrpSpPr>
+      <p:grpSpPr>
+        <a:xfrm>
+          <a:off x="0" y="0"/>
+          <a:ext cx="0" cy="0"/>
+          <a:chOff x="0" y="0"/>
+          <a:chExt cx="0" cy="0"/>
+        </a:xfrm>
+      </p:grpSpPr>
+      <p:sp>
+        <p:nvSpPr>
+          <p:cNvPr id="2" name="Slide Image Placeholder 1"/>
+          <p:cNvSpPr>
+            <a:spLocks noGrp="1"/>
+          </p:cNvSpPr>
+          <p:nvPr>
+            <p:ph type="sldImg" idx="2"/>
+          </p:nvPr>
+        </p:nvSpPr>
+        <p:spPr/>
+      </p:sp>
+      <p:sp>
+        <p:nvSpPr>
+          <p:cNvPr id="3" name="Notes Placeholder 2"/>
+          <p:cNvSpPr>
+            <a:spLocks noGrp="1"/>
+          </p:cNvSpPr>
+          <p:nvPr>
+            <p:ph type="body" idx="3" sz="quarter"/>
+          </p:nvPr>
+        </p:nvSpPr>
+        <p:spPr/>
+        <p:txBody>
+          <a:bodyPr/>
+          <a:lstStyle/>
+          <a:p>
+            <a:r>
               <a:t>[설명] 공식 문서는 버전 차이와 확장 학습을 확인할 때 사용한다.</a:t>
             </a:r>
           </a:p>
@@ -2612,32 +2799,17 @@
           <a:lstStyle/>
           <a:p>
             <a:r>
-              <a:t>[설명] 상태는 흩어진 if문이 아니라 한 곳에서 /cmd_vel_raw를 결정한다.</a:t>
-            </a:r>
-          </a:p>
-          <a:p>
-            <a:r>
-              <a:t>[실행] cd ~/ros2_curri/agv_ws</a:t>
-            </a:r>
-          </a:p>
-          <a:p>
-            <a:r>
-              <a:t>colcon build --symlink-install --packages-select agv_mission</a:t>
-            </a:r>
-          </a:p>
-          <a:p>
-            <a:r>
-              <a:t>source install/setup.bash</a:t>
-            </a:r>
-          </a:p>
-          <a:p>
-            <a:r>
-              <a:t>ros2 run agv_mission mission_manager</a:t>
-            </a:r>
-          </a:p>
-          <a:p>
-            <a:r>
-              <a:t>[확인] 명령 출력에서 슬라이드의 확인 항목을 찾는다.</a:t>
+              <a:t>[설명] 파일을 코드 문법보다 먼저 역할·사용법·확인 화면으로 설명한다.</a:t>
+            </a:r>
+          </a:p>
+          <a:p>
+            <a:r>
+              <a:t>[실행] 슬라이드의 명령 또는 파일 작성 단계를 진행한다.</a:t>
+            </a:r>
+          </a:p>
+          <a:p>
+            <a:r>
+              <a:t>[확인] 교육생이 각 파일의 산출물과 확인 위치를 말할 수 있다.</a:t>
             </a:r>
           </a:p>
           <a:p>
@@ -2717,22 +2889,17 @@
           <a:lstStyle/>
           <a:p>
             <a:r>
-              <a:t>[설명] 상태의 이름과 속도 command를 서로 다른 topic에서 확인한다.</a:t>
-            </a:r>
-          </a:p>
-          <a:p>
-            <a:r>
-              <a:t>[실행] ros2 topic echo /mission_state</a:t>
-            </a:r>
-          </a:p>
-          <a:p>
-            <a:r>
-              <a:t>ros2 topic echo /cmd_vel_raw</a:t>
-            </a:r>
-          </a:p>
-          <a:p>
-            <a:r>
-              <a:t>[확인] 명령 출력에서 슬라이드의 확인 항목을 찾는다.</a:t>
+              <a:t>[설명] 파일을 코드 문법보다 먼저 역할·사용법·확인 화면으로 설명한다.</a:t>
+            </a:r>
+          </a:p>
+          <a:p>
+            <a:r>
+              <a:t>[실행] 슬라이드의 명령 또는 파일 작성 단계를 진행한다.</a:t>
+            </a:r>
+          </a:p>
+          <a:p>
+            <a:r>
+              <a:t>[확인] 교육생이 각 파일의 산출물과 확인 위치를 말할 수 있다.</a:t>
             </a:r>
           </a:p>
           <a:p>
@@ -2812,17 +2979,32 @@
           <a:lstStyle/>
           <a:p>
             <a:r>
-              <a:t>[설명] ~/ros2_curri/agv_ws/src/agv_mission/agv_mission/mission_manager.py의 전체 파일을 1/7 구간으로 작성한다.</a:t>
-            </a:r>
-          </a:p>
-          <a:p>
-            <a:r>
-              <a:t>[실행] nano ~/ros2_curri/agv_ws/src/agv_mission/agv_mission/mission_manager.py</a:t>
-            </a:r>
-          </a:p>
-          <a:p>
-            <a:r>
-              <a:t>[확인] 코드를 저장하고 다음 코드 슬라이드 또는 build 단계로 이동한다.</a:t>
+              <a:t>[설명] 상태는 흩어진 if문이 아니라 한 곳에서 /cmd_vel_raw를 결정한다.</a:t>
+            </a:r>
+          </a:p>
+          <a:p>
+            <a:r>
+              <a:t>[실행] cd ~/ros2_curri/agv_ws</a:t>
+            </a:r>
+          </a:p>
+          <a:p>
+            <a:r>
+              <a:t>colcon build --symlink-install --packages-select agv_mission</a:t>
+            </a:r>
+          </a:p>
+          <a:p>
+            <a:r>
+              <a:t>source install/setup.bash</a:t>
+            </a:r>
+          </a:p>
+          <a:p>
+            <a:r>
+              <a:t>ros2 run agv_mission mission_manager</a:t>
+            </a:r>
+          </a:p>
+          <a:p>
+            <a:r>
+              <a:t>[확인] 명령 출력에서 슬라이드의 확인 항목을 찾는다.</a:t>
             </a:r>
           </a:p>
           <a:p>
@@ -2832,7 +3014,7 @@
           </a:p>
           <a:p>
             <a:r>
-              <a:t>[오류] 들여쓰기·XML 태그·따옴표가 슬라이드와 정확히 같은지 확인한다.</a:t>
+              <a:t>[오류] 오류가 나면 현재 폴더, source, 파일 경로를 먼저 확인한다.</a:t>
             </a:r>
           </a:p>
         </p:txBody>
@@ -6205,7 +6387,7 @@
               </a:defRPr>
             </a:pPr>
             <a:r>
-              <a:t>파일을 계속 작성하고 저장한다 (2/7)</a:t>
+              <a:t>상태 변화를 관찰한다</a:t>
             </a:r>
           </a:p>
         </p:txBody>
@@ -6244,7 +6426,7 @@
               </a:defRPr>
             </a:pPr>
             <a:r>
-              <a:t>~/ros2_curri/agv_ws/src/agv_mission/agv_mission/mission_manager.py</a:t>
+              <a:t>한 장에는 한 행동만 수행합니다.</a:t>
             </a:r>
           </a:p>
         </p:txBody>
@@ -6380,7 +6562,7 @@
               </a:defRPr>
             </a:pPr>
             <a:r>
-              <a:t>현재 단계 4/10    |    현재 폴더 ~/ros2_curri/agv_ws    |    현재 터미널</a:t>
+              <a:t>현재 단계 2/2    |    현재 폴더 ~/ros2_curri/agv_ws    |    현재 터미널</a:t>
             </a:r>
           </a:p>
         </p:txBody>
@@ -6393,8 +6575,8 @@
         </p:nvSpPr>
         <p:spPr>
           <a:xfrm>
-            <a:off x="658368" y="1627632"/>
-            <a:ext cx="10972800" cy="256032"/>
+            <a:off x="676656" y="1764792"/>
+            <a:ext cx="1828800" cy="347472"/>
           </a:xfrm>
           <a:prstGeom prst="rect">
             <a:avLst/>
@@ -6411,7 +6593,46 @@
               <a:spcAft>
                 <a:spcPts val="0"/>
               </a:spcAft>
-              <a:defRPr sz="1500" b="1">
+              <a:defRPr sz="1800" b="1">
+                <a:solidFill>
+                  <a:srgbClr val="225B9B"/>
+                </a:solidFill>
+                <a:latin typeface="Noto Sans CJK KR"/>
+              </a:defRPr>
+            </a:pPr>
+            <a:r>
+              <a:t>왜 하는가</a:t>
+            </a:r>
+          </a:p>
+        </p:txBody>
+      </p:sp>
+      <p:sp>
+        <p:nvSpPr>
+          <p:cNvPr id="8" name="TextBox 7"/>
+          <p:cNvSpPr txBox="1"/>
+          <p:nvPr/>
+        </p:nvSpPr>
+        <p:spPr>
+          <a:xfrm>
+            <a:off x="676656" y="2103120"/>
+            <a:ext cx="10789920" cy="512064"/>
+          </a:xfrm>
+          <a:prstGeom prst="rect">
+            <a:avLst/>
+          </a:prstGeom>
+          <a:noFill/>
+        </p:spPr>
+        <p:txBody>
+          <a:bodyPr wrap="square" lIns="73152" rIns="73152" tIns="36576" bIns="36576">
+            <a:spAutoFit/>
+          </a:bodyPr>
+          <a:lstStyle/>
+          <a:p>
+            <a:pPr algn="l">
+              <a:spcAft>
+                <a:spcPts val="0"/>
+              </a:spcAft>
+              <a:defRPr sz="2000" b="0">
                 <a:solidFill>
                   <a:srgbClr val="122C4E"/>
                 </a:solidFill>
@@ -6419,85 +6640,23 @@
               </a:defRPr>
             </a:pPr>
             <a:r>
-              <a:t>이번 단계: 파일의 전체 내용을 중간 생략 없이 작성합니다. 아래 줄 범위를 끝까지 입력하세요.</a:t>
-            </a:r>
-          </a:p>
-        </p:txBody>
-      </p:sp>
-      <p:sp>
-        <p:nvSpPr>
-          <p:cNvPr id="8" name="Rectangle 7"/>
+              <a:t>상태의 이름과 속도 command를 서로 다른 topic에서 확인한다.</a:t>
+            </a:r>
+          </a:p>
+        </p:txBody>
+      </p:sp>
+      <p:sp>
+        <p:nvSpPr>
+          <p:cNvPr id="9" name="Rounded Rectangle 8"/>
           <p:cNvSpPr/>
           <p:nvPr/>
         </p:nvSpPr>
         <p:spPr>
           <a:xfrm>
-            <a:off x="658368" y="1956816"/>
-            <a:ext cx="10972800" cy="603504"/>
-          </a:xfrm>
-          <a:prstGeom prst="rect">
-            <a:avLst/>
-          </a:prstGeom>
-          <a:solidFill>
-            <a:srgbClr val="F4F7FB"/>
-          </a:solidFill>
-          <a:ln>
-            <a:solidFill>
-              <a:srgbClr val="F4F7FB"/>
-            </a:solidFill>
-          </a:ln>
-        </p:spPr>
-        <p:style>
-          <a:lnRef idx="1">
-            <a:schemeClr val="accent1"/>
-          </a:lnRef>
-          <a:fillRef idx="3">
-            <a:schemeClr val="accent1"/>
-          </a:fillRef>
-          <a:effectRef idx="2">
-            <a:schemeClr val="accent1"/>
-          </a:effectRef>
-          <a:fontRef idx="minor">
-            <a:schemeClr val="lt1"/>
-          </a:fontRef>
-        </p:style>
-        <p:txBody>
-          <a:bodyPr rtlCol="0" anchor="ctr" wrap="square" lIns="73152" rIns="73152" tIns="36576" bIns="36576"/>
-          <a:lstStyle/>
-          <a:p>
-            <a:pPr algn="l">
-              <a:spcAft>
-                <a:spcPts val="0"/>
-              </a:spcAft>
-              <a:defRPr sz="1400" b="0">
-                <a:solidFill>
-                  <a:srgbClr val="122C4E"/>
-                </a:solidFill>
-                <a:latin typeface="DejaVu Sans Mono"/>
-              </a:defRPr>
-            </a:pPr>
-            <a:r>
-              <a:t>파일 생성: mkdir -p ~/ros2_curri/agv_ws/src/agv_mission/agv_mission</a:t>
-            </a:r>
-            <a:br/>
-            <a:r>
-              <a:t>파일 열기: nano ~/ros2_curri/agv_ws/src/agv_mission/agv_mission/mission_manager.py</a:t>
-            </a:r>
-          </a:p>
-        </p:txBody>
-      </p:sp>
-      <p:sp>
-        <p:nvSpPr>
-          <p:cNvPr id="9" name="Rectangle 8"/>
-          <p:cNvSpPr/>
-          <p:nvPr/>
-        </p:nvSpPr>
-        <p:spPr>
-          <a:xfrm>
-            <a:off x="658368" y="2706624"/>
-            <a:ext cx="10972800" cy="3364992"/>
-          </a:xfrm>
-          <a:prstGeom prst="rect">
+            <a:off x="676656" y="2871216"/>
+            <a:ext cx="10835640" cy="2331720"/>
+          </a:xfrm>
+          <a:prstGeom prst="roundRect">
             <a:avLst/>
           </a:prstGeom>
           <a:solidFill>
@@ -6524,14 +6683,14 @@
           </a:fontRef>
         </p:style>
         <p:txBody>
-          <a:bodyPr rtlCol="0" anchor="ctr" wrap="square" lIns="164592" rIns="164592" tIns="109728" bIns="36576"/>
-          <a:lstStyle/>
-          <a:p>
-            <a:pPr algn="l">
-              <a:spcAft>
-                <a:spcPts val="0"/>
-              </a:spcAft>
-              <a:defRPr sz="1400" b="0">
+          <a:bodyPr rtlCol="0" anchor="ctr" wrap="square" lIns="73152" rIns="73152" tIns="36576" bIns="36576"/>
+          <a:lstStyle/>
+          <a:p>
+            <a:pPr algn="l">
+              <a:spcAft>
+                <a:spcPts val="0"/>
+              </a:spcAft>
+              <a:defRPr sz="1600" b="0">
                 <a:solidFill>
                   <a:srgbClr val="FFFFFF"/>
                 </a:solidFill>
@@ -6539,51 +6698,11 @@
               </a:defRPr>
             </a:pPr>
             <a:r>
-              <a:t>        self.declare_parameter('search_speed', 0.25)</a:t>
+              <a:t>ros2 topic echo /mission_state</a:t>
             </a:r>
             <a:br/>
             <a:r>
-              <a:t>        self.declare_parameter('approach_speed', 0.15)</a:t>
-            </a:r>
-            <a:br/>
-            <a:r>
-              <a:t>        self.declare_parameter('image_center_x', 320)</a:t>
-            </a:r>
-            <a:br/>
-            <a:r>
-              <a:t>        self.declare_parameter('target_timeout_sec', 0.7)</a:t>
-            </a:r>
-            <a:br/>
-            <a:r>
-              <a:t>        self.state = 'IDLE'</a:t>
-            </a:r>
-            <a:br/>
-            <a:r>
-              <a:t>        self.obstacle_distance = math.inf</a:t>
-            </a:r>
-            <a:br/>
-            <a:r>
-              <a:t>        self.target = None</a:t>
-            </a:r>
-            <a:br/>
-            <a:r>
-              <a:t>        self.last_target_time = None</a:t>
-            </a:r>
-            <a:br/>
-            <a:r>
-              <a:t>        self.create_subscription(Float32, '/obstacle_distance', self.obstacle_callback,</a:t>
-            </a:r>
-            <a:br/>
-            <a:r>
-              <a:t>            10)</a:t>
-            </a:r>
-            <a:br/>
-            <a:r>
-              <a:t>        self.create_subscription(DetectionArray, '/detections', self.detections_callback,</a:t>
-            </a:r>
-            <a:br/>
-            <a:r>
-              <a:t>             10)</a:t>
+              <a:t>ros2 topic echo /cmd_vel_raw</a:t>
             </a:r>
           </a:p>
         </p:txBody>
@@ -6596,8 +6715,8 @@
         </p:nvSpPr>
         <p:spPr>
           <a:xfrm>
-            <a:off x="749808" y="6181344"/>
-            <a:ext cx="10789920" cy="201168"/>
+            <a:off x="768096" y="5468112"/>
+            <a:ext cx="1143000" cy="256032"/>
           </a:xfrm>
           <a:prstGeom prst="rect">
             <a:avLst/>
@@ -6614,15 +6733,54 @@
               <a:spcAft>
                 <a:spcPts val="0"/>
               </a:spcAft>
-              <a:defRPr sz="1000" b="0">
-                <a:solidFill>
-                  <a:srgbClr val="5C6672"/>
-                </a:solidFill>
-                <a:latin typeface="Noto Sans CJK KR"/>
-              </a:defRPr>
-            </a:pPr>
-            <a:r>
-              <a:t>파일 전체 2/7 · 이 슬라이드 다음에 같은 파일의 나머지 줄이 이어집니다.</a:t>
+              <a:defRPr sz="1800" b="1">
+                <a:solidFill>
+                  <a:srgbClr val="2A8B5A"/>
+                </a:solidFill>
+                <a:latin typeface="Noto Sans CJK KR"/>
+              </a:defRPr>
+            </a:pPr>
+            <a:r>
+              <a:t>확인</a:t>
+            </a:r>
+          </a:p>
+        </p:txBody>
+      </p:sp>
+      <p:sp>
+        <p:nvSpPr>
+          <p:cNvPr id="11" name="TextBox 10"/>
+          <p:cNvSpPr txBox="1"/>
+          <p:nvPr/>
+        </p:nvSpPr>
+        <p:spPr>
+          <a:xfrm>
+            <a:off x="768096" y="5742432"/>
+            <a:ext cx="10561320" cy="347472"/>
+          </a:xfrm>
+          <a:prstGeom prst="rect">
+            <a:avLst/>
+          </a:prstGeom>
+          <a:noFill/>
+        </p:spPr>
+        <p:txBody>
+          <a:bodyPr wrap="square" lIns="73152" rIns="73152" tIns="36576" bIns="36576">
+            <a:spAutoFit/>
+          </a:bodyPr>
+          <a:lstStyle/>
+          <a:p>
+            <a:pPr algn="l">
+              <a:spcAft>
+                <a:spcPts val="0"/>
+              </a:spcAft>
+              <a:defRPr sz="1800" b="0">
+                <a:solidFill>
+                  <a:srgbClr val="122C4E"/>
+                </a:solidFill>
+                <a:latin typeface="Noto Sans CJK KR"/>
+              </a:defRPr>
+            </a:pPr>
+            <a:r>
+              <a:t>명령의 출력에서 topic·frame·파일 이름 또는 성공 메시지를 찾으면 이 단계가 완료됩니다.</a:t>
             </a:r>
           </a:p>
         </p:txBody>
@@ -6679,7 +6837,7 @@
               </a:defRPr>
             </a:pPr>
             <a:r>
-              <a:t>파일을 계속 작성하고 저장한다 (3/7)</a:t>
+              <a:t>파일을 새로 만들고 저장한다 (1/7)</a:t>
             </a:r>
           </a:p>
         </p:txBody>
@@ -6854,7 +7012,7 @@
               </a:defRPr>
             </a:pPr>
             <a:r>
-              <a:t>현재 단계 5/10    |    현재 폴더 ~/ros2_curri/agv_ws    |    현재 터미널</a:t>
+              <a:t>현재 단계 3/10    |    현재 폴더 ~/ros2_curri/agv_ws    |    현재 터미널</a:t>
             </a:r>
           </a:p>
         </p:txBody>
@@ -7013,43 +7171,46 @@
               </a:defRPr>
             </a:pPr>
             <a:r>
-              <a:t>        self.command_publisher = self.create_publisher(Twist, '/cmd_vel_raw', 10)</a:t>
+              <a:t>import math</a:t>
             </a:r>
             <a:br/>
             <a:r>
-              <a:t>        self.state_publisher = self.create_publisher(String, '/mission_state', 10)</a:t>
+              <a:t>import rclpy</a:t>
             </a:r>
             <a:br/>
             <a:r>
-              <a:t>        self.create_timer(0.1, self.tick)</a:t>
+              <a:t>from rclpy.node import Node</a:t>
+            </a:r>
+            <a:br/>
+            <a:r>
+              <a:t>from geometry_msgs.msg import Twist</a:t>
+            </a:r>
+            <a:br/>
+            <a:r>
+              <a:t>from std_msgs.msg import Float32, String</a:t>
+            </a:r>
+            <a:br/>
+            <a:r>
+              <a:t>from agv_interfaces.msg import DetectionArray</a:t>
             </a:r>
             <a:br/>
             <a:br/>
             <a:r>
-              <a:t>    def obstacle_callback(self, message):</a:t>
-            </a:r>
-            <a:br/>
-            <a:r>
-              <a:t>        self.obstacle_distance = message.data</a:t>
+              <a:t>class MissionManager(Node):</a:t>
             </a:r>
             <a:br/>
             <a:br/>
             <a:r>
-              <a:t>    def detections_callback(self, message):</a:t>
+              <a:t>    def __init__(self):</a:t>
             </a:r>
             <a:br/>
             <a:r>
-              <a:t>        if message.detections:</a:t>
+              <a:t>        super().__init__('mission_manager')</a:t>
             </a:r>
             <a:br/>
             <a:r>
-              <a:t>            self.target = message.detections[0]</a:t>
-            </a:r>
-            <a:br/>
-            <a:r>
-              <a:t>            self.last_target_time = self.get_clock().now()</a:t>
-            </a:r>
-            <a:br/>
+              <a:t>        self.declare_parameter('stop_distance', 0.5)</a:t>
+            </a:r>
           </a:p>
         </p:txBody>
       </p:sp>
@@ -7087,7 +7248,7 @@
               </a:defRPr>
             </a:pPr>
             <a:r>
-              <a:t>파일 전체 3/7 · 이 슬라이드 다음에 같은 파일의 나머지 줄이 이어집니다.</a:t>
+              <a:t>파일 전체 1/7 · 이 슬라이드 다음에 같은 파일의 나머지 줄이 이어집니다.</a:t>
             </a:r>
           </a:p>
         </p:txBody>
@@ -7144,7 +7305,7 @@
               </a:defRPr>
             </a:pPr>
             <a:r>
-              <a:t>파일을 계속 작성하고 저장한다 (4/7)</a:t>
+              <a:t>파일을 계속 작성하고 저장한다 (2/7)</a:t>
             </a:r>
           </a:p>
         </p:txBody>
@@ -7319,7 +7480,7 @@
               </a:defRPr>
             </a:pPr>
             <a:r>
-              <a:t>현재 단계 6/10    |    현재 폴더 ~/ros2_curri/agv_ws    |    현재 터미널</a:t>
+              <a:t>현재 단계 4/10    |    현재 폴더 ~/ros2_curri/agv_ws    |    현재 터미널</a:t>
             </a:r>
           </a:p>
         </p:txBody>
@@ -7478,48 +7639,51 @@
               </a:defRPr>
             </a:pPr>
             <a:r>
-              <a:t>    def set_state(self, state):</a:t>
+              <a:t>        self.declare_parameter('search_speed', 0.25)</a:t>
             </a:r>
             <a:br/>
             <a:r>
-              <a:t>        if state != self.state:</a:t>
+              <a:t>        self.declare_parameter('approach_speed', 0.15)</a:t>
             </a:r>
             <a:br/>
             <a:r>
-              <a:t>            self.state = state</a:t>
+              <a:t>        self.declare_parameter('image_center_x', 320)</a:t>
             </a:r>
             <a:br/>
             <a:r>
-              <a:t>            self.get_logger().info('mission state -&gt; ' + state)</a:t>
+              <a:t>        self.declare_parameter('target_timeout_sec', 0.7)</a:t>
             </a:r>
             <a:br/>
             <a:r>
-              <a:t>        self.state_publisher.publish(String(data=self.state))</a:t>
+              <a:t>        self.state = 'IDLE'</a:t>
             </a:r>
             <a:br/>
+            <a:r>
+              <a:t>        self.obstacle_distance = math.inf</a:t>
+            </a:r>
             <a:br/>
             <a:r>
-              <a:t>    def tick(self):</a:t>
+              <a:t>        self.target = None</a:t>
             </a:r>
             <a:br/>
             <a:r>
-              <a:t>        command = Twist()</a:t>
+              <a:t>        self.last_target_time = None</a:t>
             </a:r>
             <a:br/>
             <a:r>
-              <a:t>        if self.last_target_time is not None:</a:t>
+              <a:t>        self.create_subscription(Float32, '/obstacle_distance', self.obstacle_callback,</a:t>
             </a:r>
             <a:br/>
             <a:r>
-              <a:t>            age = (self.get_clock().now() - self.last_target_time).nanoseconds / 1000000000.0</a:t>
+              <a:t>            10)</a:t>
             </a:r>
             <a:br/>
             <a:r>
-              <a:t>            if age &gt; self.get_parameter('target_timeout_sec').value:</a:t>
+              <a:t>        self.create_subscription(DetectionArray, '/detections', self.detections_callback,</a:t>
             </a:r>
             <a:br/>
             <a:r>
-              <a:t>                self.target = None</a:t>
+              <a:t>             10)</a:t>
             </a:r>
           </a:p>
         </p:txBody>
@@ -7558,7 +7722,7 @@
               </a:defRPr>
             </a:pPr>
             <a:r>
-              <a:t>파일 전체 4/7 · 이 슬라이드 다음에 같은 파일의 나머지 줄이 이어집니다.</a:t>
+              <a:t>파일 전체 2/7 · 이 슬라이드 다음에 같은 파일의 나머지 줄이 이어집니다.</a:t>
             </a:r>
           </a:p>
         </p:txBody>
@@ -7615,7 +7779,7 @@
               </a:defRPr>
             </a:pPr>
             <a:r>
-              <a:t>파일을 계속 작성하고 저장한다 (5/7)</a:t>
+              <a:t>파일을 계속 작성하고 저장한다 (3/7)</a:t>
             </a:r>
           </a:p>
         </p:txBody>
@@ -7790,7 +7954,7 @@
               </a:defRPr>
             </a:pPr>
             <a:r>
-              <a:t>현재 단계 7/10    |    현재 폴더 ~/ros2_curri/agv_ws    |    현재 터미널</a:t>
+              <a:t>현재 단계 5/10    |    현재 폴더 ~/ros2_curri/agv_ws    |    현재 터미널</a:t>
             </a:r>
           </a:p>
         </p:txBody>
@@ -7949,52 +8113,43 @@
               </a:defRPr>
             </a:pPr>
             <a:r>
-              <a:t>        if self.obstacle_distance &lt; self.get_parameter('stop_distance').value:</a:t>
+              <a:t>        self.command_publisher = self.create_publisher(Twist, '/cmd_vel_raw', 10)</a:t>
             </a:r>
             <a:br/>
             <a:r>
-              <a:t>            self.set_state('AVOID')</a:t>
+              <a:t>        self.state_publisher = self.create_publisher(String, '/mission_state', 10)</a:t>
             </a:r>
             <a:br/>
             <a:r>
-              <a:t>            command.angular.z = self.get_parameter('search_speed').value</a:t>
+              <a:t>        self.create_timer(0.1, self.tick)</a:t>
             </a:r>
             <a:br/>
-            <a:r>
-              <a:t>        elif self.target is None:</a:t>
-            </a:r>
             <a:br/>
             <a:r>
-              <a:t>            self.set_state('SEARCH')</a:t>
+              <a:t>    def obstacle_callback(self, message):</a:t>
             </a:r>
             <a:br/>
             <a:r>
-              <a:t>            command.angular.z = self.get_parameter('search_speed').value</a:t>
+              <a:t>        self.obstacle_distance = message.data</a:t>
             </a:r>
             <a:br/>
-            <a:r>
-              <a:t>        elif self.target.estimated_distance &gt; 0.0 and self.target.estimated_distance &lt; self.get_parameter('stop_distance').value:</a:t>
-            </a:r>
             <a:br/>
             <a:r>
-              <a:t>            self.set_state('GOAL')</a:t>
+              <a:t>    def detections_callback(self, message):</a:t>
             </a:r>
             <a:br/>
             <a:r>
-              <a:t>        else:</a:t>
+              <a:t>        if message.detections:</a:t>
             </a:r>
             <a:br/>
             <a:r>
-              <a:t>            self.set_state('APPROACH')</a:t>
+              <a:t>            self.target = message.detections[0]</a:t>
             </a:r>
             <a:br/>
             <a:r>
-              <a:t>            command.linear.x = self.get_parameter('approach_speed').value</a:t>
+              <a:t>            self.last_target_time = self.get_clock().now()</a:t>
             </a:r>
             <a:br/>
-            <a:r>
-              <a:t>            error = self.target.center_x - self.get_parameter('image_center_x').value</a:t>
-            </a:r>
           </a:p>
         </p:txBody>
       </p:sp>
@@ -8032,7 +8187,7 @@
               </a:defRPr>
             </a:pPr>
             <a:r>
-              <a:t>파일 전체 5/7 · 이 슬라이드 다음에 같은 파일의 나머지 줄이 이어집니다.</a:t>
+              <a:t>파일 전체 3/7 · 이 슬라이드 다음에 같은 파일의 나머지 줄이 이어집니다.</a:t>
             </a:r>
           </a:p>
         </p:txBody>
@@ -8089,7 +8244,7 @@
               </a:defRPr>
             </a:pPr>
             <a:r>
-              <a:t>파일을 계속 작성하고 저장한다 (6/7)</a:t>
+              <a:t>파일을 계속 작성하고 저장한다 (4/7)</a:t>
             </a:r>
           </a:p>
         </p:txBody>
@@ -8264,7 +8419,7 @@
               </a:defRPr>
             </a:pPr>
             <a:r>
-              <a:t>현재 단계 8/10    |    현재 폴더 ~/ros2_curri/agv_ws    |    현재 터미널</a:t>
+              <a:t>현재 단계 6/10    |    현재 폴더 ~/ros2_curri/agv_ws    |    현재 터미널</a:t>
             </a:r>
           </a:p>
         </p:txBody>
@@ -8423,48 +8578,48 @@
               </a:defRPr>
             </a:pPr>
             <a:r>
-              <a:t>            command.angular.z = max(min(-0.004 * error, 0.6), -0.6)</a:t>
+              <a:t>    def set_state(self, state):</a:t>
             </a:r>
             <a:br/>
             <a:r>
-              <a:t>        self.command_publisher.publish(command)</a:t>
+              <a:t>        if state != self.state:</a:t>
+            </a:r>
+            <a:br/>
+            <a:r>
+              <a:t>            self.state = state</a:t>
+            </a:r>
+            <a:br/>
+            <a:r>
+              <a:t>            self.get_logger().info('mission state -&gt; ' + state)</a:t>
+            </a:r>
+            <a:br/>
+            <a:r>
+              <a:t>        self.state_publisher.publish(String(data=self.state))</a:t>
             </a:r>
             <a:br/>
             <a:br/>
             <a:r>
-              <a:t>def main():</a:t>
+              <a:t>    def tick(self):</a:t>
             </a:r>
             <a:br/>
             <a:r>
-              <a:t>    rclpy.init()</a:t>
+              <a:t>        command = Twist()</a:t>
             </a:r>
             <a:br/>
             <a:r>
-              <a:t>    node = MissionManager()</a:t>
+              <a:t>        if self.last_target_time is not None:</a:t>
             </a:r>
             <a:br/>
             <a:r>
-              <a:t>    try:</a:t>
+              <a:t>            age = (self.get_clock().now() - self.last_target_time).nanoseconds / 1000000000.0</a:t>
             </a:r>
             <a:br/>
             <a:r>
-              <a:t>        rclpy.spin(node)</a:t>
+              <a:t>            if age &gt; self.get_parameter('target_timeout_sec').value:</a:t>
             </a:r>
             <a:br/>
             <a:r>
-              <a:t>    except KeyboardInterrupt:</a:t>
-            </a:r>
-            <a:br/>
-            <a:r>
-              <a:t>        pass</a:t>
-            </a:r>
-            <a:br/>
-            <a:r>
-              <a:t>    finally:</a:t>
-            </a:r>
-            <a:br/>
-            <a:r>
-              <a:t>        node.destroy_node()</a:t>
+              <a:t>                self.target = None</a:t>
             </a:r>
           </a:p>
         </p:txBody>
@@ -8503,7 +8658,7 @@
               </a:defRPr>
             </a:pPr>
             <a:r>
-              <a:t>파일 전체 6/7 · 이 슬라이드 다음에 같은 파일의 나머지 줄이 이어집니다.</a:t>
+              <a:t>파일 전체 4/7 · 이 슬라이드 다음에 같은 파일의 나머지 줄이 이어집니다.</a:t>
             </a:r>
           </a:p>
         </p:txBody>
@@ -8560,7 +8715,7 @@
               </a:defRPr>
             </a:pPr>
             <a:r>
-              <a:t>파일을 계속 작성하고 저장한다 (7/7)</a:t>
+              <a:t>파일을 계속 작성하고 저장한다 (5/7)</a:t>
             </a:r>
           </a:p>
         </p:txBody>
@@ -8735,7 +8890,7 @@
               </a:defRPr>
             </a:pPr>
             <a:r>
-              <a:t>현재 단계 9/10    |    현재 폴더 ~/ros2_curri/agv_ws    |    현재 터미널</a:t>
+              <a:t>현재 단계 7/10    |    현재 폴더 ~/ros2_curri/agv_ws    |    현재 터미널</a:t>
             </a:r>
           </a:p>
         </p:txBody>
@@ -8894,11 +9049,51 @@
               </a:defRPr>
             </a:pPr>
             <a:r>
-              <a:t>        if rclpy.ok():</a:t>
+              <a:t>        if self.obstacle_distance &lt; self.get_parameter('stop_distance').value:</a:t>
             </a:r>
             <a:br/>
             <a:r>
-              <a:t>            rclpy.shutdown()</a:t>
+              <a:t>            self.set_state('AVOID')</a:t>
+            </a:r>
+            <a:br/>
+            <a:r>
+              <a:t>            command.angular.z = self.get_parameter('search_speed').value</a:t>
+            </a:r>
+            <a:br/>
+            <a:r>
+              <a:t>        elif self.target is None:</a:t>
+            </a:r>
+            <a:br/>
+            <a:r>
+              <a:t>            self.set_state('SEARCH')</a:t>
+            </a:r>
+            <a:br/>
+            <a:r>
+              <a:t>            command.angular.z = self.get_parameter('search_speed').value</a:t>
+            </a:r>
+            <a:br/>
+            <a:r>
+              <a:t>        elif self.target.estimated_distance &gt; 0.0 and self.target.estimated_distance &lt; self.get_parameter('stop_distance').value:</a:t>
+            </a:r>
+            <a:br/>
+            <a:r>
+              <a:t>            self.set_state('GOAL')</a:t>
+            </a:r>
+            <a:br/>
+            <a:r>
+              <a:t>        else:</a:t>
+            </a:r>
+            <a:br/>
+            <a:r>
+              <a:t>            self.set_state('APPROACH')</a:t>
+            </a:r>
+            <a:br/>
+            <a:r>
+              <a:t>            command.linear.x = self.get_parameter('approach_speed').value</a:t>
+            </a:r>
+            <a:br/>
+            <a:r>
+              <a:t>            error = self.target.center_x - self.get_parameter('image_center_x').value</a:t>
             </a:r>
           </a:p>
         </p:txBody>
@@ -8937,7 +9132,7 @@
               </a:defRPr>
             </a:pPr>
             <a:r>
-              <a:t>파일 전체 7/7 · 이 슬라이드 다음에 같은 파일의 나머지 줄이 이어집니다.</a:t>
+              <a:t>파일 전체 5/7 · 이 슬라이드 다음에 같은 파일의 나머지 줄이 이어집니다.</a:t>
             </a:r>
           </a:p>
         </p:txBody>
@@ -8994,7 +9189,7 @@
               </a:defRPr>
             </a:pPr>
             <a:r>
-              <a:t>파일을 새로 만들고 저장한다 (1/2)</a:t>
+              <a:t>파일을 계속 작성하고 저장한다 (6/7)</a:t>
             </a:r>
           </a:p>
         </p:txBody>
@@ -9033,7 +9228,7 @@
               </a:defRPr>
             </a:pPr>
             <a:r>
-              <a:t>~/ros2_curri/agv_ws/src/agv_bringup/config/mission.yaml</a:t>
+              <a:t>~/ros2_curri/agv_ws/src/agv_mission/agv_mission/mission_manager.py</a:t>
             </a:r>
           </a:p>
         </p:txBody>
@@ -9169,7 +9364,7 @@
               </a:defRPr>
             </a:pPr>
             <a:r>
-              <a:t>현재 단계 10/12    |    현재 폴더 ~/ros2_curri/agv_ws    |    현재 터미널</a:t>
+              <a:t>현재 단계 8/10    |    현재 폴더 ~/ros2_curri/agv_ws    |    현재 터미널</a:t>
             </a:r>
           </a:p>
         </p:txBody>
@@ -9266,11 +9461,11 @@
               </a:defRPr>
             </a:pPr>
             <a:r>
-              <a:t>파일 생성: mkdir -p ~/ros2_curri/agv_ws/src/agv_bringup/config</a:t>
+              <a:t>파일 생성: mkdir -p ~/ros2_curri/agv_ws/src/agv_mission/agv_mission</a:t>
             </a:r>
             <a:br/>
             <a:r>
-              <a:t>파일 열기: nano ~/ros2_curri/agv_ws/src/agv_bringup/config/mission.yaml</a:t>
+              <a:t>파일 열기: nano ~/ros2_curri/agv_ws/src/agv_mission/agv_mission/mission_manager.py</a:t>
             </a:r>
           </a:p>
         </p:txBody>
@@ -9328,51 +9523,48 @@
               </a:defRPr>
             </a:pPr>
             <a:r>
-              <a:t>mission_manager:</a:t>
+              <a:t>            command.angular.z = max(min(-0.004 * error, 0.6), -0.6)</a:t>
             </a:r>
             <a:br/>
             <a:r>
-              <a:t>  ros__parameters:</a:t>
+              <a:t>        self.command_publisher.publish(command)</a:t>
             </a:r>
             <a:br/>
-            <a:r>
-              <a:t>    use_sim_time: true</a:t>
-            </a:r>
             <a:br/>
             <a:r>
-              <a:t>    stop_distance: 0.50</a:t>
+              <a:t>def main():</a:t>
             </a:r>
             <a:br/>
             <a:r>
-              <a:t>    search_speed: 0.25</a:t>
+              <a:t>    rclpy.init()</a:t>
             </a:r>
             <a:br/>
             <a:r>
-              <a:t>    approach_speed: 0.15</a:t>
+              <a:t>    node = MissionManager()</a:t>
             </a:r>
             <a:br/>
             <a:r>
-              <a:t>    image_center_x: 320</a:t>
+              <a:t>    try:</a:t>
             </a:r>
             <a:br/>
             <a:r>
-              <a:t>    target_timeout_sec: 0.70</a:t>
+              <a:t>        rclpy.spin(node)</a:t>
             </a:r>
             <a:br/>
             <a:r>
-              <a:t>safety_controller:</a:t>
+              <a:t>    except KeyboardInterrupt:</a:t>
             </a:r>
             <a:br/>
             <a:r>
-              <a:t>  ros__parameters:</a:t>
+              <a:t>        pass</a:t>
             </a:r>
             <a:br/>
             <a:r>
-              <a:t>    use_sim_time: true</a:t>
+              <a:t>    finally:</a:t>
             </a:r>
             <a:br/>
             <a:r>
-              <a:t>    stop_distance: 0.50</a:t>
+              <a:t>        node.destroy_node()</a:t>
             </a:r>
           </a:p>
         </p:txBody>
@@ -9411,7 +9603,7 @@
               </a:defRPr>
             </a:pPr>
             <a:r>
-              <a:t>파일 전체 1/2 · 이 슬라이드 다음에 같은 파일의 나머지 줄이 이어집니다.</a:t>
+              <a:t>파일 전체 6/7 · 이 슬라이드 다음에 같은 파일의 나머지 줄이 이어집니다.</a:t>
             </a:r>
           </a:p>
         </p:txBody>
@@ -9468,7 +9660,7 @@
               </a:defRPr>
             </a:pPr>
             <a:r>
-              <a:t>파일을 계속 작성하고 저장한다 (2/2)</a:t>
+              <a:t>파일을 계속 작성하고 저장한다 (7/7)</a:t>
             </a:r>
           </a:p>
         </p:txBody>
@@ -9507,7 +9699,7 @@
               </a:defRPr>
             </a:pPr>
             <a:r>
-              <a:t>~/ros2_curri/agv_ws/src/agv_bringup/config/mission.yaml</a:t>
+              <a:t>~/ros2_curri/agv_ws/src/agv_mission/agv_mission/mission_manager.py</a:t>
             </a:r>
           </a:p>
         </p:txBody>
@@ -9643,7 +9835,7 @@
               </a:defRPr>
             </a:pPr>
             <a:r>
-              <a:t>현재 단계 11/12    |    현재 폴더 ~/ros2_curri/agv_ws    |    현재 터미널</a:t>
+              <a:t>현재 단계 9/10    |    현재 폴더 ~/ros2_curri/agv_ws    |    현재 터미널</a:t>
             </a:r>
           </a:p>
         </p:txBody>
@@ -9740,11 +9932,11 @@
               </a:defRPr>
             </a:pPr>
             <a:r>
-              <a:t>파일 생성: mkdir -p ~/ros2_curri/agv_ws/src/agv_bringup/config</a:t>
+              <a:t>파일 생성: mkdir -p ~/ros2_curri/agv_ws/src/agv_mission/agv_mission</a:t>
             </a:r>
             <a:br/>
             <a:r>
-              <a:t>파일 열기: nano ~/ros2_curri/agv_ws/src/agv_bringup/config/mission.yaml</a:t>
+              <a:t>파일 열기: nano ~/ros2_curri/agv_ws/src/agv_mission/agv_mission/mission_manager.py</a:t>
             </a:r>
           </a:p>
         </p:txBody>
@@ -9802,7 +9994,11 @@
               </a:defRPr>
             </a:pPr>
             <a:r>
-              <a:t>    front_half_angle_deg: 15.0</a:t>
+              <a:t>        if rclpy.ok():</a:t>
+            </a:r>
+            <a:br/>
+            <a:r>
+              <a:t>            rclpy.shutdown()</a:t>
             </a:r>
           </a:p>
         </p:txBody>
@@ -9841,7 +10037,7 @@
               </a:defRPr>
             </a:pPr>
             <a:r>
-              <a:t>파일 전체 2/2 · 이 슬라이드 다음에 같은 파일의 나머지 줄이 이어집니다.</a:t>
+              <a:t>파일 전체 7/7 · 이 슬라이드 다음에 같은 파일의 나머지 줄이 이어집니다.</a:t>
             </a:r>
           </a:p>
         </p:txBody>
@@ -9898,7 +10094,7 @@
               </a:defRPr>
             </a:pPr>
             <a:r>
-              <a:t>파일을 새로 만들고 저장한다 (1/1)</a:t>
+              <a:t>파일을 새로 만들고 저장한다 (1/2)</a:t>
             </a:r>
           </a:p>
         </p:txBody>
@@ -9937,7 +10133,7 @@
               </a:defRPr>
             </a:pPr>
             <a:r>
-              <a:t>~/ros2_curri/agv_ws/src/agv_mission/setup.py</a:t>
+              <a:t>~/ros2_curri/agv_ws/src/agv_bringup/config/mission.yaml</a:t>
             </a:r>
           </a:p>
         </p:txBody>
@@ -10073,7 +10269,7 @@
               </a:defRPr>
             </a:pPr>
             <a:r>
-              <a:t>현재 단계 12/13    |    현재 폴더 ~/ros2_curri/agv_ws    |    현재 터미널</a:t>
+              <a:t>현재 단계 10/12    |    현재 폴더 ~/ros2_curri/agv_ws    |    현재 터미널</a:t>
             </a:r>
           </a:p>
         </p:txBody>
@@ -10170,11 +10366,11 @@
               </a:defRPr>
             </a:pPr>
             <a:r>
-              <a:t>파일 생성: mkdir -p ~/ros2_curri/agv_ws/src/agv_mission</a:t>
+              <a:t>파일 생성: mkdir -p ~/ros2_curri/agv_ws/src/agv_bringup/config</a:t>
             </a:r>
             <a:br/>
             <a:r>
-              <a:t>파일 열기: nano ~/ros2_curri/agv_ws/src/agv_mission/setup.py</a:t>
+              <a:t>파일 열기: nano ~/ros2_curri/agv_ws/src/agv_bringup/config/mission.yaml</a:t>
             </a:r>
           </a:p>
         </p:txBody>
@@ -10232,39 +10428,51 @@
               </a:defRPr>
             </a:pPr>
             <a:r>
-              <a:t>from setuptools import find_packages, setup</a:t>
+              <a:t>mission_manager:</a:t>
             </a:r>
             <a:br/>
             <a:r>
-              <a:t>package_name = 'agv_mission'</a:t>
+              <a:t>  ros__parameters:</a:t>
             </a:r>
             <a:br/>
             <a:r>
-              <a:t>setup(name=package_name, version='0.1.0', packages=find_packages(exclude=['test']),</a:t>
+              <a:t>    use_sim_time: true</a:t>
             </a:r>
             <a:br/>
             <a:r>
-              <a:t>    data_files=[('share/ament_index/resource_index/packages',</a:t>
+              <a:t>    stop_distance: 0.50</a:t>
             </a:r>
             <a:br/>
             <a:r>
-              <a:t>    ['resource/' + package_name]), ('share/' + package_name, ['package.xml'])],</a:t>
+              <a:t>    search_speed: 0.25</a:t>
             </a:r>
             <a:br/>
             <a:r>
-              <a:t>    install_requires=['setuptools'], zip_safe=True, maintainer='AGV student',</a:t>
+              <a:t>    approach_speed: 0.15</a:t>
             </a:r>
             <a:br/>
             <a:r>
-              <a:t>    maintainer_email='student@example.com', license='Apache-2.0',</a:t>
+              <a:t>    image_center_x: 320</a:t>
             </a:r>
             <a:br/>
             <a:r>
-              <a:t>    entry_points={'console_scripts': ['mission_manager = agv_mission.mission_manager:main',</a:t>
+              <a:t>    target_timeout_sec: 0.70</a:t>
             </a:r>
             <a:br/>
             <a:r>
-              <a:t>     'mission_markers = agv_mission.mission_markers:main']})</a:t>
+              <a:t>safety_controller:</a:t>
+            </a:r>
+            <a:br/>
+            <a:r>
+              <a:t>  ros__parameters:</a:t>
+            </a:r>
+            <a:br/>
+            <a:r>
+              <a:t>    use_sim_time: true</a:t>
+            </a:r>
+            <a:br/>
+            <a:r>
+              <a:t>    stop_distance: 0.50</a:t>
             </a:r>
           </a:p>
         </p:txBody>
@@ -10303,7 +10511,7 @@
               </a:defRPr>
             </a:pPr>
             <a:r>
-              <a:t>파일 전체 1/1 · 이 슬라이드 다음에 같은 파일의 나머지 줄이 이어집니다.</a:t>
+              <a:t>파일 전체 1/2 · 이 슬라이드 다음에 같은 파일의 나머지 줄이 이어집니다.</a:t>
             </a:r>
           </a:p>
         </p:txBody>
@@ -10360,7 +10568,7 @@
               </a:defRPr>
             </a:pPr>
             <a:r>
-              <a:t>build → source → run 순서로 실행한다</a:t>
+              <a:t>파일을 계속 작성하고 저장한다 (2/2)</a:t>
             </a:r>
           </a:p>
         </p:txBody>
@@ -10399,7 +10607,7 @@
               </a:defRPr>
             </a:pPr>
             <a:r>
-              <a:t>새 파일 또는 수정 파일은 build와 source 뒤에만 실행 이름·설정에 반영됩니다.</a:t>
+              <a:t>~/ros2_curri/agv_ws/src/agv_bringup/config/mission.yaml</a:t>
             </a:r>
           </a:p>
         </p:txBody>
@@ -10535,23 +10743,124 @@
               </a:defRPr>
             </a:pPr>
             <a:r>
-              <a:t>현재 단계 실행    |    현재 폴더 ~/ros2_curri/agv_ws    |    현재 터미널</a:t>
-            </a:r>
-          </a:p>
-        </p:txBody>
-      </p:sp>
-      <p:sp>
-        <p:nvSpPr>
-          <p:cNvPr id="7" name="Rounded Rectangle 6"/>
+              <a:t>현재 단계 11/12    |    현재 폴더 ~/ros2_curri/agv_ws    |    현재 터미널</a:t>
+            </a:r>
+          </a:p>
+        </p:txBody>
+      </p:sp>
+      <p:sp>
+        <p:nvSpPr>
+          <p:cNvPr id="7" name="TextBox 6"/>
+          <p:cNvSpPr txBox="1"/>
+          <p:nvPr/>
+        </p:nvSpPr>
+        <p:spPr>
+          <a:xfrm>
+            <a:off x="658368" y="1627632"/>
+            <a:ext cx="10972800" cy="256032"/>
+          </a:xfrm>
+          <a:prstGeom prst="rect">
+            <a:avLst/>
+          </a:prstGeom>
+          <a:noFill/>
+        </p:spPr>
+        <p:txBody>
+          <a:bodyPr wrap="square" lIns="73152" rIns="73152" tIns="36576" bIns="36576">
+            <a:spAutoFit/>
+          </a:bodyPr>
+          <a:lstStyle/>
+          <a:p>
+            <a:pPr algn="l">
+              <a:spcAft>
+                <a:spcPts val="0"/>
+              </a:spcAft>
+              <a:defRPr sz="1500" b="1">
+                <a:solidFill>
+                  <a:srgbClr val="122C4E"/>
+                </a:solidFill>
+                <a:latin typeface="Noto Sans CJK KR"/>
+              </a:defRPr>
+            </a:pPr>
+            <a:r>
+              <a:t>이번 단계: 파일의 전체 내용을 중간 생략 없이 작성합니다. 아래 줄 범위를 끝까지 입력하세요.</a:t>
+            </a:r>
+          </a:p>
+        </p:txBody>
+      </p:sp>
+      <p:sp>
+        <p:nvSpPr>
+          <p:cNvPr id="8" name="Rectangle 7"/>
           <p:cNvSpPr/>
           <p:nvPr/>
         </p:nvSpPr>
         <p:spPr>
           <a:xfrm>
-            <a:off x="658368" y="1700784"/>
-            <a:ext cx="10972800" cy="3182112"/>
-          </a:xfrm>
-          <a:prstGeom prst="roundRect">
+            <a:off x="658368" y="1956816"/>
+            <a:ext cx="10972800" cy="603504"/>
+          </a:xfrm>
+          <a:prstGeom prst="rect">
+            <a:avLst/>
+          </a:prstGeom>
+          <a:solidFill>
+            <a:srgbClr val="F4F7FB"/>
+          </a:solidFill>
+          <a:ln>
+            <a:solidFill>
+              <a:srgbClr val="F4F7FB"/>
+            </a:solidFill>
+          </a:ln>
+        </p:spPr>
+        <p:style>
+          <a:lnRef idx="1">
+            <a:schemeClr val="accent1"/>
+          </a:lnRef>
+          <a:fillRef idx="3">
+            <a:schemeClr val="accent1"/>
+          </a:fillRef>
+          <a:effectRef idx="2">
+            <a:schemeClr val="accent1"/>
+          </a:effectRef>
+          <a:fontRef idx="minor">
+            <a:schemeClr val="lt1"/>
+          </a:fontRef>
+        </p:style>
+        <p:txBody>
+          <a:bodyPr rtlCol="0" anchor="ctr" wrap="square" lIns="73152" rIns="73152" tIns="36576" bIns="36576"/>
+          <a:lstStyle/>
+          <a:p>
+            <a:pPr algn="l">
+              <a:spcAft>
+                <a:spcPts val="0"/>
+              </a:spcAft>
+              <a:defRPr sz="1400" b="0">
+                <a:solidFill>
+                  <a:srgbClr val="122C4E"/>
+                </a:solidFill>
+                <a:latin typeface="DejaVu Sans Mono"/>
+              </a:defRPr>
+            </a:pPr>
+            <a:r>
+              <a:t>파일 생성: mkdir -p ~/ros2_curri/agv_ws/src/agv_bringup/config</a:t>
+            </a:r>
+            <a:br/>
+            <a:r>
+              <a:t>파일 열기: nano ~/ros2_curri/agv_ws/src/agv_bringup/config/mission.yaml</a:t>
+            </a:r>
+          </a:p>
+        </p:txBody>
+      </p:sp>
+      <p:sp>
+        <p:nvSpPr>
+          <p:cNvPr id="9" name="Rectangle 8"/>
+          <p:cNvSpPr/>
+          <p:nvPr/>
+        </p:nvSpPr>
+        <p:spPr>
+          <a:xfrm>
+            <a:off x="658368" y="2706624"/>
+            <a:ext cx="10972800" cy="3364992"/>
+          </a:xfrm>
+          <a:prstGeom prst="rect">
             <a:avLst/>
           </a:prstGeom>
           <a:solidFill>
@@ -10578,14 +10887,14 @@
           </a:fontRef>
         </p:style>
         <p:txBody>
-          <a:bodyPr rtlCol="0" anchor="ctr" wrap="square" lIns="73152" rIns="73152" tIns="36576" bIns="36576"/>
-          <a:lstStyle/>
-          <a:p>
-            <a:pPr algn="l">
-              <a:spcAft>
-                <a:spcPts val="0"/>
-              </a:spcAft>
-              <a:defRPr sz="1600" b="0">
+          <a:bodyPr rtlCol="0" anchor="ctr" wrap="square" lIns="164592" rIns="164592" tIns="109728" bIns="36576"/>
+          <a:lstStyle/>
+          <a:p>
+            <a:pPr algn="l">
+              <a:spcAft>
+                <a:spcPts val="0"/>
+              </a:spcAft>
+              <a:defRPr sz="1400" b="0">
                 <a:solidFill>
                   <a:srgbClr val="FFFFFF"/>
                 </a:solidFill>
@@ -10593,25 +10902,21 @@
               </a:defRPr>
             </a:pPr>
             <a:r>
-              <a:t>source ~/ros2_curri/agv_ws/install/setup.bash</a:t>
-            </a:r>
-            <a:br/>
-            <a:r>
-              <a:t>ros2 run agv_mission mission_manager</a:t>
-            </a:r>
-          </a:p>
-        </p:txBody>
-      </p:sp>
-      <p:sp>
-        <p:nvSpPr>
-          <p:cNvPr id="8" name="TextBox 7"/>
+              <a:t>    front_half_angle_deg: 15.0</a:t>
+            </a:r>
+          </a:p>
+        </p:txBody>
+      </p:sp>
+      <p:sp>
+        <p:nvSpPr>
+          <p:cNvPr id="10" name="TextBox 9"/>
           <p:cNvSpPr txBox="1"/>
           <p:nvPr/>
         </p:nvSpPr>
         <p:spPr>
           <a:xfrm>
-            <a:off x="786384" y="5239512"/>
-            <a:ext cx="1261872" cy="237744"/>
+            <a:off x="749808" y="6181344"/>
+            <a:ext cx="10789920" cy="201168"/>
           </a:xfrm>
           <a:prstGeom prst="rect">
             <a:avLst/>
@@ -10628,54 +10933,15 @@
               <a:spcAft>
                 <a:spcPts val="0"/>
               </a:spcAft>
-              <a:defRPr sz="1800" b="1">
-                <a:solidFill>
-                  <a:srgbClr val="2A8B5A"/>
-                </a:solidFill>
-                <a:latin typeface="Noto Sans CJK KR"/>
-              </a:defRPr>
-            </a:pPr>
-            <a:r>
-              <a:t>확인 기준</a:t>
-            </a:r>
-          </a:p>
-        </p:txBody>
-      </p:sp>
-      <p:sp>
-        <p:nvSpPr>
-          <p:cNvPr id="9" name="TextBox 8"/>
-          <p:cNvSpPr txBox="1"/>
-          <p:nvPr/>
-        </p:nvSpPr>
-        <p:spPr>
-          <a:xfrm>
-            <a:off x="786384" y="5532120"/>
-            <a:ext cx="10469880" cy="420624"/>
-          </a:xfrm>
-          <a:prstGeom prst="rect">
-            <a:avLst/>
-          </a:prstGeom>
-          <a:noFill/>
-        </p:spPr>
-        <p:txBody>
-          <a:bodyPr wrap="square" lIns="73152" rIns="73152" tIns="36576" bIns="36576">
-            <a:spAutoFit/>
-          </a:bodyPr>
-          <a:lstStyle/>
-          <a:p>
-            <a:pPr algn="l">
-              <a:spcAft>
-                <a:spcPts val="0"/>
-              </a:spcAft>
-              <a:defRPr sz="1800" b="0">
-                <a:solidFill>
-                  <a:srgbClr val="122C4E"/>
-                </a:solidFill>
-                <a:latin typeface="Noto Sans CJK KR"/>
-              </a:defRPr>
-            </a:pPr>
-            <a:r>
-              <a:t>/mission_state 로그와 /cmd_vel_raw가 detection·obstacle input에 따라 바뀌는 구조를 확인한다.</a:t>
+              <a:defRPr sz="1000" b="0">
+                <a:solidFill>
+                  <a:srgbClr val="5C6672"/>
+                </a:solidFill>
+                <a:latin typeface="Noto Sans CJK KR"/>
+              </a:defRPr>
+            </a:pPr>
+            <a:r>
+              <a:t>파일 전체 2/2 · 이 슬라이드 다음에 같은 파일의 나머지 줄이 이어집니다.</a:t>
             </a:r>
           </a:p>
         </p:txBody>
@@ -11193,7 +11459,7 @@
               </a:defRPr>
             </a:pPr>
             <a:r>
-              <a:t>정상 결과: 실제 환경에서 확인한 출력</a:t>
+              <a:t>파일을 새로 만들고 저장한다 (1/1)</a:t>
             </a:r>
           </a:p>
         </p:txBody>
@@ -11232,7 +11498,7 @@
               </a:defRPr>
             </a:pPr>
             <a:r>
-              <a:t>실제 ROS 2 환경의 파일·패키지·구성 검증 로그</a:t>
+              <a:t>~/ros2_curri/agv_ws/src/agv_mission/setup.py</a:t>
             </a:r>
           </a:p>
         </p:txBody>
@@ -11315,30 +11581,64 @@
           </a:p>
         </p:txBody>
       </p:sp>
-      <p:pic>
-        <p:nvPicPr>
-          <p:cNvPr id="6" name="Picture 5" descr="validation_terminal.png"/>
-          <p:cNvPicPr>
-            <a:picLocks noChangeAspect="1"/>
-          </p:cNvPicPr>
-          <p:nvPr/>
-        </p:nvPicPr>
-        <p:blipFill>
-          <a:blip r:embed="rId2"/>
-          <a:stretch>
-            <a:fillRect/>
-          </a:stretch>
-        </p:blipFill>
-        <p:spPr>
-          <a:xfrm>
-            <a:off x="790956" y="1562649"/>
-            <a:ext cx="10607040" cy="4381924"/>
-          </a:xfrm>
-          <a:prstGeom prst="rect">
-            <a:avLst/>
-          </a:prstGeom>
-        </p:spPr>
-      </p:pic>
+      <p:sp>
+        <p:nvSpPr>
+          <p:cNvPr id="6" name="Rectangle 5"/>
+          <p:cNvSpPr/>
+          <p:nvPr/>
+        </p:nvSpPr>
+        <p:spPr>
+          <a:xfrm>
+            <a:off x="566928" y="1188720"/>
+            <a:ext cx="11064240" cy="347472"/>
+          </a:xfrm>
+          <a:prstGeom prst="rect">
+            <a:avLst/>
+          </a:prstGeom>
+          <a:solidFill>
+            <a:srgbClr val="F4F7FB"/>
+          </a:solidFill>
+          <a:ln>
+            <a:solidFill>
+              <a:srgbClr val="F4F7FB"/>
+            </a:solidFill>
+          </a:ln>
+        </p:spPr>
+        <p:style>
+          <a:lnRef idx="1">
+            <a:schemeClr val="accent1"/>
+          </a:lnRef>
+          <a:fillRef idx="3">
+            <a:schemeClr val="accent1"/>
+          </a:fillRef>
+          <a:effectRef idx="2">
+            <a:schemeClr val="accent1"/>
+          </a:effectRef>
+          <a:fontRef idx="minor">
+            <a:schemeClr val="lt1"/>
+          </a:fontRef>
+        </p:style>
+        <p:txBody>
+          <a:bodyPr rtlCol="0" anchor="ctr" wrap="square" lIns="73152" rIns="73152" tIns="36576" bIns="36576"/>
+          <a:lstStyle/>
+          <a:p>
+            <a:pPr algn="l">
+              <a:spcAft>
+                <a:spcPts val="0"/>
+              </a:spcAft>
+              <a:defRPr sz="1300" b="1">
+                <a:solidFill>
+                  <a:srgbClr val="122C4E"/>
+                </a:solidFill>
+                <a:latin typeface="Noto Sans CJK KR"/>
+              </a:defRPr>
+            </a:pPr>
+            <a:r>
+              <a:t>현재 단계 12/13    |    현재 폴더 ~/ros2_curri/agv_ws    |    현재 터미널</a:t>
+            </a:r>
+          </a:p>
+        </p:txBody>
+      </p:sp>
       <p:sp>
         <p:nvSpPr>
           <p:cNvPr id="7" name="TextBox 6"/>
@@ -11347,8 +11647,8 @@
         </p:nvSpPr>
         <p:spPr>
           <a:xfrm>
-            <a:off x="777240" y="6217920"/>
-            <a:ext cx="10607040" cy="182880"/>
+            <a:off x="658368" y="1627632"/>
+            <a:ext cx="10972800" cy="256032"/>
           </a:xfrm>
           <a:prstGeom prst="rect">
             <a:avLst/>
@@ -11361,19 +11661,210 @@
           </a:bodyPr>
           <a:lstStyle/>
           <a:p>
-            <a:pPr algn="ctr">
-              <a:spcAft>
-                <a:spcPts val="0"/>
-              </a:spcAft>
-              <a:defRPr sz="1100" b="1">
-                <a:solidFill>
-                  <a:srgbClr val="2A8B5A"/>
-                </a:solidFill>
-                <a:latin typeface="Noto Sans CJK KR"/>
-              </a:defRPr>
-            </a:pPr>
-            <a:r>
-              <a:t>① 명령/설정  ② 정상 출력 또는 화면  ③ 다음 검증 명령으로 재확인</a:t>
+            <a:pPr algn="l">
+              <a:spcAft>
+                <a:spcPts val="0"/>
+              </a:spcAft>
+              <a:defRPr sz="1500" b="1">
+                <a:solidFill>
+                  <a:srgbClr val="122C4E"/>
+                </a:solidFill>
+                <a:latin typeface="Noto Sans CJK KR"/>
+              </a:defRPr>
+            </a:pPr>
+            <a:r>
+              <a:t>이번 단계: 파일의 전체 내용을 중간 생략 없이 작성합니다. 아래 줄 범위를 끝까지 입력하세요.</a:t>
+            </a:r>
+          </a:p>
+        </p:txBody>
+      </p:sp>
+      <p:sp>
+        <p:nvSpPr>
+          <p:cNvPr id="8" name="Rectangle 7"/>
+          <p:cNvSpPr/>
+          <p:nvPr/>
+        </p:nvSpPr>
+        <p:spPr>
+          <a:xfrm>
+            <a:off x="658368" y="1956816"/>
+            <a:ext cx="10972800" cy="603504"/>
+          </a:xfrm>
+          <a:prstGeom prst="rect">
+            <a:avLst/>
+          </a:prstGeom>
+          <a:solidFill>
+            <a:srgbClr val="F4F7FB"/>
+          </a:solidFill>
+          <a:ln>
+            <a:solidFill>
+              <a:srgbClr val="F4F7FB"/>
+            </a:solidFill>
+          </a:ln>
+        </p:spPr>
+        <p:style>
+          <a:lnRef idx="1">
+            <a:schemeClr val="accent1"/>
+          </a:lnRef>
+          <a:fillRef idx="3">
+            <a:schemeClr val="accent1"/>
+          </a:fillRef>
+          <a:effectRef idx="2">
+            <a:schemeClr val="accent1"/>
+          </a:effectRef>
+          <a:fontRef idx="minor">
+            <a:schemeClr val="lt1"/>
+          </a:fontRef>
+        </p:style>
+        <p:txBody>
+          <a:bodyPr rtlCol="0" anchor="ctr" wrap="square" lIns="73152" rIns="73152" tIns="36576" bIns="36576"/>
+          <a:lstStyle/>
+          <a:p>
+            <a:pPr algn="l">
+              <a:spcAft>
+                <a:spcPts val="0"/>
+              </a:spcAft>
+              <a:defRPr sz="1400" b="0">
+                <a:solidFill>
+                  <a:srgbClr val="122C4E"/>
+                </a:solidFill>
+                <a:latin typeface="DejaVu Sans Mono"/>
+              </a:defRPr>
+            </a:pPr>
+            <a:r>
+              <a:t>파일 생성: mkdir -p ~/ros2_curri/agv_ws/src/agv_mission</a:t>
+            </a:r>
+            <a:br/>
+            <a:r>
+              <a:t>파일 열기: nano ~/ros2_curri/agv_ws/src/agv_mission/setup.py</a:t>
+            </a:r>
+          </a:p>
+        </p:txBody>
+      </p:sp>
+      <p:sp>
+        <p:nvSpPr>
+          <p:cNvPr id="9" name="Rectangle 8"/>
+          <p:cNvSpPr/>
+          <p:nvPr/>
+        </p:nvSpPr>
+        <p:spPr>
+          <a:xfrm>
+            <a:off x="658368" y="2706624"/>
+            <a:ext cx="10972800" cy="3364992"/>
+          </a:xfrm>
+          <a:prstGeom prst="rect">
+            <a:avLst/>
+          </a:prstGeom>
+          <a:solidFill>
+            <a:srgbClr val="1D232D"/>
+          </a:solidFill>
+          <a:ln>
+            <a:solidFill>
+              <a:srgbClr val="1D232D"/>
+            </a:solidFill>
+          </a:ln>
+        </p:spPr>
+        <p:style>
+          <a:lnRef idx="1">
+            <a:schemeClr val="accent1"/>
+          </a:lnRef>
+          <a:fillRef idx="3">
+            <a:schemeClr val="accent1"/>
+          </a:fillRef>
+          <a:effectRef idx="2">
+            <a:schemeClr val="accent1"/>
+          </a:effectRef>
+          <a:fontRef idx="minor">
+            <a:schemeClr val="lt1"/>
+          </a:fontRef>
+        </p:style>
+        <p:txBody>
+          <a:bodyPr rtlCol="0" anchor="ctr" wrap="square" lIns="164592" rIns="164592" tIns="109728" bIns="36576"/>
+          <a:lstStyle/>
+          <a:p>
+            <a:pPr algn="l">
+              <a:spcAft>
+                <a:spcPts val="0"/>
+              </a:spcAft>
+              <a:defRPr sz="1400" b="0">
+                <a:solidFill>
+                  <a:srgbClr val="FFFFFF"/>
+                </a:solidFill>
+                <a:latin typeface="DejaVu Sans Mono"/>
+              </a:defRPr>
+            </a:pPr>
+            <a:r>
+              <a:t>from setuptools import find_packages, setup</a:t>
+            </a:r>
+            <a:br/>
+            <a:r>
+              <a:t>package_name = 'agv_mission'</a:t>
+            </a:r>
+            <a:br/>
+            <a:r>
+              <a:t>setup(name=package_name, version='0.1.0', packages=find_packages(exclude=['test']),</a:t>
+            </a:r>
+            <a:br/>
+            <a:r>
+              <a:t>    data_files=[('share/ament_index/resource_index/packages',</a:t>
+            </a:r>
+            <a:br/>
+            <a:r>
+              <a:t>    ['resource/' + package_name]), ('share/' + package_name, ['package.xml'])],</a:t>
+            </a:r>
+            <a:br/>
+            <a:r>
+              <a:t>    install_requires=['setuptools'], zip_safe=True, maintainer='AGV student',</a:t>
+            </a:r>
+            <a:br/>
+            <a:r>
+              <a:t>    maintainer_email='student@example.com', license='Apache-2.0',</a:t>
+            </a:r>
+            <a:br/>
+            <a:r>
+              <a:t>    entry_points={'console_scripts': ['mission_manager = agv_mission.mission_manager:main',</a:t>
+            </a:r>
+            <a:br/>
+            <a:r>
+              <a:t>     'mission_markers = agv_mission.mission_markers:main']})</a:t>
+            </a:r>
+          </a:p>
+        </p:txBody>
+      </p:sp>
+      <p:sp>
+        <p:nvSpPr>
+          <p:cNvPr id="10" name="TextBox 9"/>
+          <p:cNvSpPr txBox="1"/>
+          <p:nvPr/>
+        </p:nvSpPr>
+        <p:spPr>
+          <a:xfrm>
+            <a:off x="749808" y="6181344"/>
+            <a:ext cx="10789920" cy="201168"/>
+          </a:xfrm>
+          <a:prstGeom prst="rect">
+            <a:avLst/>
+          </a:prstGeom>
+          <a:noFill/>
+        </p:spPr>
+        <p:txBody>
+          <a:bodyPr wrap="square" lIns="73152" rIns="73152" tIns="36576" bIns="36576">
+            <a:spAutoFit/>
+          </a:bodyPr>
+          <a:lstStyle/>
+          <a:p>
+            <a:pPr algn="l">
+              <a:spcAft>
+                <a:spcPts val="0"/>
+              </a:spcAft>
+              <a:defRPr sz="1000" b="0">
+                <a:solidFill>
+                  <a:srgbClr val="5C6672"/>
+                </a:solidFill>
+                <a:latin typeface="Noto Sans CJK KR"/>
+              </a:defRPr>
+            </a:pPr>
+            <a:r>
+              <a:t>파일 전체 1/1 · 이 슬라이드 다음에 같은 파일의 나머지 줄이 이어집니다.</a:t>
             </a:r>
           </a:p>
         </p:txBody>
@@ -11430,7 +11921,7 @@
               </a:defRPr>
             </a:pPr>
             <a:r>
-              <a:t>정상 결과: 실제 환경에서 확인한 출력</a:t>
+              <a:t>build → source → run 순서로 실행한다</a:t>
             </a:r>
           </a:p>
         </p:txBody>
@@ -11469,7 +11960,7 @@
               </a:defRPr>
             </a:pPr>
             <a:r>
-              <a:t>실제 RViz2: mission text Marker를 같은 scene에서 확인하는 display 구성</a:t>
+              <a:t>새 파일 또는 수정 파일은 build와 source 뒤에만 실행 이름·설정에 반영됩니다.</a:t>
             </a:r>
           </a:p>
         </p:txBody>
@@ -11552,40 +12043,136 @@
           </a:p>
         </p:txBody>
       </p:sp>
-      <p:pic>
-        <p:nvPicPr>
-          <p:cNvPr id="6" name="Picture 5" descr="02_rviz_marker_path_actual.png"/>
-          <p:cNvPicPr>
-            <a:picLocks noChangeAspect="1"/>
-          </p:cNvPicPr>
-          <p:nvPr/>
-        </p:nvPicPr>
-        <p:blipFill>
-          <a:blip r:embed="rId2"/>
-          <a:stretch>
-            <a:fillRect/>
-          </a:stretch>
-        </p:blipFill>
-        <p:spPr>
-          <a:xfrm>
-            <a:off x="2971409" y="1353312"/>
-            <a:ext cx="6246133" cy="4800600"/>
-          </a:xfrm>
-          <a:prstGeom prst="rect">
-            <a:avLst/>
-          </a:prstGeom>
-        </p:spPr>
-      </p:pic>
-      <p:sp>
-        <p:nvSpPr>
-          <p:cNvPr id="7" name="TextBox 6"/>
+      <p:sp>
+        <p:nvSpPr>
+          <p:cNvPr id="6" name="Rectangle 5"/>
+          <p:cNvSpPr/>
+          <p:nvPr/>
+        </p:nvSpPr>
+        <p:spPr>
+          <a:xfrm>
+            <a:off x="566928" y="1188720"/>
+            <a:ext cx="11064240" cy="347472"/>
+          </a:xfrm>
+          <a:prstGeom prst="rect">
+            <a:avLst/>
+          </a:prstGeom>
+          <a:solidFill>
+            <a:srgbClr val="F4F7FB"/>
+          </a:solidFill>
+          <a:ln>
+            <a:solidFill>
+              <a:srgbClr val="F4F7FB"/>
+            </a:solidFill>
+          </a:ln>
+        </p:spPr>
+        <p:style>
+          <a:lnRef idx="1">
+            <a:schemeClr val="accent1"/>
+          </a:lnRef>
+          <a:fillRef idx="3">
+            <a:schemeClr val="accent1"/>
+          </a:fillRef>
+          <a:effectRef idx="2">
+            <a:schemeClr val="accent1"/>
+          </a:effectRef>
+          <a:fontRef idx="minor">
+            <a:schemeClr val="lt1"/>
+          </a:fontRef>
+        </p:style>
+        <p:txBody>
+          <a:bodyPr rtlCol="0" anchor="ctr" wrap="square" lIns="73152" rIns="73152" tIns="36576" bIns="36576"/>
+          <a:lstStyle/>
+          <a:p>
+            <a:pPr algn="l">
+              <a:spcAft>
+                <a:spcPts val="0"/>
+              </a:spcAft>
+              <a:defRPr sz="1300" b="1">
+                <a:solidFill>
+                  <a:srgbClr val="122C4E"/>
+                </a:solidFill>
+                <a:latin typeface="Noto Sans CJK KR"/>
+              </a:defRPr>
+            </a:pPr>
+            <a:r>
+              <a:t>현재 단계 실행    |    현재 폴더 ~/ros2_curri/agv_ws    |    현재 터미널</a:t>
+            </a:r>
+          </a:p>
+        </p:txBody>
+      </p:sp>
+      <p:sp>
+        <p:nvSpPr>
+          <p:cNvPr id="7" name="Rounded Rectangle 6"/>
+          <p:cNvSpPr/>
+          <p:nvPr/>
+        </p:nvSpPr>
+        <p:spPr>
+          <a:xfrm>
+            <a:off x="658368" y="1700784"/>
+            <a:ext cx="10972800" cy="3182112"/>
+          </a:xfrm>
+          <a:prstGeom prst="roundRect">
+            <a:avLst/>
+          </a:prstGeom>
+          <a:solidFill>
+            <a:srgbClr val="1D232D"/>
+          </a:solidFill>
+          <a:ln>
+            <a:solidFill>
+              <a:srgbClr val="1D232D"/>
+            </a:solidFill>
+          </a:ln>
+        </p:spPr>
+        <p:style>
+          <a:lnRef idx="1">
+            <a:schemeClr val="accent1"/>
+          </a:lnRef>
+          <a:fillRef idx="3">
+            <a:schemeClr val="accent1"/>
+          </a:fillRef>
+          <a:effectRef idx="2">
+            <a:schemeClr val="accent1"/>
+          </a:effectRef>
+          <a:fontRef idx="minor">
+            <a:schemeClr val="lt1"/>
+          </a:fontRef>
+        </p:style>
+        <p:txBody>
+          <a:bodyPr rtlCol="0" anchor="ctr" wrap="square" lIns="73152" rIns="73152" tIns="36576" bIns="36576"/>
+          <a:lstStyle/>
+          <a:p>
+            <a:pPr algn="l">
+              <a:spcAft>
+                <a:spcPts val="0"/>
+              </a:spcAft>
+              <a:defRPr sz="1600" b="0">
+                <a:solidFill>
+                  <a:srgbClr val="FFFFFF"/>
+                </a:solidFill>
+                <a:latin typeface="DejaVu Sans Mono"/>
+              </a:defRPr>
+            </a:pPr>
+            <a:r>
+              <a:t>source ~/ros2_curri/agv_ws/install/setup.bash</a:t>
+            </a:r>
+            <a:br/>
+            <a:r>
+              <a:t>ros2 run agv_mission mission_manager</a:t>
+            </a:r>
+          </a:p>
+        </p:txBody>
+      </p:sp>
+      <p:sp>
+        <p:nvSpPr>
+          <p:cNvPr id="8" name="TextBox 7"/>
           <p:cNvSpPr txBox="1"/>
           <p:nvPr/>
         </p:nvSpPr>
         <p:spPr>
           <a:xfrm>
-            <a:off x="777240" y="6217920"/>
-            <a:ext cx="10607040" cy="182880"/>
+            <a:off x="786384" y="5239512"/>
+            <a:ext cx="1261872" cy="237744"/>
           </a:xfrm>
           <a:prstGeom prst="rect">
             <a:avLst/>
@@ -11598,11 +12185,11 @@
           </a:bodyPr>
           <a:lstStyle/>
           <a:p>
-            <a:pPr algn="ctr">
-              <a:spcAft>
-                <a:spcPts val="0"/>
-              </a:spcAft>
-              <a:defRPr sz="1100" b="1">
+            <a:pPr algn="l">
+              <a:spcAft>
+                <a:spcPts val="0"/>
+              </a:spcAft>
+              <a:defRPr sz="1800" b="1">
                 <a:solidFill>
                   <a:srgbClr val="2A8B5A"/>
                 </a:solidFill>
@@ -11610,7 +12197,46 @@
               </a:defRPr>
             </a:pPr>
             <a:r>
-              <a:t>① 명령/설정  ② 정상 출력 또는 화면  ③ 다음 검증 명령으로 재확인</a:t>
+              <a:t>확인 기준</a:t>
+            </a:r>
+          </a:p>
+        </p:txBody>
+      </p:sp>
+      <p:sp>
+        <p:nvSpPr>
+          <p:cNvPr id="9" name="TextBox 8"/>
+          <p:cNvSpPr txBox="1"/>
+          <p:nvPr/>
+        </p:nvSpPr>
+        <p:spPr>
+          <a:xfrm>
+            <a:off x="786384" y="5532120"/>
+            <a:ext cx="10469880" cy="420624"/>
+          </a:xfrm>
+          <a:prstGeom prst="rect">
+            <a:avLst/>
+          </a:prstGeom>
+          <a:noFill/>
+        </p:spPr>
+        <p:txBody>
+          <a:bodyPr wrap="square" lIns="73152" rIns="73152" tIns="36576" bIns="36576">
+            <a:spAutoFit/>
+          </a:bodyPr>
+          <a:lstStyle/>
+          <a:p>
+            <a:pPr algn="l">
+              <a:spcAft>
+                <a:spcPts val="0"/>
+              </a:spcAft>
+              <a:defRPr sz="1800" b="0">
+                <a:solidFill>
+                  <a:srgbClr val="122C4E"/>
+                </a:solidFill>
+                <a:latin typeface="Noto Sans CJK KR"/>
+              </a:defRPr>
+            </a:pPr>
+            <a:r>
+              <a:t>/mission_state 로그와 /cmd_vel_raw가 detection·obstacle input에 따라 바뀌는 구조를 확인한다.</a:t>
             </a:r>
           </a:p>
         </p:txBody>
@@ -11667,7 +12293,7 @@
               </a:defRPr>
             </a:pPr>
             <a:r>
-              <a:t>객관적 검증 명령으로 완료를 확인한다</a:t>
+              <a:t>정상 결과: 실제 환경에서 확인한 출력</a:t>
             </a:r>
           </a:p>
         </p:txBody>
@@ -11706,7 +12332,7 @@
               </a:defRPr>
             </a:pPr>
             <a:r>
-              <a:t>화면만 보지 말고 topic·frame·파일·parameter를 다시 확인합니다.</a:t>
+              <a:t>실제 ROS 2 환경의 파일·패키지·구성 검증 로그</a:t>
             </a:r>
           </a:p>
         </p:txBody>
@@ -11789,210 +12415,40 @@
           </a:p>
         </p:txBody>
       </p:sp>
-      <p:sp>
-        <p:nvSpPr>
-          <p:cNvPr id="6" name="Rectangle 5"/>
-          <p:cNvSpPr/>
-          <p:nvPr/>
-        </p:nvSpPr>
-        <p:spPr>
-          <a:xfrm>
-            <a:off x="566928" y="1188720"/>
-            <a:ext cx="11064240" cy="347472"/>
-          </a:xfrm>
-          <a:prstGeom prst="rect">
-            <a:avLst/>
-          </a:prstGeom>
-          <a:solidFill>
-            <a:srgbClr val="F4F7FB"/>
-          </a:solidFill>
-          <a:ln>
-            <a:solidFill>
-              <a:srgbClr val="F4F7FB"/>
-            </a:solidFill>
-          </a:ln>
-        </p:spPr>
-        <p:style>
-          <a:lnRef idx="1">
-            <a:schemeClr val="accent1"/>
-          </a:lnRef>
-          <a:fillRef idx="3">
-            <a:schemeClr val="accent1"/>
-          </a:fillRef>
-          <a:effectRef idx="2">
-            <a:schemeClr val="accent1"/>
-          </a:effectRef>
-          <a:fontRef idx="minor">
-            <a:schemeClr val="lt1"/>
-          </a:fontRef>
-        </p:style>
-        <p:txBody>
-          <a:bodyPr rtlCol="0" anchor="ctr" wrap="square" lIns="73152" rIns="73152" tIns="36576" bIns="36576"/>
-          <a:lstStyle/>
-          <a:p>
-            <a:pPr algn="l">
-              <a:spcAft>
-                <a:spcPts val="0"/>
-              </a:spcAft>
-              <a:defRPr sz="1300" b="1">
-                <a:solidFill>
-                  <a:srgbClr val="122C4E"/>
-                </a:solidFill>
-                <a:latin typeface="Noto Sans CJK KR"/>
-              </a:defRPr>
-            </a:pPr>
-            <a:r>
-              <a:t>현재 단계 검증    |    현재 폴더 ~/ros2_curri/agv_ws    |    현재 터미널</a:t>
-            </a:r>
-          </a:p>
-        </p:txBody>
-      </p:sp>
-      <p:sp>
-        <p:nvSpPr>
-          <p:cNvPr id="7" name="Rounded Rectangle 6"/>
-          <p:cNvSpPr/>
-          <p:nvPr/>
-        </p:nvSpPr>
-        <p:spPr>
-          <a:xfrm>
-            <a:off x="658368" y="1755648"/>
-            <a:ext cx="10972800" cy="2148840"/>
-          </a:xfrm>
-          <a:prstGeom prst="roundRect">
-            <a:avLst/>
-          </a:prstGeom>
-          <a:solidFill>
-            <a:srgbClr val="1D232D"/>
-          </a:solidFill>
-          <a:ln>
-            <a:solidFill>
-              <a:srgbClr val="1D232D"/>
-            </a:solidFill>
-          </a:ln>
-        </p:spPr>
-        <p:style>
-          <a:lnRef idx="1">
-            <a:schemeClr val="accent1"/>
-          </a:lnRef>
-          <a:fillRef idx="3">
-            <a:schemeClr val="accent1"/>
-          </a:fillRef>
-          <a:effectRef idx="2">
-            <a:schemeClr val="accent1"/>
-          </a:effectRef>
-          <a:fontRef idx="minor">
-            <a:schemeClr val="lt1"/>
-          </a:fontRef>
-        </p:style>
-        <p:txBody>
-          <a:bodyPr rtlCol="0" anchor="ctr" wrap="square" lIns="73152" rIns="73152" tIns="36576" bIns="36576"/>
-          <a:lstStyle/>
-          <a:p>
-            <a:pPr algn="l">
-              <a:spcAft>
-                <a:spcPts val="0"/>
-              </a:spcAft>
-              <a:defRPr sz="1600" b="0">
-                <a:solidFill>
-                  <a:srgbClr val="FFFFFF"/>
-                </a:solidFill>
-                <a:latin typeface="DejaVu Sans Mono"/>
-              </a:defRPr>
-            </a:pPr>
-            <a:r>
-              <a:t>ros2 topic info /mission_state</a:t>
-            </a:r>
-            <a:br/>
-            <a:r>
-              <a:t>ros2 topic info /cmd_vel_raw</a:t>
-            </a:r>
-            <a:br/>
-            <a:r>
-              <a:t>ros2 param get /mission_manager stop_distance</a:t>
-            </a:r>
-          </a:p>
-        </p:txBody>
-      </p:sp>
-      <p:sp>
-        <p:nvSpPr>
-          <p:cNvPr id="8" name="Rounded Rectangle 7"/>
-          <p:cNvSpPr/>
-          <p:nvPr/>
-        </p:nvSpPr>
-        <p:spPr>
-          <a:xfrm>
-            <a:off x="658368" y="4206240"/>
-            <a:ext cx="10972800" cy="1554480"/>
-          </a:xfrm>
-          <a:prstGeom prst="roundRect">
-            <a:avLst/>
-          </a:prstGeom>
-          <a:solidFill>
-            <a:srgbClr val="F4F7FB"/>
-          </a:solidFill>
-          <a:ln>
-            <a:solidFill>
-              <a:srgbClr val="D1DFD5"/>
-            </a:solidFill>
-          </a:ln>
-        </p:spPr>
-        <p:style>
-          <a:lnRef idx="1">
-            <a:schemeClr val="accent1"/>
-          </a:lnRef>
-          <a:fillRef idx="3">
-            <a:schemeClr val="accent1"/>
-          </a:fillRef>
-          <a:effectRef idx="2">
-            <a:schemeClr val="accent1"/>
-          </a:effectRef>
-          <a:fontRef idx="minor">
-            <a:schemeClr val="lt1"/>
-          </a:fontRef>
-        </p:style>
-        <p:txBody>
-          <a:bodyPr rtlCol="0" anchor="ctr" wrap="square" lIns="73152" rIns="73152" tIns="36576" bIns="36576"/>
-          <a:lstStyle/>
-          <a:p>
-            <a:pPr algn="l">
-              <a:spcAft>
-                <a:spcPts val="0"/>
-              </a:spcAft>
-              <a:defRPr sz="1800" b="1">
-                <a:solidFill>
-                  <a:srgbClr val="2A8B5A"/>
-                </a:solidFill>
-                <a:latin typeface="Noto Sans CJK KR"/>
-              </a:defRPr>
-            </a:pPr>
-            <a:r>
-              <a:t>완료 체크</a:t>
-            </a:r>
-            <a:br/>
-            <a:r>
-              <a:t>□ 명령이 오류 없이 실행된다.</a:t>
-            </a:r>
-            <a:br/>
-            <a:r>
-              <a:t>□ 기대한 파일·topic·frame·parameter 이름이 보인다.</a:t>
-            </a:r>
-            <a:br/>
-            <a:r>
-              <a:t>□ 값의 단위와 방향을 한 문장으로 설명할 수 있다.</a:t>
-            </a:r>
-          </a:p>
-        </p:txBody>
-      </p:sp>
-      <p:sp>
-        <p:nvSpPr>
-          <p:cNvPr id="9" name="TextBox 8"/>
+      <p:pic>
+        <p:nvPicPr>
+          <p:cNvPr id="6" name="Picture 5" descr="validation_terminal.png"/>
+          <p:cNvPicPr>
+            <a:picLocks noChangeAspect="1"/>
+          </p:cNvPicPr>
+          <p:nvPr/>
+        </p:nvPicPr>
+        <p:blipFill>
+          <a:blip r:embed="rId2"/>
+          <a:stretch>
+            <a:fillRect/>
+          </a:stretch>
+        </p:blipFill>
+        <p:spPr>
+          <a:xfrm>
+            <a:off x="790956" y="1562649"/>
+            <a:ext cx="10607040" cy="4381924"/>
+          </a:xfrm>
+          <a:prstGeom prst="rect">
+            <a:avLst/>
+          </a:prstGeom>
+        </p:spPr>
+      </p:pic>
+      <p:sp>
+        <p:nvSpPr>
+          <p:cNvPr id="7" name="TextBox 6"/>
           <p:cNvSpPr txBox="1"/>
           <p:nvPr/>
         </p:nvSpPr>
         <p:spPr>
           <a:xfrm>
-            <a:off x="731520" y="5989320"/>
-            <a:ext cx="10789920" cy="237744"/>
+            <a:off x="777240" y="6144768"/>
+            <a:ext cx="10607040" cy="310896"/>
           </a:xfrm>
           <a:prstGeom prst="rect">
             <a:avLst/>
@@ -12005,19 +12461,19 @@
           </a:bodyPr>
           <a:lstStyle/>
           <a:p>
-            <a:pPr algn="l">
-              <a:spcAft>
-                <a:spcPts val="0"/>
-              </a:spcAft>
-              <a:defRPr sz="1500" b="1">
-                <a:solidFill>
-                  <a:srgbClr val="122C4E"/>
-                </a:solidFill>
-                <a:latin typeface="Noto Sans CJK KR"/>
-              </a:defRPr>
-            </a:pPr>
-            <a:r>
-              <a:t>완료 조건: /mission_state 로그와 /cmd_vel_raw가 detection·obstacle input에 따라 바뀌는 구조를 확인한다.</a:t>
+            <a:pPr algn="ctr">
+              <a:spcAft>
+                <a:spcPts val="0"/>
+              </a:spcAft>
+              <a:defRPr sz="1100" b="1">
+                <a:solidFill>
+                  <a:srgbClr val="2A8B5A"/>
+                </a:solidFill>
+                <a:latin typeface="Noto Sans CJK KR"/>
+              </a:defRPr>
+            </a:pPr>
+            <a:r>
+              <a:t>화면에서 확인: ① 명령/설정  ② 정상 출력 또는 화면  ③ 다음 검증 명령으로 재확인</a:t>
             </a:r>
           </a:p>
         </p:txBody>
@@ -12074,7 +12530,7 @@
               </a:defRPr>
             </a:pPr>
             <a:r>
-              <a:t>막히면: 증상 → 우선 확인 → 재검증</a:t>
+              <a:t>정상 결과: 실제 환경에서 확인한 출력</a:t>
             </a:r>
           </a:p>
         </p:txBody>
@@ -12113,7 +12569,7 @@
               </a:defRPr>
             </a:pPr>
             <a:r>
-              <a:t>오류 메시지를 숨기지 않고 같은 순서로 점검합니다.</a:t>
+              <a:t>실제 RViz2: mission text Marker를 같은 scene에서 확인하는 display 구성</a:t>
             </a:r>
           </a:p>
         </p:txBody>
@@ -12196,119 +12652,40 @@
           </a:p>
         </p:txBody>
       </p:sp>
-      <p:sp>
-        <p:nvSpPr>
-          <p:cNvPr id="6" name="Rectangle 5"/>
-          <p:cNvSpPr/>
-          <p:nvPr/>
-        </p:nvSpPr>
-        <p:spPr>
-          <a:xfrm>
-            <a:off x="566928" y="1188720"/>
-            <a:ext cx="11064240" cy="347472"/>
-          </a:xfrm>
-          <a:prstGeom prst="rect">
-            <a:avLst/>
-          </a:prstGeom>
-          <a:solidFill>
-            <a:srgbClr val="F4F7FB"/>
-          </a:solidFill>
-          <a:ln>
-            <a:solidFill>
-              <a:srgbClr val="F4F7FB"/>
-            </a:solidFill>
-          </a:ln>
-        </p:spPr>
-        <p:style>
-          <a:lnRef idx="1">
-            <a:schemeClr val="accent1"/>
-          </a:lnRef>
-          <a:fillRef idx="3">
-            <a:schemeClr val="accent1"/>
-          </a:fillRef>
-          <a:effectRef idx="2">
-            <a:schemeClr val="accent1"/>
-          </a:effectRef>
-          <a:fontRef idx="minor">
-            <a:schemeClr val="lt1"/>
-          </a:fontRef>
-        </p:style>
-        <p:txBody>
-          <a:bodyPr rtlCol="0" anchor="ctr" wrap="square" lIns="73152" rIns="73152" tIns="36576" bIns="36576"/>
-          <a:lstStyle/>
-          <a:p>
-            <a:pPr algn="l">
-              <a:spcAft>
-                <a:spcPts val="0"/>
-              </a:spcAft>
-              <a:defRPr sz="1300" b="1">
-                <a:solidFill>
-                  <a:srgbClr val="122C4E"/>
-                </a:solidFill>
-                <a:latin typeface="Noto Sans CJK KR"/>
-              </a:defRPr>
-            </a:pPr>
-            <a:r>
-              <a:t>현재 단계 오류 대응    |    현재 폴더 ~/ros2_curri/agv_ws    |    현재 터미널</a:t>
-            </a:r>
-          </a:p>
-        </p:txBody>
-      </p:sp>
-      <p:sp>
-        <p:nvSpPr>
-          <p:cNvPr id="7" name="Rounded Rectangle 6"/>
-          <p:cNvSpPr/>
-          <p:nvPr/>
-        </p:nvSpPr>
-        <p:spPr>
-          <a:xfrm>
-            <a:off x="694944" y="1755648"/>
-            <a:ext cx="10972800" cy="1115568"/>
-          </a:xfrm>
-          <a:prstGeom prst="roundRect">
-            <a:avLst/>
-          </a:prstGeom>
-          <a:solidFill>
-            <a:srgbClr val="FFF7F4"/>
-          </a:solidFill>
-          <a:ln>
-            <a:solidFill>
-              <a:srgbClr val="EDBEB4"/>
-            </a:solidFill>
-          </a:ln>
-        </p:spPr>
-        <p:style>
-          <a:lnRef idx="1">
-            <a:schemeClr val="accent1"/>
-          </a:lnRef>
-          <a:fillRef idx="3">
-            <a:schemeClr val="accent1"/>
-          </a:fillRef>
-          <a:effectRef idx="2">
-            <a:schemeClr val="accent1"/>
-          </a:effectRef>
-          <a:fontRef idx="minor">
-            <a:schemeClr val="lt1"/>
-          </a:fontRef>
-        </p:style>
-        <p:txBody>
-          <a:bodyPr rtlCol="0" anchor="ctr"/>
-          <a:lstStyle/>
-          <a:p>
-            <a:pPr algn="ctr"/>
-          </a:p>
-        </p:txBody>
-      </p:sp>
-      <p:sp>
-        <p:nvSpPr>
-          <p:cNvPr id="8" name="TextBox 7"/>
+      <p:pic>
+        <p:nvPicPr>
+          <p:cNvPr id="6" name="Picture 5" descr="02_rviz_marker_path_actual.png"/>
+          <p:cNvPicPr>
+            <a:picLocks noChangeAspect="1"/>
+          </p:cNvPicPr>
+          <p:nvPr/>
+        </p:nvPicPr>
+        <p:blipFill>
+          <a:blip r:embed="rId2"/>
+          <a:stretch>
+            <a:fillRect/>
+          </a:stretch>
+        </p:blipFill>
+        <p:spPr>
+          <a:xfrm>
+            <a:off x="2971409" y="1353312"/>
+            <a:ext cx="6246133" cy="4800600"/>
+          </a:xfrm>
+          <a:prstGeom prst="rect">
+            <a:avLst/>
+          </a:prstGeom>
+        </p:spPr>
+      </p:pic>
+      <p:sp>
+        <p:nvSpPr>
+          <p:cNvPr id="7" name="TextBox 6"/>
           <p:cNvSpPr txBox="1"/>
           <p:nvPr/>
         </p:nvSpPr>
         <p:spPr>
           <a:xfrm>
-            <a:off x="896112" y="1901952"/>
-            <a:ext cx="2926080" cy="274320"/>
+            <a:off x="777240" y="6144768"/>
+            <a:ext cx="10607040" cy="310896"/>
           </a:xfrm>
           <a:prstGeom prst="rect">
             <a:avLst/>
@@ -12321,228 +12698,19 @@
           </a:bodyPr>
           <a:lstStyle/>
           <a:p>
-            <a:pPr algn="l">
-              <a:spcAft>
-                <a:spcPts val="0"/>
-              </a:spcAft>
-              <a:defRPr sz="1800" b="1">
-                <a:solidFill>
-                  <a:srgbClr val="BE3B3B"/>
-                </a:solidFill>
-                <a:latin typeface="Noto Sans CJK KR"/>
-              </a:defRPr>
-            </a:pPr>
-            <a:r>
-              <a:t>증상 1: 상태가 전환되지 않음</a:t>
-            </a:r>
-          </a:p>
-        </p:txBody>
-      </p:sp>
-      <p:sp>
-        <p:nvSpPr>
-          <p:cNvPr id="9" name="TextBox 8"/>
-          <p:cNvSpPr txBox="1"/>
-          <p:nvPr/>
-        </p:nvSpPr>
-        <p:spPr>
-          <a:xfrm>
-            <a:off x="3794760" y="1883664"/>
-            <a:ext cx="7543800" cy="621792"/>
-          </a:xfrm>
-          <a:prstGeom prst="rect">
-            <a:avLst/>
-          </a:prstGeom>
-          <a:noFill/>
-        </p:spPr>
-        <p:txBody>
-          <a:bodyPr wrap="square" lIns="73152" rIns="73152" tIns="36576" bIns="36576">
-            <a:spAutoFit/>
-          </a:bodyPr>
-          <a:lstStyle/>
-          <a:p>
-            <a:pPr algn="l">
-              <a:spcAft>
-                <a:spcPts val="0"/>
-              </a:spcAft>
-              <a:defRPr sz="1600" b="0">
-                <a:solidFill>
-                  <a:srgbClr val="122C4E"/>
-                </a:solidFill>
-                <a:latin typeface="Noto Sans CJK KR"/>
-              </a:defRPr>
-            </a:pPr>
-            <a:r>
-              <a:t>우선 확인: callback input·조건식·거리 단위를 확인한다.</a:t>
-            </a:r>
-            <a:br/>
-            <a:r>
-              <a:t>수정 후: ros2 topic info /mission_state</a:t>
-            </a:r>
-          </a:p>
-        </p:txBody>
-      </p:sp>
-      <p:sp>
-        <p:nvSpPr>
-          <p:cNvPr id="10" name="Rounded Rectangle 9"/>
-          <p:cNvSpPr/>
-          <p:nvPr/>
-        </p:nvSpPr>
-        <p:spPr>
-          <a:xfrm>
-            <a:off x="694944" y="3172968"/>
-            <a:ext cx="10972800" cy="1115568"/>
-          </a:xfrm>
-          <a:prstGeom prst="roundRect">
-            <a:avLst/>
-          </a:prstGeom>
-          <a:solidFill>
-            <a:srgbClr val="FFF7F4"/>
-          </a:solidFill>
-          <a:ln>
-            <a:solidFill>
-              <a:srgbClr val="EDBEB4"/>
-            </a:solidFill>
-          </a:ln>
-        </p:spPr>
-        <p:style>
-          <a:lnRef idx="1">
-            <a:schemeClr val="accent1"/>
-          </a:lnRef>
-          <a:fillRef idx="3">
-            <a:schemeClr val="accent1"/>
-          </a:fillRef>
-          <a:effectRef idx="2">
-            <a:schemeClr val="accent1"/>
-          </a:effectRef>
-          <a:fontRef idx="minor">
-            <a:schemeClr val="lt1"/>
-          </a:fontRef>
-        </p:style>
-        <p:txBody>
-          <a:bodyPr rtlCol="0" anchor="ctr"/>
-          <a:lstStyle/>
-          <a:p>
-            <a:pPr algn="ctr"/>
-          </a:p>
-        </p:txBody>
-      </p:sp>
-      <p:sp>
-        <p:nvSpPr>
-          <p:cNvPr id="11" name="TextBox 10"/>
-          <p:cNvSpPr txBox="1"/>
-          <p:nvPr/>
-        </p:nvSpPr>
-        <p:spPr>
-          <a:xfrm>
-            <a:off x="896112" y="3319272"/>
-            <a:ext cx="2926080" cy="274320"/>
-          </a:xfrm>
-          <a:prstGeom prst="rect">
-            <a:avLst/>
-          </a:prstGeom>
-          <a:noFill/>
-        </p:spPr>
-        <p:txBody>
-          <a:bodyPr wrap="square" lIns="73152" rIns="73152" tIns="36576" bIns="36576">
-            <a:spAutoFit/>
-          </a:bodyPr>
-          <a:lstStyle/>
-          <a:p>
-            <a:pPr algn="l">
-              <a:spcAft>
-                <a:spcPts val="0"/>
-              </a:spcAft>
-              <a:defRPr sz="1800" b="1">
-                <a:solidFill>
-                  <a:srgbClr val="BE3B3B"/>
-                </a:solidFill>
-                <a:latin typeface="Noto Sans CJK KR"/>
-              </a:defRPr>
-            </a:pPr>
-            <a:r>
-              <a:t>증상 2: SEARCH↔APPROACH 반복</a:t>
-            </a:r>
-          </a:p>
-        </p:txBody>
-      </p:sp>
-      <p:sp>
-        <p:nvSpPr>
-          <p:cNvPr id="12" name="TextBox 11"/>
-          <p:cNvSpPr txBox="1"/>
-          <p:nvPr/>
-        </p:nvSpPr>
-        <p:spPr>
-          <a:xfrm>
-            <a:off x="3794760" y="3300984"/>
-            <a:ext cx="7543800" cy="621792"/>
-          </a:xfrm>
-          <a:prstGeom prst="rect">
-            <a:avLst/>
-          </a:prstGeom>
-          <a:noFill/>
-        </p:spPr>
-        <p:txBody>
-          <a:bodyPr wrap="square" lIns="73152" rIns="73152" tIns="36576" bIns="36576">
-            <a:spAutoFit/>
-          </a:bodyPr>
-          <a:lstStyle/>
-          <a:p>
-            <a:pPr algn="l">
-              <a:spcAft>
-                <a:spcPts val="0"/>
-              </a:spcAft>
-              <a:defRPr sz="1600" b="0">
-                <a:solidFill>
-                  <a:srgbClr val="122C4E"/>
-                </a:solidFill>
-                <a:latin typeface="Noto Sans CJK KR"/>
-              </a:defRPr>
-            </a:pPr>
-            <a:r>
-              <a:t>우선 확인: detection timeout·hysteresis·우선순위를 추가 점검한다.</a:t>
-            </a:r>
-            <a:br/>
-            <a:r>
-              <a:t>수정 후: ros2 topic info /mission_state</a:t>
-            </a:r>
-          </a:p>
-        </p:txBody>
-      </p:sp>
-      <p:sp>
-        <p:nvSpPr>
-          <p:cNvPr id="13" name="TextBox 12"/>
-          <p:cNvSpPr txBox="1"/>
-          <p:nvPr/>
-        </p:nvSpPr>
-        <p:spPr>
-          <a:xfrm>
-            <a:off x="822960" y="5102352"/>
-            <a:ext cx="10607040" cy="402336"/>
-          </a:xfrm>
-          <a:prstGeom prst="rect">
-            <a:avLst/>
-          </a:prstGeom>
-          <a:noFill/>
-        </p:spPr>
-        <p:txBody>
-          <a:bodyPr wrap="square" lIns="73152" rIns="73152" tIns="36576" bIns="36576">
-            <a:spAutoFit/>
-          </a:bodyPr>
-          <a:lstStyle/>
-          <a:p>
             <a:pPr algn="ctr">
               <a:spcAft>
                 <a:spcPts val="0"/>
               </a:spcAft>
-              <a:defRPr sz="1800" b="1">
-                <a:solidFill>
-                  <a:srgbClr val="DB7E22"/>
-                </a:solidFill>
-                <a:latin typeface="Noto Sans CJK KR"/>
-              </a:defRPr>
-            </a:pPr>
-            <a:r>
-              <a:t>공통 순서: ① 현재 폴더 ② source ③ 파일 경로 ④ 이름/타입/단위 ⑤ build·source 후 재실행</a:t>
+              <a:defRPr sz="1100" b="1">
+                <a:solidFill>
+                  <a:srgbClr val="2A8B5A"/>
+                </a:solidFill>
+                <a:latin typeface="Noto Sans CJK KR"/>
+              </a:defRPr>
+            </a:pPr>
+            <a:r>
+              <a:t>화면에서 확인: 명령·설정과 화면의 topic·frame·결과 이름을 대조합니다.</a:t>
             </a:r>
           </a:p>
         </p:txBody>
@@ -12599,7 +12767,7 @@
               </a:defRPr>
             </a:pPr>
             <a:r>
-              <a:t>미니 실습: 값 하나를 바꾸고 결과를 비교한다</a:t>
+              <a:t>객관적 검증 명령으로 완료를 확인한다</a:t>
             </a:r>
           </a:p>
         </p:txBody>
@@ -12638,7 +12806,7 @@
               </a:defRPr>
             </a:pPr>
             <a:r>
-              <a:t>정상 결과를 만든 뒤에는 한 번에 하나의 값만 바꿉니다.</a:t>
+              <a:t>화면만 보지 말고 topic·frame·파일·parameter를 다시 확인합니다.</a:t>
             </a:r>
           </a:p>
         </p:txBody>
@@ -12774,7 +12942,7 @@
               </a:defRPr>
             </a:pPr>
             <a:r>
-              <a:t>현재 단계 미니 실습    |    현재 폴더 ~/ros2_curri/agv_ws    |    현재 터미널</a:t>
+              <a:t>현재 단계 검증    |    현재 폴더 ~/ros2_curri/agv_ws    |    현재 터미널</a:t>
             </a:r>
           </a:p>
         </p:txBody>
@@ -12787,18 +12955,18 @@
         </p:nvSpPr>
         <p:spPr>
           <a:xfrm>
-            <a:off x="749808" y="1874519"/>
-            <a:ext cx="10652760" cy="1993392"/>
+            <a:off x="658368" y="1755648"/>
+            <a:ext cx="10972800" cy="2148840"/>
           </a:xfrm>
           <a:prstGeom prst="roundRect">
             <a:avLst/>
           </a:prstGeom>
           <a:solidFill>
-            <a:srgbClr val="FFF8EB"/>
+            <a:srgbClr val="1D232D"/>
           </a:solidFill>
           <a:ln>
             <a:solidFill>
-              <a:srgbClr val="ECC680"/>
+              <a:srgbClr val="1D232D"/>
             </a:solidFill>
           </a:ln>
         </p:spPr>
@@ -12820,33 +12988,111 @@
           <a:bodyPr rtlCol="0" anchor="ctr" wrap="square" lIns="73152" rIns="73152" tIns="36576" bIns="36576"/>
           <a:lstStyle/>
           <a:p>
-            <a:pPr algn="ctr">
-              <a:spcAft>
-                <a:spcPts val="0"/>
-              </a:spcAft>
-              <a:defRPr sz="2300" b="1">
-                <a:solidFill>
-                  <a:srgbClr val="122C4E"/>
-                </a:solidFill>
-                <a:latin typeface="Noto Sans CJK KR"/>
-              </a:defRPr>
-            </a:pPr>
-            <a:r>
-              <a:t>target 없음, target 있음, obstacle&lt;0.5 m의 세 입력에 대해 예상 state와 /cmd_vel_raw를 표로 작성한다.</a:t>
-            </a:r>
-          </a:p>
-        </p:txBody>
-      </p:sp>
-      <p:sp>
-        <p:nvSpPr>
-          <p:cNvPr id="8" name="TextBox 7"/>
+            <a:pPr algn="l">
+              <a:spcAft>
+                <a:spcPts val="0"/>
+              </a:spcAft>
+              <a:defRPr sz="1600" b="0">
+                <a:solidFill>
+                  <a:srgbClr val="FFFFFF"/>
+                </a:solidFill>
+                <a:latin typeface="DejaVu Sans Mono"/>
+              </a:defRPr>
+            </a:pPr>
+            <a:r>
+              <a:t>ros2 topic info /mission_state</a:t>
+            </a:r>
+            <a:br/>
+            <a:r>
+              <a:t>ros2 topic info /cmd_vel_raw</a:t>
+            </a:r>
+            <a:br/>
+            <a:r>
+              <a:t>ros2 param get /mission_manager stop_distance</a:t>
+            </a:r>
+          </a:p>
+        </p:txBody>
+      </p:sp>
+      <p:sp>
+        <p:nvSpPr>
+          <p:cNvPr id="8" name="Rounded Rectangle 7"/>
+          <p:cNvSpPr/>
+          <p:nvPr/>
+        </p:nvSpPr>
+        <p:spPr>
+          <a:xfrm>
+            <a:off x="658368" y="4206240"/>
+            <a:ext cx="10972800" cy="1554480"/>
+          </a:xfrm>
+          <a:prstGeom prst="roundRect">
+            <a:avLst/>
+          </a:prstGeom>
+          <a:solidFill>
+            <a:srgbClr val="F4F7FB"/>
+          </a:solidFill>
+          <a:ln>
+            <a:solidFill>
+              <a:srgbClr val="D1DFD5"/>
+            </a:solidFill>
+          </a:ln>
+        </p:spPr>
+        <p:style>
+          <a:lnRef idx="1">
+            <a:schemeClr val="accent1"/>
+          </a:lnRef>
+          <a:fillRef idx="3">
+            <a:schemeClr val="accent1"/>
+          </a:fillRef>
+          <a:effectRef idx="2">
+            <a:schemeClr val="accent1"/>
+          </a:effectRef>
+          <a:fontRef idx="minor">
+            <a:schemeClr val="lt1"/>
+          </a:fontRef>
+        </p:style>
+        <p:txBody>
+          <a:bodyPr rtlCol="0" anchor="ctr" wrap="square" lIns="73152" rIns="73152" tIns="36576" bIns="36576"/>
+          <a:lstStyle/>
+          <a:p>
+            <a:pPr algn="l">
+              <a:spcAft>
+                <a:spcPts val="0"/>
+              </a:spcAft>
+              <a:defRPr sz="1800" b="1">
+                <a:solidFill>
+                  <a:srgbClr val="2A8B5A"/>
+                </a:solidFill>
+                <a:latin typeface="Noto Sans CJK KR"/>
+              </a:defRPr>
+            </a:pPr>
+            <a:r>
+              <a:t>완료 체크</a:t>
+            </a:r>
+            <a:br/>
+            <a:r>
+              <a:t>□ 명령이 오류 없이 실행된다.</a:t>
+            </a:r>
+            <a:br/>
+            <a:r>
+              <a:t>□ 기대한 파일·topic·frame·parameter 이름이 보인다.</a:t>
+            </a:r>
+            <a:br/>
+            <a:r>
+              <a:t>□ 값의 단위와 방향을 한 문장으로 설명할 수 있다.</a:t>
+            </a:r>
+          </a:p>
+        </p:txBody>
+      </p:sp>
+      <p:sp>
+        <p:nvSpPr>
+          <p:cNvPr id="9" name="TextBox 8"/>
           <p:cNvSpPr txBox="1"/>
           <p:nvPr/>
         </p:nvSpPr>
         <p:spPr>
           <a:xfrm>
-            <a:off x="877824" y="4590288"/>
-            <a:ext cx="10241280" cy="594360"/>
+            <a:off x="731520" y="5989320"/>
+            <a:ext cx="10789920" cy="237744"/>
           </a:xfrm>
           <a:prstGeom prst="rect">
             <a:avLst/>
@@ -12859,19 +13105,19 @@
           </a:bodyPr>
           <a:lstStyle/>
           <a:p>
-            <a:pPr algn="ctr">
-              <a:spcAft>
-                <a:spcPts val="0"/>
-              </a:spcAft>
-              <a:defRPr sz="1900" b="1">
-                <a:solidFill>
-                  <a:srgbClr val="DB7E22"/>
-                </a:solidFill>
-                <a:latin typeface="Noto Sans CJK KR"/>
-              </a:defRPr>
-            </a:pPr>
-            <a:r>
-              <a:t>기록할 것: 바꾼 값(단위) · 기대한 변화 · 실제 출력/화면 · 원래 값으로 되돌린 결과</a:t>
+            <a:pPr algn="l">
+              <a:spcAft>
+                <a:spcPts val="0"/>
+              </a:spcAft>
+              <a:defRPr sz="1500" b="1">
+                <a:solidFill>
+                  <a:srgbClr val="122C4E"/>
+                </a:solidFill>
+                <a:latin typeface="Noto Sans CJK KR"/>
+              </a:defRPr>
+            </a:pPr>
+            <a:r>
+              <a:t>완료 조건: /mission_state 로그와 /cmd_vel_raw가 detection·obstacle input에 따라 바뀌는 구조를 확인한다.</a:t>
             </a:r>
           </a:p>
         </p:txBody>
@@ -12928,7 +13174,7 @@
               </a:defRPr>
             </a:pPr>
             <a:r>
-              <a:t>체크포인트를 저장하고 다음 모듈로 넘긴다</a:t>
+              <a:t>막히면: 증상 → 우선 확인 → 재검증</a:t>
             </a:r>
           </a:p>
         </p:txBody>
@@ -12967,7 +13213,7 @@
               </a:defRPr>
             </a:pPr>
             <a:r>
-              <a:t>현재 Complete는 다음 Starter의 기준선입니다.</a:t>
+              <a:t>오류 메시지를 숨기지 않고 같은 순서로 점검합니다.</a:t>
             </a:r>
           </a:p>
         </p:txBody>
@@ -13103,7 +13349,7 @@
               </a:defRPr>
             </a:pPr>
             <a:r>
-              <a:t>현재 단계 체크포인트    |    현재 폴더 ~/ros2_curri/agv_ws    |    현재 터미널</a:t>
+              <a:t>현재 단계 오류 대응    |    현재 폴더 ~/ros2_curri/agv_ws    |    현재 터미널</a:t>
             </a:r>
           </a:p>
         </p:txBody>
@@ -13116,18 +13362,18 @@
         </p:nvSpPr>
         <p:spPr>
           <a:xfrm>
-            <a:off x="685800" y="1737360"/>
-            <a:ext cx="10972800" cy="3611880"/>
+            <a:off x="694944" y="1755648"/>
+            <a:ext cx="10972800" cy="1115568"/>
           </a:xfrm>
           <a:prstGeom prst="roundRect">
             <a:avLst/>
           </a:prstGeom>
           <a:solidFill>
-            <a:srgbClr val="F4F7FB"/>
+            <a:srgbClr val="FFF7F4"/>
           </a:solidFill>
           <a:ln>
             <a:solidFill>
-              <a:srgbClr val="D2DCE8"/>
+              <a:srgbClr val="EDBEB4"/>
             </a:solidFill>
           </a:ln>
         </p:spPr>
@@ -13161,111 +13407,8 @@
         </p:nvSpPr>
         <p:spPr>
           <a:xfrm>
-            <a:off x="896112" y="1993392"/>
-            <a:ext cx="10332720" cy="2971800"/>
-          </a:xfrm>
-          <a:prstGeom prst="rect">
-            <a:avLst/>
-          </a:prstGeom>
-          <a:noFill/>
-        </p:spPr>
-        <p:txBody>
-          <a:bodyPr wrap="square" lIns="109728" rIns="109728">
-            <a:spAutoFit/>
-          </a:bodyPr>
-          <a:lstStyle/>
-          <a:p>
-            <a:pPr>
-              <a:spcAft>
-                <a:spcPts val="800"/>
-              </a:spcAft>
-              <a:defRPr sz="1800">
-                <a:solidFill>
-                  <a:srgbClr val="122C4E"/>
-                </a:solidFill>
-                <a:latin typeface="Noto Sans CJK KR"/>
-              </a:defRPr>
-            </a:pPr>
-            <a:r>
-              <a:t>• □ 완료 화면: /mission_state 로그와 /cmd_vel_raw가 detection·obstacle input에 따라 바뀌는 구조를 확인한다.</a:t>
-            </a:r>
-          </a:p>
-          <a:p>
-            <a:pPr>
-              <a:spcAft>
-                <a:spcPts val="800"/>
-              </a:spcAft>
-              <a:defRPr sz="1800">
-                <a:solidFill>
-                  <a:srgbClr val="122C4E"/>
-                </a:solidFill>
-                <a:latin typeface="Noto Sans CJK KR"/>
-              </a:defRPr>
-            </a:pPr>
-            <a:r>
-              <a:t>• □ Complete 파일: blocks/E_autonomy_logic/M19_mission_fsm/complete/</a:t>
-            </a:r>
-          </a:p>
-          <a:p>
-            <a:pPr>
-              <a:spcAft>
-                <a:spcPts val="800"/>
-              </a:spcAft>
-              <a:defRPr sz="1800">
-                <a:solidFill>
-                  <a:srgbClr val="122C4E"/>
-                </a:solidFill>
-                <a:latin typeface="Noto Sans CJK KR"/>
-              </a:defRPr>
-            </a:pPr>
-            <a:r>
-              <a:t>• □ 정상 로그·캡처: logs/validation.log, screenshots/validation_terminal.png</a:t>
-            </a:r>
-          </a:p>
-          <a:p>
-            <a:pPr>
-              <a:spcAft>
-                <a:spcPts val="800"/>
-              </a:spcAft>
-              <a:defRPr sz="1800">
-                <a:solidFill>
-                  <a:srgbClr val="122C4E"/>
-                </a:solidFill>
-                <a:latin typeface="Noto Sans CJK KR"/>
-              </a:defRPr>
-            </a:pPr>
-            <a:r>
-              <a:t>• □ 버전 식별: CHECKSUM_or_TAG.txt의 SHA-256 manifest</a:t>
-            </a:r>
-          </a:p>
-          <a:p>
-            <a:pPr>
-              <a:spcAft>
-                <a:spcPts val="800"/>
-              </a:spcAft>
-              <a:defRPr sz="1800">
-                <a:solidFill>
-                  <a:srgbClr val="122C4E"/>
-                </a:solidFill>
-                <a:latin typeface="Noto Sans CJK KR"/>
-              </a:defRPr>
-            </a:pPr>
-            <a:r>
-              <a:t>• □ 다음 시작 조건: M20 PID</a:t>
-            </a:r>
-          </a:p>
-        </p:txBody>
-      </p:sp>
-      <p:sp>
-        <p:nvSpPr>
-          <p:cNvPr id="9" name="TextBox 8"/>
-          <p:cNvSpPr txBox="1"/>
-          <p:nvPr/>
-        </p:nvSpPr>
-        <p:spPr>
-          <a:xfrm>
-            <a:off x="868680" y="5596128"/>
-            <a:ext cx="10515600" cy="338328"/>
+            <a:off x="896112" y="1901952"/>
+            <a:ext cx="2926080" cy="274320"/>
           </a:xfrm>
           <a:prstGeom prst="rect">
             <a:avLst/>
@@ -13278,19 +13421,228 @@
           </a:bodyPr>
           <a:lstStyle/>
           <a:p>
+            <a:pPr algn="l">
+              <a:spcAft>
+                <a:spcPts val="0"/>
+              </a:spcAft>
+              <a:defRPr sz="1800" b="1">
+                <a:solidFill>
+                  <a:srgbClr val="BE3B3B"/>
+                </a:solidFill>
+                <a:latin typeface="Noto Sans CJK KR"/>
+              </a:defRPr>
+            </a:pPr>
+            <a:r>
+              <a:t>증상 1: 상태가 전환되지 않음</a:t>
+            </a:r>
+          </a:p>
+        </p:txBody>
+      </p:sp>
+      <p:sp>
+        <p:nvSpPr>
+          <p:cNvPr id="9" name="TextBox 8"/>
+          <p:cNvSpPr txBox="1"/>
+          <p:nvPr/>
+        </p:nvSpPr>
+        <p:spPr>
+          <a:xfrm>
+            <a:off x="3794760" y="1883664"/>
+            <a:ext cx="7543800" cy="621792"/>
+          </a:xfrm>
+          <a:prstGeom prst="rect">
+            <a:avLst/>
+          </a:prstGeom>
+          <a:noFill/>
+        </p:spPr>
+        <p:txBody>
+          <a:bodyPr wrap="square" lIns="73152" rIns="73152" tIns="36576" bIns="36576">
+            <a:spAutoFit/>
+          </a:bodyPr>
+          <a:lstStyle/>
+          <a:p>
+            <a:pPr algn="l">
+              <a:spcAft>
+                <a:spcPts val="0"/>
+              </a:spcAft>
+              <a:defRPr sz="1600" b="0">
+                <a:solidFill>
+                  <a:srgbClr val="122C4E"/>
+                </a:solidFill>
+                <a:latin typeface="Noto Sans CJK KR"/>
+              </a:defRPr>
+            </a:pPr>
+            <a:r>
+              <a:t>우선 확인: callback input·조건식·거리 단위를 확인한다.</a:t>
+            </a:r>
+            <a:br/>
+            <a:r>
+              <a:t>수정 후: ros2 topic info /mission_state</a:t>
+            </a:r>
+          </a:p>
+        </p:txBody>
+      </p:sp>
+      <p:sp>
+        <p:nvSpPr>
+          <p:cNvPr id="10" name="Rounded Rectangle 9"/>
+          <p:cNvSpPr/>
+          <p:nvPr/>
+        </p:nvSpPr>
+        <p:spPr>
+          <a:xfrm>
+            <a:off x="694944" y="3172968"/>
+            <a:ext cx="10972800" cy="1115568"/>
+          </a:xfrm>
+          <a:prstGeom prst="roundRect">
+            <a:avLst/>
+          </a:prstGeom>
+          <a:solidFill>
+            <a:srgbClr val="FFF7F4"/>
+          </a:solidFill>
+          <a:ln>
+            <a:solidFill>
+              <a:srgbClr val="EDBEB4"/>
+            </a:solidFill>
+          </a:ln>
+        </p:spPr>
+        <p:style>
+          <a:lnRef idx="1">
+            <a:schemeClr val="accent1"/>
+          </a:lnRef>
+          <a:fillRef idx="3">
+            <a:schemeClr val="accent1"/>
+          </a:fillRef>
+          <a:effectRef idx="2">
+            <a:schemeClr val="accent1"/>
+          </a:effectRef>
+          <a:fontRef idx="minor">
+            <a:schemeClr val="lt1"/>
+          </a:fontRef>
+        </p:style>
+        <p:txBody>
+          <a:bodyPr rtlCol="0" anchor="ctr"/>
+          <a:lstStyle/>
+          <a:p>
+            <a:pPr algn="ctr"/>
+          </a:p>
+        </p:txBody>
+      </p:sp>
+      <p:sp>
+        <p:nvSpPr>
+          <p:cNvPr id="11" name="TextBox 10"/>
+          <p:cNvSpPr txBox="1"/>
+          <p:nvPr/>
+        </p:nvSpPr>
+        <p:spPr>
+          <a:xfrm>
+            <a:off x="896112" y="3319272"/>
+            <a:ext cx="2926080" cy="274320"/>
+          </a:xfrm>
+          <a:prstGeom prst="rect">
+            <a:avLst/>
+          </a:prstGeom>
+          <a:noFill/>
+        </p:spPr>
+        <p:txBody>
+          <a:bodyPr wrap="square" lIns="73152" rIns="73152" tIns="36576" bIns="36576">
+            <a:spAutoFit/>
+          </a:bodyPr>
+          <a:lstStyle/>
+          <a:p>
+            <a:pPr algn="l">
+              <a:spcAft>
+                <a:spcPts val="0"/>
+              </a:spcAft>
+              <a:defRPr sz="1800" b="1">
+                <a:solidFill>
+                  <a:srgbClr val="BE3B3B"/>
+                </a:solidFill>
+                <a:latin typeface="Noto Sans CJK KR"/>
+              </a:defRPr>
+            </a:pPr>
+            <a:r>
+              <a:t>증상 2: SEARCH↔APPROACH 반복</a:t>
+            </a:r>
+          </a:p>
+        </p:txBody>
+      </p:sp>
+      <p:sp>
+        <p:nvSpPr>
+          <p:cNvPr id="12" name="TextBox 11"/>
+          <p:cNvSpPr txBox="1"/>
+          <p:nvPr/>
+        </p:nvSpPr>
+        <p:spPr>
+          <a:xfrm>
+            <a:off x="3794760" y="3300984"/>
+            <a:ext cx="7543800" cy="621792"/>
+          </a:xfrm>
+          <a:prstGeom prst="rect">
+            <a:avLst/>
+          </a:prstGeom>
+          <a:noFill/>
+        </p:spPr>
+        <p:txBody>
+          <a:bodyPr wrap="square" lIns="73152" rIns="73152" tIns="36576" bIns="36576">
+            <a:spAutoFit/>
+          </a:bodyPr>
+          <a:lstStyle/>
+          <a:p>
+            <a:pPr algn="l">
+              <a:spcAft>
+                <a:spcPts val="0"/>
+              </a:spcAft>
+              <a:defRPr sz="1600" b="0">
+                <a:solidFill>
+                  <a:srgbClr val="122C4E"/>
+                </a:solidFill>
+                <a:latin typeface="Noto Sans CJK KR"/>
+              </a:defRPr>
+            </a:pPr>
+            <a:r>
+              <a:t>우선 확인: detection timeout·hysteresis·우선순위를 추가 점검한다.</a:t>
+            </a:r>
+            <a:br/>
+            <a:r>
+              <a:t>수정 후: ros2 topic info /mission_state</a:t>
+            </a:r>
+          </a:p>
+        </p:txBody>
+      </p:sp>
+      <p:sp>
+        <p:nvSpPr>
+          <p:cNvPr id="13" name="TextBox 12"/>
+          <p:cNvSpPr txBox="1"/>
+          <p:nvPr/>
+        </p:nvSpPr>
+        <p:spPr>
+          <a:xfrm>
+            <a:off x="822960" y="5102352"/>
+            <a:ext cx="10607040" cy="402336"/>
+          </a:xfrm>
+          <a:prstGeom prst="rect">
+            <a:avLst/>
+          </a:prstGeom>
+          <a:noFill/>
+        </p:spPr>
+        <p:txBody>
+          <a:bodyPr wrap="square" lIns="73152" rIns="73152" tIns="36576" bIns="36576">
+            <a:spAutoFit/>
+          </a:bodyPr>
+          <a:lstStyle/>
+          <a:p>
             <a:pPr algn="ctr">
               <a:spcAft>
                 <a:spcPts val="0"/>
               </a:spcAft>
-              <a:defRPr sz="1700" b="1">
-                <a:solidFill>
-                  <a:srgbClr val="2A8B5A"/>
-                </a:solidFill>
-                <a:latin typeface="Noto Sans CJK KR"/>
-              </a:defRPr>
-            </a:pPr>
-            <a:r>
-              <a:t>다음 모듈을 시작하기 전, 이 슬라이드의 Complete와 다음 모듈의 Starter를 비교합니다.</a:t>
+              <a:defRPr sz="1800" b="1">
+                <a:solidFill>
+                  <a:srgbClr val="DB7E22"/>
+                </a:solidFill>
+                <a:latin typeface="Noto Sans CJK KR"/>
+              </a:defRPr>
+            </a:pPr>
+            <a:r>
+              <a:t>공통 순서: ① 현재 폴더 ② source ③ 파일 경로 ④ 이름/타입/단위 ⑤ build·source 후 재실행</a:t>
             </a:r>
           </a:p>
         </p:txBody>
@@ -13347,6 +13699,754 @@
               </a:defRPr>
             </a:pPr>
             <a:r>
+              <a:t>미니 실습: 값 하나를 바꾸고 결과를 비교한다</a:t>
+            </a:r>
+          </a:p>
+        </p:txBody>
+      </p:sp>
+      <p:sp>
+        <p:nvSpPr>
+          <p:cNvPr id="3" name="TextBox 2"/>
+          <p:cNvSpPr txBox="1"/>
+          <p:nvPr/>
+        </p:nvSpPr>
+        <p:spPr>
+          <a:xfrm>
+            <a:off x="603504" y="859536"/>
+            <a:ext cx="10698480" cy="292608"/>
+          </a:xfrm>
+          <a:prstGeom prst="rect">
+            <a:avLst/>
+          </a:prstGeom>
+          <a:noFill/>
+        </p:spPr>
+        <p:txBody>
+          <a:bodyPr wrap="square" lIns="73152" rIns="73152" tIns="36576" bIns="36576">
+            <a:spAutoFit/>
+          </a:bodyPr>
+          <a:lstStyle/>
+          <a:p>
+            <a:pPr algn="l">
+              <a:spcAft>
+                <a:spcPts val="0"/>
+              </a:spcAft>
+              <a:defRPr sz="1700" b="0">
+                <a:solidFill>
+                  <a:srgbClr val="5C6672"/>
+                </a:solidFill>
+                <a:latin typeface="Noto Sans CJK KR"/>
+              </a:defRPr>
+            </a:pPr>
+            <a:r>
+              <a:t>정상 결과를 만든 뒤에는 한 번에 하나의 값만 바꿉니다.</a:t>
+            </a:r>
+          </a:p>
+        </p:txBody>
+      </p:sp>
+      <p:sp>
+        <p:nvSpPr>
+          <p:cNvPr id="4" name="TextBox 3"/>
+          <p:cNvSpPr txBox="1"/>
+          <p:nvPr/>
+        </p:nvSpPr>
+        <p:spPr>
+          <a:xfrm>
+            <a:off x="530352" y="6510528"/>
+            <a:ext cx="7772400" cy="201168"/>
+          </a:xfrm>
+          <a:prstGeom prst="rect">
+            <a:avLst/>
+          </a:prstGeom>
+          <a:noFill/>
+        </p:spPr>
+        <p:txBody>
+          <a:bodyPr wrap="square" lIns="73152" rIns="73152" tIns="36576" bIns="36576">
+            <a:spAutoFit/>
+          </a:bodyPr>
+          <a:lstStyle/>
+          <a:p>
+            <a:pPr algn="l">
+              <a:spcAft>
+                <a:spcPts val="0"/>
+              </a:spcAft>
+              <a:defRPr sz="1000" b="0">
+                <a:solidFill>
+                  <a:srgbClr val="5C6672"/>
+                </a:solidFill>
+                <a:latin typeface="Noto Sans CJK KR"/>
+              </a:defRPr>
+            </a:pPr>
+            <a:r>
+              <a:t>ROS 2 Jazzy · Gazebo Harmonic · M19 · 따라 하기형 AGV 실습</a:t>
+            </a:r>
+          </a:p>
+        </p:txBody>
+      </p:sp>
+      <p:sp>
+        <p:nvSpPr>
+          <p:cNvPr id="5" name="TextBox 4"/>
+          <p:cNvSpPr txBox="1"/>
+          <p:nvPr/>
+        </p:nvSpPr>
+        <p:spPr>
+          <a:xfrm>
+            <a:off x="9144000" y="6510528"/>
+            <a:ext cx="2468880" cy="201168"/>
+          </a:xfrm>
+          <a:prstGeom prst="rect">
+            <a:avLst/>
+          </a:prstGeom>
+          <a:noFill/>
+        </p:spPr>
+        <p:txBody>
+          <a:bodyPr wrap="square" lIns="73152" rIns="73152" tIns="36576" bIns="36576">
+            <a:spAutoFit/>
+          </a:bodyPr>
+          <a:lstStyle/>
+          <a:p>
+            <a:pPr algn="r">
+              <a:spcAft>
+                <a:spcPts val="0"/>
+              </a:spcAft>
+              <a:defRPr sz="1000" b="0">
+                <a:solidFill>
+                  <a:srgbClr val="5C6672"/>
+                </a:solidFill>
+                <a:latin typeface="Noto Sans CJK KR"/>
+              </a:defRPr>
+            </a:pPr>
+            <a:r>
+              <a:t>명령·파일 경로는 슬라이드에서 복사 가능</a:t>
+            </a:r>
+          </a:p>
+        </p:txBody>
+      </p:sp>
+      <p:sp>
+        <p:nvSpPr>
+          <p:cNvPr id="6" name="Rectangle 5"/>
+          <p:cNvSpPr/>
+          <p:nvPr/>
+        </p:nvSpPr>
+        <p:spPr>
+          <a:xfrm>
+            <a:off x="566928" y="1188720"/>
+            <a:ext cx="11064240" cy="347472"/>
+          </a:xfrm>
+          <a:prstGeom prst="rect">
+            <a:avLst/>
+          </a:prstGeom>
+          <a:solidFill>
+            <a:srgbClr val="F4F7FB"/>
+          </a:solidFill>
+          <a:ln>
+            <a:solidFill>
+              <a:srgbClr val="F4F7FB"/>
+            </a:solidFill>
+          </a:ln>
+        </p:spPr>
+        <p:style>
+          <a:lnRef idx="1">
+            <a:schemeClr val="accent1"/>
+          </a:lnRef>
+          <a:fillRef idx="3">
+            <a:schemeClr val="accent1"/>
+          </a:fillRef>
+          <a:effectRef idx="2">
+            <a:schemeClr val="accent1"/>
+          </a:effectRef>
+          <a:fontRef idx="minor">
+            <a:schemeClr val="lt1"/>
+          </a:fontRef>
+        </p:style>
+        <p:txBody>
+          <a:bodyPr rtlCol="0" anchor="ctr" wrap="square" lIns="73152" rIns="73152" tIns="36576" bIns="36576"/>
+          <a:lstStyle/>
+          <a:p>
+            <a:pPr algn="l">
+              <a:spcAft>
+                <a:spcPts val="0"/>
+              </a:spcAft>
+              <a:defRPr sz="1300" b="1">
+                <a:solidFill>
+                  <a:srgbClr val="122C4E"/>
+                </a:solidFill>
+                <a:latin typeface="Noto Sans CJK KR"/>
+              </a:defRPr>
+            </a:pPr>
+            <a:r>
+              <a:t>현재 단계 미니 실습    |    현재 폴더 ~/ros2_curri/agv_ws    |    현재 터미널</a:t>
+            </a:r>
+          </a:p>
+        </p:txBody>
+      </p:sp>
+      <p:sp>
+        <p:nvSpPr>
+          <p:cNvPr id="7" name="Rounded Rectangle 6"/>
+          <p:cNvSpPr/>
+          <p:nvPr/>
+        </p:nvSpPr>
+        <p:spPr>
+          <a:xfrm>
+            <a:off x="749808" y="1874519"/>
+            <a:ext cx="10652760" cy="1993392"/>
+          </a:xfrm>
+          <a:prstGeom prst="roundRect">
+            <a:avLst/>
+          </a:prstGeom>
+          <a:solidFill>
+            <a:srgbClr val="FFF8EB"/>
+          </a:solidFill>
+          <a:ln>
+            <a:solidFill>
+              <a:srgbClr val="ECC680"/>
+            </a:solidFill>
+          </a:ln>
+        </p:spPr>
+        <p:style>
+          <a:lnRef idx="1">
+            <a:schemeClr val="accent1"/>
+          </a:lnRef>
+          <a:fillRef idx="3">
+            <a:schemeClr val="accent1"/>
+          </a:fillRef>
+          <a:effectRef idx="2">
+            <a:schemeClr val="accent1"/>
+          </a:effectRef>
+          <a:fontRef idx="minor">
+            <a:schemeClr val="lt1"/>
+          </a:fontRef>
+        </p:style>
+        <p:txBody>
+          <a:bodyPr rtlCol="0" anchor="ctr" wrap="square" lIns="73152" rIns="73152" tIns="36576" bIns="36576"/>
+          <a:lstStyle/>
+          <a:p>
+            <a:pPr algn="ctr">
+              <a:spcAft>
+                <a:spcPts val="0"/>
+              </a:spcAft>
+              <a:defRPr sz="2300" b="1">
+                <a:solidFill>
+                  <a:srgbClr val="122C4E"/>
+                </a:solidFill>
+                <a:latin typeface="Noto Sans CJK KR"/>
+              </a:defRPr>
+            </a:pPr>
+            <a:r>
+              <a:t>target 없음, target 있음, obstacle&lt;0.5 m의 세 입력에 대해 예상 state와 /cmd_vel_raw를 표로 작성한다.</a:t>
+            </a:r>
+          </a:p>
+        </p:txBody>
+      </p:sp>
+      <p:sp>
+        <p:nvSpPr>
+          <p:cNvPr id="8" name="TextBox 7"/>
+          <p:cNvSpPr txBox="1"/>
+          <p:nvPr/>
+        </p:nvSpPr>
+        <p:spPr>
+          <a:xfrm>
+            <a:off x="877824" y="4590288"/>
+            <a:ext cx="10241280" cy="594360"/>
+          </a:xfrm>
+          <a:prstGeom prst="rect">
+            <a:avLst/>
+          </a:prstGeom>
+          <a:noFill/>
+        </p:spPr>
+        <p:txBody>
+          <a:bodyPr wrap="square" lIns="73152" rIns="73152" tIns="36576" bIns="36576">
+            <a:spAutoFit/>
+          </a:bodyPr>
+          <a:lstStyle/>
+          <a:p>
+            <a:pPr algn="ctr">
+              <a:spcAft>
+                <a:spcPts val="0"/>
+              </a:spcAft>
+              <a:defRPr sz="1900" b="1">
+                <a:solidFill>
+                  <a:srgbClr val="DB7E22"/>
+                </a:solidFill>
+                <a:latin typeface="Noto Sans CJK KR"/>
+              </a:defRPr>
+            </a:pPr>
+            <a:r>
+              <a:t>기록할 것: 바꾼 값(단위) · 기대한 변화 · 실제 출력/화면 · 원래 값으로 되돌린 결과</a:t>
+            </a:r>
+          </a:p>
+        </p:txBody>
+      </p:sp>
+    </p:spTree>
+  </p:cSld>
+  <p:clrMapOvr>
+    <a:masterClrMapping/>
+  </p:clrMapOvr>
+</p:sld>
+</file>
+
+<file path=ppt/slides/slide27.xml><?xml version="1.0" encoding="utf-8"?>
+<p:sld xmlns:a="http://schemas.openxmlformats.org/drawingml/2006/main" xmlns:p="http://schemas.openxmlformats.org/presentationml/2006/main" xmlns:r="http://schemas.openxmlformats.org/officeDocument/2006/relationships">
+  <p:cSld>
+    <p:spTree>
+      <p:nvGrpSpPr>
+        <p:cNvPr id="1" name=""/>
+        <p:cNvGrpSpPr/>
+        <p:nvPr/>
+      </p:nvGrpSpPr>
+      <p:grpSpPr/>
+      <p:sp>
+        <p:nvSpPr>
+          <p:cNvPr id="2" name="TextBox 1"/>
+          <p:cNvSpPr txBox="1"/>
+          <p:nvPr/>
+        </p:nvSpPr>
+        <p:spPr>
+          <a:xfrm>
+            <a:off x="566928" y="347472"/>
+            <a:ext cx="10881360" cy="438912"/>
+          </a:xfrm>
+          <a:prstGeom prst="rect">
+            <a:avLst/>
+          </a:prstGeom>
+          <a:noFill/>
+        </p:spPr>
+        <p:txBody>
+          <a:bodyPr wrap="square" lIns="73152" rIns="73152" tIns="36576" bIns="36576">
+            <a:spAutoFit/>
+          </a:bodyPr>
+          <a:lstStyle/>
+          <a:p>
+            <a:pPr algn="l">
+              <a:spcAft>
+                <a:spcPts val="0"/>
+              </a:spcAft>
+              <a:defRPr sz="3200" b="1">
+                <a:solidFill>
+                  <a:srgbClr val="122C4E"/>
+                </a:solidFill>
+                <a:latin typeface="Noto Sans CJK KR"/>
+              </a:defRPr>
+            </a:pPr>
+            <a:r>
+              <a:t>체크포인트를 저장하고 다음 모듈로 넘긴다</a:t>
+            </a:r>
+          </a:p>
+        </p:txBody>
+      </p:sp>
+      <p:sp>
+        <p:nvSpPr>
+          <p:cNvPr id="3" name="TextBox 2"/>
+          <p:cNvSpPr txBox="1"/>
+          <p:nvPr/>
+        </p:nvSpPr>
+        <p:spPr>
+          <a:xfrm>
+            <a:off x="603504" y="859536"/>
+            <a:ext cx="10698480" cy="292608"/>
+          </a:xfrm>
+          <a:prstGeom prst="rect">
+            <a:avLst/>
+          </a:prstGeom>
+          <a:noFill/>
+        </p:spPr>
+        <p:txBody>
+          <a:bodyPr wrap="square" lIns="73152" rIns="73152" tIns="36576" bIns="36576">
+            <a:spAutoFit/>
+          </a:bodyPr>
+          <a:lstStyle/>
+          <a:p>
+            <a:pPr algn="l">
+              <a:spcAft>
+                <a:spcPts val="0"/>
+              </a:spcAft>
+              <a:defRPr sz="1700" b="0">
+                <a:solidFill>
+                  <a:srgbClr val="5C6672"/>
+                </a:solidFill>
+                <a:latin typeface="Noto Sans CJK KR"/>
+              </a:defRPr>
+            </a:pPr>
+            <a:r>
+              <a:t>현재 Complete는 다음 Starter의 기준선입니다.</a:t>
+            </a:r>
+          </a:p>
+        </p:txBody>
+      </p:sp>
+      <p:sp>
+        <p:nvSpPr>
+          <p:cNvPr id="4" name="TextBox 3"/>
+          <p:cNvSpPr txBox="1"/>
+          <p:nvPr/>
+        </p:nvSpPr>
+        <p:spPr>
+          <a:xfrm>
+            <a:off x="530352" y="6510528"/>
+            <a:ext cx="7772400" cy="201168"/>
+          </a:xfrm>
+          <a:prstGeom prst="rect">
+            <a:avLst/>
+          </a:prstGeom>
+          <a:noFill/>
+        </p:spPr>
+        <p:txBody>
+          <a:bodyPr wrap="square" lIns="73152" rIns="73152" tIns="36576" bIns="36576">
+            <a:spAutoFit/>
+          </a:bodyPr>
+          <a:lstStyle/>
+          <a:p>
+            <a:pPr algn="l">
+              <a:spcAft>
+                <a:spcPts val="0"/>
+              </a:spcAft>
+              <a:defRPr sz="1000" b="0">
+                <a:solidFill>
+                  <a:srgbClr val="5C6672"/>
+                </a:solidFill>
+                <a:latin typeface="Noto Sans CJK KR"/>
+              </a:defRPr>
+            </a:pPr>
+            <a:r>
+              <a:t>ROS 2 Jazzy · Gazebo Harmonic · M19 · 따라 하기형 AGV 실습</a:t>
+            </a:r>
+          </a:p>
+        </p:txBody>
+      </p:sp>
+      <p:sp>
+        <p:nvSpPr>
+          <p:cNvPr id="5" name="TextBox 4"/>
+          <p:cNvSpPr txBox="1"/>
+          <p:nvPr/>
+        </p:nvSpPr>
+        <p:spPr>
+          <a:xfrm>
+            <a:off x="9144000" y="6510528"/>
+            <a:ext cx="2468880" cy="201168"/>
+          </a:xfrm>
+          <a:prstGeom prst="rect">
+            <a:avLst/>
+          </a:prstGeom>
+          <a:noFill/>
+        </p:spPr>
+        <p:txBody>
+          <a:bodyPr wrap="square" lIns="73152" rIns="73152" tIns="36576" bIns="36576">
+            <a:spAutoFit/>
+          </a:bodyPr>
+          <a:lstStyle/>
+          <a:p>
+            <a:pPr algn="r">
+              <a:spcAft>
+                <a:spcPts val="0"/>
+              </a:spcAft>
+              <a:defRPr sz="1000" b="0">
+                <a:solidFill>
+                  <a:srgbClr val="5C6672"/>
+                </a:solidFill>
+                <a:latin typeface="Noto Sans CJK KR"/>
+              </a:defRPr>
+            </a:pPr>
+            <a:r>
+              <a:t>명령·파일 경로는 슬라이드에서 복사 가능</a:t>
+            </a:r>
+          </a:p>
+        </p:txBody>
+      </p:sp>
+      <p:sp>
+        <p:nvSpPr>
+          <p:cNvPr id="6" name="Rectangle 5"/>
+          <p:cNvSpPr/>
+          <p:nvPr/>
+        </p:nvSpPr>
+        <p:spPr>
+          <a:xfrm>
+            <a:off x="566928" y="1188720"/>
+            <a:ext cx="11064240" cy="347472"/>
+          </a:xfrm>
+          <a:prstGeom prst="rect">
+            <a:avLst/>
+          </a:prstGeom>
+          <a:solidFill>
+            <a:srgbClr val="F4F7FB"/>
+          </a:solidFill>
+          <a:ln>
+            <a:solidFill>
+              <a:srgbClr val="F4F7FB"/>
+            </a:solidFill>
+          </a:ln>
+        </p:spPr>
+        <p:style>
+          <a:lnRef idx="1">
+            <a:schemeClr val="accent1"/>
+          </a:lnRef>
+          <a:fillRef idx="3">
+            <a:schemeClr val="accent1"/>
+          </a:fillRef>
+          <a:effectRef idx="2">
+            <a:schemeClr val="accent1"/>
+          </a:effectRef>
+          <a:fontRef idx="minor">
+            <a:schemeClr val="lt1"/>
+          </a:fontRef>
+        </p:style>
+        <p:txBody>
+          <a:bodyPr rtlCol="0" anchor="ctr" wrap="square" lIns="73152" rIns="73152" tIns="36576" bIns="36576"/>
+          <a:lstStyle/>
+          <a:p>
+            <a:pPr algn="l">
+              <a:spcAft>
+                <a:spcPts val="0"/>
+              </a:spcAft>
+              <a:defRPr sz="1300" b="1">
+                <a:solidFill>
+                  <a:srgbClr val="122C4E"/>
+                </a:solidFill>
+                <a:latin typeface="Noto Sans CJK KR"/>
+              </a:defRPr>
+            </a:pPr>
+            <a:r>
+              <a:t>현재 단계 체크포인트    |    현재 폴더 ~/ros2_curri/agv_ws    |    현재 터미널</a:t>
+            </a:r>
+          </a:p>
+        </p:txBody>
+      </p:sp>
+      <p:sp>
+        <p:nvSpPr>
+          <p:cNvPr id="7" name="Rounded Rectangle 6"/>
+          <p:cNvSpPr/>
+          <p:nvPr/>
+        </p:nvSpPr>
+        <p:spPr>
+          <a:xfrm>
+            <a:off x="685800" y="1737360"/>
+            <a:ext cx="10972800" cy="3611880"/>
+          </a:xfrm>
+          <a:prstGeom prst="roundRect">
+            <a:avLst/>
+          </a:prstGeom>
+          <a:solidFill>
+            <a:srgbClr val="F4F7FB"/>
+          </a:solidFill>
+          <a:ln>
+            <a:solidFill>
+              <a:srgbClr val="D2DCE8"/>
+            </a:solidFill>
+          </a:ln>
+        </p:spPr>
+        <p:style>
+          <a:lnRef idx="1">
+            <a:schemeClr val="accent1"/>
+          </a:lnRef>
+          <a:fillRef idx="3">
+            <a:schemeClr val="accent1"/>
+          </a:fillRef>
+          <a:effectRef idx="2">
+            <a:schemeClr val="accent1"/>
+          </a:effectRef>
+          <a:fontRef idx="minor">
+            <a:schemeClr val="lt1"/>
+          </a:fontRef>
+        </p:style>
+        <p:txBody>
+          <a:bodyPr rtlCol="0" anchor="ctr"/>
+          <a:lstStyle/>
+          <a:p>
+            <a:pPr algn="ctr"/>
+          </a:p>
+        </p:txBody>
+      </p:sp>
+      <p:sp>
+        <p:nvSpPr>
+          <p:cNvPr id="8" name="TextBox 7"/>
+          <p:cNvSpPr txBox="1"/>
+          <p:nvPr/>
+        </p:nvSpPr>
+        <p:spPr>
+          <a:xfrm>
+            <a:off x="896112" y="1993392"/>
+            <a:ext cx="10332720" cy="2971800"/>
+          </a:xfrm>
+          <a:prstGeom prst="rect">
+            <a:avLst/>
+          </a:prstGeom>
+          <a:noFill/>
+        </p:spPr>
+        <p:txBody>
+          <a:bodyPr wrap="square" lIns="109728" rIns="109728">
+            <a:spAutoFit/>
+          </a:bodyPr>
+          <a:lstStyle/>
+          <a:p>
+            <a:pPr>
+              <a:spcAft>
+                <a:spcPts val="800"/>
+              </a:spcAft>
+              <a:defRPr sz="1800">
+                <a:solidFill>
+                  <a:srgbClr val="122C4E"/>
+                </a:solidFill>
+                <a:latin typeface="Noto Sans CJK KR"/>
+              </a:defRPr>
+            </a:pPr>
+            <a:r>
+              <a:t>• □ 완료 화면: /mission_state 로그와 /cmd_vel_raw가 detection·obstacle input에 따라 바뀌는 구조를 확인한다.</a:t>
+            </a:r>
+          </a:p>
+          <a:p>
+            <a:pPr>
+              <a:spcAft>
+                <a:spcPts val="800"/>
+              </a:spcAft>
+              <a:defRPr sz="1800">
+                <a:solidFill>
+                  <a:srgbClr val="122C4E"/>
+                </a:solidFill>
+                <a:latin typeface="Noto Sans CJK KR"/>
+              </a:defRPr>
+            </a:pPr>
+            <a:r>
+              <a:t>• □ Complete 파일: blocks/E_autonomy_logic/M19_mission_fsm/complete/</a:t>
+            </a:r>
+          </a:p>
+          <a:p>
+            <a:pPr>
+              <a:spcAft>
+                <a:spcPts val="800"/>
+              </a:spcAft>
+              <a:defRPr sz="1800">
+                <a:solidFill>
+                  <a:srgbClr val="122C4E"/>
+                </a:solidFill>
+                <a:latin typeface="Noto Sans CJK KR"/>
+              </a:defRPr>
+            </a:pPr>
+            <a:r>
+              <a:t>• □ 정상 로그·캡처: logs/validation.log, screenshots/validation_terminal.png</a:t>
+            </a:r>
+          </a:p>
+          <a:p>
+            <a:pPr>
+              <a:spcAft>
+                <a:spcPts val="800"/>
+              </a:spcAft>
+              <a:defRPr sz="1800">
+                <a:solidFill>
+                  <a:srgbClr val="122C4E"/>
+                </a:solidFill>
+                <a:latin typeface="Noto Sans CJK KR"/>
+              </a:defRPr>
+            </a:pPr>
+            <a:r>
+              <a:t>• □ 버전 식별: CHECKSUM_or_TAG.txt의 SHA-256 manifest</a:t>
+            </a:r>
+          </a:p>
+          <a:p>
+            <a:pPr>
+              <a:spcAft>
+                <a:spcPts val="800"/>
+              </a:spcAft>
+              <a:defRPr sz="1800">
+                <a:solidFill>
+                  <a:srgbClr val="122C4E"/>
+                </a:solidFill>
+                <a:latin typeface="Noto Sans CJK KR"/>
+              </a:defRPr>
+            </a:pPr>
+            <a:r>
+              <a:t>• □ 다음 시작 조건: M20 PID</a:t>
+            </a:r>
+          </a:p>
+        </p:txBody>
+      </p:sp>
+      <p:sp>
+        <p:nvSpPr>
+          <p:cNvPr id="9" name="TextBox 8"/>
+          <p:cNvSpPr txBox="1"/>
+          <p:nvPr/>
+        </p:nvSpPr>
+        <p:spPr>
+          <a:xfrm>
+            <a:off x="868680" y="5596128"/>
+            <a:ext cx="10515600" cy="338328"/>
+          </a:xfrm>
+          <a:prstGeom prst="rect">
+            <a:avLst/>
+          </a:prstGeom>
+          <a:noFill/>
+        </p:spPr>
+        <p:txBody>
+          <a:bodyPr wrap="square" lIns="73152" rIns="73152" tIns="36576" bIns="36576">
+            <a:spAutoFit/>
+          </a:bodyPr>
+          <a:lstStyle/>
+          <a:p>
+            <a:pPr algn="ctr">
+              <a:spcAft>
+                <a:spcPts val="0"/>
+              </a:spcAft>
+              <a:defRPr sz="1700" b="1">
+                <a:solidFill>
+                  <a:srgbClr val="2A8B5A"/>
+                </a:solidFill>
+                <a:latin typeface="Noto Sans CJK KR"/>
+              </a:defRPr>
+            </a:pPr>
+            <a:r>
+              <a:t>다음 모듈을 시작하기 전, 이 슬라이드의 Complete와 다음 모듈의 Starter를 비교합니다.</a:t>
+            </a:r>
+          </a:p>
+        </p:txBody>
+      </p:sp>
+    </p:spTree>
+  </p:cSld>
+  <p:clrMapOvr>
+    <a:masterClrMapping/>
+  </p:clrMapOvr>
+</p:sld>
+</file>
+
+<file path=ppt/slides/slide28.xml><?xml version="1.0" encoding="utf-8"?>
+<p:sld xmlns:a="http://schemas.openxmlformats.org/drawingml/2006/main" xmlns:p="http://schemas.openxmlformats.org/presentationml/2006/main" xmlns:r="http://schemas.openxmlformats.org/officeDocument/2006/relationships">
+  <p:cSld>
+    <p:spTree>
+      <p:nvGrpSpPr>
+        <p:cNvPr id="1" name=""/>
+        <p:cNvGrpSpPr/>
+        <p:nvPr/>
+      </p:nvGrpSpPr>
+      <p:grpSpPr/>
+      <p:sp>
+        <p:nvSpPr>
+          <p:cNvPr id="2" name="TextBox 1"/>
+          <p:cNvSpPr txBox="1"/>
+          <p:nvPr/>
+        </p:nvSpPr>
+        <p:spPr>
+          <a:xfrm>
+            <a:off x="566928" y="347472"/>
+            <a:ext cx="10881360" cy="438912"/>
+          </a:xfrm>
+          <a:prstGeom prst="rect">
+            <a:avLst/>
+          </a:prstGeom>
+          <a:noFill/>
+        </p:spPr>
+        <p:txBody>
+          <a:bodyPr wrap="square" lIns="73152" rIns="73152" tIns="36576" bIns="36576">
+            <a:spAutoFit/>
+          </a:bodyPr>
+          <a:lstStyle/>
+          <a:p>
+            <a:pPr algn="l">
+              <a:spcAft>
+                <a:spcPts val="0"/>
+              </a:spcAft>
+              <a:defRPr sz="3200" b="1">
+                <a:solidFill>
+                  <a:srgbClr val="122C4E"/>
+                </a:solidFill>
+                <a:latin typeface="Noto Sans CJK KR"/>
+              </a:defRPr>
+            </a:pPr>
+            <a:r>
               <a:t>공식 참고 자료</a:t>
             </a:r>
           </a:p>
@@ -15463,7 +16563,7 @@
               </a:defRPr>
             </a:pPr>
             <a:r>
-              <a:t>FSM node를 빌드하고 실행한다</a:t>
+              <a:t>코드/설정이 실제로 만드는 것 (1/2)</a:t>
             </a:r>
           </a:p>
         </p:txBody>
@@ -15502,7 +16602,7 @@
               </a:defRPr>
             </a:pPr>
             <a:r>
-              <a:t>한 장에는 한 행동만 수행합니다.</a:t>
+              <a:t>파일을 입력하기 전에 ‘무엇을 만들고 어디서 볼지’를 먼저 연결합니다.</a:t>
             </a:r>
           </a:p>
         </p:txBody>
@@ -15638,109 +16738,31 @@
               </a:defRPr>
             </a:pPr>
             <a:r>
-              <a:t>현재 단계 1/2    |    현재 폴더 ~/ros2_curri/agv_ws    |    현재 터미널</a:t>
-            </a:r>
-          </a:p>
-        </p:txBody>
-      </p:sp>
-      <p:sp>
-        <p:nvSpPr>
-          <p:cNvPr id="7" name="TextBox 6"/>
-          <p:cNvSpPr txBox="1"/>
-          <p:nvPr/>
-        </p:nvSpPr>
-        <p:spPr>
-          <a:xfrm>
-            <a:off x="676656" y="1764792"/>
-            <a:ext cx="1828800" cy="347472"/>
-          </a:xfrm>
-          <a:prstGeom prst="rect">
-            <a:avLst/>
-          </a:prstGeom>
-          <a:noFill/>
-        </p:spPr>
-        <p:txBody>
-          <a:bodyPr wrap="square" lIns="73152" rIns="73152" tIns="36576" bIns="36576">
-            <a:spAutoFit/>
-          </a:bodyPr>
-          <a:lstStyle/>
-          <a:p>
-            <a:pPr algn="l">
-              <a:spcAft>
-                <a:spcPts val="0"/>
-              </a:spcAft>
-              <a:defRPr sz="1800" b="1">
-                <a:solidFill>
-                  <a:srgbClr val="225B9B"/>
-                </a:solidFill>
-                <a:latin typeface="Noto Sans CJK KR"/>
-              </a:defRPr>
-            </a:pPr>
-            <a:r>
-              <a:t>왜 하는가</a:t>
-            </a:r>
-          </a:p>
-        </p:txBody>
-      </p:sp>
-      <p:sp>
-        <p:nvSpPr>
-          <p:cNvPr id="8" name="TextBox 7"/>
-          <p:cNvSpPr txBox="1"/>
-          <p:nvPr/>
-        </p:nvSpPr>
-        <p:spPr>
-          <a:xfrm>
-            <a:off x="676656" y="2103120"/>
-            <a:ext cx="10789920" cy="512064"/>
-          </a:xfrm>
-          <a:prstGeom prst="rect">
-            <a:avLst/>
-          </a:prstGeom>
-          <a:noFill/>
-        </p:spPr>
-        <p:txBody>
-          <a:bodyPr wrap="square" lIns="73152" rIns="73152" tIns="36576" bIns="36576">
-            <a:spAutoFit/>
-          </a:bodyPr>
-          <a:lstStyle/>
-          <a:p>
-            <a:pPr algn="l">
-              <a:spcAft>
-                <a:spcPts val="0"/>
-              </a:spcAft>
-              <a:defRPr sz="2000" b="0">
-                <a:solidFill>
-                  <a:srgbClr val="122C4E"/>
-                </a:solidFill>
-                <a:latin typeface="Noto Sans CJK KR"/>
-              </a:defRPr>
-            </a:pPr>
-            <a:r>
-              <a:t>상태는 흩어진 if문이 아니라 한 곳에서 /cmd_vel_raw를 결정한다.</a:t>
-            </a:r>
-          </a:p>
-        </p:txBody>
-      </p:sp>
-      <p:sp>
-        <p:nvSpPr>
-          <p:cNvPr id="9" name="Rounded Rectangle 8"/>
+              <a:t>현재 단계 파일 역할    |    현재 폴더 ~/ros2_curri/agv_ws    |    현재 터미널</a:t>
+            </a:r>
+          </a:p>
+        </p:txBody>
+      </p:sp>
+      <p:sp>
+        <p:nvSpPr>
+          <p:cNvPr id="7" name="Rounded Rectangle 6"/>
           <p:cNvSpPr/>
           <p:nvPr/>
         </p:nvSpPr>
         <p:spPr>
           <a:xfrm>
-            <a:off x="676656" y="2871216"/>
-            <a:ext cx="10835640" cy="2331720"/>
+            <a:off x="640080" y="1627632"/>
+            <a:ext cx="10972800" cy="2048256"/>
           </a:xfrm>
           <a:prstGeom prst="roundRect">
             <a:avLst/>
           </a:prstGeom>
           <a:solidFill>
-            <a:srgbClr val="1D232D"/>
+            <a:srgbClr val="F4F7FB"/>
           </a:solidFill>
           <a:ln>
             <a:solidFill>
-              <a:srgbClr val="1D232D"/>
+              <a:srgbClr val="CCDBEB"/>
             </a:solidFill>
           </a:ln>
         </p:spPr>
@@ -15759,48 +16781,23 @@
           </a:fontRef>
         </p:style>
         <p:txBody>
-          <a:bodyPr rtlCol="0" anchor="ctr" wrap="square" lIns="73152" rIns="73152" tIns="36576" bIns="36576"/>
-          <a:lstStyle/>
-          <a:p>
-            <a:pPr algn="l">
-              <a:spcAft>
-                <a:spcPts val="0"/>
-              </a:spcAft>
-              <a:defRPr sz="1600" b="0">
-                <a:solidFill>
-                  <a:srgbClr val="FFFFFF"/>
-                </a:solidFill>
-                <a:latin typeface="DejaVu Sans Mono"/>
-              </a:defRPr>
-            </a:pPr>
-            <a:r>
-              <a:t>cd ~/ros2_curri/agv_ws</a:t>
-            </a:r>
-            <a:br/>
-            <a:r>
-              <a:t>colcon build --symlink-install --packages-select agv_mission</a:t>
-            </a:r>
-            <a:br/>
-            <a:r>
-              <a:t>source install/setup.bash</a:t>
-            </a:r>
-            <a:br/>
-            <a:r>
-              <a:t>ros2 run agv_mission mission_manager</a:t>
-            </a:r>
-          </a:p>
-        </p:txBody>
-      </p:sp>
-      <p:sp>
-        <p:nvSpPr>
-          <p:cNvPr id="10" name="TextBox 9"/>
+          <a:bodyPr rtlCol="0" anchor="ctr"/>
+          <a:lstStyle/>
+          <a:p>
+            <a:pPr algn="ctr"/>
+          </a:p>
+        </p:txBody>
+      </p:sp>
+      <p:sp>
+        <p:nvSpPr>
+          <p:cNvPr id="8" name="TextBox 7"/>
           <p:cNvSpPr txBox="1"/>
           <p:nvPr/>
         </p:nvSpPr>
         <p:spPr>
           <a:xfrm>
-            <a:off x="768096" y="5468112"/>
-            <a:ext cx="1143000" cy="256032"/>
+            <a:off x="850392" y="1764792"/>
+            <a:ext cx="10424160" cy="256032"/>
           </a:xfrm>
           <a:prstGeom prst="rect">
             <a:avLst/>
@@ -15817,29 +16814,29 @@
               <a:spcAft>
                 <a:spcPts val="0"/>
               </a:spcAft>
-              <a:defRPr sz="1800" b="1">
-                <a:solidFill>
-                  <a:srgbClr val="2A8B5A"/>
-                </a:solidFill>
-                <a:latin typeface="Noto Sans CJK KR"/>
-              </a:defRPr>
-            </a:pPr>
-            <a:r>
-              <a:t>확인</a:t>
-            </a:r>
-          </a:p>
-        </p:txBody>
-      </p:sp>
-      <p:sp>
-        <p:nvSpPr>
-          <p:cNvPr id="11" name="TextBox 10"/>
+              <a:defRPr sz="1300" b="1">
+                <a:solidFill>
+                  <a:srgbClr val="225B9B"/>
+                </a:solidFill>
+                <a:latin typeface="DejaVu Sans Mono"/>
+              </a:defRPr>
+            </a:pPr>
+            <a:r>
+              <a:t>~/ros2_curri/agv_ws/src/agv_mission/agv_mission/mission_manager.py</a:t>
+            </a:r>
+          </a:p>
+        </p:txBody>
+      </p:sp>
+      <p:sp>
+        <p:nvSpPr>
+          <p:cNvPr id="9" name="TextBox 8"/>
           <p:cNvSpPr txBox="1"/>
           <p:nvPr/>
         </p:nvSpPr>
         <p:spPr>
           <a:xfrm>
-            <a:off x="768096" y="5742432"/>
-            <a:ext cx="10561320" cy="347472"/>
+            <a:off x="868680" y="2130552"/>
+            <a:ext cx="1234440" cy="228600"/>
           </a:xfrm>
           <a:prstGeom prst="rect">
             <a:avLst/>
@@ -15856,7 +16853,46 @@
               <a:spcAft>
                 <a:spcPts val="0"/>
               </a:spcAft>
-              <a:defRPr sz="1800" b="0">
+              <a:defRPr sz="1500" b="1">
+                <a:solidFill>
+                  <a:srgbClr val="2A8B5A"/>
+                </a:solidFill>
+                <a:latin typeface="Noto Sans CJK KR"/>
+              </a:defRPr>
+            </a:pPr>
+            <a:r>
+              <a:t>만드는 것</a:t>
+            </a:r>
+          </a:p>
+        </p:txBody>
+      </p:sp>
+      <p:sp>
+        <p:nvSpPr>
+          <p:cNvPr id="10" name="TextBox 9"/>
+          <p:cNvSpPr txBox="1"/>
+          <p:nvPr/>
+        </p:nvSpPr>
+        <p:spPr>
+          <a:xfrm>
+            <a:off x="1975104" y="2112264"/>
+            <a:ext cx="9189720" cy="274320"/>
+          </a:xfrm>
+          <a:prstGeom prst="rect">
+            <a:avLst/>
+          </a:prstGeom>
+          <a:noFill/>
+        </p:spPr>
+        <p:txBody>
+          <a:bodyPr wrap="square" lIns="73152" rIns="73152" tIns="36576" bIns="36576">
+            <a:spAutoFit/>
+          </a:bodyPr>
+          <a:lstStyle/>
+          <a:p>
+            <a:pPr algn="l">
+              <a:spcAft>
+                <a:spcPts val="0"/>
+              </a:spcAft>
+              <a:defRPr sz="1500" b="0">
                 <a:solidFill>
                   <a:srgbClr val="122C4E"/>
                 </a:solidFill>
@@ -15864,7 +16900,489 @@
               </a:defRPr>
             </a:pPr>
             <a:r>
-              <a:t>명령의 출력에서 topic·frame·파일 이름 또는 성공 메시지를 찾으면 이 단계가 완료됩니다.</a:t>
+              <a:t>ROS 2 node 또는 실행 보조 로직</a:t>
+            </a:r>
+          </a:p>
+        </p:txBody>
+      </p:sp>
+      <p:sp>
+        <p:nvSpPr>
+          <p:cNvPr id="11" name="TextBox 10"/>
+          <p:cNvSpPr txBox="1"/>
+          <p:nvPr/>
+        </p:nvSpPr>
+        <p:spPr>
+          <a:xfrm>
+            <a:off x="868680" y="2505456"/>
+            <a:ext cx="1234440" cy="228600"/>
+          </a:xfrm>
+          <a:prstGeom prst="rect">
+            <a:avLst/>
+          </a:prstGeom>
+          <a:noFill/>
+        </p:spPr>
+        <p:txBody>
+          <a:bodyPr wrap="square" lIns="73152" rIns="73152" tIns="36576" bIns="36576">
+            <a:spAutoFit/>
+          </a:bodyPr>
+          <a:lstStyle/>
+          <a:p>
+            <a:pPr algn="l">
+              <a:spcAft>
+                <a:spcPts val="0"/>
+              </a:spcAft>
+              <a:defRPr sz="1500" b="1">
+                <a:solidFill>
+                  <a:srgbClr val="DB7E22"/>
+                </a:solidFill>
+                <a:latin typeface="Noto Sans CJK KR"/>
+              </a:defRPr>
+            </a:pPr>
+            <a:r>
+              <a:t>코드 읽기</a:t>
+            </a:r>
+          </a:p>
+        </p:txBody>
+      </p:sp>
+      <p:sp>
+        <p:nvSpPr>
+          <p:cNvPr id="12" name="TextBox 11"/>
+          <p:cNvSpPr txBox="1"/>
+          <p:nvPr/>
+        </p:nvSpPr>
+        <p:spPr>
+          <a:xfrm>
+            <a:off x="1975104" y="2487168"/>
+            <a:ext cx="9189720" cy="301752"/>
+          </a:xfrm>
+          <a:prstGeom prst="rect">
+            <a:avLst/>
+          </a:prstGeom>
+          <a:noFill/>
+        </p:spPr>
+        <p:txBody>
+          <a:bodyPr wrap="square" lIns="73152" rIns="73152" tIns="36576" bIns="36576">
+            <a:spAutoFit/>
+          </a:bodyPr>
+          <a:lstStyle/>
+          <a:p>
+            <a:pPr algn="l">
+              <a:spcAft>
+                <a:spcPts val="0"/>
+              </a:spcAft>
+              <a:defRPr sz="1400" b="0">
+                <a:solidFill>
+                  <a:srgbClr val="122C4E"/>
+                </a:solidFill>
+                <a:latin typeface="Noto Sans CJK KR"/>
+              </a:defRPr>
+            </a:pPr>
+            <a:r>
+              <a:t>import → Node 생성 → publisher/subscription → callback/main 순서로 읽는다.</a:t>
+            </a:r>
+          </a:p>
+        </p:txBody>
+      </p:sp>
+      <p:sp>
+        <p:nvSpPr>
+          <p:cNvPr id="13" name="TextBox 12"/>
+          <p:cNvSpPr txBox="1"/>
+          <p:nvPr/>
+        </p:nvSpPr>
+        <p:spPr>
+          <a:xfrm>
+            <a:off x="868680" y="2889504"/>
+            <a:ext cx="1234440" cy="228600"/>
+          </a:xfrm>
+          <a:prstGeom prst="rect">
+            <a:avLst/>
+          </a:prstGeom>
+          <a:noFill/>
+        </p:spPr>
+        <p:txBody>
+          <a:bodyPr wrap="square" lIns="73152" rIns="73152" tIns="36576" bIns="36576">
+            <a:spAutoFit/>
+          </a:bodyPr>
+          <a:lstStyle/>
+          <a:p>
+            <a:pPr algn="l">
+              <a:spcAft>
+                <a:spcPts val="0"/>
+              </a:spcAft>
+              <a:defRPr sz="1500" b="1">
+                <a:solidFill>
+                  <a:srgbClr val="225B9B"/>
+                </a:solidFill>
+                <a:latin typeface="Noto Sans CJK KR"/>
+              </a:defRPr>
+            </a:pPr>
+            <a:r>
+              <a:t>사용/확인</a:t>
+            </a:r>
+          </a:p>
+        </p:txBody>
+      </p:sp>
+      <p:sp>
+        <p:nvSpPr>
+          <p:cNvPr id="14" name="TextBox 13"/>
+          <p:cNvSpPr txBox="1"/>
+          <p:nvPr/>
+        </p:nvSpPr>
+        <p:spPr>
+          <a:xfrm>
+            <a:off x="1975104" y="2871216"/>
+            <a:ext cx="9189720" cy="512064"/>
+          </a:xfrm>
+          <a:prstGeom prst="rect">
+            <a:avLst/>
+          </a:prstGeom>
+          <a:noFill/>
+        </p:spPr>
+        <p:txBody>
+          <a:bodyPr wrap="square" lIns="73152" rIns="73152" tIns="36576" bIns="36576">
+            <a:spAutoFit/>
+          </a:bodyPr>
+          <a:lstStyle/>
+          <a:p>
+            <a:pPr algn="l">
+              <a:spcAft>
+                <a:spcPts val="0"/>
+              </a:spcAft>
+              <a:defRPr sz="1300" b="0">
+                <a:solidFill>
+                  <a:srgbClr val="122C4E"/>
+                </a:solidFill>
+                <a:latin typeface="Noto Sans CJK KR"/>
+              </a:defRPr>
+            </a:pPr>
+            <a:r>
+              <a:t>사용: package를 build·source한 뒤 ros2 run 또는 launch에서 실행한다.</a:t>
+            </a:r>
+            <a:br/>
+            <a:r>
+              <a:t>화면/출력: terminal의 node/topic/log 출력</a:t>
+            </a:r>
+          </a:p>
+        </p:txBody>
+      </p:sp>
+      <p:sp>
+        <p:nvSpPr>
+          <p:cNvPr id="15" name="Rounded Rectangle 14"/>
+          <p:cNvSpPr/>
+          <p:nvPr/>
+        </p:nvSpPr>
+        <p:spPr>
+          <a:xfrm>
+            <a:off x="640080" y="3941063"/>
+            <a:ext cx="10972800" cy="2048256"/>
+          </a:xfrm>
+          <a:prstGeom prst="roundRect">
+            <a:avLst/>
+          </a:prstGeom>
+          <a:solidFill>
+            <a:srgbClr val="F4F7FB"/>
+          </a:solidFill>
+          <a:ln>
+            <a:solidFill>
+              <a:srgbClr val="CCDBEB"/>
+            </a:solidFill>
+          </a:ln>
+        </p:spPr>
+        <p:style>
+          <a:lnRef idx="1">
+            <a:schemeClr val="accent1"/>
+          </a:lnRef>
+          <a:fillRef idx="3">
+            <a:schemeClr val="accent1"/>
+          </a:fillRef>
+          <a:effectRef idx="2">
+            <a:schemeClr val="accent1"/>
+          </a:effectRef>
+          <a:fontRef idx="minor">
+            <a:schemeClr val="lt1"/>
+          </a:fontRef>
+        </p:style>
+        <p:txBody>
+          <a:bodyPr rtlCol="0" anchor="ctr"/>
+          <a:lstStyle/>
+          <a:p>
+            <a:pPr algn="ctr"/>
+          </a:p>
+        </p:txBody>
+      </p:sp>
+      <p:sp>
+        <p:nvSpPr>
+          <p:cNvPr id="16" name="TextBox 15"/>
+          <p:cNvSpPr txBox="1"/>
+          <p:nvPr/>
+        </p:nvSpPr>
+        <p:spPr>
+          <a:xfrm>
+            <a:off x="850392" y="4078224"/>
+            <a:ext cx="10424160" cy="256032"/>
+          </a:xfrm>
+          <a:prstGeom prst="rect">
+            <a:avLst/>
+          </a:prstGeom>
+          <a:noFill/>
+        </p:spPr>
+        <p:txBody>
+          <a:bodyPr wrap="square" lIns="73152" rIns="73152" tIns="36576" bIns="36576">
+            <a:spAutoFit/>
+          </a:bodyPr>
+          <a:lstStyle/>
+          <a:p>
+            <a:pPr algn="l">
+              <a:spcAft>
+                <a:spcPts val="0"/>
+              </a:spcAft>
+              <a:defRPr sz="1300" b="1">
+                <a:solidFill>
+                  <a:srgbClr val="225B9B"/>
+                </a:solidFill>
+                <a:latin typeface="DejaVu Sans Mono"/>
+              </a:defRPr>
+            </a:pPr>
+            <a:r>
+              <a:t>~/ros2_curri/agv_ws/src/agv_bringup/config/mission.yaml</a:t>
+            </a:r>
+          </a:p>
+        </p:txBody>
+      </p:sp>
+      <p:sp>
+        <p:nvSpPr>
+          <p:cNvPr id="17" name="TextBox 16"/>
+          <p:cNvSpPr txBox="1"/>
+          <p:nvPr/>
+        </p:nvSpPr>
+        <p:spPr>
+          <a:xfrm>
+            <a:off x="868680" y="4443983"/>
+            <a:ext cx="1234440" cy="228600"/>
+          </a:xfrm>
+          <a:prstGeom prst="rect">
+            <a:avLst/>
+          </a:prstGeom>
+          <a:noFill/>
+        </p:spPr>
+        <p:txBody>
+          <a:bodyPr wrap="square" lIns="73152" rIns="73152" tIns="36576" bIns="36576">
+            <a:spAutoFit/>
+          </a:bodyPr>
+          <a:lstStyle/>
+          <a:p>
+            <a:pPr algn="l">
+              <a:spcAft>
+                <a:spcPts val="0"/>
+              </a:spcAft>
+              <a:defRPr sz="1500" b="1">
+                <a:solidFill>
+                  <a:srgbClr val="2A8B5A"/>
+                </a:solidFill>
+                <a:latin typeface="Noto Sans CJK KR"/>
+              </a:defRPr>
+            </a:pPr>
+            <a:r>
+              <a:t>만드는 것</a:t>
+            </a:r>
+          </a:p>
+        </p:txBody>
+      </p:sp>
+      <p:sp>
+        <p:nvSpPr>
+          <p:cNvPr id="18" name="TextBox 17"/>
+          <p:cNvSpPr txBox="1"/>
+          <p:nvPr/>
+        </p:nvSpPr>
+        <p:spPr>
+          <a:xfrm>
+            <a:off x="1975104" y="4425696"/>
+            <a:ext cx="9189720" cy="274320"/>
+          </a:xfrm>
+          <a:prstGeom prst="rect">
+            <a:avLst/>
+          </a:prstGeom>
+          <a:noFill/>
+        </p:spPr>
+        <p:txBody>
+          <a:bodyPr wrap="square" lIns="73152" rIns="73152" tIns="36576" bIns="36576">
+            <a:spAutoFit/>
+          </a:bodyPr>
+          <a:lstStyle/>
+          <a:p>
+            <a:pPr algn="l">
+              <a:spcAft>
+                <a:spcPts val="0"/>
+              </a:spcAft>
+              <a:defRPr sz="1500" b="0">
+                <a:solidFill>
+                  <a:srgbClr val="122C4E"/>
+                </a:solidFill>
+                <a:latin typeface="Noto Sans CJK KR"/>
+              </a:defRPr>
+            </a:pPr>
+            <a:r>
+              <a:t>실행 시 읽히는 ROS 2 설정값</a:t>
+            </a:r>
+          </a:p>
+        </p:txBody>
+      </p:sp>
+      <p:sp>
+        <p:nvSpPr>
+          <p:cNvPr id="19" name="TextBox 18"/>
+          <p:cNvSpPr txBox="1"/>
+          <p:nvPr/>
+        </p:nvSpPr>
+        <p:spPr>
+          <a:xfrm>
+            <a:off x="868680" y="4818888"/>
+            <a:ext cx="1234440" cy="228600"/>
+          </a:xfrm>
+          <a:prstGeom prst="rect">
+            <a:avLst/>
+          </a:prstGeom>
+          <a:noFill/>
+        </p:spPr>
+        <p:txBody>
+          <a:bodyPr wrap="square" lIns="73152" rIns="73152" tIns="36576" bIns="36576">
+            <a:spAutoFit/>
+          </a:bodyPr>
+          <a:lstStyle/>
+          <a:p>
+            <a:pPr algn="l">
+              <a:spcAft>
+                <a:spcPts val="0"/>
+              </a:spcAft>
+              <a:defRPr sz="1500" b="1">
+                <a:solidFill>
+                  <a:srgbClr val="DB7E22"/>
+                </a:solidFill>
+                <a:latin typeface="Noto Sans CJK KR"/>
+              </a:defRPr>
+            </a:pPr>
+            <a:r>
+              <a:t>코드 읽기</a:t>
+            </a:r>
+          </a:p>
+        </p:txBody>
+      </p:sp>
+      <p:sp>
+        <p:nvSpPr>
+          <p:cNvPr id="20" name="TextBox 19"/>
+          <p:cNvSpPr txBox="1"/>
+          <p:nvPr/>
+        </p:nvSpPr>
+        <p:spPr>
+          <a:xfrm>
+            <a:off x="1975104" y="4800600"/>
+            <a:ext cx="9189720" cy="301752"/>
+          </a:xfrm>
+          <a:prstGeom prst="rect">
+            <a:avLst/>
+          </a:prstGeom>
+          <a:noFill/>
+        </p:spPr>
+        <p:txBody>
+          <a:bodyPr wrap="square" lIns="73152" rIns="73152" tIns="36576" bIns="36576">
+            <a:spAutoFit/>
+          </a:bodyPr>
+          <a:lstStyle/>
+          <a:p>
+            <a:pPr algn="l">
+              <a:spcAft>
+                <a:spcPts val="0"/>
+              </a:spcAft>
+              <a:defRPr sz="1400" b="0">
+                <a:solidFill>
+                  <a:srgbClr val="122C4E"/>
+                </a:solidFill>
+                <a:latin typeface="Noto Sans CJK KR"/>
+              </a:defRPr>
+            </a:pPr>
+            <a:r>
+              <a:t>이름 → type/value → launch에서 전달되는 위치를 비교한다.</a:t>
+            </a:r>
+          </a:p>
+        </p:txBody>
+      </p:sp>
+      <p:sp>
+        <p:nvSpPr>
+          <p:cNvPr id="21" name="TextBox 20"/>
+          <p:cNvSpPr txBox="1"/>
+          <p:nvPr/>
+        </p:nvSpPr>
+        <p:spPr>
+          <a:xfrm>
+            <a:off x="868680" y="5202936"/>
+            <a:ext cx="1234440" cy="228600"/>
+          </a:xfrm>
+          <a:prstGeom prst="rect">
+            <a:avLst/>
+          </a:prstGeom>
+          <a:noFill/>
+        </p:spPr>
+        <p:txBody>
+          <a:bodyPr wrap="square" lIns="73152" rIns="73152" tIns="36576" bIns="36576">
+            <a:spAutoFit/>
+          </a:bodyPr>
+          <a:lstStyle/>
+          <a:p>
+            <a:pPr algn="l">
+              <a:spcAft>
+                <a:spcPts val="0"/>
+              </a:spcAft>
+              <a:defRPr sz="1500" b="1">
+                <a:solidFill>
+                  <a:srgbClr val="225B9B"/>
+                </a:solidFill>
+                <a:latin typeface="Noto Sans CJK KR"/>
+              </a:defRPr>
+            </a:pPr>
+            <a:r>
+              <a:t>사용/확인</a:t>
+            </a:r>
+          </a:p>
+        </p:txBody>
+      </p:sp>
+      <p:sp>
+        <p:nvSpPr>
+          <p:cNvPr id="22" name="TextBox 21"/>
+          <p:cNvSpPr txBox="1"/>
+          <p:nvPr/>
+        </p:nvSpPr>
+        <p:spPr>
+          <a:xfrm>
+            <a:off x="1975104" y="5184648"/>
+            <a:ext cx="9189720" cy="512064"/>
+          </a:xfrm>
+          <a:prstGeom prst="rect">
+            <a:avLst/>
+          </a:prstGeom>
+          <a:noFill/>
+        </p:spPr>
+        <p:txBody>
+          <a:bodyPr wrap="square" lIns="73152" rIns="73152" tIns="36576" bIns="36576">
+            <a:spAutoFit/>
+          </a:bodyPr>
+          <a:lstStyle/>
+          <a:p>
+            <a:pPr algn="l">
+              <a:spcAft>
+                <a:spcPts val="0"/>
+              </a:spcAft>
+              <a:defRPr sz="1300" b="0">
+                <a:solidFill>
+                  <a:srgbClr val="122C4E"/>
+                </a:solidFill>
+                <a:latin typeface="Noto Sans CJK KR"/>
+              </a:defRPr>
+            </a:pPr>
+            <a:r>
+              <a:t>사용: launch 실행 뒤 ros2 param/topic 명령으로 확인한다.</a:t>
+            </a:r>
+            <a:br/>
+            <a:r>
+              <a:t>화면/출력: terminal의 parameter/topic 출력</a:t>
             </a:r>
           </a:p>
         </p:txBody>
@@ -15921,7 +17439,7 @@
               </a:defRPr>
             </a:pPr>
             <a:r>
-              <a:t>상태 변화를 관찰한다</a:t>
+              <a:t>코드/설정이 실제로 만드는 것 (2/2)</a:t>
             </a:r>
           </a:p>
         </p:txBody>
@@ -15960,7 +17478,7 @@
               </a:defRPr>
             </a:pPr>
             <a:r>
-              <a:t>한 장에는 한 행동만 수행합니다.</a:t>
+              <a:t>파일을 입력하기 전에 ‘무엇을 만들고 어디서 볼지’를 먼저 연결합니다.</a:t>
             </a:r>
           </a:p>
         </p:txBody>
@@ -16096,109 +17614,31 @@
               </a:defRPr>
             </a:pPr>
             <a:r>
-              <a:t>현재 단계 2/2    |    현재 폴더 ~/ros2_curri/agv_ws    |    현재 터미널</a:t>
-            </a:r>
-          </a:p>
-        </p:txBody>
-      </p:sp>
-      <p:sp>
-        <p:nvSpPr>
-          <p:cNvPr id="7" name="TextBox 6"/>
-          <p:cNvSpPr txBox="1"/>
-          <p:nvPr/>
-        </p:nvSpPr>
-        <p:spPr>
-          <a:xfrm>
-            <a:off x="676656" y="1764792"/>
-            <a:ext cx="1828800" cy="347472"/>
-          </a:xfrm>
-          <a:prstGeom prst="rect">
-            <a:avLst/>
-          </a:prstGeom>
-          <a:noFill/>
-        </p:spPr>
-        <p:txBody>
-          <a:bodyPr wrap="square" lIns="73152" rIns="73152" tIns="36576" bIns="36576">
-            <a:spAutoFit/>
-          </a:bodyPr>
-          <a:lstStyle/>
-          <a:p>
-            <a:pPr algn="l">
-              <a:spcAft>
-                <a:spcPts val="0"/>
-              </a:spcAft>
-              <a:defRPr sz="1800" b="1">
-                <a:solidFill>
-                  <a:srgbClr val="225B9B"/>
-                </a:solidFill>
-                <a:latin typeface="Noto Sans CJK KR"/>
-              </a:defRPr>
-            </a:pPr>
-            <a:r>
-              <a:t>왜 하는가</a:t>
-            </a:r>
-          </a:p>
-        </p:txBody>
-      </p:sp>
-      <p:sp>
-        <p:nvSpPr>
-          <p:cNvPr id="8" name="TextBox 7"/>
-          <p:cNvSpPr txBox="1"/>
-          <p:nvPr/>
-        </p:nvSpPr>
-        <p:spPr>
-          <a:xfrm>
-            <a:off x="676656" y="2103120"/>
-            <a:ext cx="10789920" cy="512064"/>
-          </a:xfrm>
-          <a:prstGeom prst="rect">
-            <a:avLst/>
-          </a:prstGeom>
-          <a:noFill/>
-        </p:spPr>
-        <p:txBody>
-          <a:bodyPr wrap="square" lIns="73152" rIns="73152" tIns="36576" bIns="36576">
-            <a:spAutoFit/>
-          </a:bodyPr>
-          <a:lstStyle/>
-          <a:p>
-            <a:pPr algn="l">
-              <a:spcAft>
-                <a:spcPts val="0"/>
-              </a:spcAft>
-              <a:defRPr sz="2000" b="0">
-                <a:solidFill>
-                  <a:srgbClr val="122C4E"/>
-                </a:solidFill>
-                <a:latin typeface="Noto Sans CJK KR"/>
-              </a:defRPr>
-            </a:pPr>
-            <a:r>
-              <a:t>상태의 이름과 속도 command를 서로 다른 topic에서 확인한다.</a:t>
-            </a:r>
-          </a:p>
-        </p:txBody>
-      </p:sp>
-      <p:sp>
-        <p:nvSpPr>
-          <p:cNvPr id="9" name="Rounded Rectangle 8"/>
+              <a:t>현재 단계 파일 역할    |    현재 폴더 ~/ros2_curri/agv_ws    |    현재 터미널</a:t>
+            </a:r>
+          </a:p>
+        </p:txBody>
+      </p:sp>
+      <p:sp>
+        <p:nvSpPr>
+          <p:cNvPr id="7" name="Rounded Rectangle 6"/>
           <p:cNvSpPr/>
           <p:nvPr/>
         </p:nvSpPr>
         <p:spPr>
           <a:xfrm>
-            <a:off x="676656" y="2871216"/>
-            <a:ext cx="10835640" cy="2331720"/>
+            <a:off x="640080" y="1627632"/>
+            <a:ext cx="10972800" cy="2048256"/>
           </a:xfrm>
           <a:prstGeom prst="roundRect">
             <a:avLst/>
           </a:prstGeom>
           <a:solidFill>
-            <a:srgbClr val="1D232D"/>
+            <a:srgbClr val="F4F7FB"/>
           </a:solidFill>
           <a:ln>
             <a:solidFill>
-              <a:srgbClr val="1D232D"/>
+              <a:srgbClr val="CCDBEB"/>
             </a:solidFill>
           </a:ln>
         </p:spPr>
@@ -16217,40 +17657,23 @@
           </a:fontRef>
         </p:style>
         <p:txBody>
-          <a:bodyPr rtlCol="0" anchor="ctr" wrap="square" lIns="73152" rIns="73152" tIns="36576" bIns="36576"/>
-          <a:lstStyle/>
-          <a:p>
-            <a:pPr algn="l">
-              <a:spcAft>
-                <a:spcPts val="0"/>
-              </a:spcAft>
-              <a:defRPr sz="1600" b="0">
-                <a:solidFill>
-                  <a:srgbClr val="FFFFFF"/>
-                </a:solidFill>
-                <a:latin typeface="DejaVu Sans Mono"/>
-              </a:defRPr>
-            </a:pPr>
-            <a:r>
-              <a:t>ros2 topic echo /mission_state</a:t>
-            </a:r>
-            <a:br/>
-            <a:r>
-              <a:t>ros2 topic echo /cmd_vel_raw</a:t>
-            </a:r>
-          </a:p>
-        </p:txBody>
-      </p:sp>
-      <p:sp>
-        <p:nvSpPr>
-          <p:cNvPr id="10" name="TextBox 9"/>
+          <a:bodyPr rtlCol="0" anchor="ctr"/>
+          <a:lstStyle/>
+          <a:p>
+            <a:pPr algn="ctr"/>
+          </a:p>
+        </p:txBody>
+      </p:sp>
+      <p:sp>
+        <p:nvSpPr>
+          <p:cNvPr id="8" name="TextBox 7"/>
           <p:cNvSpPr txBox="1"/>
           <p:nvPr/>
         </p:nvSpPr>
         <p:spPr>
           <a:xfrm>
-            <a:off x="768096" y="5468112"/>
-            <a:ext cx="1143000" cy="256032"/>
+            <a:off x="850392" y="1764792"/>
+            <a:ext cx="10424160" cy="256032"/>
           </a:xfrm>
           <a:prstGeom prst="rect">
             <a:avLst/>
@@ -16267,29 +17690,29 @@
               <a:spcAft>
                 <a:spcPts val="0"/>
               </a:spcAft>
-              <a:defRPr sz="1800" b="1">
-                <a:solidFill>
-                  <a:srgbClr val="2A8B5A"/>
-                </a:solidFill>
-                <a:latin typeface="Noto Sans CJK KR"/>
-              </a:defRPr>
-            </a:pPr>
-            <a:r>
-              <a:t>확인</a:t>
-            </a:r>
-          </a:p>
-        </p:txBody>
-      </p:sp>
-      <p:sp>
-        <p:nvSpPr>
-          <p:cNvPr id="11" name="TextBox 10"/>
+              <a:defRPr sz="1300" b="1">
+                <a:solidFill>
+                  <a:srgbClr val="225B9B"/>
+                </a:solidFill>
+                <a:latin typeface="DejaVu Sans Mono"/>
+              </a:defRPr>
+            </a:pPr>
+            <a:r>
+              <a:t>~/ros2_curri/agv_ws/src/agv_mission/setup.py</a:t>
+            </a:r>
+          </a:p>
+        </p:txBody>
+      </p:sp>
+      <p:sp>
+        <p:nvSpPr>
+          <p:cNvPr id="9" name="TextBox 8"/>
           <p:cNvSpPr txBox="1"/>
           <p:nvPr/>
         </p:nvSpPr>
         <p:spPr>
           <a:xfrm>
-            <a:off x="768096" y="5742432"/>
-            <a:ext cx="10561320" cy="347472"/>
+            <a:off x="868680" y="2130552"/>
+            <a:ext cx="1234440" cy="228600"/>
           </a:xfrm>
           <a:prstGeom prst="rect">
             <a:avLst/>
@@ -16306,7 +17729,46 @@
               <a:spcAft>
                 <a:spcPts val="0"/>
               </a:spcAft>
-              <a:defRPr sz="1800" b="0">
+              <a:defRPr sz="1500" b="1">
+                <a:solidFill>
+                  <a:srgbClr val="2A8B5A"/>
+                </a:solidFill>
+                <a:latin typeface="Noto Sans CJK KR"/>
+              </a:defRPr>
+            </a:pPr>
+            <a:r>
+              <a:t>만드는 것</a:t>
+            </a:r>
+          </a:p>
+        </p:txBody>
+      </p:sp>
+      <p:sp>
+        <p:nvSpPr>
+          <p:cNvPr id="10" name="TextBox 9"/>
+          <p:cNvSpPr txBox="1"/>
+          <p:nvPr/>
+        </p:nvSpPr>
+        <p:spPr>
+          <a:xfrm>
+            <a:off x="1975104" y="2112264"/>
+            <a:ext cx="9189720" cy="274320"/>
+          </a:xfrm>
+          <a:prstGeom prst="rect">
+            <a:avLst/>
+          </a:prstGeom>
+          <a:noFill/>
+        </p:spPr>
+        <p:txBody>
+          <a:bodyPr wrap="square" lIns="73152" rIns="73152" tIns="36576" bIns="36576">
+            <a:spAutoFit/>
+          </a:bodyPr>
+          <a:lstStyle/>
+          <a:p>
+            <a:pPr algn="l">
+              <a:spcAft>
+                <a:spcPts val="0"/>
+              </a:spcAft>
+              <a:defRPr sz="1500" b="0">
                 <a:solidFill>
                   <a:srgbClr val="122C4E"/>
                 </a:solidFill>
@@ -16314,7 +17776,167 @@
               </a:defRPr>
             </a:pPr>
             <a:r>
-              <a:t>명령의 출력에서 topic·frame·파일 이름 또는 성공 메시지를 찾으면 이 단계가 완료됩니다.</a:t>
+              <a:t>ROS 2 node 또는 실행 보조 로직</a:t>
+            </a:r>
+          </a:p>
+        </p:txBody>
+      </p:sp>
+      <p:sp>
+        <p:nvSpPr>
+          <p:cNvPr id="11" name="TextBox 10"/>
+          <p:cNvSpPr txBox="1"/>
+          <p:nvPr/>
+        </p:nvSpPr>
+        <p:spPr>
+          <a:xfrm>
+            <a:off x="868680" y="2505456"/>
+            <a:ext cx="1234440" cy="228600"/>
+          </a:xfrm>
+          <a:prstGeom prst="rect">
+            <a:avLst/>
+          </a:prstGeom>
+          <a:noFill/>
+        </p:spPr>
+        <p:txBody>
+          <a:bodyPr wrap="square" lIns="73152" rIns="73152" tIns="36576" bIns="36576">
+            <a:spAutoFit/>
+          </a:bodyPr>
+          <a:lstStyle/>
+          <a:p>
+            <a:pPr algn="l">
+              <a:spcAft>
+                <a:spcPts val="0"/>
+              </a:spcAft>
+              <a:defRPr sz="1500" b="1">
+                <a:solidFill>
+                  <a:srgbClr val="DB7E22"/>
+                </a:solidFill>
+                <a:latin typeface="Noto Sans CJK KR"/>
+              </a:defRPr>
+            </a:pPr>
+            <a:r>
+              <a:t>코드 읽기</a:t>
+            </a:r>
+          </a:p>
+        </p:txBody>
+      </p:sp>
+      <p:sp>
+        <p:nvSpPr>
+          <p:cNvPr id="12" name="TextBox 11"/>
+          <p:cNvSpPr txBox="1"/>
+          <p:nvPr/>
+        </p:nvSpPr>
+        <p:spPr>
+          <a:xfrm>
+            <a:off x="1975104" y="2487168"/>
+            <a:ext cx="9189720" cy="301752"/>
+          </a:xfrm>
+          <a:prstGeom prst="rect">
+            <a:avLst/>
+          </a:prstGeom>
+          <a:noFill/>
+        </p:spPr>
+        <p:txBody>
+          <a:bodyPr wrap="square" lIns="73152" rIns="73152" tIns="36576" bIns="36576">
+            <a:spAutoFit/>
+          </a:bodyPr>
+          <a:lstStyle/>
+          <a:p>
+            <a:pPr algn="l">
+              <a:spcAft>
+                <a:spcPts val="0"/>
+              </a:spcAft>
+              <a:defRPr sz="1400" b="0">
+                <a:solidFill>
+                  <a:srgbClr val="122C4E"/>
+                </a:solidFill>
+                <a:latin typeface="Noto Sans CJK KR"/>
+              </a:defRPr>
+            </a:pPr>
+            <a:r>
+              <a:t>import → Node 생성 → publisher/subscription → callback/main 순서로 읽는다.</a:t>
+            </a:r>
+          </a:p>
+        </p:txBody>
+      </p:sp>
+      <p:sp>
+        <p:nvSpPr>
+          <p:cNvPr id="13" name="TextBox 12"/>
+          <p:cNvSpPr txBox="1"/>
+          <p:nvPr/>
+        </p:nvSpPr>
+        <p:spPr>
+          <a:xfrm>
+            <a:off x="868680" y="2889504"/>
+            <a:ext cx="1234440" cy="228600"/>
+          </a:xfrm>
+          <a:prstGeom prst="rect">
+            <a:avLst/>
+          </a:prstGeom>
+          <a:noFill/>
+        </p:spPr>
+        <p:txBody>
+          <a:bodyPr wrap="square" lIns="73152" rIns="73152" tIns="36576" bIns="36576">
+            <a:spAutoFit/>
+          </a:bodyPr>
+          <a:lstStyle/>
+          <a:p>
+            <a:pPr algn="l">
+              <a:spcAft>
+                <a:spcPts val="0"/>
+              </a:spcAft>
+              <a:defRPr sz="1500" b="1">
+                <a:solidFill>
+                  <a:srgbClr val="225B9B"/>
+                </a:solidFill>
+                <a:latin typeface="Noto Sans CJK KR"/>
+              </a:defRPr>
+            </a:pPr>
+            <a:r>
+              <a:t>사용/확인</a:t>
+            </a:r>
+          </a:p>
+        </p:txBody>
+      </p:sp>
+      <p:sp>
+        <p:nvSpPr>
+          <p:cNvPr id="14" name="TextBox 13"/>
+          <p:cNvSpPr txBox="1"/>
+          <p:nvPr/>
+        </p:nvSpPr>
+        <p:spPr>
+          <a:xfrm>
+            <a:off x="1975104" y="2871216"/>
+            <a:ext cx="9189720" cy="512064"/>
+          </a:xfrm>
+          <a:prstGeom prst="rect">
+            <a:avLst/>
+          </a:prstGeom>
+          <a:noFill/>
+        </p:spPr>
+        <p:txBody>
+          <a:bodyPr wrap="square" lIns="73152" rIns="73152" tIns="36576" bIns="36576">
+            <a:spAutoFit/>
+          </a:bodyPr>
+          <a:lstStyle/>
+          <a:p>
+            <a:pPr algn="l">
+              <a:spcAft>
+                <a:spcPts val="0"/>
+              </a:spcAft>
+              <a:defRPr sz="1300" b="0">
+                <a:solidFill>
+                  <a:srgbClr val="122C4E"/>
+                </a:solidFill>
+                <a:latin typeface="Noto Sans CJK KR"/>
+              </a:defRPr>
+            </a:pPr>
+            <a:r>
+              <a:t>사용: package를 build·source한 뒤 ros2 run 또는 launch에서 실행한다.</a:t>
+            </a:r>
+            <a:br/>
+            <a:r>
+              <a:t>화면/출력: terminal의 node/topic/log 출력</a:t>
             </a:r>
           </a:p>
         </p:txBody>
@@ -16371,7 +17993,7 @@
               </a:defRPr>
             </a:pPr>
             <a:r>
-              <a:t>파일을 새로 만들고 저장한다 (1/7)</a:t>
+              <a:t>FSM node를 빌드하고 실행한다</a:t>
             </a:r>
           </a:p>
         </p:txBody>
@@ -16410,7 +18032,7 @@
               </a:defRPr>
             </a:pPr>
             <a:r>
-              <a:t>~/ros2_curri/agv_ws/src/agv_mission/agv_mission/mission_manager.py</a:t>
+              <a:t>한 장에는 한 행동만 수행합니다.</a:t>
             </a:r>
           </a:p>
         </p:txBody>
@@ -16546,7 +18168,7 @@
               </a:defRPr>
             </a:pPr>
             <a:r>
-              <a:t>현재 단계 3/10    |    현재 폴더 ~/ros2_curri/agv_ws    |    현재 터미널</a:t>
+              <a:t>현재 단계 1/2    |    현재 폴더 ~/ros2_curri/agv_ws    |    현재 터미널</a:t>
             </a:r>
           </a:p>
         </p:txBody>
@@ -16559,8 +18181,8 @@
         </p:nvSpPr>
         <p:spPr>
           <a:xfrm>
-            <a:off x="658368" y="1627632"/>
-            <a:ext cx="10972800" cy="256032"/>
+            <a:off x="676656" y="1764792"/>
+            <a:ext cx="1828800" cy="347472"/>
           </a:xfrm>
           <a:prstGeom prst="rect">
             <a:avLst/>
@@ -16577,7 +18199,46 @@
               <a:spcAft>
                 <a:spcPts val="0"/>
               </a:spcAft>
-              <a:defRPr sz="1500" b="1">
+              <a:defRPr sz="1800" b="1">
+                <a:solidFill>
+                  <a:srgbClr val="225B9B"/>
+                </a:solidFill>
+                <a:latin typeface="Noto Sans CJK KR"/>
+              </a:defRPr>
+            </a:pPr>
+            <a:r>
+              <a:t>왜 하는가</a:t>
+            </a:r>
+          </a:p>
+        </p:txBody>
+      </p:sp>
+      <p:sp>
+        <p:nvSpPr>
+          <p:cNvPr id="8" name="TextBox 7"/>
+          <p:cNvSpPr txBox="1"/>
+          <p:nvPr/>
+        </p:nvSpPr>
+        <p:spPr>
+          <a:xfrm>
+            <a:off x="676656" y="2103120"/>
+            <a:ext cx="10789920" cy="512064"/>
+          </a:xfrm>
+          <a:prstGeom prst="rect">
+            <a:avLst/>
+          </a:prstGeom>
+          <a:noFill/>
+        </p:spPr>
+        <p:txBody>
+          <a:bodyPr wrap="square" lIns="73152" rIns="73152" tIns="36576" bIns="36576">
+            <a:spAutoFit/>
+          </a:bodyPr>
+          <a:lstStyle/>
+          <a:p>
+            <a:pPr algn="l">
+              <a:spcAft>
+                <a:spcPts val="0"/>
+              </a:spcAft>
+              <a:defRPr sz="2000" b="0">
                 <a:solidFill>
                   <a:srgbClr val="122C4E"/>
                 </a:solidFill>
@@ -16585,85 +18246,23 @@
               </a:defRPr>
             </a:pPr>
             <a:r>
-              <a:t>이번 단계: 파일의 전체 내용을 중간 생략 없이 작성합니다. 아래 줄 범위를 끝까지 입력하세요.</a:t>
-            </a:r>
-          </a:p>
-        </p:txBody>
-      </p:sp>
-      <p:sp>
-        <p:nvSpPr>
-          <p:cNvPr id="8" name="Rectangle 7"/>
+              <a:t>상태는 흩어진 if문이 아니라 한 곳에서 /cmd_vel_raw를 결정한다.</a:t>
+            </a:r>
+          </a:p>
+        </p:txBody>
+      </p:sp>
+      <p:sp>
+        <p:nvSpPr>
+          <p:cNvPr id="9" name="Rounded Rectangle 8"/>
           <p:cNvSpPr/>
           <p:nvPr/>
         </p:nvSpPr>
         <p:spPr>
           <a:xfrm>
-            <a:off x="658368" y="1956816"/>
-            <a:ext cx="10972800" cy="603504"/>
-          </a:xfrm>
-          <a:prstGeom prst="rect">
-            <a:avLst/>
-          </a:prstGeom>
-          <a:solidFill>
-            <a:srgbClr val="F4F7FB"/>
-          </a:solidFill>
-          <a:ln>
-            <a:solidFill>
-              <a:srgbClr val="F4F7FB"/>
-            </a:solidFill>
-          </a:ln>
-        </p:spPr>
-        <p:style>
-          <a:lnRef idx="1">
-            <a:schemeClr val="accent1"/>
-          </a:lnRef>
-          <a:fillRef idx="3">
-            <a:schemeClr val="accent1"/>
-          </a:fillRef>
-          <a:effectRef idx="2">
-            <a:schemeClr val="accent1"/>
-          </a:effectRef>
-          <a:fontRef idx="minor">
-            <a:schemeClr val="lt1"/>
-          </a:fontRef>
-        </p:style>
-        <p:txBody>
-          <a:bodyPr rtlCol="0" anchor="ctr" wrap="square" lIns="73152" rIns="73152" tIns="36576" bIns="36576"/>
-          <a:lstStyle/>
-          <a:p>
-            <a:pPr algn="l">
-              <a:spcAft>
-                <a:spcPts val="0"/>
-              </a:spcAft>
-              <a:defRPr sz="1400" b="0">
-                <a:solidFill>
-                  <a:srgbClr val="122C4E"/>
-                </a:solidFill>
-                <a:latin typeface="DejaVu Sans Mono"/>
-              </a:defRPr>
-            </a:pPr>
-            <a:r>
-              <a:t>파일 생성: mkdir -p ~/ros2_curri/agv_ws/src/agv_mission/agv_mission</a:t>
-            </a:r>
-            <a:br/>
-            <a:r>
-              <a:t>파일 열기: nano ~/ros2_curri/agv_ws/src/agv_mission/agv_mission/mission_manager.py</a:t>
-            </a:r>
-          </a:p>
-        </p:txBody>
-      </p:sp>
-      <p:sp>
-        <p:nvSpPr>
-          <p:cNvPr id="9" name="Rectangle 8"/>
-          <p:cNvSpPr/>
-          <p:nvPr/>
-        </p:nvSpPr>
-        <p:spPr>
-          <a:xfrm>
-            <a:off x="658368" y="2706624"/>
-            <a:ext cx="10972800" cy="3364992"/>
-          </a:xfrm>
-          <a:prstGeom prst="rect">
+            <a:off x="676656" y="2871216"/>
+            <a:ext cx="10835640" cy="2331720"/>
+          </a:xfrm>
+          <a:prstGeom prst="roundRect">
             <a:avLst/>
           </a:prstGeom>
           <a:solidFill>
@@ -16690,14 +18289,14 @@
           </a:fontRef>
         </p:style>
         <p:txBody>
-          <a:bodyPr rtlCol="0" anchor="ctr" wrap="square" lIns="164592" rIns="164592" tIns="109728" bIns="36576"/>
-          <a:lstStyle/>
-          <a:p>
-            <a:pPr algn="l">
-              <a:spcAft>
-                <a:spcPts val="0"/>
-              </a:spcAft>
-              <a:defRPr sz="1400" b="0">
+          <a:bodyPr rtlCol="0" anchor="ctr" wrap="square" lIns="73152" rIns="73152" tIns="36576" bIns="36576"/>
+          <a:lstStyle/>
+          <a:p>
+            <a:pPr algn="l">
+              <a:spcAft>
+                <a:spcPts val="0"/>
+              </a:spcAft>
+              <a:defRPr sz="1600" b="0">
                 <a:solidFill>
                   <a:srgbClr val="FFFFFF"/>
                 </a:solidFill>
@@ -16705,45 +18304,19 @@
               </a:defRPr>
             </a:pPr>
             <a:r>
-              <a:t>import math</a:t>
+              <a:t>cd ~/ros2_curri/agv_ws</a:t>
             </a:r>
             <a:br/>
             <a:r>
-              <a:t>import rclpy</a:t>
+              <a:t>colcon build --symlink-install --packages-select agv_mission</a:t>
             </a:r>
             <a:br/>
             <a:r>
-              <a:t>from rclpy.node import Node</a:t>
+              <a:t>source install/setup.bash</a:t>
             </a:r>
             <a:br/>
             <a:r>
-              <a:t>from geometry_msgs.msg import Twist</a:t>
-            </a:r>
-            <a:br/>
-            <a:r>
-              <a:t>from std_msgs.msg import Float32, String</a:t>
-            </a:r>
-            <a:br/>
-            <a:r>
-              <a:t>from agv_interfaces.msg import DetectionArray</a:t>
-            </a:r>
-            <a:br/>
-            <a:br/>
-            <a:r>
-              <a:t>class MissionManager(Node):</a:t>
-            </a:r>
-            <a:br/>
-            <a:br/>
-            <a:r>
-              <a:t>    def __init__(self):</a:t>
-            </a:r>
-            <a:br/>
-            <a:r>
-              <a:t>        super().__init__('mission_manager')</a:t>
-            </a:r>
-            <a:br/>
-            <a:r>
-              <a:t>        self.declare_parameter('stop_distance', 0.5)</a:t>
+              <a:t>ros2 run agv_mission mission_manager</a:t>
             </a:r>
           </a:p>
         </p:txBody>
@@ -16756,8 +18329,8 @@
         </p:nvSpPr>
         <p:spPr>
           <a:xfrm>
-            <a:off x="749808" y="6181344"/>
-            <a:ext cx="10789920" cy="201168"/>
+            <a:off x="768096" y="5468112"/>
+            <a:ext cx="1143000" cy="256032"/>
           </a:xfrm>
           <a:prstGeom prst="rect">
             <a:avLst/>
@@ -16774,15 +18347,54 @@
               <a:spcAft>
                 <a:spcPts val="0"/>
               </a:spcAft>
-              <a:defRPr sz="1000" b="0">
-                <a:solidFill>
-                  <a:srgbClr val="5C6672"/>
-                </a:solidFill>
-                <a:latin typeface="Noto Sans CJK KR"/>
-              </a:defRPr>
-            </a:pPr>
-            <a:r>
-              <a:t>파일 전체 1/7 · 이 슬라이드 다음에 같은 파일의 나머지 줄이 이어집니다.</a:t>
+              <a:defRPr sz="1800" b="1">
+                <a:solidFill>
+                  <a:srgbClr val="2A8B5A"/>
+                </a:solidFill>
+                <a:latin typeface="Noto Sans CJK KR"/>
+              </a:defRPr>
+            </a:pPr>
+            <a:r>
+              <a:t>확인</a:t>
+            </a:r>
+          </a:p>
+        </p:txBody>
+      </p:sp>
+      <p:sp>
+        <p:nvSpPr>
+          <p:cNvPr id="11" name="TextBox 10"/>
+          <p:cNvSpPr txBox="1"/>
+          <p:nvPr/>
+        </p:nvSpPr>
+        <p:spPr>
+          <a:xfrm>
+            <a:off x="768096" y="5742432"/>
+            <a:ext cx="10561320" cy="347472"/>
+          </a:xfrm>
+          <a:prstGeom prst="rect">
+            <a:avLst/>
+          </a:prstGeom>
+          <a:noFill/>
+        </p:spPr>
+        <p:txBody>
+          <a:bodyPr wrap="square" lIns="73152" rIns="73152" tIns="36576" bIns="36576">
+            <a:spAutoFit/>
+          </a:bodyPr>
+          <a:lstStyle/>
+          <a:p>
+            <a:pPr algn="l">
+              <a:spcAft>
+                <a:spcPts val="0"/>
+              </a:spcAft>
+              <a:defRPr sz="1800" b="0">
+                <a:solidFill>
+                  <a:srgbClr val="122C4E"/>
+                </a:solidFill>
+                <a:latin typeface="Noto Sans CJK KR"/>
+              </a:defRPr>
+            </a:pPr>
+            <a:r>
+              <a:t>명령의 출력에서 topic·frame·파일 이름 또는 성공 메시지를 찾으면 이 단계가 완료됩니다.</a:t>
             </a:r>
           </a:p>
         </p:txBody>

--- a/blocks/E_autonomy_logic/M19_mission_fsm/M19_Mission_State_Machine.pptx
+++ b/blocks/E_autonomy_logic/M19_mission_fsm/M19_Mission_State_Machine.pptx
@@ -8021,7 +8021,7 @@
               <a:spcAft>
                 <a:spcPts val="0"/>
               </a:spcAft>
-              <a:defRPr sz="1800" b="1">
+              <a:defRPr sz="1400" b="1">
                 <a:solidFill>
                   <a:srgbClr val="FFFFFF"/>
                 </a:solidFill>
@@ -8029,7 +8029,7 @@
               </a:defRPr>
             </a:pPr>
             <a:r>
-              <a:t>M19 · Block E · ROS 2 + Gazebo Sim AGV</a:t>
+              <a:t>ROS 2 기반 AGV End-to-End 개발 커리큘럼 · M19 · Block E</a:t>
             </a:r>
           </a:p>
         </p:txBody>
@@ -8239,7 +8239,7 @@
               <a:spcAft>
                 <a:spcPts val="0"/>
               </a:spcAft>
-              <a:defRPr sz="1000" b="0">
+              <a:defRPr sz="900" b="0">
                 <a:solidFill>
                   <a:srgbClr val="5C6672"/>
                 </a:solidFill>
@@ -8247,7 +8247,7 @@
               </a:defRPr>
             </a:pPr>
             <a:r>
-              <a:t>ROS 2 Jazzy · Gazebo Harmonic · M19 · 따라 하기형 AGV 실습</a:t>
+              <a:t>ROS 2 기반 AGV End-to-End 개발 커리큘럼 · M19 · Block E</a:t>
             </a:r>
           </a:p>
         </p:txBody>
@@ -8413,7 +8413,7 @@
               <a:spcAft>
                 <a:spcPts val="0"/>
               </a:spcAft>
-              <a:defRPr sz="1000" b="0">
+              <a:defRPr sz="900" b="0">
                 <a:solidFill>
                   <a:srgbClr val="5C6672"/>
                 </a:solidFill>
@@ -8421,7 +8421,7 @@
               </a:defRPr>
             </a:pPr>
             <a:r>
-              <a:t>ROS 2 Jazzy · Gazebo Harmonic · M19 · 따라 하기형 AGV 실습</a:t>
+              <a:t>ROS 2 기반 AGV End-to-End 개발 커리큘럼 · M19 · Block E</a:t>
             </a:r>
           </a:p>
         </p:txBody>
@@ -9289,7 +9289,7 @@
               <a:spcAft>
                 <a:spcPts val="0"/>
               </a:spcAft>
-              <a:defRPr sz="1000" b="0">
+              <a:defRPr sz="900" b="0">
                 <a:solidFill>
                   <a:srgbClr val="5C6672"/>
                 </a:solidFill>
@@ -9297,7 +9297,7 @@
               </a:defRPr>
             </a:pPr>
             <a:r>
-              <a:t>ROS 2 Jazzy · Gazebo Harmonic · M19 · 따라 하기형 AGV 실습</a:t>
+              <a:t>ROS 2 기반 AGV End-to-End 개발 커리큘럼 · M19 · Block E</a:t>
             </a:r>
           </a:p>
         </p:txBody>
@@ -9700,7 +9700,7 @@
               <a:spcAft>
                 <a:spcPts val="0"/>
               </a:spcAft>
-              <a:defRPr sz="1000" b="0">
+              <a:defRPr sz="900" b="0">
                 <a:solidFill>
                   <a:srgbClr val="5C6672"/>
                 </a:solidFill>
@@ -9708,7 +9708,7 @@
               </a:defRPr>
             </a:pPr>
             <a:r>
-              <a:t>ROS 2 Jazzy · Gazebo Harmonic · M19 · 따라 하기형 AGV 실습</a:t>
+              <a:t>ROS 2 기반 AGV End-to-End 개발 커리큘럼 · M19 · Block E</a:t>
             </a:r>
           </a:p>
         </p:txBody>
@@ -10228,7 +10228,7 @@
               <a:spcAft>
                 <a:spcPts val="0"/>
               </a:spcAft>
-              <a:defRPr sz="1000" b="0">
+              <a:defRPr sz="900" b="0">
                 <a:solidFill>
                   <a:srgbClr val="5C6672"/>
                 </a:solidFill>
@@ -10236,7 +10236,7 @@
               </a:defRPr>
             </a:pPr>
             <a:r>
-              <a:t>ROS 2 Jazzy · Gazebo Harmonic · M19 · 따라 하기형 AGV 실습</a:t>
+              <a:t>ROS 2 기반 AGV End-to-End 개발 커리큘럼 · M19 · Block E</a:t>
             </a:r>
           </a:p>
         </p:txBody>
@@ -11017,7 +11017,7 @@
               <a:spcAft>
                 <a:spcPts val="0"/>
               </a:spcAft>
-              <a:defRPr sz="1000" b="0">
+              <a:defRPr sz="900" b="0">
                 <a:solidFill>
                   <a:srgbClr val="5C6672"/>
                 </a:solidFill>
@@ -11025,7 +11025,7 @@
               </a:defRPr>
             </a:pPr>
             <a:r>
-              <a:t>ROS 2 Jazzy · Gazebo Harmonic · M19 · 따라 하기형 AGV 실습</a:t>
+              <a:t>ROS 2 기반 AGV End-to-End 개발 커리큘럼 · M19 · Block E</a:t>
             </a:r>
           </a:p>
         </p:txBody>
@@ -11586,7 +11586,7 @@
               <a:spcAft>
                 <a:spcPts val="0"/>
               </a:spcAft>
-              <a:defRPr sz="1000" b="0">
+              <a:defRPr sz="900" b="0">
                 <a:solidFill>
                   <a:srgbClr val="5C6672"/>
                 </a:solidFill>
@@ -11594,7 +11594,7 @@
               </a:defRPr>
             </a:pPr>
             <a:r>
-              <a:t>ROS 2 Jazzy · Gazebo Harmonic · M19 · 따라 하기형 AGV 실습</a:t>
+              <a:t>ROS 2 기반 AGV End-to-End 개발 커리큘럼 · M19 · Block E</a:t>
             </a:r>
           </a:p>
         </p:txBody>
@@ -12060,7 +12060,7 @@
               <a:spcAft>
                 <a:spcPts val="0"/>
               </a:spcAft>
-              <a:defRPr sz="1000" b="0">
+              <a:defRPr sz="900" b="0">
                 <a:solidFill>
                   <a:srgbClr val="5C6672"/>
                 </a:solidFill>
@@ -12068,7 +12068,7 @@
               </a:defRPr>
             </a:pPr>
             <a:r>
-              <a:t>ROS 2 Jazzy · Gazebo Harmonic · M19 · 따라 하기형 AGV 실습</a:t>
+              <a:t>ROS 2 기반 AGV End-to-End 개발 커리큘럼 · M19 · Block E</a:t>
             </a:r>
           </a:p>
         </p:txBody>
@@ -12531,7 +12531,7 @@
               <a:spcAft>
                 <a:spcPts val="0"/>
               </a:spcAft>
-              <a:defRPr sz="1000" b="0">
+              <a:defRPr sz="900" b="0">
                 <a:solidFill>
                   <a:srgbClr val="5C6672"/>
                 </a:solidFill>
@@ -12539,7 +12539,7 @@
               </a:defRPr>
             </a:pPr>
             <a:r>
-              <a:t>ROS 2 Jazzy · Gazebo Harmonic · M19 · 따라 하기형 AGV 실습</a:t>
+              <a:t>ROS 2 기반 AGV End-to-End 개발 커리큘럼 · M19 · Block E</a:t>
             </a:r>
           </a:p>
         </p:txBody>
@@ -12961,7 +12961,7 @@
               <a:spcAft>
                 <a:spcPts val="0"/>
               </a:spcAft>
-              <a:defRPr sz="1000" b="0">
+              <a:defRPr sz="900" b="0">
                 <a:solidFill>
                   <a:srgbClr val="5C6672"/>
                 </a:solidFill>
@@ -12969,7 +12969,7 @@
               </a:defRPr>
             </a:pPr>
             <a:r>
-              <a:t>ROS 2 Jazzy · Gazebo Harmonic · M19 · 따라 하기형 AGV 실습</a:t>
+              <a:t>ROS 2 기반 AGV End-to-End 개발 커리큘럼 · M19 · Block E</a:t>
             </a:r>
           </a:p>
         </p:txBody>
@@ -13489,7 +13489,7 @@
               <a:spcAft>
                 <a:spcPts val="0"/>
               </a:spcAft>
-              <a:defRPr sz="1000" b="0">
+              <a:defRPr sz="900" b="0">
                 <a:solidFill>
                   <a:srgbClr val="5C6672"/>
                 </a:solidFill>
@@ -13497,7 +13497,7 @@
               </a:defRPr>
             </a:pPr>
             <a:r>
-              <a:t>ROS 2 Jazzy · Gazebo Harmonic · M19 · 따라 하기형 AGV 실습</a:t>
+              <a:t>ROS 2 기반 AGV End-to-End 개발 커리큘럼 · M19 · Block E</a:t>
             </a:r>
           </a:p>
         </p:txBody>
@@ -14282,7 +14282,7 @@
               <a:spcAft>
                 <a:spcPts val="0"/>
               </a:spcAft>
-              <a:defRPr sz="1000" b="0">
+              <a:defRPr sz="900" b="0">
                 <a:solidFill>
                   <a:srgbClr val="5C6672"/>
                 </a:solidFill>
@@ -14290,7 +14290,7 @@
               </a:defRPr>
             </a:pPr>
             <a:r>
-              <a:t>ROS 2 Jazzy · Gazebo Harmonic · M19 · 따라 하기형 AGV 실습</a:t>
+              <a:t>ROS 2 기반 AGV End-to-End 개발 커리큘럼 · M19 · Block E</a:t>
             </a:r>
           </a:p>
         </p:txBody>
@@ -14743,7 +14743,7 @@
               <a:spcAft>
                 <a:spcPts val="0"/>
               </a:spcAft>
-              <a:defRPr sz="1000" b="0">
+              <a:defRPr sz="900" b="0">
                 <a:solidFill>
                   <a:srgbClr val="5C6672"/>
                 </a:solidFill>
@@ -14751,7 +14751,7 @@
               </a:defRPr>
             </a:pPr>
             <a:r>
-              <a:t>ROS 2 Jazzy · Gazebo Harmonic · M19 · 따라 하기형 AGV 실습</a:t>
+              <a:t>ROS 2 기반 AGV End-to-End 개발 커리큘럼 · M19 · Block E</a:t>
             </a:r>
           </a:p>
         </p:txBody>
@@ -15536,7 +15536,7 @@
               <a:spcAft>
                 <a:spcPts val="0"/>
               </a:spcAft>
-              <a:defRPr sz="1000" b="0">
+              <a:defRPr sz="900" b="0">
                 <a:solidFill>
                   <a:srgbClr val="5C6672"/>
                 </a:solidFill>
@@ -15544,7 +15544,7 @@
               </a:defRPr>
             </a:pPr>
             <a:r>
-              <a:t>ROS 2 Jazzy · Gazebo Harmonic · M19 · 따라 하기형 AGV 실습</a:t>
+              <a:t>ROS 2 기반 AGV End-to-End 개발 커리큘럼 · M19 · Block E</a:t>
             </a:r>
           </a:p>
         </p:txBody>
@@ -15998,7 +15998,7 @@
               <a:spcAft>
                 <a:spcPts val="0"/>
               </a:spcAft>
-              <a:defRPr sz="1000" b="0">
+              <a:defRPr sz="900" b="0">
                 <a:solidFill>
                   <a:srgbClr val="5C6672"/>
                 </a:solidFill>
@@ -16006,7 +16006,7 @@
               </a:defRPr>
             </a:pPr>
             <a:r>
-              <a:t>ROS 2 Jazzy · Gazebo Harmonic · M19 · 따라 하기형 AGV 실습</a:t>
+              <a:t>ROS 2 기반 AGV End-to-End 개발 커리큘럼 · M19 · Block E</a:t>
             </a:r>
           </a:p>
         </p:txBody>
@@ -16526,7 +16526,7 @@
               <a:spcAft>
                 <a:spcPts val="0"/>
               </a:spcAft>
-              <a:defRPr sz="1000" b="0">
+              <a:defRPr sz="900" b="0">
                 <a:solidFill>
                   <a:srgbClr val="5C6672"/>
                 </a:solidFill>
@@ -16534,7 +16534,7 @@
               </a:defRPr>
             </a:pPr>
             <a:r>
-              <a:t>ROS 2 Jazzy · Gazebo Harmonic · M19 · 따라 하기형 AGV 실습</a:t>
+              <a:t>ROS 2 기반 AGV End-to-End 개발 커리큘럼 · M19 · Block E</a:t>
             </a:r>
           </a:p>
         </p:txBody>
@@ -17315,7 +17315,7 @@
               <a:spcAft>
                 <a:spcPts val="0"/>
               </a:spcAft>
-              <a:defRPr sz="1000" b="0">
+              <a:defRPr sz="900" b="0">
                 <a:solidFill>
                   <a:srgbClr val="5C6672"/>
                 </a:solidFill>
@@ -17323,7 +17323,7 @@
               </a:defRPr>
             </a:pPr>
             <a:r>
-              <a:t>ROS 2 Jazzy · Gazebo Harmonic · M19 · 따라 하기형 AGV 실습</a:t>
+              <a:t>ROS 2 기반 AGV End-to-End 개발 커리큘럼 · M19 · Block E</a:t>
             </a:r>
           </a:p>
         </p:txBody>
@@ -18104,7 +18104,7 @@
               <a:spcAft>
                 <a:spcPts val="0"/>
               </a:spcAft>
-              <a:defRPr sz="1000" b="0">
+              <a:defRPr sz="900" b="0">
                 <a:solidFill>
                   <a:srgbClr val="5C6672"/>
                 </a:solidFill>
@@ -18112,7 +18112,7 @@
               </a:defRPr>
             </a:pPr>
             <a:r>
-              <a:t>ROS 2 Jazzy · Gazebo Harmonic · M19 · 따라 하기형 AGV 실습</a:t>
+              <a:t>ROS 2 기반 AGV End-to-End 개발 커리큘럼 · M19 · Block E</a:t>
             </a:r>
           </a:p>
         </p:txBody>
@@ -18901,7 +18901,7 @@
               <a:spcAft>
                 <a:spcPts val="0"/>
               </a:spcAft>
-              <a:defRPr sz="1000" b="0">
+              <a:defRPr sz="900" b="0">
                 <a:solidFill>
                   <a:srgbClr val="5C6672"/>
                 </a:solidFill>
@@ -18909,7 +18909,7 @@
               </a:defRPr>
             </a:pPr>
             <a:r>
-              <a:t>ROS 2 Jazzy · Gazebo Harmonic · M19 · 따라 하기형 AGV 실습</a:t>
+              <a:t>ROS 2 기반 AGV End-to-End 개발 커리큘럼 · M19 · Block E</a:t>
             </a:r>
           </a:p>
         </p:txBody>
@@ -19690,7 +19690,7 @@
               <a:spcAft>
                 <a:spcPts val="0"/>
               </a:spcAft>
-              <a:defRPr sz="1000" b="0">
+              <a:defRPr sz="900" b="0">
                 <a:solidFill>
                   <a:srgbClr val="5C6672"/>
                 </a:solidFill>
@@ -19698,7 +19698,7 @@
               </a:defRPr>
             </a:pPr>
             <a:r>
-              <a:t>ROS 2 Jazzy · Gazebo Harmonic · M19 · 따라 하기형 AGV 실습</a:t>
+              <a:t>ROS 2 기반 AGV End-to-End 개발 커리큘럼 · M19 · Block E</a:t>
             </a:r>
           </a:p>
         </p:txBody>
@@ -20259,7 +20259,7 @@
               <a:spcAft>
                 <a:spcPts val="0"/>
               </a:spcAft>
-              <a:defRPr sz="1000" b="0">
+              <a:defRPr sz="900" b="0">
                 <a:solidFill>
                   <a:srgbClr val="5C6672"/>
                 </a:solidFill>
@@ -20267,7 +20267,7 @@
               </a:defRPr>
             </a:pPr>
             <a:r>
-              <a:t>ROS 2 Jazzy · Gazebo Harmonic · M19 · 따라 하기형 AGV 실습</a:t>
+              <a:t>ROS 2 기반 AGV End-to-End 개발 커리큘럼 · M19 · Block E</a:t>
             </a:r>
           </a:p>
         </p:txBody>
@@ -20727,7 +20727,7 @@
               <a:spcAft>
                 <a:spcPts val="0"/>
               </a:spcAft>
-              <a:defRPr sz="1000" b="0">
+              <a:defRPr sz="900" b="0">
                 <a:solidFill>
                   <a:srgbClr val="5C6672"/>
                 </a:solidFill>
@@ -20735,7 +20735,7 @@
               </a:defRPr>
             </a:pPr>
             <a:r>
-              <a:t>ROS 2 Jazzy · Gazebo Harmonic · M19 · 따라 하기형 AGV 실습</a:t>
+              <a:t>ROS 2 기반 AGV End-to-End 개발 커리큘럼 · M19 · Block E</a:t>
             </a:r>
           </a:p>
         </p:txBody>
@@ -21201,7 +21201,7 @@
               <a:spcAft>
                 <a:spcPts val="0"/>
               </a:spcAft>
-              <a:defRPr sz="1000" b="0">
+              <a:defRPr sz="900" b="0">
                 <a:solidFill>
                   <a:srgbClr val="5C6672"/>
                 </a:solidFill>
@@ -21209,7 +21209,7 @@
               </a:defRPr>
             </a:pPr>
             <a:r>
-              <a:t>ROS 2 Jazzy · Gazebo Harmonic · M19 · 따라 하기형 AGV 실습</a:t>
+              <a:t>ROS 2 기반 AGV End-to-End 개발 커리큘럼 · M19 · Block E</a:t>
             </a:r>
           </a:p>
         </p:txBody>
@@ -21620,7 +21620,7 @@
               <a:spcAft>
                 <a:spcPts val="0"/>
               </a:spcAft>
-              <a:defRPr sz="1000" b="0">
+              <a:defRPr sz="900" b="0">
                 <a:solidFill>
                   <a:srgbClr val="5C6672"/>
                 </a:solidFill>
@@ -21628,7 +21628,7 @@
               </a:defRPr>
             </a:pPr>
             <a:r>
-              <a:t>ROS 2 Jazzy · Gazebo Harmonic · M19 · 따라 하기형 AGV 실습</a:t>
+              <a:t>ROS 2 기반 AGV End-to-End 개발 커리큘럼 · M19 · Block E</a:t>
             </a:r>
           </a:p>
         </p:txBody>
@@ -22085,7 +22085,7 @@
               <a:spcAft>
                 <a:spcPts val="0"/>
               </a:spcAft>
-              <a:defRPr sz="1000" b="0">
+              <a:defRPr sz="900" b="0">
                 <a:solidFill>
                   <a:srgbClr val="5C6672"/>
                 </a:solidFill>
@@ -22093,7 +22093,7 @@
               </a:defRPr>
             </a:pPr>
             <a:r>
-              <a:t>ROS 2 Jazzy · Gazebo Harmonic · M19 · 따라 하기형 AGV 실습</a:t>
+              <a:t>ROS 2 기반 AGV End-to-End 개발 커리큘럼 · M19 · Block E</a:t>
             </a:r>
           </a:p>
         </p:txBody>
@@ -22556,7 +22556,7 @@
               <a:spcAft>
                 <a:spcPts val="0"/>
               </a:spcAft>
-              <a:defRPr sz="1000" b="0">
+              <a:defRPr sz="900" b="0">
                 <a:solidFill>
                   <a:srgbClr val="5C6672"/>
                 </a:solidFill>
@@ -22564,7 +22564,7 @@
               </a:defRPr>
             </a:pPr>
             <a:r>
-              <a:t>ROS 2 Jazzy · Gazebo Harmonic · M19 · 따라 하기형 AGV 실습</a:t>
+              <a:t>ROS 2 기반 AGV End-to-End 개발 커리큘럼 · M19 · Block E</a:t>
             </a:r>
           </a:p>
         </p:txBody>
@@ -23030,7 +23030,7 @@
               <a:spcAft>
                 <a:spcPts val="0"/>
               </a:spcAft>
-              <a:defRPr sz="1000" b="0">
+              <a:defRPr sz="900" b="0">
                 <a:solidFill>
                   <a:srgbClr val="5C6672"/>
                 </a:solidFill>
@@ -23038,7 +23038,7 @@
               </a:defRPr>
             </a:pPr>
             <a:r>
-              <a:t>ROS 2 Jazzy · Gazebo Harmonic · M19 · 따라 하기형 AGV 실습</a:t>
+              <a:t>ROS 2 기반 AGV End-to-End 개발 커리큘럼 · M19 · Block E</a:t>
             </a:r>
           </a:p>
         </p:txBody>
@@ -23501,7 +23501,7 @@
               <a:spcAft>
                 <a:spcPts val="0"/>
               </a:spcAft>
-              <a:defRPr sz="1000" b="0">
+              <a:defRPr sz="900" b="0">
                 <a:solidFill>
                   <a:srgbClr val="5C6672"/>
                 </a:solidFill>
@@ -23509,7 +23509,7 @@
               </a:defRPr>
             </a:pPr>
             <a:r>
-              <a:t>ROS 2 Jazzy · Gazebo Harmonic · M19 · 따라 하기형 AGV 실습</a:t>
+              <a:t>ROS 2 기반 AGV End-to-End 개발 커리큘럼 · M19 · Block E</a:t>
             </a:r>
           </a:p>
         </p:txBody>
@@ -23935,7 +23935,7 @@
               <a:spcAft>
                 <a:spcPts val="0"/>
               </a:spcAft>
-              <a:defRPr sz="1000" b="0">
+              <a:defRPr sz="900" b="0">
                 <a:solidFill>
                   <a:srgbClr val="5C6672"/>
                 </a:solidFill>
@@ -23943,7 +23943,7 @@
               </a:defRPr>
             </a:pPr>
             <a:r>
-              <a:t>ROS 2 Jazzy · Gazebo Harmonic · M19 · 따라 하기형 AGV 실습</a:t>
+              <a:t>ROS 2 기반 AGV End-to-End 개발 커리큘럼 · M19 · Block E</a:t>
             </a:r>
           </a:p>
         </p:txBody>
@@ -24463,7 +24463,7 @@
               <a:spcAft>
                 <a:spcPts val="0"/>
               </a:spcAft>
-              <a:defRPr sz="1000" b="0">
+              <a:defRPr sz="900" b="0">
                 <a:solidFill>
                   <a:srgbClr val="5C6672"/>
                 </a:solidFill>
@@ -24471,7 +24471,7 @@
               </a:defRPr>
             </a:pPr>
             <a:r>
-              <a:t>ROS 2 Jazzy · Gazebo Harmonic · M19 · 따라 하기형 AGV 실습</a:t>
+              <a:t>ROS 2 기반 AGV End-to-End 개발 커리큘럼 · M19 · Block E</a:t>
             </a:r>
           </a:p>
         </p:txBody>
@@ -25252,7 +25252,7 @@
               <a:spcAft>
                 <a:spcPts val="0"/>
               </a:spcAft>
-              <a:defRPr sz="1000" b="0">
+              <a:defRPr sz="900" b="0">
                 <a:solidFill>
                   <a:srgbClr val="5C6672"/>
                 </a:solidFill>
@@ -25260,7 +25260,7 @@
               </a:defRPr>
             </a:pPr>
             <a:r>
-              <a:t>ROS 2 Jazzy · Gazebo Harmonic · M19 · 따라 하기형 AGV 실습</a:t>
+              <a:t>ROS 2 기반 AGV End-to-End 개발 커리큘럼 · M19 · Block E</a:t>
             </a:r>
           </a:p>
         </p:txBody>
@@ -25821,7 +25821,7 @@
               <a:spcAft>
                 <a:spcPts val="0"/>
               </a:spcAft>
-              <a:defRPr sz="1000" b="0">
+              <a:defRPr sz="900" b="0">
                 <a:solidFill>
                   <a:srgbClr val="5C6672"/>
                 </a:solidFill>
@@ -25829,7 +25829,7 @@
               </a:defRPr>
             </a:pPr>
             <a:r>
-              <a:t>ROS 2 Jazzy · Gazebo Harmonic · M19 · 따라 하기형 AGV 실습</a:t>
+              <a:t>ROS 2 기반 AGV End-to-End 개발 커리큘럼 · M19 · Block E</a:t>
             </a:r>
           </a:p>
         </p:txBody>
@@ -26295,7 +26295,7 @@
               <a:spcAft>
                 <a:spcPts val="0"/>
               </a:spcAft>
-              <a:defRPr sz="1000" b="0">
+              <a:defRPr sz="900" b="0">
                 <a:solidFill>
                   <a:srgbClr val="5C6672"/>
                 </a:solidFill>
@@ -26303,7 +26303,7 @@
               </a:defRPr>
             </a:pPr>
             <a:r>
-              <a:t>ROS 2 Jazzy · Gazebo Harmonic · M19 · 따라 하기형 AGV 실습</a:t>
+              <a:t>ROS 2 기반 AGV End-to-End 개발 커리큘럼 · M19 · Block E</a:t>
             </a:r>
           </a:p>
         </p:txBody>
@@ -26725,7 +26725,7 @@
               <a:spcAft>
                 <a:spcPts val="0"/>
               </a:spcAft>
-              <a:defRPr sz="1000" b="0">
+              <a:defRPr sz="900" b="0">
                 <a:solidFill>
                   <a:srgbClr val="5C6672"/>
                 </a:solidFill>
@@ -26733,7 +26733,7 @@
               </a:defRPr>
             </a:pPr>
             <a:r>
-              <a:t>ROS 2 Jazzy · Gazebo Harmonic · M19 · 따라 하기형 AGV 실습</a:t>
+              <a:t>ROS 2 기반 AGV End-to-End 개발 커리큘럼 · M19 · Block E</a:t>
             </a:r>
           </a:p>
         </p:txBody>
@@ -27058,7 +27058,7 @@
               <a:spcAft>
                 <a:spcPts val="0"/>
               </a:spcAft>
-              <a:defRPr sz="1000" b="0">
+              <a:defRPr sz="900" b="0">
                 <a:solidFill>
                   <a:srgbClr val="5C6672"/>
                 </a:solidFill>
@@ -27066,7 +27066,7 @@
               </a:defRPr>
             </a:pPr>
             <a:r>
-              <a:t>ROS 2 Jazzy · Gazebo Harmonic · M19 · 따라 하기형 AGV 실습</a:t>
+              <a:t>ROS 2 기반 AGV End-to-End 개발 커리큘럼 · M19 · Block E</a:t>
             </a:r>
           </a:p>
         </p:txBody>
@@ -27516,7 +27516,7 @@
               <a:spcAft>
                 <a:spcPts val="0"/>
               </a:spcAft>
-              <a:defRPr sz="1000" b="0">
+              <a:defRPr sz="900" b="0">
                 <a:solidFill>
                   <a:srgbClr val="5C6672"/>
                 </a:solidFill>
@@ -27524,7 +27524,7 @@
               </a:defRPr>
             </a:pPr>
             <a:r>
-              <a:t>ROS 2 Jazzy · Gazebo Harmonic · M19 · 따라 하기형 AGV 실습</a:t>
+              <a:t>ROS 2 기반 AGV End-to-End 개발 커리큘럼 · M19 · Block E</a:t>
             </a:r>
           </a:p>
         </p:txBody>
@@ -27966,7 +27966,7 @@
               <a:spcAft>
                 <a:spcPts val="0"/>
               </a:spcAft>
-              <a:defRPr sz="1000" b="0">
+              <a:defRPr sz="900" b="0">
                 <a:solidFill>
                   <a:srgbClr val="5C6672"/>
                 </a:solidFill>
@@ -27974,7 +27974,7 @@
               </a:defRPr>
             </a:pPr>
             <a:r>
-              <a:t>ROS 2 Jazzy · Gazebo Harmonic · M19 · 따라 하기형 AGV 실습</a:t>
+              <a:t>ROS 2 기반 AGV End-to-End 개발 커리큘럼 · M19 · Block E</a:t>
             </a:r>
           </a:p>
         </p:txBody>
@@ -28338,7 +28338,7 @@
               <a:spcAft>
                 <a:spcPts val="0"/>
               </a:spcAft>
-              <a:defRPr sz="1000" b="0">
+              <a:defRPr sz="900" b="0">
                 <a:solidFill>
                   <a:srgbClr val="5C6672"/>
                 </a:solidFill>
@@ -28346,7 +28346,7 @@
               </a:defRPr>
             </a:pPr>
             <a:r>
-              <a:t>ROS 2 Jazzy · Gazebo Harmonic · M19 · 따라 하기형 AGV 실습</a:t>
+              <a:t>ROS 2 기반 AGV End-to-End 개발 커리큘럼 · M19 · Block E</a:t>
             </a:r>
           </a:p>
         </p:txBody>
@@ -28575,7 +28575,7 @@
               <a:spcAft>
                 <a:spcPts val="0"/>
               </a:spcAft>
-              <a:defRPr sz="1000" b="0">
+              <a:defRPr sz="900" b="0">
                 <a:solidFill>
                   <a:srgbClr val="5C6672"/>
                 </a:solidFill>
@@ -28583,7 +28583,7 @@
               </a:defRPr>
             </a:pPr>
             <a:r>
-              <a:t>ROS 2 Jazzy · Gazebo Harmonic · M19 · 따라 하기형 AGV 실습</a:t>
+              <a:t>ROS 2 기반 AGV End-to-End 개발 커리큘럼 · M19 · Block E</a:t>
             </a:r>
           </a:p>
         </p:txBody>
@@ -28982,7 +28982,7 @@
               <a:spcAft>
                 <a:spcPts val="0"/>
               </a:spcAft>
-              <a:defRPr sz="1000" b="0">
+              <a:defRPr sz="900" b="0">
                 <a:solidFill>
                   <a:srgbClr val="5C6672"/>
                 </a:solidFill>
@@ -28990,7 +28990,7 @@
               </a:defRPr>
             </a:pPr>
             <a:r>
-              <a:t>ROS 2 Jazzy · Gazebo Harmonic · M19 · 따라 하기형 AGV 실습</a:t>
+              <a:t>ROS 2 기반 AGV End-to-End 개발 커리큘럼 · M19 · Block E</a:t>
             </a:r>
           </a:p>
         </p:txBody>
@@ -29507,7 +29507,7 @@
               <a:spcAft>
                 <a:spcPts val="0"/>
               </a:spcAft>
-              <a:defRPr sz="1000" b="0">
+              <a:defRPr sz="900" b="0">
                 <a:solidFill>
                   <a:srgbClr val="5C6672"/>
                 </a:solidFill>
@@ -29515,7 +29515,7 @@
               </a:defRPr>
             </a:pPr>
             <a:r>
-              <a:t>ROS 2 Jazzy · Gazebo Harmonic · M19 · 따라 하기형 AGV 실습</a:t>
+              <a:t>ROS 2 기반 AGV End-to-End 개발 커리큘럼 · M19 · Block E</a:t>
             </a:r>
           </a:p>
         </p:txBody>
@@ -29891,7 +29891,7 @@
               <a:spcAft>
                 <a:spcPts val="0"/>
               </a:spcAft>
-              <a:defRPr sz="1000" b="0">
+              <a:defRPr sz="900" b="0">
                 <a:solidFill>
                   <a:srgbClr val="5C6672"/>
                 </a:solidFill>
@@ -29899,7 +29899,7 @@
               </a:defRPr>
             </a:pPr>
             <a:r>
-              <a:t>ROS 2 Jazzy · Gazebo Harmonic · M19 · 따라 하기형 AGV 실습</a:t>
+              <a:t>ROS 2 기반 AGV End-to-End 개발 커리큘럼 · M19 · Block E</a:t>
             </a:r>
           </a:p>
         </p:txBody>
@@ -30220,7 +30220,7 @@
               <a:spcAft>
                 <a:spcPts val="0"/>
               </a:spcAft>
-              <a:defRPr sz="1000" b="0">
+              <a:defRPr sz="900" b="0">
                 <a:solidFill>
                   <a:srgbClr val="5C6672"/>
                 </a:solidFill>
@@ -30228,7 +30228,7 @@
               </a:defRPr>
             </a:pPr>
             <a:r>
-              <a:t>ROS 2 Jazzy · Gazebo Harmonic · M19 · 따라 하기형 AGV 실습</a:t>
+              <a:t>ROS 2 기반 AGV End-to-End 개발 커리큘럼 · M19 · Block E</a:t>
             </a:r>
           </a:p>
         </p:txBody>
@@ -30639,7 +30639,7 @@
               <a:spcAft>
                 <a:spcPts val="0"/>
               </a:spcAft>
-              <a:defRPr sz="1000" b="0">
+              <a:defRPr sz="900" b="0">
                 <a:solidFill>
                   <a:srgbClr val="5C6672"/>
                 </a:solidFill>
@@ -30647,7 +30647,7 @@
               </a:defRPr>
             </a:pPr>
             <a:r>
-              <a:t>ROS 2 Jazzy · Gazebo Harmonic · M19 · 따라 하기형 AGV 실습</a:t>
+              <a:t>ROS 2 기반 AGV End-to-End 개발 커리큘럼 · M19 · Block E</a:t>
             </a:r>
           </a:p>
         </p:txBody>
@@ -31170,7 +31170,7 @@
               <a:spcAft>
                 <a:spcPts val="0"/>
               </a:spcAft>
-              <a:defRPr sz="1000" b="0">
+              <a:defRPr sz="900" b="0">
                 <a:solidFill>
                   <a:srgbClr val="5C6672"/>
                 </a:solidFill>
@@ -31178,7 +31178,7 @@
               </a:defRPr>
             </a:pPr>
             <a:r>
-              <a:t>ROS 2 Jazzy · Gazebo Harmonic · M19 · 따라 하기형 AGV 실습</a:t>
+              <a:t>ROS 2 기반 AGV End-to-End 개발 커리큘럼 · M19 · Block E</a:t>
             </a:r>
           </a:p>
         </p:txBody>
@@ -31810,7 +31810,7 @@
               <a:spcAft>
                 <a:spcPts val="0"/>
               </a:spcAft>
-              <a:defRPr sz="1000" b="0">
+              <a:defRPr sz="900" b="0">
                 <a:solidFill>
                   <a:srgbClr val="5C6672"/>
                 </a:solidFill>
@@ -31818,7 +31818,7 @@
               </a:defRPr>
             </a:pPr>
             <a:r>
-              <a:t>ROS 2 Jazzy · Gazebo Harmonic · M19 · 따라 하기형 AGV 실습</a:t>
+              <a:t>ROS 2 기반 AGV End-to-End 개발 커리큘럼 · M19 · Block E</a:t>
             </a:r>
           </a:p>
         </p:txBody>
@@ -32047,7 +32047,7 @@
               <a:spcAft>
                 <a:spcPts val="0"/>
               </a:spcAft>
-              <a:defRPr sz="1000" b="0">
+              <a:defRPr sz="900" b="0">
                 <a:solidFill>
                   <a:srgbClr val="5C6672"/>
                 </a:solidFill>
@@ -32055,7 +32055,7 @@
               </a:defRPr>
             </a:pPr>
             <a:r>
-              <a:t>ROS 2 Jazzy · Gazebo Harmonic · M19 · 따라 하기형 AGV 실습</a:t>
+              <a:t>ROS 2 기반 AGV End-to-End 개발 커리큘럼 · M19 · Block E</a:t>
             </a:r>
           </a:p>
         </p:txBody>
@@ -32597,7 +32597,7 @@
               <a:spcAft>
                 <a:spcPts val="0"/>
               </a:spcAft>
-              <a:defRPr sz="1000" b="0">
+              <a:defRPr sz="900" b="0">
                 <a:solidFill>
                   <a:srgbClr val="5C6672"/>
                 </a:solidFill>
@@ -32605,7 +32605,7 @@
               </a:defRPr>
             </a:pPr>
             <a:r>
-              <a:t>ROS 2 Jazzy · Gazebo Harmonic · M19 · 따라 하기형 AGV 실습</a:t>
+              <a:t>ROS 2 기반 AGV End-to-End 개발 커리큘럼 · M19 · Block E</a:t>
             </a:r>
           </a:p>
         </p:txBody>
@@ -32884,7 +32884,7 @@
               <a:spcAft>
                 <a:spcPts val="0"/>
               </a:spcAft>
-              <a:defRPr sz="1000" b="0">
+              <a:defRPr sz="900" b="0">
                 <a:solidFill>
                   <a:srgbClr val="5C6672"/>
                 </a:solidFill>
@@ -32892,7 +32892,7 @@
               </a:defRPr>
             </a:pPr>
             <a:r>
-              <a:t>ROS 2 Jazzy · Gazebo Harmonic · M19 · 따라 하기형 AGV 실습</a:t>
+              <a:t>ROS 2 기반 AGV End-to-End 개발 커리큘럼 · M19 · Block E</a:t>
             </a:r>
           </a:p>
         </p:txBody>

--- a/blocks/E_autonomy_logic/M19_mission_fsm/M19_Mission_State_Machine.pptx
+++ b/blocks/E_autonomy_logic/M19_mission_fsm/M19_Mission_State_Machine.pptx
@@ -54,6 +54,7 @@
     <p:sldId id="302" r:id="rId54"/>
     <p:sldId id="303" r:id="rId55"/>
     <p:sldId id="304" r:id="rId56"/>
+    <p:sldId id="305" r:id="rId57"/>
   </p:sldIdLst>
   <p:sldSz cx="12191999" cy="6858000" type="screen4x3"/>
   <p:notesSz cx="6858000" cy="9144000"/>
@@ -3940,7 +3941,7 @@
           </a:p>
           <a:p>
             <a:r>
-              <a:t>[확인] ① 명령/설정  ② 정상 출력 또는 화면  ③ 다음 검증 명령으로 재확인</a:t>
+              <a:t>[확인] 명령·설정과 화면의 topic·frame·결과 이름을 대조합니다.</a:t>
             </a:r>
           </a:p>
           <a:p>
@@ -4020,27 +4021,17 @@
           <a:lstStyle/>
           <a:p>
             <a:r>
-              <a:t>[설명] 검증 명령은 GUI 결과와 별도로 실행해 재현 가능한 완료 기준을 만든다.</a:t>
-            </a:r>
-          </a:p>
-          <a:p>
-            <a:r>
-              <a:t>[실행] ros2 topic info /mission_state</a:t>
-            </a:r>
-          </a:p>
-          <a:p>
-            <a:r>
-              <a:t>ros2 topic info /cmd_vel_raw</a:t>
-            </a:r>
-          </a:p>
-          <a:p>
-            <a:r>
-              <a:t>ros2 param get /mission_manager stop_distance</a:t>
-            </a:r>
-          </a:p>
-          <a:p>
-            <a:r>
-              <a:t>[확인] /mission_state 로그와 /cmd_vel_raw가 detection·obstacle input에 따라 바뀌는 구조를 확인한다.</a:t>
+              <a:t>[설명] 실제 Ubuntu/ROS 2 환경에서 생성한 검증 화면이다.</a:t>
+            </a:r>
+          </a:p>
+          <a:p>
+            <a:r>
+              <a:t>[실행] 슬라이드의 명령 또는 파일 작성 단계를 진행한다.</a:t>
+            </a:r>
+          </a:p>
+          <a:p>
+            <a:r>
+              <a:t>[확인] ① 명령/설정  ② 정상 출력 또는 화면  ③ 다음 검증 명령으로 재확인</a:t>
             </a:r>
           </a:p>
           <a:p>
@@ -4120,17 +4111,27 @@
           <a:lstStyle/>
           <a:p>
             <a:r>
-              <a:t>[설명] 오류를 대신 해결하지 말고 증상부터 우선 확인 순서대로 교육생이 실행하게 한다.</a:t>
-            </a:r>
-          </a:p>
-          <a:p>
-            <a:r>
-              <a:t>[실행] 슬라이드의 명령 또는 파일 작성 단계를 진행한다.</a:t>
-            </a:r>
-          </a:p>
-          <a:p>
-            <a:r>
-              <a:t>[확인] 수정 뒤 첫 검증 명령을 다시 실행한다.</a:t>
+              <a:t>[설명] 검증 명령은 GUI 결과와 별도로 실행해 재현 가능한 완료 기준을 만든다.</a:t>
+            </a:r>
+          </a:p>
+          <a:p>
+            <a:r>
+              <a:t>[실행] ros2 topic info /mission_state</a:t>
+            </a:r>
+          </a:p>
+          <a:p>
+            <a:r>
+              <a:t>ros2 topic info /cmd_vel_raw</a:t>
+            </a:r>
+          </a:p>
+          <a:p>
+            <a:r>
+              <a:t>ros2 param get /mission_manager stop_distance</a:t>
+            </a:r>
+          </a:p>
+          <a:p>
+            <a:r>
+              <a:t>[확인] /mission_state 로그와 /cmd_vel_raw가 detection·obstacle input에 따라 바뀌는 구조를 확인한다.</a:t>
             </a:r>
           </a:p>
           <a:p>
@@ -4140,7 +4141,7 @@
           </a:p>
           <a:p>
             <a:r>
-              <a:t>[오류] 슬라이드의 두 대표 오류를 먼저 사용한다.</a:t>
+              <a:t>[오류] 오류가 나면 현재 폴더, source, 파일 경로를 먼저 확인한다.</a:t>
             </a:r>
           </a:p>
         </p:txBody>
@@ -4210,37 +4211,17 @@
           <a:lstStyle/>
           <a:p>
             <a:r>
-              <a:t>[설명] Complete는 정답 복사본이 아니라 막혔을 때 비교·복구하는 안전망이다.</a:t>
-            </a:r>
-          </a:p>
-          <a:p>
-            <a:r>
-              <a:t>[실행] cd ~/ros2_curri</a:t>
-            </a:r>
-          </a:p>
-          <a:p>
-            <a:r>
-              <a:t>diff -ru my_agv_ws/src blocks/E_autonomy_logic/M19_mission_fsm/complete/agv_ws/src || true</a:t>
-            </a:r>
-          </a:p>
-          <a:p>
-            <a:r>
-              <a:t>cp -a my_agv_ws/src my_agv_ws/src_before_M19</a:t>
-            </a:r>
-          </a:p>
-          <a:p>
-            <a:r>
-              <a:t>cp -a blocks/E_autonomy_logic/M19_mission_fsm/complete/agv_ws/src/. my_agv_ws/src/</a:t>
-            </a:r>
-          </a:p>
-          <a:p>
-            <a:r>
-              <a:t>cd my_agv_ws &amp;&amp; colcon build --symlink-install &amp;&amp; source install/setup.bash</a:t>
-            </a:r>
-          </a:p>
-          <a:p>
-            <a:r>
-              <a:t>[확인] diff에서 내 파일과 Complete의 차이를 설명할 수 있다.</a:t>
+              <a:t>[설명] 오류를 대신 해결하지 말고 증상부터 우선 확인 순서대로 교육생이 실행하게 한다.</a:t>
+            </a:r>
+          </a:p>
+          <a:p>
+            <a:r>
+              <a:t>[실행] 슬라이드의 명령 또는 파일 작성 단계를 진행한다.</a:t>
+            </a:r>
+          </a:p>
+          <a:p>
+            <a:r>
+              <a:t>[확인] 수정 뒤 첫 검증 명령을 다시 실행한다.</a:t>
             </a:r>
           </a:p>
           <a:p>
@@ -4250,7 +4231,7 @@
           </a:p>
           <a:p>
             <a:r>
-              <a:t>[오류] 오류가 나면 현재 폴더, source, 파일 경로를 먼저 확인한다.</a:t>
+              <a:t>[오류] 슬라이드의 두 대표 오류를 먼저 사용한다.</a:t>
             </a:r>
           </a:p>
         </p:txBody>
@@ -4320,17 +4301,37 @@
           <a:lstStyle/>
           <a:p>
             <a:r>
-              <a:t>[설명] 교육생이 직접 한 값만 바꿔 원인과 결과를 연결하게 한다.</a:t>
-            </a:r>
-          </a:p>
-          <a:p>
-            <a:r>
-              <a:t>[실행] 슬라이드의 명령 또는 파일 작성 단계를 진행한다.</a:t>
-            </a:r>
-          </a:p>
-          <a:p>
-            <a:r>
-              <a:t>[확인] 원래 값과 변경 값을 모두 기록한다.</a:t>
+              <a:t>[설명] Complete는 정답 복사본이 아니라 막혔을 때 비교·복구하는 안전망이다.</a:t>
+            </a:r>
+          </a:p>
+          <a:p>
+            <a:r>
+              <a:t>[실행] cd ~/ros2_curri</a:t>
+            </a:r>
+          </a:p>
+          <a:p>
+            <a:r>
+              <a:t>diff -ru my_agv_ws/src blocks/E_autonomy_logic/M19_mission_fsm/complete/agv_ws/src || true</a:t>
+            </a:r>
+          </a:p>
+          <a:p>
+            <a:r>
+              <a:t>cp -a my_agv_ws/src my_agv_ws/src_before_M19</a:t>
+            </a:r>
+          </a:p>
+          <a:p>
+            <a:r>
+              <a:t>cp -a blocks/E_autonomy_logic/M19_mission_fsm/complete/agv_ws/src/. my_agv_ws/src/</a:t>
+            </a:r>
+          </a:p>
+          <a:p>
+            <a:r>
+              <a:t>cd my_agv_ws &amp;&amp; colcon build --symlink-install &amp;&amp; source install/setup.bash</a:t>
+            </a:r>
+          </a:p>
+          <a:p>
+            <a:r>
+              <a:t>[확인] diff에서 내 파일과 Complete의 차이를 설명할 수 있다.</a:t>
             </a:r>
           </a:p>
           <a:p>
@@ -4410,7 +4411,7 @@
           <a:lstStyle/>
           <a:p>
             <a:r>
-              <a:t>[설명] 교육생이 자신의 workspace·캡처·로그를 저장했는지 확인하고 다음 모듈의 시작 상태를 읽는다.</a:t>
+              <a:t>[설명] 교육생이 직접 한 값만 바꿔 원인과 결과를 연결하게 한다.</a:t>
             </a:r>
           </a:p>
           <a:p>
@@ -4420,7 +4421,7 @@
           </a:p>
           <a:p>
             <a:r>
-              <a:t>[확인] M20 PID 시작 조건을 말할 수 있다.</a:t>
+              <a:t>[확인] 원래 값과 변경 값을 모두 기록한다.</a:t>
             </a:r>
           </a:p>
           <a:p>
@@ -4500,7 +4501,7 @@
           <a:lstStyle/>
           <a:p>
             <a:r>
-              <a:t>[설명] 공식 문서는 버전 차이와 확장 학습을 확인할 때 사용한다.</a:t>
+              <a:t>[설명] 교육생이 자신의 workspace·캡처·로그를 저장했는지 확인하고 다음 모듈의 시작 상태를 읽는다.</a:t>
             </a:r>
           </a:p>
           <a:p>
@@ -4510,7 +4511,7 @@
           </a:p>
           <a:p>
             <a:r>
-              <a:t>[확인] 학습자는 본문만으로 현재 모듈을 완료한 상태여야 한다.</a:t>
+              <a:t>[확인] M20 PID 시작 조건을 말할 수 있다.</a:t>
             </a:r>
           </a:p>
           <a:p>
@@ -4601,6 +4602,96 @@
           <a:p>
             <a:r>
               <a:t>[확인] /mission_state 로그와 /cmd_vel_raw가 detection·obstacle input에 따라 바뀌는 구조를 확인한다.</a:t>
+            </a:r>
+          </a:p>
+          <a:p>
+            <a:r>
+              <a:t>[멈춤] 교육생이 현재 체크포인트를 통과할 때까지 기다린다.</a:t>
+            </a:r>
+          </a:p>
+          <a:p>
+            <a:r>
+              <a:t>[오류] 오류가 나면 현재 폴더, source, 파일 경로를 먼저 확인한다.</a:t>
+            </a:r>
+          </a:p>
+        </p:txBody>
+      </p:sp>
+      <p:sp>
+        <p:nvSpPr>
+          <p:cNvPr id="4" name="Slide Number Placeholder 3"/>
+          <p:cNvSpPr>
+            <a:spLocks noGrp="1"/>
+          </p:cNvSpPr>
+          <p:nvPr>
+            <p:ph type="sldNum" idx="5" sz="quarter"/>
+          </p:nvPr>
+        </p:nvSpPr>
+        <p:spPr/>
+      </p:sp>
+    </p:spTree>
+  </p:cSld>
+  <p:clrMapOvr>
+    <a:masterClrMapping/>
+  </p:clrMapOvr>
+</p:notes>
+</file>
+
+<file path=ppt/notesSlides/notesSlide50.xml><?xml version="1.0" encoding="utf-8"?>
+<p:notes xmlns:a="http://schemas.openxmlformats.org/drawingml/2006/main" xmlns:p="http://schemas.openxmlformats.org/presentationml/2006/main" xmlns:r="http://schemas.openxmlformats.org/officeDocument/2006/relationships">
+  <p:cSld>
+    <p:spTree>
+      <p:nvGrpSpPr>
+        <p:cNvPr id="1" name=""/>
+        <p:cNvGrpSpPr/>
+        <p:nvPr/>
+      </p:nvGrpSpPr>
+      <p:grpSpPr>
+        <a:xfrm>
+          <a:off x="0" y="0"/>
+          <a:ext cx="0" cy="0"/>
+          <a:chOff x="0" y="0"/>
+          <a:chExt cx="0" cy="0"/>
+        </a:xfrm>
+      </p:grpSpPr>
+      <p:sp>
+        <p:nvSpPr>
+          <p:cNvPr id="2" name="Slide Image Placeholder 1"/>
+          <p:cNvSpPr>
+            <a:spLocks noGrp="1"/>
+          </p:cNvSpPr>
+          <p:nvPr>
+            <p:ph type="sldImg" idx="2"/>
+          </p:nvPr>
+        </p:nvSpPr>
+        <p:spPr/>
+      </p:sp>
+      <p:sp>
+        <p:nvSpPr>
+          <p:cNvPr id="3" name="Notes Placeholder 2"/>
+          <p:cNvSpPr>
+            <a:spLocks noGrp="1"/>
+          </p:cNvSpPr>
+          <p:nvPr>
+            <p:ph type="body" idx="3" sz="quarter"/>
+          </p:nvPr>
+        </p:nvSpPr>
+        <p:spPr/>
+        <p:txBody>
+          <a:bodyPr/>
+          <a:lstStyle/>
+          <a:p>
+            <a:r>
+              <a:t>[설명] 공식 문서는 버전 차이와 확장 학습을 확인할 때 사용한다.</a:t>
+            </a:r>
+          </a:p>
+          <a:p>
+            <a:r>
+              <a:t>[실행] 슬라이드의 명령 또는 파일 작성 단계를 진행한다.</a:t>
+            </a:r>
+          </a:p>
+          <a:p>
+            <a:r>
+              <a:t>[확인] 학습자는 본문만으로 현재 모듈을 완료한 상태여야 한다.</a:t>
             </a:r>
           </a:p>
           <a:p>
@@ -9476,7 +9567,7 @@
           </a:fontRef>
         </p:style>
         <p:txBody>
-          <a:bodyPr rtlCol="0" anchor="ctr" wrap="square" lIns="73152" rIns="73152" tIns="36576" bIns="36576"/>
+          <a:bodyPr rtlCol="0" anchor="ctr" wrap="square" lIns="109728" rIns="109728" tIns="73152" bIns="73152"/>
           <a:lstStyle/>
           <a:p>
             <a:pPr algn="l">
@@ -9493,7 +9584,19 @@
             <a:r>
               <a:t>cd ~/ros2_curri/my_agv_ws/src</a:t>
             </a:r>
-            <a:br/>
+          </a:p>
+          <a:p>
+            <a:pPr algn="l">
+              <a:spcAft>
+                <a:spcPts val="0"/>
+              </a:spcAft>
+              <a:defRPr sz="1500" b="0">
+                <a:solidFill>
+                  <a:srgbClr val="FFFFFF"/>
+                </a:solidFill>
+                <a:latin typeface="DejaVu Sans Mono"/>
+              </a:defRPr>
+            </a:pPr>
             <a:r>
               <a:t>ros2 pkg create --build-type ament_python --dependencies rclpy std_msgs geometry_msgs agv_mission</a:t>
             </a:r>
@@ -10004,7 +10107,7 @@
           </a:fontRef>
         </p:style>
         <p:txBody>
-          <a:bodyPr rtlCol="0" anchor="ctr" wrap="square" lIns="73152" rIns="73152" tIns="36576" bIns="36576"/>
+          <a:bodyPr rtlCol="0" anchor="ctr" wrap="square" lIns="109728" rIns="109728" tIns="73152" bIns="73152"/>
           <a:lstStyle/>
           <a:p>
             <a:pPr algn="l">
@@ -10021,7 +10124,19 @@
             <a:r>
               <a:t>mkdir -p ~/ros2_curri/my_agv_ws/src/agv_mission</a:t>
             </a:r>
-            <a:br/>
+          </a:p>
+          <a:p>
+            <a:pPr algn="l">
+              <a:spcAft>
+                <a:spcPts val="0"/>
+              </a:spcAft>
+              <a:defRPr sz="1600" b="0">
+                <a:solidFill>
+                  <a:srgbClr val="FFFFFF"/>
+                </a:solidFill>
+                <a:latin typeface="DejaVu Sans Mono"/>
+              </a:defRPr>
+            </a:pPr>
             <a:r>
               <a:t>nano ~/ros2_curri/my_agv_ws/src/agv_mission/package.xml</a:t>
             </a:r>
@@ -11835,7 +11950,7 @@
           </a:fontRef>
         </p:style>
         <p:txBody>
-          <a:bodyPr rtlCol="0" anchor="ctr" wrap="square" lIns="164592" rIns="164592" tIns="109728" bIns="36576"/>
+          <a:bodyPr rtlCol="0" anchor="ctr" wrap="square" lIns="164592" rIns="164592" tIns="109728" bIns="73152"/>
           <a:lstStyle/>
           <a:p>
             <a:pPr algn="l">
@@ -11852,47 +11967,179 @@
             <a:r>
               <a:t>&lt;?xml version="1.0" ?&gt;</a:t>
             </a:r>
-            <a:br/>
+          </a:p>
+          <a:p>
+            <a:pPr algn="l">
+              <a:spcAft>
+                <a:spcPts val="0"/>
+              </a:spcAft>
+              <a:defRPr sz="1400" b="0">
+                <a:solidFill>
+                  <a:srgbClr val="FFFFFF"/>
+                </a:solidFill>
+                <a:latin typeface="DejaVu Sans Mono"/>
+              </a:defRPr>
+            </a:pPr>
             <a:r>
               <a:t>&lt;package format="3"&gt;</a:t>
             </a:r>
-            <a:br/>
+          </a:p>
+          <a:p>
+            <a:pPr algn="l">
+              <a:spcAft>
+                <a:spcPts val="0"/>
+              </a:spcAft>
+              <a:defRPr sz="1400" b="0">
+                <a:solidFill>
+                  <a:srgbClr val="FFFFFF"/>
+                </a:solidFill>
+                <a:latin typeface="DejaVu Sans Mono"/>
+              </a:defRPr>
+            </a:pPr>
             <a:r>
               <a:t>  &lt;name&gt;agv_mission&lt;/name&gt;</a:t>
             </a:r>
-            <a:br/>
+          </a:p>
+          <a:p>
+            <a:pPr algn="l">
+              <a:spcAft>
+                <a:spcPts val="0"/>
+              </a:spcAft>
+              <a:defRPr sz="1400" b="0">
+                <a:solidFill>
+                  <a:srgbClr val="FFFFFF"/>
+                </a:solidFill>
+                <a:latin typeface="DejaVu Sans Mono"/>
+              </a:defRPr>
+            </a:pPr>
             <a:r>
               <a:t>  &lt;version&gt;0.1.0&lt;/version&gt;</a:t>
             </a:r>
-            <a:br/>
+          </a:p>
+          <a:p>
+            <a:pPr algn="l">
+              <a:spcAft>
+                <a:spcPts val="0"/>
+              </a:spcAft>
+              <a:defRPr sz="1400" b="0">
+                <a:solidFill>
+                  <a:srgbClr val="FFFFFF"/>
+                </a:solidFill>
+                <a:latin typeface="DejaVu Sans Mono"/>
+              </a:defRPr>
+            </a:pPr>
             <a:r>
               <a:t>  </a:t>
             </a:r>
-            <a:br/>
+          </a:p>
+          <a:p>
+            <a:pPr algn="l">
+              <a:spcAft>
+                <a:spcPts val="0"/>
+              </a:spcAft>
+              <a:defRPr sz="1400" b="0">
+                <a:solidFill>
+                  <a:srgbClr val="FFFFFF"/>
+                </a:solidFill>
+                <a:latin typeface="DejaVu Sans Mono"/>
+              </a:defRPr>
+            </a:pPr>
             <a:r>
               <a:t>  </a:t>
             </a:r>
-            <a:br/>
+          </a:p>
+          <a:p>
+            <a:pPr algn="l">
+              <a:spcAft>
+                <a:spcPts val="0"/>
+              </a:spcAft>
+              <a:defRPr sz="1400" b="0">
+                <a:solidFill>
+                  <a:srgbClr val="FFFFFF"/>
+                </a:solidFill>
+                <a:latin typeface="DejaVu Sans Mono"/>
+              </a:defRPr>
+            </a:pPr>
             <a:r>
               <a:t>  &lt;description&gt;Finite-state mission manager for the educational AGV.&lt;/description&gt;</a:t>
             </a:r>
-            <a:br/>
+          </a:p>
+          <a:p>
+            <a:pPr algn="l">
+              <a:spcAft>
+                <a:spcPts val="0"/>
+              </a:spcAft>
+              <a:defRPr sz="1400" b="0">
+                <a:solidFill>
+                  <a:srgbClr val="FFFFFF"/>
+                </a:solidFill>
+                <a:latin typeface="DejaVu Sans Mono"/>
+              </a:defRPr>
+            </a:pPr>
             <a:r>
               <a:t>  &lt;maintainer email="student@example.com"&gt;AGV student&lt;/maintainer&gt;</a:t>
             </a:r>
-            <a:br/>
+          </a:p>
+          <a:p>
+            <a:pPr algn="l">
+              <a:spcAft>
+                <a:spcPts val="0"/>
+              </a:spcAft>
+              <a:defRPr sz="1400" b="0">
+                <a:solidFill>
+                  <a:srgbClr val="FFFFFF"/>
+                </a:solidFill>
+                <a:latin typeface="DejaVu Sans Mono"/>
+              </a:defRPr>
+            </a:pPr>
             <a:r>
               <a:t>  &lt;license&gt;Apache-2.0&lt;/license&gt;</a:t>
             </a:r>
-            <a:br/>
+          </a:p>
+          <a:p>
+            <a:pPr algn="l">
+              <a:spcAft>
+                <a:spcPts val="0"/>
+              </a:spcAft>
+              <a:defRPr sz="1400" b="0">
+                <a:solidFill>
+                  <a:srgbClr val="FFFFFF"/>
+                </a:solidFill>
+                <a:latin typeface="DejaVu Sans Mono"/>
+              </a:defRPr>
+            </a:pPr>
             <a:r>
               <a:t>  </a:t>
             </a:r>
-            <a:br/>
+          </a:p>
+          <a:p>
+            <a:pPr algn="l">
+              <a:spcAft>
+                <a:spcPts val="0"/>
+              </a:spcAft>
+              <a:defRPr sz="1400" b="0">
+                <a:solidFill>
+                  <a:srgbClr val="FFFFFF"/>
+                </a:solidFill>
+                <a:latin typeface="DejaVu Sans Mono"/>
+              </a:defRPr>
+            </a:pPr>
             <a:r>
               <a:t>  </a:t>
             </a:r>
-            <a:br/>
+          </a:p>
+          <a:p>
+            <a:pPr algn="l">
+              <a:spcAft>
+                <a:spcPts val="0"/>
+              </a:spcAft>
+              <a:defRPr sz="1400" b="0">
+                <a:solidFill>
+                  <a:srgbClr val="FFFFFF"/>
+                </a:solidFill>
+                <a:latin typeface="DejaVu Sans Mono"/>
+              </a:defRPr>
+            </a:pPr>
             <a:r>
               <a:t>  &lt;buildtool_depend&gt;ament_python&lt;/buildtool_depend&gt;</a:t>
             </a:r>
@@ -12309,7 +12556,7 @@
           </a:fontRef>
         </p:style>
         <p:txBody>
-          <a:bodyPr rtlCol="0" anchor="ctr" wrap="square" lIns="164592" rIns="164592" tIns="109728" bIns="36576"/>
+          <a:bodyPr rtlCol="0" anchor="ctr" wrap="square" lIns="164592" rIns="164592" tIns="109728" bIns="73152"/>
           <a:lstStyle/>
           <a:p>
             <a:pPr algn="l">
@@ -12326,47 +12573,166 @@
             <a:r>
               <a:t>  &lt;exec_depend&gt;rclpy&lt;/exec_depend&gt;</a:t>
             </a:r>
-            <a:br/>
+          </a:p>
+          <a:p>
+            <a:pPr algn="l">
+              <a:spcAft>
+                <a:spcPts val="0"/>
+              </a:spcAft>
+              <a:defRPr sz="1400" b="0">
+                <a:solidFill>
+                  <a:srgbClr val="FFFFFF"/>
+                </a:solidFill>
+                <a:latin typeface="DejaVu Sans Mono"/>
+              </a:defRPr>
+            </a:pPr>
             <a:r>
               <a:t>  &lt;exec_depend&gt;geometry_msgs&lt;/exec_depend&gt;</a:t>
             </a:r>
-            <a:br/>
+          </a:p>
+          <a:p>
+            <a:pPr algn="l">
+              <a:spcAft>
+                <a:spcPts val="0"/>
+              </a:spcAft>
+              <a:defRPr sz="1400" b="0">
+                <a:solidFill>
+                  <a:srgbClr val="FFFFFF"/>
+                </a:solidFill>
+                <a:latin typeface="DejaVu Sans Mono"/>
+              </a:defRPr>
+            </a:pPr>
             <a:r>
               <a:t>  &lt;exec_depend&gt;std_msgs&lt;/exec_depend&gt;</a:t>
             </a:r>
-            <a:br/>
+          </a:p>
+          <a:p>
+            <a:pPr algn="l">
+              <a:spcAft>
+                <a:spcPts val="0"/>
+              </a:spcAft>
+              <a:defRPr sz="1400" b="0">
+                <a:solidFill>
+                  <a:srgbClr val="FFFFFF"/>
+                </a:solidFill>
+                <a:latin typeface="DejaVu Sans Mono"/>
+              </a:defRPr>
+            </a:pPr>
             <a:r>
               <a:t>  &lt;exec_depend&gt;visualization_msgs&lt;/exec_depend&gt;</a:t>
             </a:r>
-            <a:br/>
+          </a:p>
+          <a:p>
+            <a:pPr algn="l">
+              <a:spcAft>
+                <a:spcPts val="0"/>
+              </a:spcAft>
+              <a:defRPr sz="1400" b="0">
+                <a:solidFill>
+                  <a:srgbClr val="FFFFFF"/>
+                </a:solidFill>
+                <a:latin typeface="DejaVu Sans Mono"/>
+              </a:defRPr>
+            </a:pPr>
             <a:r>
               <a:t>  &lt;exec_depend&gt;agv_interfaces&lt;/exec_depend&gt;</a:t>
             </a:r>
-            <a:br/>
+          </a:p>
+          <a:p>
+            <a:pPr algn="l">
+              <a:spcAft>
+                <a:spcPts val="0"/>
+              </a:spcAft>
+              <a:defRPr sz="1400" b="0">
+                <a:solidFill>
+                  <a:srgbClr val="FFFFFF"/>
+                </a:solidFill>
+                <a:latin typeface="DejaVu Sans Mono"/>
+              </a:defRPr>
+            </a:pPr>
             <a:r>
               <a:t>  </a:t>
             </a:r>
-            <a:br/>
+          </a:p>
+          <a:p>
+            <a:pPr algn="l">
+              <a:spcAft>
+                <a:spcPts val="0"/>
+              </a:spcAft>
+              <a:defRPr sz="1400" b="0">
+                <a:solidFill>
+                  <a:srgbClr val="FFFFFF"/>
+                </a:solidFill>
+                <a:latin typeface="DejaVu Sans Mono"/>
+              </a:defRPr>
+            </a:pPr>
             <a:r>
               <a:t>  </a:t>
             </a:r>
-            <a:br/>
+          </a:p>
+          <a:p>
+            <a:pPr algn="l">
+              <a:spcAft>
+                <a:spcPts val="0"/>
+              </a:spcAft>
+              <a:defRPr sz="1400" b="0">
+                <a:solidFill>
+                  <a:srgbClr val="FFFFFF"/>
+                </a:solidFill>
+                <a:latin typeface="DejaVu Sans Mono"/>
+              </a:defRPr>
+            </a:pPr>
             <a:r>
               <a:t>  &lt;export&gt;</a:t>
             </a:r>
-            <a:br/>
+          </a:p>
+          <a:p>
+            <a:pPr algn="l">
+              <a:spcAft>
+                <a:spcPts val="0"/>
+              </a:spcAft>
+              <a:defRPr sz="1400" b="0">
+                <a:solidFill>
+                  <a:srgbClr val="FFFFFF"/>
+                </a:solidFill>
+                <a:latin typeface="DejaVu Sans Mono"/>
+              </a:defRPr>
+            </a:pPr>
             <a:r>
               <a:t>    &lt;build_type&gt;ament_python&lt;/build_type&gt;</a:t>
             </a:r>
-            <a:br/>
+          </a:p>
+          <a:p>
+            <a:pPr algn="l">
+              <a:spcAft>
+                <a:spcPts val="0"/>
+              </a:spcAft>
+              <a:defRPr sz="1400" b="0">
+                <a:solidFill>
+                  <a:srgbClr val="FFFFFF"/>
+                </a:solidFill>
+                <a:latin typeface="DejaVu Sans Mono"/>
+              </a:defRPr>
+            </a:pPr>
             <a:r>
               <a:t>  &lt;/export&gt;</a:t>
             </a:r>
-            <a:br/>
+          </a:p>
+          <a:p>
+            <a:pPr algn="l">
+              <a:spcAft>
+                <a:spcPts val="0"/>
+              </a:spcAft>
+              <a:defRPr sz="1400" b="0">
+                <a:solidFill>
+                  <a:srgbClr val="FFFFFF"/>
+                </a:solidFill>
+                <a:latin typeface="DejaVu Sans Mono"/>
+              </a:defRPr>
+            </a:pPr>
             <a:r>
               <a:t>  </a:t>
             </a:r>
-            <a:br/>
           </a:p>
         </p:txBody>
       </p:sp>
@@ -12780,7 +13146,7 @@
           </a:fontRef>
         </p:style>
         <p:txBody>
-          <a:bodyPr rtlCol="0" anchor="ctr" wrap="square" lIns="164592" rIns="164592" tIns="109728" bIns="36576"/>
+          <a:bodyPr rtlCol="0" anchor="ctr" wrap="square" lIns="164592" rIns="164592" tIns="109728" bIns="73152"/>
           <a:lstStyle/>
           <a:p>
             <a:pPr algn="l">
@@ -13265,7 +13631,7 @@
           </a:fontRef>
         </p:style>
         <p:txBody>
-          <a:bodyPr rtlCol="0" anchor="ctr" wrap="square" lIns="73152" rIns="73152" tIns="36576" bIns="36576"/>
+          <a:bodyPr rtlCol="0" anchor="ctr" wrap="square" lIns="109728" rIns="109728" tIns="73152" bIns="73152"/>
           <a:lstStyle/>
           <a:p>
             <a:pPr algn="l">
@@ -13282,7 +13648,19 @@
             <a:r>
               <a:t>mkdir -p ~/ros2_curri/my_agv_ws/src/agv_mission</a:t>
             </a:r>
-            <a:br/>
+          </a:p>
+          <a:p>
+            <a:pPr algn="l">
+              <a:spcAft>
+                <a:spcPts val="0"/>
+              </a:spcAft>
+              <a:defRPr sz="1600" b="0">
+                <a:solidFill>
+                  <a:srgbClr val="FFFFFF"/>
+                </a:solidFill>
+                <a:latin typeface="DejaVu Sans Mono"/>
+              </a:defRPr>
+            </a:pPr>
             <a:r>
               <a:t>nano ~/ros2_curri/my_agv_ws/src/agv_mission/setup.py</a:t>
             </a:r>
@@ -15785,7 +16163,7 @@
           </a:fontRef>
         </p:style>
         <p:txBody>
-          <a:bodyPr rtlCol="0" anchor="ctr" wrap="square" lIns="164592" rIns="164592" tIns="109728" bIns="36576"/>
+          <a:bodyPr rtlCol="0" anchor="ctr" wrap="square" lIns="164592" rIns="164592" tIns="109728" bIns="73152"/>
           <a:lstStyle/>
           <a:p>
             <a:pPr algn="l">
@@ -15802,35 +16180,131 @@
             <a:r>
               <a:t>from setuptools import find_packages, setup</a:t>
             </a:r>
-            <a:br/>
+          </a:p>
+          <a:p>
+            <a:pPr algn="l">
+              <a:spcAft>
+                <a:spcPts val="0"/>
+              </a:spcAft>
+              <a:defRPr sz="1400" b="0">
+                <a:solidFill>
+                  <a:srgbClr val="FFFFFF"/>
+                </a:solidFill>
+                <a:latin typeface="DejaVu Sans Mono"/>
+              </a:defRPr>
+            </a:pPr>
             <a:r>
               <a:t>package_name = 'agv_mission'</a:t>
             </a:r>
-            <a:br/>
+          </a:p>
+          <a:p>
+            <a:pPr algn="l">
+              <a:spcAft>
+                <a:spcPts val="0"/>
+              </a:spcAft>
+              <a:defRPr sz="1400" b="0">
+                <a:solidFill>
+                  <a:srgbClr val="FFFFFF"/>
+                </a:solidFill>
+                <a:latin typeface="DejaVu Sans Mono"/>
+              </a:defRPr>
+            </a:pPr>
             <a:r>
               <a:t>setup(name=package_name, version='0.1.0', packages=find_packages(exclude=['test']),</a:t>
             </a:r>
-            <a:br/>
+          </a:p>
+          <a:p>
+            <a:pPr algn="l">
+              <a:spcAft>
+                <a:spcPts val="0"/>
+              </a:spcAft>
+              <a:defRPr sz="1400" b="0">
+                <a:solidFill>
+                  <a:srgbClr val="FFFFFF"/>
+                </a:solidFill>
+                <a:latin typeface="DejaVu Sans Mono"/>
+              </a:defRPr>
+            </a:pPr>
             <a:r>
               <a:t>    data_files=[('share/ament_index/resource_index/packages',</a:t>
             </a:r>
-            <a:br/>
+          </a:p>
+          <a:p>
+            <a:pPr algn="l">
+              <a:spcAft>
+                <a:spcPts val="0"/>
+              </a:spcAft>
+              <a:defRPr sz="1400" b="0">
+                <a:solidFill>
+                  <a:srgbClr val="FFFFFF"/>
+                </a:solidFill>
+                <a:latin typeface="DejaVu Sans Mono"/>
+              </a:defRPr>
+            </a:pPr>
             <a:r>
               <a:t>    ['resource/' + package_name]), ('share/' + package_name, ['package.xml'])],</a:t>
             </a:r>
-            <a:br/>
+          </a:p>
+          <a:p>
+            <a:pPr algn="l">
+              <a:spcAft>
+                <a:spcPts val="0"/>
+              </a:spcAft>
+              <a:defRPr sz="1400" b="0">
+                <a:solidFill>
+                  <a:srgbClr val="FFFFFF"/>
+                </a:solidFill>
+                <a:latin typeface="DejaVu Sans Mono"/>
+              </a:defRPr>
+            </a:pPr>
             <a:r>
               <a:t>    install_requires=['setuptools'], zip_safe=True, maintainer='AGV student',</a:t>
             </a:r>
-            <a:br/>
+          </a:p>
+          <a:p>
+            <a:pPr algn="l">
+              <a:spcAft>
+                <a:spcPts val="0"/>
+              </a:spcAft>
+              <a:defRPr sz="1400" b="0">
+                <a:solidFill>
+                  <a:srgbClr val="FFFFFF"/>
+                </a:solidFill>
+                <a:latin typeface="DejaVu Sans Mono"/>
+              </a:defRPr>
+            </a:pPr>
             <a:r>
               <a:t>    maintainer_email='student@example.com', license='Apache-2.0',</a:t>
             </a:r>
-            <a:br/>
+          </a:p>
+          <a:p>
+            <a:pPr algn="l">
+              <a:spcAft>
+                <a:spcPts val="0"/>
+              </a:spcAft>
+              <a:defRPr sz="1400" b="0">
+                <a:solidFill>
+                  <a:srgbClr val="FFFFFF"/>
+                </a:solidFill>
+                <a:latin typeface="DejaVu Sans Mono"/>
+              </a:defRPr>
+            </a:pPr>
             <a:r>
               <a:t>    entry_points={'console_scripts': ['mission_manager = agv_mission.mission_manager:main',</a:t>
             </a:r>
-            <a:br/>
+          </a:p>
+          <a:p>
+            <a:pPr algn="l">
+              <a:spcAft>
+                <a:spcPts val="0"/>
+              </a:spcAft>
+              <a:defRPr sz="1400" b="0">
+                <a:solidFill>
+                  <a:srgbClr val="FFFFFF"/>
+                </a:solidFill>
+                <a:latin typeface="DejaVu Sans Mono"/>
+              </a:defRPr>
+            </a:pPr>
             <a:r>
               <a:t>     'mission_markers = agv_mission.mission_markers:main']})</a:t>
             </a:r>
@@ -16302,7 +16776,7 @@
           </a:fontRef>
         </p:style>
         <p:txBody>
-          <a:bodyPr rtlCol="0" anchor="ctr" wrap="square" lIns="73152" rIns="73152" tIns="36576" bIns="36576"/>
+          <a:bodyPr rtlCol="0" anchor="ctr" wrap="square" lIns="109728" rIns="109728" tIns="73152" bIns="73152"/>
           <a:lstStyle/>
           <a:p>
             <a:pPr algn="l">
@@ -16319,7 +16793,19 @@
             <a:r>
               <a:t>mkdir -p ~/ros2_curri/my_agv_ws/src/agv_mission/agv_mission</a:t>
             </a:r>
-            <a:br/>
+          </a:p>
+          <a:p>
+            <a:pPr algn="l">
+              <a:spcAft>
+                <a:spcPts val="0"/>
+              </a:spcAft>
+              <a:defRPr sz="1600" b="0">
+                <a:solidFill>
+                  <a:srgbClr val="FFFFFF"/>
+                </a:solidFill>
+                <a:latin typeface="DejaVu Sans Mono"/>
+              </a:defRPr>
+            </a:pPr>
             <a:r>
               <a:t>nano ~/ros2_curri/my_agv_ws/src/agv_mission/agv_mission/mission_manager.py</a:t>
             </a:r>
@@ -20508,7 +20994,7 @@
           </a:fontRef>
         </p:style>
         <p:txBody>
-          <a:bodyPr rtlCol="0" anchor="ctr" wrap="square" lIns="164592" rIns="164592" tIns="109728" bIns="36576"/>
+          <a:bodyPr rtlCol="0" anchor="ctr" wrap="square" lIns="164592" rIns="164592" tIns="109728" bIns="73152"/>
           <a:lstStyle/>
           <a:p>
             <a:pPr algn="l">
@@ -20525,41 +21011,173 @@
             <a:r>
               <a:t>import math</a:t>
             </a:r>
-            <a:br/>
+          </a:p>
+          <a:p>
+            <a:pPr algn="l">
+              <a:spcAft>
+                <a:spcPts val="0"/>
+              </a:spcAft>
+              <a:defRPr sz="1400" b="0">
+                <a:solidFill>
+                  <a:srgbClr val="FFFFFF"/>
+                </a:solidFill>
+                <a:latin typeface="DejaVu Sans Mono"/>
+              </a:defRPr>
+            </a:pPr>
             <a:r>
               <a:t>import rclpy</a:t>
             </a:r>
-            <a:br/>
+          </a:p>
+          <a:p>
+            <a:pPr algn="l">
+              <a:spcAft>
+                <a:spcPts val="0"/>
+              </a:spcAft>
+              <a:defRPr sz="1400" b="0">
+                <a:solidFill>
+                  <a:srgbClr val="FFFFFF"/>
+                </a:solidFill>
+                <a:latin typeface="DejaVu Sans Mono"/>
+              </a:defRPr>
+            </a:pPr>
             <a:r>
               <a:t>from rclpy.node import Node</a:t>
             </a:r>
-            <a:br/>
+          </a:p>
+          <a:p>
+            <a:pPr algn="l">
+              <a:spcAft>
+                <a:spcPts val="0"/>
+              </a:spcAft>
+              <a:defRPr sz="1400" b="0">
+                <a:solidFill>
+                  <a:srgbClr val="FFFFFF"/>
+                </a:solidFill>
+                <a:latin typeface="DejaVu Sans Mono"/>
+              </a:defRPr>
+            </a:pPr>
             <a:r>
               <a:t>from geometry_msgs.msg import Twist</a:t>
             </a:r>
-            <a:br/>
+          </a:p>
+          <a:p>
+            <a:pPr algn="l">
+              <a:spcAft>
+                <a:spcPts val="0"/>
+              </a:spcAft>
+              <a:defRPr sz="1400" b="0">
+                <a:solidFill>
+                  <a:srgbClr val="FFFFFF"/>
+                </a:solidFill>
+                <a:latin typeface="DejaVu Sans Mono"/>
+              </a:defRPr>
+            </a:pPr>
             <a:r>
               <a:t>from std_msgs.msg import Float32, String</a:t>
             </a:r>
-            <a:br/>
+          </a:p>
+          <a:p>
+            <a:pPr algn="l">
+              <a:spcAft>
+                <a:spcPts val="0"/>
+              </a:spcAft>
+              <a:defRPr sz="1400" b="0">
+                <a:solidFill>
+                  <a:srgbClr val="FFFFFF"/>
+                </a:solidFill>
+                <a:latin typeface="DejaVu Sans Mono"/>
+              </a:defRPr>
+            </a:pPr>
             <a:r>
               <a:t>from agv_interfaces.msg import DetectionArray</a:t>
             </a:r>
-            <a:br/>
-            <a:br/>
+          </a:p>
+          <a:p>
+            <a:pPr algn="l">
+              <a:spcAft>
+                <a:spcPts val="0"/>
+              </a:spcAft>
+              <a:defRPr sz="1400" b="0">
+                <a:solidFill>
+                  <a:srgbClr val="FFFFFF"/>
+                </a:solidFill>
+                <a:latin typeface="DejaVu Sans Mono"/>
+              </a:defRPr>
+            </a:pPr>
+          </a:p>
+          <a:p>
+            <a:pPr algn="l">
+              <a:spcAft>
+                <a:spcPts val="0"/>
+              </a:spcAft>
+              <a:defRPr sz="1400" b="0">
+                <a:solidFill>
+                  <a:srgbClr val="FFFFFF"/>
+                </a:solidFill>
+                <a:latin typeface="DejaVu Sans Mono"/>
+              </a:defRPr>
+            </a:pPr>
             <a:r>
               <a:t>class MissionManager(Node):</a:t>
             </a:r>
-            <a:br/>
-            <a:br/>
+          </a:p>
+          <a:p>
+            <a:pPr algn="l">
+              <a:spcAft>
+                <a:spcPts val="0"/>
+              </a:spcAft>
+              <a:defRPr sz="1400" b="0">
+                <a:solidFill>
+                  <a:srgbClr val="FFFFFF"/>
+                </a:solidFill>
+                <a:latin typeface="DejaVu Sans Mono"/>
+              </a:defRPr>
+            </a:pPr>
+          </a:p>
+          <a:p>
+            <a:pPr algn="l">
+              <a:spcAft>
+                <a:spcPts val="0"/>
+              </a:spcAft>
+              <a:defRPr sz="1400" b="0">
+                <a:solidFill>
+                  <a:srgbClr val="FFFFFF"/>
+                </a:solidFill>
+                <a:latin typeface="DejaVu Sans Mono"/>
+              </a:defRPr>
+            </a:pPr>
             <a:r>
               <a:t>    def __init__(self):</a:t>
             </a:r>
-            <a:br/>
+          </a:p>
+          <a:p>
+            <a:pPr algn="l">
+              <a:spcAft>
+                <a:spcPts val="0"/>
+              </a:spcAft>
+              <a:defRPr sz="1400" b="0">
+                <a:solidFill>
+                  <a:srgbClr val="FFFFFF"/>
+                </a:solidFill>
+                <a:latin typeface="DejaVu Sans Mono"/>
+              </a:defRPr>
+            </a:pPr>
             <a:r>
               <a:t>        super().__init__('mission_manager')</a:t>
             </a:r>
-            <a:br/>
+          </a:p>
+          <a:p>
+            <a:pPr algn="l">
+              <a:spcAft>
+                <a:spcPts val="0"/>
+              </a:spcAft>
+              <a:defRPr sz="1400" b="0">
+                <a:solidFill>
+                  <a:srgbClr val="FFFFFF"/>
+                </a:solidFill>
+                <a:latin typeface="DejaVu Sans Mono"/>
+              </a:defRPr>
+            </a:pPr>
             <a:r>
               <a:t>        self.declare_parameter('stop_distance', 0.5)</a:t>
             </a:r>
@@ -20976,7 +21594,7 @@
           </a:fontRef>
         </p:style>
         <p:txBody>
-          <a:bodyPr rtlCol="0" anchor="ctr" wrap="square" lIns="164592" rIns="164592" tIns="109728" bIns="36576"/>
+          <a:bodyPr rtlCol="0" anchor="ctr" wrap="square" lIns="164592" rIns="164592" tIns="109728" bIns="73152"/>
           <a:lstStyle/>
           <a:p>
             <a:pPr algn="l">
@@ -20993,47 +21611,179 @@
             <a:r>
               <a:t>        self.declare_parameter('search_speed', 0.25)</a:t>
             </a:r>
-            <a:br/>
+          </a:p>
+          <a:p>
+            <a:pPr algn="l">
+              <a:spcAft>
+                <a:spcPts val="0"/>
+              </a:spcAft>
+              <a:defRPr sz="1400" b="0">
+                <a:solidFill>
+                  <a:srgbClr val="FFFFFF"/>
+                </a:solidFill>
+                <a:latin typeface="DejaVu Sans Mono"/>
+              </a:defRPr>
+            </a:pPr>
             <a:r>
               <a:t>        self.declare_parameter('approach_speed', 0.15)</a:t>
             </a:r>
-            <a:br/>
+          </a:p>
+          <a:p>
+            <a:pPr algn="l">
+              <a:spcAft>
+                <a:spcPts val="0"/>
+              </a:spcAft>
+              <a:defRPr sz="1400" b="0">
+                <a:solidFill>
+                  <a:srgbClr val="FFFFFF"/>
+                </a:solidFill>
+                <a:latin typeface="DejaVu Sans Mono"/>
+              </a:defRPr>
+            </a:pPr>
             <a:r>
               <a:t>        self.declare_parameter('image_center_x', 320)</a:t>
             </a:r>
-            <a:br/>
+          </a:p>
+          <a:p>
+            <a:pPr algn="l">
+              <a:spcAft>
+                <a:spcPts val="0"/>
+              </a:spcAft>
+              <a:defRPr sz="1400" b="0">
+                <a:solidFill>
+                  <a:srgbClr val="FFFFFF"/>
+                </a:solidFill>
+                <a:latin typeface="DejaVu Sans Mono"/>
+              </a:defRPr>
+            </a:pPr>
             <a:r>
               <a:t>        self.declare_parameter('target_timeout_sec', 0.7)</a:t>
             </a:r>
-            <a:br/>
+          </a:p>
+          <a:p>
+            <a:pPr algn="l">
+              <a:spcAft>
+                <a:spcPts val="0"/>
+              </a:spcAft>
+              <a:defRPr sz="1400" b="0">
+                <a:solidFill>
+                  <a:srgbClr val="FFFFFF"/>
+                </a:solidFill>
+                <a:latin typeface="DejaVu Sans Mono"/>
+              </a:defRPr>
+            </a:pPr>
             <a:r>
               <a:t>        self.state = 'IDLE'</a:t>
             </a:r>
-            <a:br/>
+          </a:p>
+          <a:p>
+            <a:pPr algn="l">
+              <a:spcAft>
+                <a:spcPts val="0"/>
+              </a:spcAft>
+              <a:defRPr sz="1400" b="0">
+                <a:solidFill>
+                  <a:srgbClr val="FFFFFF"/>
+                </a:solidFill>
+                <a:latin typeface="DejaVu Sans Mono"/>
+              </a:defRPr>
+            </a:pPr>
             <a:r>
               <a:t>        self.obstacle_distance = math.inf</a:t>
             </a:r>
-            <a:br/>
+          </a:p>
+          <a:p>
+            <a:pPr algn="l">
+              <a:spcAft>
+                <a:spcPts val="0"/>
+              </a:spcAft>
+              <a:defRPr sz="1400" b="0">
+                <a:solidFill>
+                  <a:srgbClr val="FFFFFF"/>
+                </a:solidFill>
+                <a:latin typeface="DejaVu Sans Mono"/>
+              </a:defRPr>
+            </a:pPr>
             <a:r>
               <a:t>        self.target = None</a:t>
             </a:r>
-            <a:br/>
+          </a:p>
+          <a:p>
+            <a:pPr algn="l">
+              <a:spcAft>
+                <a:spcPts val="0"/>
+              </a:spcAft>
+              <a:defRPr sz="1400" b="0">
+                <a:solidFill>
+                  <a:srgbClr val="FFFFFF"/>
+                </a:solidFill>
+                <a:latin typeface="DejaVu Sans Mono"/>
+              </a:defRPr>
+            </a:pPr>
             <a:r>
               <a:t>        self.last_target_time = None</a:t>
             </a:r>
-            <a:br/>
+          </a:p>
+          <a:p>
+            <a:pPr algn="l">
+              <a:spcAft>
+                <a:spcPts val="0"/>
+              </a:spcAft>
+              <a:defRPr sz="1400" b="0">
+                <a:solidFill>
+                  <a:srgbClr val="FFFFFF"/>
+                </a:solidFill>
+                <a:latin typeface="DejaVu Sans Mono"/>
+              </a:defRPr>
+            </a:pPr>
             <a:r>
               <a:t>        self.create_subscription(Float32, '/obstacle_distance', self.obstacle_callback,</a:t>
             </a:r>
-            <a:br/>
+          </a:p>
+          <a:p>
+            <a:pPr algn="l">
+              <a:spcAft>
+                <a:spcPts val="0"/>
+              </a:spcAft>
+              <a:defRPr sz="1400" b="0">
+                <a:solidFill>
+                  <a:srgbClr val="FFFFFF"/>
+                </a:solidFill>
+                <a:latin typeface="DejaVu Sans Mono"/>
+              </a:defRPr>
+            </a:pPr>
             <a:r>
               <a:t>            10)</a:t>
             </a:r>
-            <a:br/>
+          </a:p>
+          <a:p>
+            <a:pPr algn="l">
+              <a:spcAft>
+                <a:spcPts val="0"/>
+              </a:spcAft>
+              <a:defRPr sz="1400" b="0">
+                <a:solidFill>
+                  <a:srgbClr val="FFFFFF"/>
+                </a:solidFill>
+                <a:latin typeface="DejaVu Sans Mono"/>
+              </a:defRPr>
+            </a:pPr>
             <a:r>
               <a:t>        self.create_subscription(DetectionArray, '/detections', self.detections_callback,</a:t>
             </a:r>
-            <a:br/>
+          </a:p>
+          <a:p>
+            <a:pPr algn="l">
+              <a:spcAft>
+                <a:spcPts val="0"/>
+              </a:spcAft>
+              <a:defRPr sz="1400" b="0">
+                <a:solidFill>
+                  <a:srgbClr val="FFFFFF"/>
+                </a:solidFill>
+                <a:latin typeface="DejaVu Sans Mono"/>
+              </a:defRPr>
+            </a:pPr>
             <a:r>
               <a:t>             10)</a:t>
             </a:r>
@@ -21869,7 +22619,7 @@
           </a:fontRef>
         </p:style>
         <p:txBody>
-          <a:bodyPr rtlCol="0" anchor="ctr" wrap="square" lIns="164592" rIns="164592" tIns="109728" bIns="36576"/>
+          <a:bodyPr rtlCol="0" anchor="ctr" wrap="square" lIns="164592" rIns="164592" tIns="109728" bIns="73152"/>
           <a:lstStyle/>
           <a:p>
             <a:pPr algn="l">
@@ -21886,41 +22636,160 @@
             <a:r>
               <a:t>        self.command_publisher = self.create_publisher(Twist, '/cmd_vel_raw', 10)</a:t>
             </a:r>
-            <a:br/>
+          </a:p>
+          <a:p>
+            <a:pPr algn="l">
+              <a:spcAft>
+                <a:spcPts val="0"/>
+              </a:spcAft>
+              <a:defRPr sz="1400" b="0">
+                <a:solidFill>
+                  <a:srgbClr val="FFFFFF"/>
+                </a:solidFill>
+                <a:latin typeface="DejaVu Sans Mono"/>
+              </a:defRPr>
+            </a:pPr>
             <a:r>
               <a:t>        self.state_publisher = self.create_publisher(String, '/mission_state', 10)</a:t>
             </a:r>
-            <a:br/>
+          </a:p>
+          <a:p>
+            <a:pPr algn="l">
+              <a:spcAft>
+                <a:spcPts val="0"/>
+              </a:spcAft>
+              <a:defRPr sz="1400" b="0">
+                <a:solidFill>
+                  <a:srgbClr val="FFFFFF"/>
+                </a:solidFill>
+                <a:latin typeface="DejaVu Sans Mono"/>
+              </a:defRPr>
+            </a:pPr>
             <a:r>
               <a:t>        self.create_timer(0.1, self.tick)</a:t>
             </a:r>
-            <a:br/>
-            <a:br/>
+          </a:p>
+          <a:p>
+            <a:pPr algn="l">
+              <a:spcAft>
+                <a:spcPts val="0"/>
+              </a:spcAft>
+              <a:defRPr sz="1400" b="0">
+                <a:solidFill>
+                  <a:srgbClr val="FFFFFF"/>
+                </a:solidFill>
+                <a:latin typeface="DejaVu Sans Mono"/>
+              </a:defRPr>
+            </a:pPr>
+          </a:p>
+          <a:p>
+            <a:pPr algn="l">
+              <a:spcAft>
+                <a:spcPts val="0"/>
+              </a:spcAft>
+              <a:defRPr sz="1400" b="0">
+                <a:solidFill>
+                  <a:srgbClr val="FFFFFF"/>
+                </a:solidFill>
+                <a:latin typeface="DejaVu Sans Mono"/>
+              </a:defRPr>
+            </a:pPr>
             <a:r>
               <a:t>    def obstacle_callback(self, message):</a:t>
             </a:r>
-            <a:br/>
+          </a:p>
+          <a:p>
+            <a:pPr algn="l">
+              <a:spcAft>
+                <a:spcPts val="0"/>
+              </a:spcAft>
+              <a:defRPr sz="1400" b="0">
+                <a:solidFill>
+                  <a:srgbClr val="FFFFFF"/>
+                </a:solidFill>
+                <a:latin typeface="DejaVu Sans Mono"/>
+              </a:defRPr>
+            </a:pPr>
             <a:r>
               <a:t>        self.obstacle_distance = message.data</a:t>
             </a:r>
-            <a:br/>
-            <a:br/>
+          </a:p>
+          <a:p>
+            <a:pPr algn="l">
+              <a:spcAft>
+                <a:spcPts val="0"/>
+              </a:spcAft>
+              <a:defRPr sz="1400" b="0">
+                <a:solidFill>
+                  <a:srgbClr val="FFFFFF"/>
+                </a:solidFill>
+                <a:latin typeface="DejaVu Sans Mono"/>
+              </a:defRPr>
+            </a:pPr>
+          </a:p>
+          <a:p>
+            <a:pPr algn="l">
+              <a:spcAft>
+                <a:spcPts val="0"/>
+              </a:spcAft>
+              <a:defRPr sz="1400" b="0">
+                <a:solidFill>
+                  <a:srgbClr val="FFFFFF"/>
+                </a:solidFill>
+                <a:latin typeface="DejaVu Sans Mono"/>
+              </a:defRPr>
+            </a:pPr>
             <a:r>
               <a:t>    def detections_callback(self, message):</a:t>
             </a:r>
-            <a:br/>
+          </a:p>
+          <a:p>
+            <a:pPr algn="l">
+              <a:spcAft>
+                <a:spcPts val="0"/>
+              </a:spcAft>
+              <a:defRPr sz="1400" b="0">
+                <a:solidFill>
+                  <a:srgbClr val="FFFFFF"/>
+                </a:solidFill>
+                <a:latin typeface="DejaVu Sans Mono"/>
+              </a:defRPr>
+            </a:pPr>
             <a:r>
               <a:t>        if message.detections:</a:t>
             </a:r>
-            <a:br/>
+          </a:p>
+          <a:p>
+            <a:pPr algn="l">
+              <a:spcAft>
+                <a:spcPts val="0"/>
+              </a:spcAft>
+              <a:defRPr sz="1400" b="0">
+                <a:solidFill>
+                  <a:srgbClr val="FFFFFF"/>
+                </a:solidFill>
+                <a:latin typeface="DejaVu Sans Mono"/>
+              </a:defRPr>
+            </a:pPr>
             <a:r>
               <a:t>            self.target = message.detections[0]</a:t>
             </a:r>
-            <a:br/>
+          </a:p>
+          <a:p>
+            <a:pPr algn="l">
+              <a:spcAft>
+                <a:spcPts val="0"/>
+              </a:spcAft>
+              <a:defRPr sz="1400" b="0">
+                <a:solidFill>
+                  <a:srgbClr val="FFFFFF"/>
+                </a:solidFill>
+                <a:latin typeface="DejaVu Sans Mono"/>
+              </a:defRPr>
+            </a:pPr>
             <a:r>
               <a:t>            self.last_target_time = self.get_clock().now()</a:t>
             </a:r>
-            <a:br/>
           </a:p>
         </p:txBody>
       </p:sp>
@@ -22334,7 +23203,7 @@
           </a:fontRef>
         </p:style>
         <p:txBody>
-          <a:bodyPr rtlCol="0" anchor="ctr" wrap="square" lIns="164592" rIns="164592" tIns="109728" bIns="36576"/>
+          <a:bodyPr rtlCol="0" anchor="ctr" wrap="square" lIns="164592" rIns="164592" tIns="109728" bIns="73152"/>
           <a:lstStyle/>
           <a:p>
             <a:pPr algn="l">
@@ -22351,44 +23220,176 @@
             <a:r>
               <a:t>    def set_state(self, state):</a:t>
             </a:r>
-            <a:br/>
+          </a:p>
+          <a:p>
+            <a:pPr algn="l">
+              <a:spcAft>
+                <a:spcPts val="0"/>
+              </a:spcAft>
+              <a:defRPr sz="1400" b="0">
+                <a:solidFill>
+                  <a:srgbClr val="FFFFFF"/>
+                </a:solidFill>
+                <a:latin typeface="DejaVu Sans Mono"/>
+              </a:defRPr>
+            </a:pPr>
             <a:r>
               <a:t>        if state != self.state:</a:t>
             </a:r>
-            <a:br/>
+          </a:p>
+          <a:p>
+            <a:pPr algn="l">
+              <a:spcAft>
+                <a:spcPts val="0"/>
+              </a:spcAft>
+              <a:defRPr sz="1400" b="0">
+                <a:solidFill>
+                  <a:srgbClr val="FFFFFF"/>
+                </a:solidFill>
+                <a:latin typeface="DejaVu Sans Mono"/>
+              </a:defRPr>
+            </a:pPr>
             <a:r>
               <a:t>            self.state = state</a:t>
             </a:r>
-            <a:br/>
+          </a:p>
+          <a:p>
+            <a:pPr algn="l">
+              <a:spcAft>
+                <a:spcPts val="0"/>
+              </a:spcAft>
+              <a:defRPr sz="1400" b="0">
+                <a:solidFill>
+                  <a:srgbClr val="FFFFFF"/>
+                </a:solidFill>
+                <a:latin typeface="DejaVu Sans Mono"/>
+              </a:defRPr>
+            </a:pPr>
             <a:r>
               <a:t>            self.get_logger().info('mission state -&gt; ' + state)</a:t>
             </a:r>
-            <a:br/>
+          </a:p>
+          <a:p>
+            <a:pPr algn="l">
+              <a:spcAft>
+                <a:spcPts val="0"/>
+              </a:spcAft>
+              <a:defRPr sz="1400" b="0">
+                <a:solidFill>
+                  <a:srgbClr val="FFFFFF"/>
+                </a:solidFill>
+                <a:latin typeface="DejaVu Sans Mono"/>
+              </a:defRPr>
+            </a:pPr>
             <a:r>
               <a:t>        self.state_publisher.publish(String(data=self.state))</a:t>
             </a:r>
-            <a:br/>
-            <a:br/>
+          </a:p>
+          <a:p>
+            <a:pPr algn="l">
+              <a:spcAft>
+                <a:spcPts val="0"/>
+              </a:spcAft>
+              <a:defRPr sz="1400" b="0">
+                <a:solidFill>
+                  <a:srgbClr val="FFFFFF"/>
+                </a:solidFill>
+                <a:latin typeface="DejaVu Sans Mono"/>
+              </a:defRPr>
+            </a:pPr>
+          </a:p>
+          <a:p>
+            <a:pPr algn="l">
+              <a:spcAft>
+                <a:spcPts val="0"/>
+              </a:spcAft>
+              <a:defRPr sz="1400" b="0">
+                <a:solidFill>
+                  <a:srgbClr val="FFFFFF"/>
+                </a:solidFill>
+                <a:latin typeface="DejaVu Sans Mono"/>
+              </a:defRPr>
+            </a:pPr>
             <a:r>
               <a:t>    def tick(self):</a:t>
             </a:r>
-            <a:br/>
+          </a:p>
+          <a:p>
+            <a:pPr algn="l">
+              <a:spcAft>
+                <a:spcPts val="0"/>
+              </a:spcAft>
+              <a:defRPr sz="1400" b="0">
+                <a:solidFill>
+                  <a:srgbClr val="FFFFFF"/>
+                </a:solidFill>
+                <a:latin typeface="DejaVu Sans Mono"/>
+              </a:defRPr>
+            </a:pPr>
             <a:r>
               <a:t>        command = Twist()</a:t>
             </a:r>
-            <a:br/>
+          </a:p>
+          <a:p>
+            <a:pPr algn="l">
+              <a:spcAft>
+                <a:spcPts val="0"/>
+              </a:spcAft>
+              <a:defRPr sz="1400" b="0">
+                <a:solidFill>
+                  <a:srgbClr val="FFFFFF"/>
+                </a:solidFill>
+                <a:latin typeface="DejaVu Sans Mono"/>
+              </a:defRPr>
+            </a:pPr>
             <a:r>
               <a:t>        if self.last_target_time is not None:</a:t>
             </a:r>
-            <a:br/>
+          </a:p>
+          <a:p>
+            <a:pPr algn="l">
+              <a:spcAft>
+                <a:spcPts val="0"/>
+              </a:spcAft>
+              <a:defRPr sz="1400" b="0">
+                <a:solidFill>
+                  <a:srgbClr val="FFFFFF"/>
+                </a:solidFill>
+                <a:latin typeface="DejaVu Sans Mono"/>
+              </a:defRPr>
+            </a:pPr>
             <a:r>
               <a:t>            age = (self.get_clock().now() - self.last_target_time).nanoseconds / 1000000000.0</a:t>
             </a:r>
-            <a:br/>
+          </a:p>
+          <a:p>
+            <a:pPr algn="l">
+              <a:spcAft>
+                <a:spcPts val="0"/>
+              </a:spcAft>
+              <a:defRPr sz="1400" b="0">
+                <a:solidFill>
+                  <a:srgbClr val="FFFFFF"/>
+                </a:solidFill>
+                <a:latin typeface="DejaVu Sans Mono"/>
+              </a:defRPr>
+            </a:pPr>
             <a:r>
               <a:t>            if age &gt; self.get_parameter('target_timeout_sec').value:</a:t>
             </a:r>
-            <a:br/>
+          </a:p>
+          <a:p>
+            <a:pPr algn="l">
+              <a:spcAft>
+                <a:spcPts val="0"/>
+              </a:spcAft>
+              <a:defRPr sz="1400" b="0">
+                <a:solidFill>
+                  <a:srgbClr val="FFFFFF"/>
+                </a:solidFill>
+                <a:latin typeface="DejaVu Sans Mono"/>
+              </a:defRPr>
+            </a:pPr>
             <a:r>
               <a:t>                self.target = None</a:t>
             </a:r>
@@ -22805,7 +23806,7 @@
           </a:fontRef>
         </p:style>
         <p:txBody>
-          <a:bodyPr rtlCol="0" anchor="ctr" wrap="square" lIns="164592" rIns="164592" tIns="109728" bIns="36576"/>
+          <a:bodyPr rtlCol="0" anchor="ctr" wrap="square" lIns="164592" rIns="164592" tIns="109728" bIns="73152"/>
           <a:lstStyle/>
           <a:p>
             <a:pPr algn="l">
@@ -22822,47 +23823,179 @@
             <a:r>
               <a:t>        if self.obstacle_distance &lt; self.get_parameter('stop_distance').value:</a:t>
             </a:r>
-            <a:br/>
+          </a:p>
+          <a:p>
+            <a:pPr algn="l">
+              <a:spcAft>
+                <a:spcPts val="0"/>
+              </a:spcAft>
+              <a:defRPr sz="1400" b="0">
+                <a:solidFill>
+                  <a:srgbClr val="FFFFFF"/>
+                </a:solidFill>
+                <a:latin typeface="DejaVu Sans Mono"/>
+              </a:defRPr>
+            </a:pPr>
             <a:r>
               <a:t>            self.set_state('AVOID')</a:t>
             </a:r>
-            <a:br/>
+          </a:p>
+          <a:p>
+            <a:pPr algn="l">
+              <a:spcAft>
+                <a:spcPts val="0"/>
+              </a:spcAft>
+              <a:defRPr sz="1400" b="0">
+                <a:solidFill>
+                  <a:srgbClr val="FFFFFF"/>
+                </a:solidFill>
+                <a:latin typeface="DejaVu Sans Mono"/>
+              </a:defRPr>
+            </a:pPr>
             <a:r>
               <a:t>            command.angular.z = self.get_parameter('search_speed').value</a:t>
             </a:r>
-            <a:br/>
+          </a:p>
+          <a:p>
+            <a:pPr algn="l">
+              <a:spcAft>
+                <a:spcPts val="0"/>
+              </a:spcAft>
+              <a:defRPr sz="1400" b="0">
+                <a:solidFill>
+                  <a:srgbClr val="FFFFFF"/>
+                </a:solidFill>
+                <a:latin typeface="DejaVu Sans Mono"/>
+              </a:defRPr>
+            </a:pPr>
             <a:r>
               <a:t>        elif self.target is None:</a:t>
             </a:r>
-            <a:br/>
+          </a:p>
+          <a:p>
+            <a:pPr algn="l">
+              <a:spcAft>
+                <a:spcPts val="0"/>
+              </a:spcAft>
+              <a:defRPr sz="1400" b="0">
+                <a:solidFill>
+                  <a:srgbClr val="FFFFFF"/>
+                </a:solidFill>
+                <a:latin typeface="DejaVu Sans Mono"/>
+              </a:defRPr>
+            </a:pPr>
             <a:r>
               <a:t>            self.set_state('SEARCH')</a:t>
             </a:r>
-            <a:br/>
+          </a:p>
+          <a:p>
+            <a:pPr algn="l">
+              <a:spcAft>
+                <a:spcPts val="0"/>
+              </a:spcAft>
+              <a:defRPr sz="1400" b="0">
+                <a:solidFill>
+                  <a:srgbClr val="FFFFFF"/>
+                </a:solidFill>
+                <a:latin typeface="DejaVu Sans Mono"/>
+              </a:defRPr>
+            </a:pPr>
             <a:r>
               <a:t>            command.angular.z = self.get_parameter('search_speed').value</a:t>
             </a:r>
-            <a:br/>
+          </a:p>
+          <a:p>
+            <a:pPr algn="l">
+              <a:spcAft>
+                <a:spcPts val="0"/>
+              </a:spcAft>
+              <a:defRPr sz="1400" b="0">
+                <a:solidFill>
+                  <a:srgbClr val="FFFFFF"/>
+                </a:solidFill>
+                <a:latin typeface="DejaVu Sans Mono"/>
+              </a:defRPr>
+            </a:pPr>
             <a:r>
               <a:t>        elif self.target.estimated_distance &gt; 0.0 and self.target.estimated_distance &lt; self.get_parameter('stop_distance').value:</a:t>
             </a:r>
-            <a:br/>
+          </a:p>
+          <a:p>
+            <a:pPr algn="l">
+              <a:spcAft>
+                <a:spcPts val="0"/>
+              </a:spcAft>
+              <a:defRPr sz="1400" b="0">
+                <a:solidFill>
+                  <a:srgbClr val="FFFFFF"/>
+                </a:solidFill>
+                <a:latin typeface="DejaVu Sans Mono"/>
+              </a:defRPr>
+            </a:pPr>
             <a:r>
               <a:t>            self.set_state('GOAL')</a:t>
             </a:r>
-            <a:br/>
+          </a:p>
+          <a:p>
+            <a:pPr algn="l">
+              <a:spcAft>
+                <a:spcPts val="0"/>
+              </a:spcAft>
+              <a:defRPr sz="1400" b="0">
+                <a:solidFill>
+                  <a:srgbClr val="FFFFFF"/>
+                </a:solidFill>
+                <a:latin typeface="DejaVu Sans Mono"/>
+              </a:defRPr>
+            </a:pPr>
             <a:r>
               <a:t>        else:</a:t>
             </a:r>
-            <a:br/>
+          </a:p>
+          <a:p>
+            <a:pPr algn="l">
+              <a:spcAft>
+                <a:spcPts val="0"/>
+              </a:spcAft>
+              <a:defRPr sz="1400" b="0">
+                <a:solidFill>
+                  <a:srgbClr val="FFFFFF"/>
+                </a:solidFill>
+                <a:latin typeface="DejaVu Sans Mono"/>
+              </a:defRPr>
+            </a:pPr>
             <a:r>
               <a:t>            self.set_state('APPROACH')</a:t>
             </a:r>
-            <a:br/>
+          </a:p>
+          <a:p>
+            <a:pPr algn="l">
+              <a:spcAft>
+                <a:spcPts val="0"/>
+              </a:spcAft>
+              <a:defRPr sz="1400" b="0">
+                <a:solidFill>
+                  <a:srgbClr val="FFFFFF"/>
+                </a:solidFill>
+                <a:latin typeface="DejaVu Sans Mono"/>
+              </a:defRPr>
+            </a:pPr>
             <a:r>
               <a:t>            command.linear.x = self.get_parameter('approach_speed').value</a:t>
             </a:r>
-            <a:br/>
+          </a:p>
+          <a:p>
+            <a:pPr algn="l">
+              <a:spcAft>
+                <a:spcPts val="0"/>
+              </a:spcAft>
+              <a:defRPr sz="1400" b="0">
+                <a:solidFill>
+                  <a:srgbClr val="FFFFFF"/>
+                </a:solidFill>
+                <a:latin typeface="DejaVu Sans Mono"/>
+              </a:defRPr>
+            </a:pPr>
             <a:r>
               <a:t>            error = self.target.center_x - self.get_parameter('image_center_x').value</a:t>
             </a:r>
@@ -23279,7 +24412,7 @@
           </a:fontRef>
         </p:style>
         <p:txBody>
-          <a:bodyPr rtlCol="0" anchor="ctr" wrap="square" lIns="164592" rIns="164592" tIns="109728" bIns="36576"/>
+          <a:bodyPr rtlCol="0" anchor="ctr" wrap="square" lIns="164592" rIns="164592" tIns="109728" bIns="73152"/>
           <a:lstStyle/>
           <a:p>
             <a:pPr algn="l">
@@ -23296,44 +24429,176 @@
             <a:r>
               <a:t>            command.angular.z = max(min(-0.004 * error, 0.6), -0.6)</a:t>
             </a:r>
-            <a:br/>
+          </a:p>
+          <a:p>
+            <a:pPr algn="l">
+              <a:spcAft>
+                <a:spcPts val="0"/>
+              </a:spcAft>
+              <a:defRPr sz="1400" b="0">
+                <a:solidFill>
+                  <a:srgbClr val="FFFFFF"/>
+                </a:solidFill>
+                <a:latin typeface="DejaVu Sans Mono"/>
+              </a:defRPr>
+            </a:pPr>
             <a:r>
               <a:t>        self.command_publisher.publish(command)</a:t>
             </a:r>
-            <a:br/>
-            <a:br/>
+          </a:p>
+          <a:p>
+            <a:pPr algn="l">
+              <a:spcAft>
+                <a:spcPts val="0"/>
+              </a:spcAft>
+              <a:defRPr sz="1400" b="0">
+                <a:solidFill>
+                  <a:srgbClr val="FFFFFF"/>
+                </a:solidFill>
+                <a:latin typeface="DejaVu Sans Mono"/>
+              </a:defRPr>
+            </a:pPr>
+          </a:p>
+          <a:p>
+            <a:pPr algn="l">
+              <a:spcAft>
+                <a:spcPts val="0"/>
+              </a:spcAft>
+              <a:defRPr sz="1400" b="0">
+                <a:solidFill>
+                  <a:srgbClr val="FFFFFF"/>
+                </a:solidFill>
+                <a:latin typeface="DejaVu Sans Mono"/>
+              </a:defRPr>
+            </a:pPr>
             <a:r>
               <a:t>def main():</a:t>
             </a:r>
-            <a:br/>
+          </a:p>
+          <a:p>
+            <a:pPr algn="l">
+              <a:spcAft>
+                <a:spcPts val="0"/>
+              </a:spcAft>
+              <a:defRPr sz="1400" b="0">
+                <a:solidFill>
+                  <a:srgbClr val="FFFFFF"/>
+                </a:solidFill>
+                <a:latin typeface="DejaVu Sans Mono"/>
+              </a:defRPr>
+            </a:pPr>
             <a:r>
               <a:t>    rclpy.init()</a:t>
             </a:r>
-            <a:br/>
+          </a:p>
+          <a:p>
+            <a:pPr algn="l">
+              <a:spcAft>
+                <a:spcPts val="0"/>
+              </a:spcAft>
+              <a:defRPr sz="1400" b="0">
+                <a:solidFill>
+                  <a:srgbClr val="FFFFFF"/>
+                </a:solidFill>
+                <a:latin typeface="DejaVu Sans Mono"/>
+              </a:defRPr>
+            </a:pPr>
             <a:r>
               <a:t>    node = MissionManager()</a:t>
             </a:r>
-            <a:br/>
+          </a:p>
+          <a:p>
+            <a:pPr algn="l">
+              <a:spcAft>
+                <a:spcPts val="0"/>
+              </a:spcAft>
+              <a:defRPr sz="1400" b="0">
+                <a:solidFill>
+                  <a:srgbClr val="FFFFFF"/>
+                </a:solidFill>
+                <a:latin typeface="DejaVu Sans Mono"/>
+              </a:defRPr>
+            </a:pPr>
             <a:r>
               <a:t>    try:</a:t>
             </a:r>
-            <a:br/>
+          </a:p>
+          <a:p>
+            <a:pPr algn="l">
+              <a:spcAft>
+                <a:spcPts val="0"/>
+              </a:spcAft>
+              <a:defRPr sz="1400" b="0">
+                <a:solidFill>
+                  <a:srgbClr val="FFFFFF"/>
+                </a:solidFill>
+                <a:latin typeface="DejaVu Sans Mono"/>
+              </a:defRPr>
+            </a:pPr>
             <a:r>
               <a:t>        rclpy.spin(node)</a:t>
             </a:r>
-            <a:br/>
+          </a:p>
+          <a:p>
+            <a:pPr algn="l">
+              <a:spcAft>
+                <a:spcPts val="0"/>
+              </a:spcAft>
+              <a:defRPr sz="1400" b="0">
+                <a:solidFill>
+                  <a:srgbClr val="FFFFFF"/>
+                </a:solidFill>
+                <a:latin typeface="DejaVu Sans Mono"/>
+              </a:defRPr>
+            </a:pPr>
             <a:r>
               <a:t>    except KeyboardInterrupt:</a:t>
             </a:r>
-            <a:br/>
+          </a:p>
+          <a:p>
+            <a:pPr algn="l">
+              <a:spcAft>
+                <a:spcPts val="0"/>
+              </a:spcAft>
+              <a:defRPr sz="1400" b="0">
+                <a:solidFill>
+                  <a:srgbClr val="FFFFFF"/>
+                </a:solidFill>
+                <a:latin typeface="DejaVu Sans Mono"/>
+              </a:defRPr>
+            </a:pPr>
             <a:r>
               <a:t>        pass</a:t>
             </a:r>
-            <a:br/>
+          </a:p>
+          <a:p>
+            <a:pPr algn="l">
+              <a:spcAft>
+                <a:spcPts val="0"/>
+              </a:spcAft>
+              <a:defRPr sz="1400" b="0">
+                <a:solidFill>
+                  <a:srgbClr val="FFFFFF"/>
+                </a:solidFill>
+                <a:latin typeface="DejaVu Sans Mono"/>
+              </a:defRPr>
+            </a:pPr>
             <a:r>
               <a:t>    finally:</a:t>
             </a:r>
-            <a:br/>
+          </a:p>
+          <a:p>
+            <a:pPr algn="l">
+              <a:spcAft>
+                <a:spcPts val="0"/>
+              </a:spcAft>
+              <a:defRPr sz="1400" b="0">
+                <a:solidFill>
+                  <a:srgbClr val="FFFFFF"/>
+                </a:solidFill>
+                <a:latin typeface="DejaVu Sans Mono"/>
+              </a:defRPr>
+            </a:pPr>
             <a:r>
               <a:t>        node.destroy_node()</a:t>
             </a:r>
@@ -23750,7 +25015,7 @@
           </a:fontRef>
         </p:style>
         <p:txBody>
-          <a:bodyPr rtlCol="0" anchor="ctr" wrap="square" lIns="164592" rIns="164592" tIns="109728" bIns="36576"/>
+          <a:bodyPr rtlCol="0" anchor="ctr" wrap="square" lIns="164592" rIns="164592" tIns="109728" bIns="73152"/>
           <a:lstStyle/>
           <a:p>
             <a:pPr algn="l">
@@ -23767,7 +25032,19 @@
             <a:r>
               <a:t>        if rclpy.ok():</a:t>
             </a:r>
-            <a:br/>
+          </a:p>
+          <a:p>
+            <a:pPr algn="l">
+              <a:spcAft>
+                <a:spcPts val="0"/>
+              </a:spcAft>
+              <a:defRPr sz="1400" b="0">
+                <a:solidFill>
+                  <a:srgbClr val="FFFFFF"/>
+                </a:solidFill>
+                <a:latin typeface="DejaVu Sans Mono"/>
+              </a:defRPr>
+            </a:pPr>
             <a:r>
               <a:t>            rclpy.shutdown()</a:t>
             </a:r>
@@ -24239,7 +25516,7 @@
           </a:fontRef>
         </p:style>
         <p:txBody>
-          <a:bodyPr rtlCol="0" anchor="ctr" wrap="square" lIns="73152" rIns="73152" tIns="36576" bIns="36576"/>
+          <a:bodyPr rtlCol="0" anchor="ctr" wrap="square" lIns="109728" rIns="109728" tIns="73152" bIns="73152"/>
           <a:lstStyle/>
           <a:p>
             <a:pPr algn="l">
@@ -24256,7 +25533,19 @@
             <a:r>
               <a:t>mkdir -p ~/ros2_curri/my_agv_ws/src/agv_bringup/config</a:t>
             </a:r>
-            <a:br/>
+          </a:p>
+          <a:p>
+            <a:pPr algn="l">
+              <a:spcAft>
+                <a:spcPts val="0"/>
+              </a:spcAft>
+              <a:defRPr sz="1600" b="0">
+                <a:solidFill>
+                  <a:srgbClr val="FFFFFF"/>
+                </a:solidFill>
+                <a:latin typeface="DejaVu Sans Mono"/>
+              </a:defRPr>
+            </a:pPr>
             <a:r>
               <a:t>nano ~/ros2_curri/my_agv_ws/src/agv_bringup/config/mission.yaml</a:t>
             </a:r>
@@ -26070,7 +27359,7 @@
           </a:fontRef>
         </p:style>
         <p:txBody>
-          <a:bodyPr rtlCol="0" anchor="ctr" wrap="square" lIns="164592" rIns="164592" tIns="109728" bIns="36576"/>
+          <a:bodyPr rtlCol="0" anchor="ctr" wrap="square" lIns="164592" rIns="164592" tIns="109728" bIns="73152"/>
           <a:lstStyle/>
           <a:p>
             <a:pPr algn="l">
@@ -26087,47 +27376,179 @@
             <a:r>
               <a:t>mission_manager:</a:t>
             </a:r>
-            <a:br/>
+          </a:p>
+          <a:p>
+            <a:pPr algn="l">
+              <a:spcAft>
+                <a:spcPts val="0"/>
+              </a:spcAft>
+              <a:defRPr sz="1400" b="0">
+                <a:solidFill>
+                  <a:srgbClr val="FFFFFF"/>
+                </a:solidFill>
+                <a:latin typeface="DejaVu Sans Mono"/>
+              </a:defRPr>
+            </a:pPr>
             <a:r>
               <a:t>  ros__parameters:</a:t>
             </a:r>
-            <a:br/>
+          </a:p>
+          <a:p>
+            <a:pPr algn="l">
+              <a:spcAft>
+                <a:spcPts val="0"/>
+              </a:spcAft>
+              <a:defRPr sz="1400" b="0">
+                <a:solidFill>
+                  <a:srgbClr val="FFFFFF"/>
+                </a:solidFill>
+                <a:latin typeface="DejaVu Sans Mono"/>
+              </a:defRPr>
+            </a:pPr>
             <a:r>
               <a:t>    use_sim_time: true</a:t>
             </a:r>
-            <a:br/>
+          </a:p>
+          <a:p>
+            <a:pPr algn="l">
+              <a:spcAft>
+                <a:spcPts val="0"/>
+              </a:spcAft>
+              <a:defRPr sz="1400" b="0">
+                <a:solidFill>
+                  <a:srgbClr val="FFFFFF"/>
+                </a:solidFill>
+                <a:latin typeface="DejaVu Sans Mono"/>
+              </a:defRPr>
+            </a:pPr>
             <a:r>
               <a:t>    stop_distance: 0.50</a:t>
             </a:r>
-            <a:br/>
+          </a:p>
+          <a:p>
+            <a:pPr algn="l">
+              <a:spcAft>
+                <a:spcPts val="0"/>
+              </a:spcAft>
+              <a:defRPr sz="1400" b="0">
+                <a:solidFill>
+                  <a:srgbClr val="FFFFFF"/>
+                </a:solidFill>
+                <a:latin typeface="DejaVu Sans Mono"/>
+              </a:defRPr>
+            </a:pPr>
             <a:r>
               <a:t>    search_speed: 0.25</a:t>
             </a:r>
-            <a:br/>
+          </a:p>
+          <a:p>
+            <a:pPr algn="l">
+              <a:spcAft>
+                <a:spcPts val="0"/>
+              </a:spcAft>
+              <a:defRPr sz="1400" b="0">
+                <a:solidFill>
+                  <a:srgbClr val="FFFFFF"/>
+                </a:solidFill>
+                <a:latin typeface="DejaVu Sans Mono"/>
+              </a:defRPr>
+            </a:pPr>
             <a:r>
               <a:t>    approach_speed: 0.15</a:t>
             </a:r>
-            <a:br/>
+          </a:p>
+          <a:p>
+            <a:pPr algn="l">
+              <a:spcAft>
+                <a:spcPts val="0"/>
+              </a:spcAft>
+              <a:defRPr sz="1400" b="0">
+                <a:solidFill>
+                  <a:srgbClr val="FFFFFF"/>
+                </a:solidFill>
+                <a:latin typeface="DejaVu Sans Mono"/>
+              </a:defRPr>
+            </a:pPr>
             <a:r>
               <a:t>    image_center_x: 320</a:t>
             </a:r>
-            <a:br/>
+          </a:p>
+          <a:p>
+            <a:pPr algn="l">
+              <a:spcAft>
+                <a:spcPts val="0"/>
+              </a:spcAft>
+              <a:defRPr sz="1400" b="0">
+                <a:solidFill>
+                  <a:srgbClr val="FFFFFF"/>
+                </a:solidFill>
+                <a:latin typeface="DejaVu Sans Mono"/>
+              </a:defRPr>
+            </a:pPr>
             <a:r>
               <a:t>    target_timeout_sec: 0.70</a:t>
             </a:r>
-            <a:br/>
+          </a:p>
+          <a:p>
+            <a:pPr algn="l">
+              <a:spcAft>
+                <a:spcPts val="0"/>
+              </a:spcAft>
+              <a:defRPr sz="1400" b="0">
+                <a:solidFill>
+                  <a:srgbClr val="FFFFFF"/>
+                </a:solidFill>
+                <a:latin typeface="DejaVu Sans Mono"/>
+              </a:defRPr>
+            </a:pPr>
             <a:r>
               <a:t>safety_controller:</a:t>
             </a:r>
-            <a:br/>
+          </a:p>
+          <a:p>
+            <a:pPr algn="l">
+              <a:spcAft>
+                <a:spcPts val="0"/>
+              </a:spcAft>
+              <a:defRPr sz="1400" b="0">
+                <a:solidFill>
+                  <a:srgbClr val="FFFFFF"/>
+                </a:solidFill>
+                <a:latin typeface="DejaVu Sans Mono"/>
+              </a:defRPr>
+            </a:pPr>
             <a:r>
               <a:t>  ros__parameters:</a:t>
             </a:r>
-            <a:br/>
+          </a:p>
+          <a:p>
+            <a:pPr algn="l">
+              <a:spcAft>
+                <a:spcPts val="0"/>
+              </a:spcAft>
+              <a:defRPr sz="1400" b="0">
+                <a:solidFill>
+                  <a:srgbClr val="FFFFFF"/>
+                </a:solidFill>
+                <a:latin typeface="DejaVu Sans Mono"/>
+              </a:defRPr>
+            </a:pPr>
             <a:r>
               <a:t>    use_sim_time: true</a:t>
             </a:r>
-            <a:br/>
+          </a:p>
+          <a:p>
+            <a:pPr algn="l">
+              <a:spcAft>
+                <a:spcPts val="0"/>
+              </a:spcAft>
+              <a:defRPr sz="1400" b="0">
+                <a:solidFill>
+                  <a:srgbClr val="FFFFFF"/>
+                </a:solidFill>
+                <a:latin typeface="DejaVu Sans Mono"/>
+              </a:defRPr>
+            </a:pPr>
             <a:r>
               <a:t>    stop_distance: 0.50</a:t>
             </a:r>
@@ -26544,7 +27965,7 @@
           </a:fontRef>
         </p:style>
         <p:txBody>
-          <a:bodyPr rtlCol="0" anchor="ctr" wrap="square" lIns="164592" rIns="164592" tIns="109728" bIns="36576"/>
+          <a:bodyPr rtlCol="0" anchor="ctr" wrap="square" lIns="164592" rIns="164592" tIns="109728" bIns="73152"/>
           <a:lstStyle/>
           <a:p>
             <a:pPr algn="l">
@@ -27163,7 +28584,7 @@
               </a:defRPr>
             </a:pPr>
             <a:r>
-              <a:t>현재 단계 실행 1/2    |    현재 폴더 ~/ros2_curri/my_agv_ws    |    현재 터미널</a:t>
+              <a:t>현재 단계 실행 1/2    |    현재 폴더 ~/ros2_curri/my_agv_ws    |    터미널 1</a:t>
             </a:r>
           </a:p>
         </p:txBody>
@@ -27176,25 +28597,25 @@
         </p:nvSpPr>
         <p:spPr>
           <a:xfrm>
-            <a:off x="676656" y="1764792"/>
-            <a:ext cx="1828800" cy="347472"/>
-          </a:xfrm>
-          <a:prstGeom prst="rect">
-            <a:avLst/>
-          </a:prstGeom>
-          <a:noFill/>
-        </p:spPr>
-        <p:txBody>
-          <a:bodyPr wrap="square" lIns="73152" rIns="73152" tIns="36576" bIns="36576">
-            <a:spAutoFit/>
-          </a:bodyPr>
-          <a:lstStyle/>
-          <a:p>
-            <a:pPr algn="l">
-              <a:spcAft>
-                <a:spcPts val="0"/>
-              </a:spcAft>
-              <a:defRPr sz="1800" b="1">
+            <a:off x="676656" y="1719072"/>
+            <a:ext cx="1691640" cy="274320"/>
+          </a:xfrm>
+          <a:prstGeom prst="rect">
+            <a:avLst/>
+          </a:prstGeom>
+          <a:noFill/>
+        </p:spPr>
+        <p:txBody>
+          <a:bodyPr wrap="square" lIns="73152" rIns="73152" tIns="36576" bIns="36576">
+            <a:spAutoFit/>
+          </a:bodyPr>
+          <a:lstStyle/>
+          <a:p>
+            <a:pPr algn="l">
+              <a:spcAft>
+                <a:spcPts val="0"/>
+              </a:spcAft>
+              <a:defRPr sz="1700" b="1">
                 <a:solidFill>
                   <a:srgbClr val="225B9B"/>
                 </a:solidFill>
@@ -27202,7 +28623,7 @@
               </a:defRPr>
             </a:pPr>
             <a:r>
-              <a:t>왜 하는가</a:t>
+              <a:t>명령의 목적</a:t>
             </a:r>
           </a:p>
         </p:txBody>
@@ -27215,7 +28636,7 @@
         </p:nvSpPr>
         <p:spPr>
           <a:xfrm>
-            <a:off x="676656" y="2103120"/>
+            <a:off x="676656" y="2002536"/>
             <a:ext cx="10789920" cy="512064"/>
           </a:xfrm>
           <a:prstGeom prst="rect">
@@ -27233,7 +28654,7 @@
               <a:spcAft>
                 <a:spcPts val="0"/>
               </a:spcAft>
-              <a:defRPr sz="2000" b="0">
+              <a:defRPr sz="1800" b="0">
                 <a:solidFill>
                   <a:srgbClr val="122C4E"/>
                 </a:solidFill>
@@ -27248,14 +28669,53 @@
       </p:sp>
       <p:sp>
         <p:nvSpPr>
-          <p:cNvPr id="9" name="Rounded Rectangle 8"/>
+          <p:cNvPr id="9" name="TextBox 8"/>
+          <p:cNvSpPr txBox="1"/>
+          <p:nvPr/>
+        </p:nvSpPr>
+        <p:spPr>
+          <a:xfrm>
+            <a:off x="676656" y="2816352"/>
+            <a:ext cx="10835640" cy="256032"/>
+          </a:xfrm>
+          <a:prstGeom prst="rect">
+            <a:avLst/>
+          </a:prstGeom>
+          <a:noFill/>
+        </p:spPr>
+        <p:txBody>
+          <a:bodyPr wrap="square" lIns="73152" rIns="73152" tIns="36576" bIns="36576">
+            <a:spAutoFit/>
+          </a:bodyPr>
+          <a:lstStyle/>
+          <a:p>
+            <a:pPr algn="ctr">
+              <a:spcAft>
+                <a:spcPts val="0"/>
+              </a:spcAft>
+              <a:defRPr sz="1600" b="1">
+                <a:solidFill>
+                  <a:srgbClr val="225B9B"/>
+                </a:solidFill>
+                <a:latin typeface="Noto Sans CJK KR"/>
+              </a:defRPr>
+            </a:pPr>
+            <a:r>
+              <a:t>터미널 1 — 아래 검은 블록은 명령만 복사합니다.</a:t>
+            </a:r>
+          </a:p>
+        </p:txBody>
+      </p:sp>
+      <p:sp>
+        <p:nvSpPr>
+          <p:cNvPr id="10" name="Rounded Rectangle 9"/>
           <p:cNvSpPr/>
           <p:nvPr/>
         </p:nvSpPr>
         <p:spPr>
           <a:xfrm>
-            <a:off x="676656" y="2871216"/>
-            <a:ext cx="10835640" cy="2331720"/>
+            <a:off x="676656" y="3154680"/>
+            <a:ext cx="10835640" cy="1938528"/>
           </a:xfrm>
           <a:prstGeom prst="roundRect">
             <a:avLst/>
@@ -27284,7 +28744,7 @@
           </a:fontRef>
         </p:style>
         <p:txBody>
-          <a:bodyPr rtlCol="0" anchor="ctr" wrap="square" lIns="73152" rIns="73152" tIns="36576" bIns="36576"/>
+          <a:bodyPr rtlCol="0" anchor="ctr" wrap="square" lIns="109728" rIns="109728" tIns="73152" bIns="73152"/>
           <a:lstStyle/>
           <a:p>
             <a:pPr algn="l">
@@ -27301,15 +28761,51 @@
             <a:r>
               <a:t>cd ~/ros2_curri/my_agv_ws</a:t>
             </a:r>
-            <a:br/>
+          </a:p>
+          <a:p>
+            <a:pPr algn="l">
+              <a:spcAft>
+                <a:spcPts val="0"/>
+              </a:spcAft>
+              <a:defRPr sz="1600" b="0">
+                <a:solidFill>
+                  <a:srgbClr val="FFFFFF"/>
+                </a:solidFill>
+                <a:latin typeface="DejaVu Sans Mono"/>
+              </a:defRPr>
+            </a:pPr>
             <a:r>
               <a:t>colcon build --symlink-install --packages-select agv_mission</a:t>
             </a:r>
-            <a:br/>
+          </a:p>
+          <a:p>
+            <a:pPr algn="l">
+              <a:spcAft>
+                <a:spcPts val="0"/>
+              </a:spcAft>
+              <a:defRPr sz="1600" b="0">
+                <a:solidFill>
+                  <a:srgbClr val="FFFFFF"/>
+                </a:solidFill>
+                <a:latin typeface="DejaVu Sans Mono"/>
+              </a:defRPr>
+            </a:pPr>
             <a:r>
               <a:t>source install/setup.bash</a:t>
             </a:r>
-            <a:br/>
+          </a:p>
+          <a:p>
+            <a:pPr algn="l">
+              <a:spcAft>
+                <a:spcPts val="0"/>
+              </a:spcAft>
+              <a:defRPr sz="1600" b="0">
+                <a:solidFill>
+                  <a:srgbClr val="FFFFFF"/>
+                </a:solidFill>
+                <a:latin typeface="DejaVu Sans Mono"/>
+              </a:defRPr>
+            </a:pPr>
             <a:r>
               <a:t>ros2 run agv_mission mission_manager</a:t>
             </a:r>
@@ -27318,31 +28814,31 @@
       </p:sp>
       <p:sp>
         <p:nvSpPr>
-          <p:cNvPr id="10" name="TextBox 9"/>
-          <p:cNvSpPr txBox="1"/>
-          <p:nvPr/>
-        </p:nvSpPr>
-        <p:spPr>
-          <a:xfrm>
-            <a:off x="768096" y="5468112"/>
-            <a:ext cx="1143000" cy="256032"/>
-          </a:xfrm>
-          <a:prstGeom prst="rect">
-            <a:avLst/>
-          </a:prstGeom>
-          <a:noFill/>
-        </p:spPr>
-        <p:txBody>
-          <a:bodyPr wrap="square" lIns="73152" rIns="73152" tIns="36576" bIns="36576">
-            <a:spAutoFit/>
-          </a:bodyPr>
-          <a:lstStyle/>
-          <a:p>
-            <a:pPr algn="l">
-              <a:spcAft>
-                <a:spcPts val="0"/>
-              </a:spcAft>
-              <a:defRPr sz="1800" b="1">
+          <p:cNvPr id="11" name="TextBox 10"/>
+          <p:cNvSpPr txBox="1"/>
+          <p:nvPr/>
+        </p:nvSpPr>
+        <p:spPr>
+          <a:xfrm>
+            <a:off x="768096" y="5276088"/>
+            <a:ext cx="10561320" cy="384048"/>
+          </a:xfrm>
+          <a:prstGeom prst="rect">
+            <a:avLst/>
+          </a:prstGeom>
+          <a:noFill/>
+        </p:spPr>
+        <p:txBody>
+          <a:bodyPr wrap="square" lIns="73152" rIns="73152" tIns="36576" bIns="36576">
+            <a:spAutoFit/>
+          </a:bodyPr>
+          <a:lstStyle/>
+          <a:p>
+            <a:pPr algn="ctr">
+              <a:spcAft>
+                <a:spcPts val="0"/>
+              </a:spcAft>
+              <a:defRPr sz="1500" b="1">
                 <a:solidFill>
                   <a:srgbClr val="2A8B5A"/>
                 </a:solidFill>
@@ -27350,38 +28846,38 @@
               </a:defRPr>
             </a:pPr>
             <a:r>
-              <a:t>확인</a:t>
-            </a:r>
-          </a:p>
-        </p:txBody>
-      </p:sp>
-      <p:sp>
-        <p:nvSpPr>
-          <p:cNvPr id="11" name="TextBox 10"/>
-          <p:cNvSpPr txBox="1"/>
-          <p:nvPr/>
-        </p:nvSpPr>
-        <p:spPr>
-          <a:xfrm>
-            <a:off x="768096" y="5742432"/>
-            <a:ext cx="10561320" cy="347472"/>
-          </a:xfrm>
-          <a:prstGeom prst="rect">
-            <a:avLst/>
-          </a:prstGeom>
-          <a:noFill/>
-        </p:spPr>
-        <p:txBody>
-          <a:bodyPr wrap="square" lIns="73152" rIns="73152" tIns="36576" bIns="36576">
-            <a:spAutoFit/>
-          </a:bodyPr>
-          <a:lstStyle/>
-          <a:p>
-            <a:pPr algn="l">
-              <a:spcAft>
-                <a:spcPts val="0"/>
-              </a:spcAft>
-              <a:defRPr sz="1800" b="0">
+              <a:t>터미널 1 역할: 이 node를 실행합니다. 출력이 계속 나오는 동안 Ctrl+C로 종료하지 않습니다.</a:t>
+            </a:r>
+          </a:p>
+        </p:txBody>
+      </p:sp>
+      <p:sp>
+        <p:nvSpPr>
+          <p:cNvPr id="12" name="TextBox 11"/>
+          <p:cNvSpPr txBox="1"/>
+          <p:nvPr/>
+        </p:nvSpPr>
+        <p:spPr>
+          <a:xfrm>
+            <a:off x="768096" y="5916168"/>
+            <a:ext cx="10561320" cy="292608"/>
+          </a:xfrm>
+          <a:prstGeom prst="rect">
+            <a:avLst/>
+          </a:prstGeom>
+          <a:noFill/>
+        </p:spPr>
+        <p:txBody>
+          <a:bodyPr wrap="square" lIns="73152" rIns="73152" tIns="36576" bIns="36576">
+            <a:spAutoFit/>
+          </a:bodyPr>
+          <a:lstStyle/>
+          <a:p>
+            <a:pPr algn="ctr">
+              <a:spcAft>
+                <a:spcPts val="0"/>
+              </a:spcAft>
+              <a:defRPr sz="1500" b="1">
                 <a:solidFill>
                   <a:srgbClr val="122C4E"/>
                 </a:solidFill>
@@ -27389,7 +28885,7 @@
               </a:defRPr>
             </a:pPr>
             <a:r>
-              <a:t>출력에서 topic·frame·파일 이름 또는 성공 메시지를 찾고, 맞지 않으면 다음 파일로 가지 않습니다.</a:t>
+              <a:t>확인: 출력에서 topic·frame·파일 이름 또는 성공 메시지를 찾고, 맞지 않으면 다음 파일로 가지 않습니다.</a:t>
             </a:r>
           </a:p>
         </p:txBody>
@@ -27621,7 +29117,7 @@
               </a:defRPr>
             </a:pPr>
             <a:r>
-              <a:t>현재 단계 실행 2/2    |    현재 폴더 ~/ros2_curri/my_agv_ws    |    현재 터미널</a:t>
+              <a:t>현재 단계 실행 2/2    |    현재 폴더 ~/ros2_curri/my_agv_ws    |    터미널 1</a:t>
             </a:r>
           </a:p>
         </p:txBody>
@@ -27634,25 +29130,25 @@
         </p:nvSpPr>
         <p:spPr>
           <a:xfrm>
-            <a:off x="676656" y="1764792"/>
-            <a:ext cx="1828800" cy="347472"/>
-          </a:xfrm>
-          <a:prstGeom prst="rect">
-            <a:avLst/>
-          </a:prstGeom>
-          <a:noFill/>
-        </p:spPr>
-        <p:txBody>
-          <a:bodyPr wrap="square" lIns="73152" rIns="73152" tIns="36576" bIns="36576">
-            <a:spAutoFit/>
-          </a:bodyPr>
-          <a:lstStyle/>
-          <a:p>
-            <a:pPr algn="l">
-              <a:spcAft>
-                <a:spcPts val="0"/>
-              </a:spcAft>
-              <a:defRPr sz="1800" b="1">
+            <a:off x="676656" y="1719072"/>
+            <a:ext cx="1691640" cy="274320"/>
+          </a:xfrm>
+          <a:prstGeom prst="rect">
+            <a:avLst/>
+          </a:prstGeom>
+          <a:noFill/>
+        </p:spPr>
+        <p:txBody>
+          <a:bodyPr wrap="square" lIns="73152" rIns="73152" tIns="36576" bIns="36576">
+            <a:spAutoFit/>
+          </a:bodyPr>
+          <a:lstStyle/>
+          <a:p>
+            <a:pPr algn="l">
+              <a:spcAft>
+                <a:spcPts val="0"/>
+              </a:spcAft>
+              <a:defRPr sz="1700" b="1">
                 <a:solidFill>
                   <a:srgbClr val="225B9B"/>
                 </a:solidFill>
@@ -27660,7 +29156,7 @@
               </a:defRPr>
             </a:pPr>
             <a:r>
-              <a:t>왜 하는가</a:t>
+              <a:t>명령의 목적</a:t>
             </a:r>
           </a:p>
         </p:txBody>
@@ -27673,7 +29169,7 @@
         </p:nvSpPr>
         <p:spPr>
           <a:xfrm>
-            <a:off x="676656" y="2103120"/>
+            <a:off x="676656" y="2002536"/>
             <a:ext cx="10789920" cy="512064"/>
           </a:xfrm>
           <a:prstGeom prst="rect">
@@ -27691,7 +29187,7 @@
               <a:spcAft>
                 <a:spcPts val="0"/>
               </a:spcAft>
-              <a:defRPr sz="2000" b="0">
+              <a:defRPr sz="1800" b="0">
                 <a:solidFill>
                   <a:srgbClr val="122C4E"/>
                 </a:solidFill>
@@ -27706,14 +29202,53 @@
       </p:sp>
       <p:sp>
         <p:nvSpPr>
-          <p:cNvPr id="9" name="Rounded Rectangle 8"/>
+          <p:cNvPr id="9" name="TextBox 8"/>
+          <p:cNvSpPr txBox="1"/>
+          <p:nvPr/>
+        </p:nvSpPr>
+        <p:spPr>
+          <a:xfrm>
+            <a:off x="676656" y="2816352"/>
+            <a:ext cx="10835640" cy="256032"/>
+          </a:xfrm>
+          <a:prstGeom prst="rect">
+            <a:avLst/>
+          </a:prstGeom>
+          <a:noFill/>
+        </p:spPr>
+        <p:txBody>
+          <a:bodyPr wrap="square" lIns="73152" rIns="73152" tIns="36576" bIns="36576">
+            <a:spAutoFit/>
+          </a:bodyPr>
+          <a:lstStyle/>
+          <a:p>
+            <a:pPr algn="ctr">
+              <a:spcAft>
+                <a:spcPts val="0"/>
+              </a:spcAft>
+              <a:defRPr sz="1600" b="1">
+                <a:solidFill>
+                  <a:srgbClr val="225B9B"/>
+                </a:solidFill>
+                <a:latin typeface="Noto Sans CJK KR"/>
+              </a:defRPr>
+            </a:pPr>
+            <a:r>
+              <a:t>터미널 1 — 아래 검은 블록은 명령만 복사합니다.</a:t>
+            </a:r>
+          </a:p>
+        </p:txBody>
+      </p:sp>
+      <p:sp>
+        <p:nvSpPr>
+          <p:cNvPr id="10" name="Rounded Rectangle 9"/>
           <p:cNvSpPr/>
           <p:nvPr/>
         </p:nvSpPr>
         <p:spPr>
           <a:xfrm>
-            <a:off x="676656" y="2871216"/>
-            <a:ext cx="10835640" cy="2331720"/>
+            <a:off x="676656" y="3154680"/>
+            <a:ext cx="10835640" cy="1938528"/>
           </a:xfrm>
           <a:prstGeom prst="roundRect">
             <a:avLst/>
@@ -27742,7 +29277,7 @@
           </a:fontRef>
         </p:style>
         <p:txBody>
-          <a:bodyPr rtlCol="0" anchor="ctr" wrap="square" lIns="73152" rIns="73152" tIns="36576" bIns="36576"/>
+          <a:bodyPr rtlCol="0" anchor="ctr" wrap="square" lIns="109728" rIns="109728" tIns="73152" bIns="73152"/>
           <a:lstStyle/>
           <a:p>
             <a:pPr algn="l">
@@ -27759,7 +29294,19 @@
             <a:r>
               <a:t>ros2 topic echo /mission_state</a:t>
             </a:r>
-            <a:br/>
+          </a:p>
+          <a:p>
+            <a:pPr algn="l">
+              <a:spcAft>
+                <a:spcPts val="0"/>
+              </a:spcAft>
+              <a:defRPr sz="1600" b="0">
+                <a:solidFill>
+                  <a:srgbClr val="FFFFFF"/>
+                </a:solidFill>
+                <a:latin typeface="DejaVu Sans Mono"/>
+              </a:defRPr>
+            </a:pPr>
             <a:r>
               <a:t>ros2 topic echo /cmd_vel_raw</a:t>
             </a:r>
@@ -27768,31 +29315,31 @@
       </p:sp>
       <p:sp>
         <p:nvSpPr>
-          <p:cNvPr id="10" name="TextBox 9"/>
-          <p:cNvSpPr txBox="1"/>
-          <p:nvPr/>
-        </p:nvSpPr>
-        <p:spPr>
-          <a:xfrm>
-            <a:off x="768096" y="5468112"/>
-            <a:ext cx="1143000" cy="256032"/>
-          </a:xfrm>
-          <a:prstGeom prst="rect">
-            <a:avLst/>
-          </a:prstGeom>
-          <a:noFill/>
-        </p:spPr>
-        <p:txBody>
-          <a:bodyPr wrap="square" lIns="73152" rIns="73152" tIns="36576" bIns="36576">
-            <a:spAutoFit/>
-          </a:bodyPr>
-          <a:lstStyle/>
-          <a:p>
-            <a:pPr algn="l">
-              <a:spcAft>
-                <a:spcPts val="0"/>
-              </a:spcAft>
-              <a:defRPr sz="1800" b="1">
+          <p:cNvPr id="11" name="TextBox 10"/>
+          <p:cNvSpPr txBox="1"/>
+          <p:nvPr/>
+        </p:nvSpPr>
+        <p:spPr>
+          <a:xfrm>
+            <a:off x="768096" y="5276088"/>
+            <a:ext cx="10561320" cy="384048"/>
+          </a:xfrm>
+          <a:prstGeom prst="rect">
+            <a:avLst/>
+          </a:prstGeom>
+          <a:noFill/>
+        </p:spPr>
+        <p:txBody>
+          <a:bodyPr wrap="square" lIns="73152" rIns="73152" tIns="36576" bIns="36576">
+            <a:spAutoFit/>
+          </a:bodyPr>
+          <a:lstStyle/>
+          <a:p>
+            <a:pPr algn="ctr">
+              <a:spcAft>
+                <a:spcPts val="0"/>
+              </a:spcAft>
+              <a:defRPr sz="1500" b="1">
                 <a:solidFill>
                   <a:srgbClr val="2A8B5A"/>
                 </a:solidFill>
@@ -27800,38 +29347,38 @@
               </a:defRPr>
             </a:pPr>
             <a:r>
-              <a:t>확인</a:t>
-            </a:r>
-          </a:p>
-        </p:txBody>
-      </p:sp>
-      <p:sp>
-        <p:nvSpPr>
-          <p:cNvPr id="11" name="TextBox 10"/>
-          <p:cNvSpPr txBox="1"/>
-          <p:nvPr/>
-        </p:nvSpPr>
-        <p:spPr>
-          <a:xfrm>
-            <a:off x="768096" y="5742432"/>
-            <a:ext cx="10561320" cy="347472"/>
-          </a:xfrm>
-          <a:prstGeom prst="rect">
-            <a:avLst/>
-          </a:prstGeom>
-          <a:noFill/>
-        </p:spPr>
-        <p:txBody>
-          <a:bodyPr wrap="square" lIns="73152" rIns="73152" tIns="36576" bIns="36576">
-            <a:spAutoFit/>
-          </a:bodyPr>
-          <a:lstStyle/>
-          <a:p>
-            <a:pPr algn="l">
-              <a:spcAft>
-                <a:spcPts val="0"/>
-              </a:spcAft>
-              <a:defRPr sz="1800" b="0">
+              <a:t>터미널 1 역할: 다른 터미널의 실행 결과를 이 창에서 관찰·검증합니다.</a:t>
+            </a:r>
+          </a:p>
+        </p:txBody>
+      </p:sp>
+      <p:sp>
+        <p:nvSpPr>
+          <p:cNvPr id="12" name="TextBox 11"/>
+          <p:cNvSpPr txBox="1"/>
+          <p:nvPr/>
+        </p:nvSpPr>
+        <p:spPr>
+          <a:xfrm>
+            <a:off x="768096" y="5916168"/>
+            <a:ext cx="10561320" cy="292608"/>
+          </a:xfrm>
+          <a:prstGeom prst="rect">
+            <a:avLst/>
+          </a:prstGeom>
+          <a:noFill/>
+        </p:spPr>
+        <p:txBody>
+          <a:bodyPr wrap="square" lIns="73152" rIns="73152" tIns="36576" bIns="36576">
+            <a:spAutoFit/>
+          </a:bodyPr>
+          <a:lstStyle/>
+          <a:p>
+            <a:pPr algn="ctr">
+              <a:spcAft>
+                <a:spcPts val="0"/>
+              </a:spcAft>
+              <a:defRPr sz="1500" b="1">
                 <a:solidFill>
                   <a:srgbClr val="122C4E"/>
                 </a:solidFill>
@@ -27839,7 +29386,7 @@
               </a:defRPr>
             </a:pPr>
             <a:r>
-              <a:t>출력에서 topic·frame·파일 이름 또는 성공 메시지를 찾고, 맞지 않으면 다음 파일로 가지 않습니다.</a:t>
+              <a:t>확인: 출력에서 topic·frame·파일 이름 또는 성공 메시지를 찾고, 맞지 않으면 다음 파일로 가지 않습니다.</a:t>
             </a:r>
           </a:p>
         </p:txBody>
@@ -28071,21 +29618,138 @@
               </a:defRPr>
             </a:pPr>
             <a:r>
-              <a:t>현재 단계 실행    |    현재 폴더 ~/ros2_curri/my_agv_ws    |    현재 터미널</a:t>
-            </a:r>
-          </a:p>
-        </p:txBody>
-      </p:sp>
-      <p:sp>
-        <p:nvSpPr>
-          <p:cNvPr id="7" name="Rounded Rectangle 6"/>
+              <a:t>현재 단계 실행    |    현재 폴더 ~/ros2_curri/my_agv_ws    |    터미널 1</a:t>
+            </a:r>
+          </a:p>
+        </p:txBody>
+      </p:sp>
+      <p:sp>
+        <p:nvSpPr>
+          <p:cNvPr id="7" name="TextBox 6"/>
+          <p:cNvSpPr txBox="1"/>
+          <p:nvPr/>
+        </p:nvSpPr>
+        <p:spPr>
+          <a:xfrm>
+            <a:off x="676656" y="1719072"/>
+            <a:ext cx="1691640" cy="274320"/>
+          </a:xfrm>
+          <a:prstGeom prst="rect">
+            <a:avLst/>
+          </a:prstGeom>
+          <a:noFill/>
+        </p:spPr>
+        <p:txBody>
+          <a:bodyPr wrap="square" lIns="73152" rIns="73152" tIns="36576" bIns="36576">
+            <a:spAutoFit/>
+          </a:bodyPr>
+          <a:lstStyle/>
+          <a:p>
+            <a:pPr algn="l">
+              <a:spcAft>
+                <a:spcPts val="0"/>
+              </a:spcAft>
+              <a:defRPr sz="1700" b="1">
+                <a:solidFill>
+                  <a:srgbClr val="225B9B"/>
+                </a:solidFill>
+                <a:latin typeface="Noto Sans CJK KR"/>
+              </a:defRPr>
+            </a:pPr>
+            <a:r>
+              <a:t>명령의 목적</a:t>
+            </a:r>
+          </a:p>
+        </p:txBody>
+      </p:sp>
+      <p:sp>
+        <p:nvSpPr>
+          <p:cNvPr id="8" name="TextBox 7"/>
+          <p:cNvSpPr txBox="1"/>
+          <p:nvPr/>
+        </p:nvSpPr>
+        <p:spPr>
+          <a:xfrm>
+            <a:off x="676656" y="2002536"/>
+            <a:ext cx="10789920" cy="512064"/>
+          </a:xfrm>
+          <a:prstGeom prst="rect">
+            <a:avLst/>
+          </a:prstGeom>
+          <a:noFill/>
+        </p:spPr>
+        <p:txBody>
+          <a:bodyPr wrap="square" lIns="73152" rIns="73152" tIns="36576" bIns="36576">
+            <a:spAutoFit/>
+          </a:bodyPr>
+          <a:lstStyle/>
+          <a:p>
+            <a:pPr algn="l">
+              <a:spcAft>
+                <a:spcPts val="0"/>
+              </a:spcAft>
+              <a:defRPr sz="1800" b="0">
+                <a:solidFill>
+                  <a:srgbClr val="122C4E"/>
+                </a:solidFill>
+                <a:latin typeface="Noto Sans CJK KR"/>
+              </a:defRPr>
+            </a:pPr>
+            <a:r>
+              <a:t>명령 순서를 바꾸지 않습니다. build가 끝난 뒤 source하고, 마지막 명령으로 node·Gazebo·RViz를 실행합니다.</a:t>
+            </a:r>
+          </a:p>
+        </p:txBody>
+      </p:sp>
+      <p:sp>
+        <p:nvSpPr>
+          <p:cNvPr id="9" name="TextBox 8"/>
+          <p:cNvSpPr txBox="1"/>
+          <p:nvPr/>
+        </p:nvSpPr>
+        <p:spPr>
+          <a:xfrm>
+            <a:off x="676656" y="2816352"/>
+            <a:ext cx="10835640" cy="256032"/>
+          </a:xfrm>
+          <a:prstGeom prst="rect">
+            <a:avLst/>
+          </a:prstGeom>
+          <a:noFill/>
+        </p:spPr>
+        <p:txBody>
+          <a:bodyPr wrap="square" lIns="73152" rIns="73152" tIns="36576" bIns="36576">
+            <a:spAutoFit/>
+          </a:bodyPr>
+          <a:lstStyle/>
+          <a:p>
+            <a:pPr algn="ctr">
+              <a:spcAft>
+                <a:spcPts val="0"/>
+              </a:spcAft>
+              <a:defRPr sz="1600" b="1">
+                <a:solidFill>
+                  <a:srgbClr val="225B9B"/>
+                </a:solidFill>
+                <a:latin typeface="Noto Sans CJK KR"/>
+              </a:defRPr>
+            </a:pPr>
+            <a:r>
+              <a:t>터미널 1 — 아래 검은 블록은 명령만 복사합니다.</a:t>
+            </a:r>
+          </a:p>
+        </p:txBody>
+      </p:sp>
+      <p:sp>
+        <p:nvSpPr>
+          <p:cNvPr id="10" name="Rounded Rectangle 9"/>
           <p:cNvSpPr/>
           <p:nvPr/>
         </p:nvSpPr>
         <p:spPr>
           <a:xfrm>
-            <a:off x="658368" y="1700784"/>
-            <a:ext cx="10972800" cy="3182112"/>
+            <a:off x="676656" y="3154680"/>
+            <a:ext cx="10835640" cy="1938528"/>
           </a:xfrm>
           <a:prstGeom prst="roundRect">
             <a:avLst/>
@@ -28114,7 +29778,7 @@
           </a:fontRef>
         </p:style>
         <p:txBody>
-          <a:bodyPr rtlCol="0" anchor="ctr" wrap="square" lIns="73152" rIns="73152" tIns="36576" bIns="36576"/>
+          <a:bodyPr rtlCol="0" anchor="ctr" wrap="square" lIns="109728" rIns="109728" tIns="73152" bIns="73152"/>
           <a:lstStyle/>
           <a:p>
             <a:pPr algn="l">
@@ -28131,7 +29795,19 @@
             <a:r>
               <a:t>source ~/ros2_curri/my_agv_ws/install/setup.bash</a:t>
             </a:r>
-            <a:br/>
+          </a:p>
+          <a:p>
+            <a:pPr algn="l">
+              <a:spcAft>
+                <a:spcPts val="0"/>
+              </a:spcAft>
+              <a:defRPr sz="1600" b="0">
+                <a:solidFill>
+                  <a:srgbClr val="FFFFFF"/>
+                </a:solidFill>
+                <a:latin typeface="DejaVu Sans Mono"/>
+              </a:defRPr>
+            </a:pPr>
             <a:r>
               <a:t>ros2 run agv_mission mission_manager</a:t>
             </a:r>
@@ -28140,31 +29816,31 @@
       </p:sp>
       <p:sp>
         <p:nvSpPr>
-          <p:cNvPr id="8" name="TextBox 7"/>
-          <p:cNvSpPr txBox="1"/>
-          <p:nvPr/>
-        </p:nvSpPr>
-        <p:spPr>
-          <a:xfrm>
-            <a:off x="786384" y="5239512"/>
-            <a:ext cx="1261872" cy="237744"/>
-          </a:xfrm>
-          <a:prstGeom prst="rect">
-            <a:avLst/>
-          </a:prstGeom>
-          <a:noFill/>
-        </p:spPr>
-        <p:txBody>
-          <a:bodyPr wrap="square" lIns="73152" rIns="73152" tIns="36576" bIns="36576">
-            <a:spAutoFit/>
-          </a:bodyPr>
-          <a:lstStyle/>
-          <a:p>
-            <a:pPr algn="l">
-              <a:spcAft>
-                <a:spcPts val="0"/>
-              </a:spcAft>
-              <a:defRPr sz="1800" b="1">
+          <p:cNvPr id="11" name="TextBox 10"/>
+          <p:cNvSpPr txBox="1"/>
+          <p:nvPr/>
+        </p:nvSpPr>
+        <p:spPr>
+          <a:xfrm>
+            <a:off x="768096" y="5276088"/>
+            <a:ext cx="10561320" cy="384048"/>
+          </a:xfrm>
+          <a:prstGeom prst="rect">
+            <a:avLst/>
+          </a:prstGeom>
+          <a:noFill/>
+        </p:spPr>
+        <p:txBody>
+          <a:bodyPr wrap="square" lIns="73152" rIns="73152" tIns="36576" bIns="36576">
+            <a:spAutoFit/>
+          </a:bodyPr>
+          <a:lstStyle/>
+          <a:p>
+            <a:pPr algn="ctr">
+              <a:spcAft>
+                <a:spcPts val="0"/>
+              </a:spcAft>
+              <a:defRPr sz="1500" b="1">
                 <a:solidFill>
                   <a:srgbClr val="2A8B5A"/>
                 </a:solidFill>
@@ -28172,38 +29848,38 @@
               </a:defRPr>
             </a:pPr>
             <a:r>
-              <a:t>확인 기준</a:t>
-            </a:r>
-          </a:p>
-        </p:txBody>
-      </p:sp>
-      <p:sp>
-        <p:nvSpPr>
-          <p:cNvPr id="9" name="TextBox 8"/>
-          <p:cNvSpPr txBox="1"/>
-          <p:nvPr/>
-        </p:nvSpPr>
-        <p:spPr>
-          <a:xfrm>
-            <a:off x="786384" y="5532120"/>
-            <a:ext cx="10469880" cy="420624"/>
-          </a:xfrm>
-          <a:prstGeom prst="rect">
-            <a:avLst/>
-          </a:prstGeom>
-          <a:noFill/>
-        </p:spPr>
-        <p:txBody>
-          <a:bodyPr wrap="square" lIns="73152" rIns="73152" tIns="36576" bIns="36576">
-            <a:spAutoFit/>
-          </a:bodyPr>
-          <a:lstStyle/>
-          <a:p>
-            <a:pPr algn="l">
-              <a:spcAft>
-                <a:spcPts val="0"/>
-              </a:spcAft>
-              <a:defRPr sz="1800" b="0">
+              <a:t>터미널 1 역할: 이 node를 실행합니다. 출력이 계속 나오는 동안 Ctrl+C로 종료하지 않습니다.</a:t>
+            </a:r>
+          </a:p>
+        </p:txBody>
+      </p:sp>
+      <p:sp>
+        <p:nvSpPr>
+          <p:cNvPr id="12" name="TextBox 11"/>
+          <p:cNvSpPr txBox="1"/>
+          <p:nvPr/>
+        </p:nvSpPr>
+        <p:spPr>
+          <a:xfrm>
+            <a:off x="768096" y="5916168"/>
+            <a:ext cx="10561320" cy="292608"/>
+          </a:xfrm>
+          <a:prstGeom prst="rect">
+            <a:avLst/>
+          </a:prstGeom>
+          <a:noFill/>
+        </p:spPr>
+        <p:txBody>
+          <a:bodyPr wrap="square" lIns="73152" rIns="73152" tIns="36576" bIns="36576">
+            <a:spAutoFit/>
+          </a:bodyPr>
+          <a:lstStyle/>
+          <a:p>
+            <a:pPr algn="ctr">
+              <a:spcAft>
+                <a:spcPts val="0"/>
+              </a:spcAft>
+              <a:defRPr sz="1500" b="1">
                 <a:solidFill>
                   <a:srgbClr val="122C4E"/>
                 </a:solidFill>
@@ -28211,7 +29887,7 @@
               </a:defRPr>
             </a:pPr>
             <a:r>
-              <a:t>/mission_state 로그와 /cmd_vel_raw가 detection·obstacle input에 따라 바뀌는 구조를 확인한다.</a:t>
+              <a:t>확인: /mission_state 로그와 /cmd_vel_raw가 detection·obstacle input에 따라 바뀌는 구조를 확인한다.</a:t>
             </a:r>
           </a:p>
         </p:txBody>
@@ -28307,7 +29983,7 @@
               </a:defRPr>
             </a:pPr>
             <a:r>
-              <a:t>실제 ROS 2 환경의 파일·패키지·구성 검증 로그</a:t>
+              <a:t>실제 RViz2: mission text Marker를 같은 scene에서 확인하는 display 구성</a:t>
             </a:r>
           </a:p>
         </p:txBody>
@@ -28392,7 +30068,7 @@
       </p:sp>
       <p:pic>
         <p:nvPicPr>
-          <p:cNvPr id="6" name="Picture 5" descr="validation_terminal.png"/>
+          <p:cNvPr id="6" name="Picture 5" descr="02_rviz_marker_path_actual.png"/>
           <p:cNvPicPr>
             <a:picLocks noChangeAspect="1"/>
           </p:cNvPicPr>
@@ -28406,8 +30082,8 @@
         </p:blipFill>
         <p:spPr>
           <a:xfrm>
-            <a:off x="790956" y="1562649"/>
-            <a:ext cx="10607040" cy="4381924"/>
+            <a:off x="2971409" y="1353312"/>
+            <a:ext cx="6246133" cy="4800600"/>
           </a:xfrm>
           <a:prstGeom prst="rect">
             <a:avLst/>
@@ -28448,7 +30124,7 @@
               </a:defRPr>
             </a:pPr>
             <a:r>
-              <a:t>화면에서 확인: ① 명령/설정  ② 정상 출력 또는 화면  ③ 다음 검증 명령으로 재확인</a:t>
+              <a:t>화면에서 확인: 명령·설정과 화면의 topic·frame·결과 이름을 대조합니다.</a:t>
             </a:r>
           </a:p>
         </p:txBody>
@@ -28505,7 +30181,7 @@
               </a:defRPr>
             </a:pPr>
             <a:r>
-              <a:t>객관적 검증 명령으로 완료를 확인한다</a:t>
+              <a:t>정상 결과: 실제 환경에서 확인한 출력</a:t>
             </a:r>
           </a:p>
         </p:txBody>
@@ -28544,7 +30220,7 @@
               </a:defRPr>
             </a:pPr>
             <a:r>
-              <a:t>화면만 보지 말고 topic·frame·파일·parameter를 다시 확인합니다.</a:t>
+              <a:t>실제 ROS 2 환경의 파일·패키지·구성 검증 로그</a:t>
             </a:r>
           </a:p>
         </p:txBody>
@@ -28627,176 +30303,57 @@
           </a:p>
         </p:txBody>
       </p:sp>
-      <p:sp>
-        <p:nvSpPr>
-          <p:cNvPr id="6" name="Rectangle 5"/>
-          <p:cNvSpPr/>
-          <p:nvPr/>
-        </p:nvSpPr>
-        <p:spPr>
-          <a:xfrm>
-            <a:off x="566928" y="1188720"/>
-            <a:ext cx="11064240" cy="347472"/>
-          </a:xfrm>
-          <a:prstGeom prst="rect">
-            <a:avLst/>
-          </a:prstGeom>
-          <a:solidFill>
-            <a:srgbClr val="F4F7FB"/>
-          </a:solidFill>
-          <a:ln>
-            <a:solidFill>
-              <a:srgbClr val="F4F7FB"/>
-            </a:solidFill>
-          </a:ln>
-        </p:spPr>
-        <p:style>
-          <a:lnRef idx="1">
-            <a:schemeClr val="accent1"/>
-          </a:lnRef>
-          <a:fillRef idx="3">
-            <a:schemeClr val="accent1"/>
-          </a:fillRef>
-          <a:effectRef idx="2">
-            <a:schemeClr val="accent1"/>
-          </a:effectRef>
-          <a:fontRef idx="minor">
-            <a:schemeClr val="lt1"/>
-          </a:fontRef>
-        </p:style>
-        <p:txBody>
-          <a:bodyPr rtlCol="0" anchor="ctr" wrap="square" lIns="73152" rIns="73152" tIns="36576" bIns="36576"/>
-          <a:lstStyle/>
-          <a:p>
-            <a:pPr algn="l">
-              <a:spcAft>
-                <a:spcPts val="0"/>
-              </a:spcAft>
-              <a:defRPr sz="1300" b="1">
-                <a:solidFill>
-                  <a:srgbClr val="122C4E"/>
-                </a:solidFill>
-                <a:latin typeface="Noto Sans CJK KR"/>
-              </a:defRPr>
-            </a:pPr>
-            <a:r>
-              <a:t>현재 단계 검증    |    현재 폴더 ~/ros2_curri/my_agv_ws    |    현재 터미널</a:t>
-            </a:r>
-          </a:p>
-        </p:txBody>
-      </p:sp>
-      <p:sp>
-        <p:nvSpPr>
-          <p:cNvPr id="7" name="Rounded Rectangle 6"/>
-          <p:cNvSpPr/>
-          <p:nvPr/>
-        </p:nvSpPr>
-        <p:spPr>
-          <a:xfrm>
-            <a:off x="658368" y="1755648"/>
-            <a:ext cx="10972800" cy="2148840"/>
-          </a:xfrm>
-          <a:prstGeom prst="roundRect">
-            <a:avLst/>
-          </a:prstGeom>
-          <a:solidFill>
-            <a:srgbClr val="1D232D"/>
-          </a:solidFill>
-          <a:ln>
-            <a:solidFill>
-              <a:srgbClr val="1D232D"/>
-            </a:solidFill>
-          </a:ln>
-        </p:spPr>
-        <p:style>
-          <a:lnRef idx="1">
-            <a:schemeClr val="accent1"/>
-          </a:lnRef>
-          <a:fillRef idx="3">
-            <a:schemeClr val="accent1"/>
-          </a:fillRef>
-          <a:effectRef idx="2">
-            <a:schemeClr val="accent1"/>
-          </a:effectRef>
-          <a:fontRef idx="minor">
-            <a:schemeClr val="lt1"/>
-          </a:fontRef>
-        </p:style>
-        <p:txBody>
-          <a:bodyPr rtlCol="0" anchor="ctr" wrap="square" lIns="73152" rIns="73152" tIns="36576" bIns="36576"/>
-          <a:lstStyle/>
-          <a:p>
-            <a:pPr algn="l">
-              <a:spcAft>
-                <a:spcPts val="0"/>
-              </a:spcAft>
-              <a:defRPr sz="1600" b="0">
-                <a:solidFill>
-                  <a:srgbClr val="FFFFFF"/>
-                </a:solidFill>
-                <a:latin typeface="DejaVu Sans Mono"/>
-              </a:defRPr>
-            </a:pPr>
-            <a:r>
-              <a:t>ros2 topic info /mission_state</a:t>
-            </a:r>
-            <a:br/>
-            <a:r>
-              <a:t>ros2 topic info /cmd_vel_raw</a:t>
-            </a:r>
-            <a:br/>
-            <a:r>
-              <a:t>ros2 param get /mission_manager stop_distance</a:t>
-            </a:r>
-          </a:p>
-        </p:txBody>
-      </p:sp>
-      <p:sp>
-        <p:nvSpPr>
-          <p:cNvPr id="8" name="Rounded Rectangle 7"/>
-          <p:cNvSpPr/>
-          <p:nvPr/>
-        </p:nvSpPr>
-        <p:spPr>
-          <a:xfrm>
-            <a:off x="658368" y="4206240"/>
-            <a:ext cx="10972800" cy="1554480"/>
-          </a:xfrm>
-          <a:prstGeom prst="roundRect">
-            <a:avLst/>
-          </a:prstGeom>
-          <a:solidFill>
-            <a:srgbClr val="F4F7FB"/>
-          </a:solidFill>
-          <a:ln>
-            <a:solidFill>
-              <a:srgbClr val="D1DFD5"/>
-            </a:solidFill>
-          </a:ln>
-        </p:spPr>
-        <p:style>
-          <a:lnRef idx="1">
-            <a:schemeClr val="accent1"/>
-          </a:lnRef>
-          <a:fillRef idx="3">
-            <a:schemeClr val="accent1"/>
-          </a:fillRef>
-          <a:effectRef idx="2">
-            <a:schemeClr val="accent1"/>
-          </a:effectRef>
-          <a:fontRef idx="minor">
-            <a:schemeClr val="lt1"/>
-          </a:fontRef>
-        </p:style>
-        <p:txBody>
-          <a:bodyPr rtlCol="0" anchor="ctr" wrap="square" lIns="73152" rIns="73152" tIns="36576" bIns="36576"/>
-          <a:lstStyle/>
-          <a:p>
-            <a:pPr algn="l">
-              <a:spcAft>
-                <a:spcPts val="0"/>
-              </a:spcAft>
-              <a:defRPr sz="1800" b="1">
+      <p:pic>
+        <p:nvPicPr>
+          <p:cNvPr id="6" name="Picture 5" descr="validation_terminal.png"/>
+          <p:cNvPicPr>
+            <a:picLocks noChangeAspect="1"/>
+          </p:cNvPicPr>
+          <p:nvPr/>
+        </p:nvPicPr>
+        <p:blipFill>
+          <a:blip r:embed="rId2"/>
+          <a:stretch>
+            <a:fillRect/>
+          </a:stretch>
+        </p:blipFill>
+        <p:spPr>
+          <a:xfrm>
+            <a:off x="790956" y="1562649"/>
+            <a:ext cx="10607040" cy="4381924"/>
+          </a:xfrm>
+          <a:prstGeom prst="rect">
+            <a:avLst/>
+          </a:prstGeom>
+        </p:spPr>
+      </p:pic>
+      <p:sp>
+        <p:nvSpPr>
+          <p:cNvPr id="7" name="TextBox 6"/>
+          <p:cNvSpPr txBox="1"/>
+          <p:nvPr/>
+        </p:nvSpPr>
+        <p:spPr>
+          <a:xfrm>
+            <a:off x="777240" y="6144768"/>
+            <a:ext cx="10607040" cy="310896"/>
+          </a:xfrm>
+          <a:prstGeom prst="rect">
+            <a:avLst/>
+          </a:prstGeom>
+          <a:noFill/>
+        </p:spPr>
+        <p:txBody>
+          <a:bodyPr wrap="square" lIns="73152" rIns="73152" tIns="36576" bIns="36576">
+            <a:spAutoFit/>
+          </a:bodyPr>
+          <a:lstStyle/>
+          <a:p>
+            <a:pPr algn="ctr">
+              <a:spcAft>
+                <a:spcPts val="0"/>
+              </a:spcAft>
+              <a:defRPr sz="1100" b="1">
                 <a:solidFill>
                   <a:srgbClr val="2A8B5A"/>
                 </a:solidFill>
@@ -28804,58 +30361,7 @@
               </a:defRPr>
             </a:pPr>
             <a:r>
-              <a:t>완료 체크</a:t>
-            </a:r>
-            <a:br/>
-            <a:r>
-              <a:t>□ 명령이 오류 없이 실행된다.</a:t>
-            </a:r>
-            <a:br/>
-            <a:r>
-              <a:t>□ 기대한 파일·topic·frame·parameter 이름이 보인다.</a:t>
-            </a:r>
-            <a:br/>
-            <a:r>
-              <a:t>□ 값의 단위와 방향을 한 문장으로 설명할 수 있다.</a:t>
-            </a:r>
-          </a:p>
-        </p:txBody>
-      </p:sp>
-      <p:sp>
-        <p:nvSpPr>
-          <p:cNvPr id="9" name="TextBox 8"/>
-          <p:cNvSpPr txBox="1"/>
-          <p:nvPr/>
-        </p:nvSpPr>
-        <p:spPr>
-          <a:xfrm>
-            <a:off x="731520" y="5989320"/>
-            <a:ext cx="10789920" cy="237744"/>
-          </a:xfrm>
-          <a:prstGeom prst="rect">
-            <a:avLst/>
-          </a:prstGeom>
-          <a:noFill/>
-        </p:spPr>
-        <p:txBody>
-          <a:bodyPr wrap="square" lIns="73152" rIns="73152" tIns="36576" bIns="36576">
-            <a:spAutoFit/>
-          </a:bodyPr>
-          <a:lstStyle/>
-          <a:p>
-            <a:pPr algn="l">
-              <a:spcAft>
-                <a:spcPts val="0"/>
-              </a:spcAft>
-              <a:defRPr sz="1500" b="1">
-                <a:solidFill>
-                  <a:srgbClr val="122C4E"/>
-                </a:solidFill>
-                <a:latin typeface="Noto Sans CJK KR"/>
-              </a:defRPr>
-            </a:pPr>
-            <a:r>
-              <a:t>완료 조건: /mission_state 로그와 /cmd_vel_raw가 detection·obstacle input에 따라 바뀌는 구조를 확인한다.</a:t>
+              <a:t>화면에서 확인: ① 명령/설정  ② 정상 출력 또는 화면  ③ 다음 검증 명령으로 재확인</a:t>
             </a:r>
           </a:p>
         </p:txBody>
@@ -28912,7 +30418,7 @@
               </a:defRPr>
             </a:pPr>
             <a:r>
-              <a:t>막히면: 증상 → 우선 확인 → 재검증</a:t>
+              <a:t>객관적 검증 명령으로 완료를 확인한다</a:t>
             </a:r>
           </a:p>
         </p:txBody>
@@ -28951,7 +30457,7 @@
               </a:defRPr>
             </a:pPr>
             <a:r>
-              <a:t>오류 메시지를 숨기지 않고 같은 순서로 점검합니다.</a:t>
+              <a:t>화면만 보지 말고 topic·frame·파일·parameter를 다시 확인합니다.</a:t>
             </a:r>
           </a:p>
         </p:txBody>
@@ -29087,7 +30593,7 @@
               </a:defRPr>
             </a:pPr>
             <a:r>
-              <a:t>현재 단계 오류 대응    |    현재 폴더 ~/ros2_curri/my_agv_ws    |    현재 터미널</a:t>
+              <a:t>현재 단계 검증    |    현재 폴더 ~/ros2_curri/my_agv_ws    |    현재 터미널</a:t>
             </a:r>
           </a:p>
         </p:txBody>
@@ -29100,18 +30606,18 @@
         </p:nvSpPr>
         <p:spPr>
           <a:xfrm>
-            <a:off x="694944" y="1755648"/>
-            <a:ext cx="10972800" cy="1115568"/>
+            <a:off x="658368" y="1755648"/>
+            <a:ext cx="10972800" cy="2148840"/>
           </a:xfrm>
           <a:prstGeom prst="roundRect">
             <a:avLst/>
           </a:prstGeom>
           <a:solidFill>
-            <a:srgbClr val="FFF7F4"/>
+            <a:srgbClr val="1D232D"/>
           </a:solidFill>
           <a:ln>
             <a:solidFill>
-              <a:srgbClr val="EDBEB4"/>
+              <a:srgbClr val="1D232D"/>
             </a:solidFill>
           </a:ln>
         </p:spPr>
@@ -29130,72 +30636,7 @@
           </a:fontRef>
         </p:style>
         <p:txBody>
-          <a:bodyPr rtlCol="0" anchor="ctr"/>
-          <a:lstStyle/>
-          <a:p>
-            <a:pPr algn="ctr"/>
-          </a:p>
-        </p:txBody>
-      </p:sp>
-      <p:sp>
-        <p:nvSpPr>
-          <p:cNvPr id="8" name="TextBox 7"/>
-          <p:cNvSpPr txBox="1"/>
-          <p:nvPr/>
-        </p:nvSpPr>
-        <p:spPr>
-          <a:xfrm>
-            <a:off x="896112" y="1901952"/>
-            <a:ext cx="2926080" cy="274320"/>
-          </a:xfrm>
-          <a:prstGeom prst="rect">
-            <a:avLst/>
-          </a:prstGeom>
-          <a:noFill/>
-        </p:spPr>
-        <p:txBody>
-          <a:bodyPr wrap="square" lIns="73152" rIns="73152" tIns="36576" bIns="36576">
-            <a:spAutoFit/>
-          </a:bodyPr>
-          <a:lstStyle/>
-          <a:p>
-            <a:pPr algn="l">
-              <a:spcAft>
-                <a:spcPts val="0"/>
-              </a:spcAft>
-              <a:defRPr sz="1800" b="1">
-                <a:solidFill>
-                  <a:srgbClr val="BE3B3B"/>
-                </a:solidFill>
-                <a:latin typeface="Noto Sans CJK KR"/>
-              </a:defRPr>
-            </a:pPr>
-            <a:r>
-              <a:t>증상 1: 상태가 전환되지 않음</a:t>
-            </a:r>
-          </a:p>
-        </p:txBody>
-      </p:sp>
-      <p:sp>
-        <p:nvSpPr>
-          <p:cNvPr id="9" name="TextBox 8"/>
-          <p:cNvSpPr txBox="1"/>
-          <p:nvPr/>
-        </p:nvSpPr>
-        <p:spPr>
-          <a:xfrm>
-            <a:off x="3794760" y="1883664"/>
-            <a:ext cx="7543800" cy="621792"/>
-          </a:xfrm>
-          <a:prstGeom prst="rect">
-            <a:avLst/>
-          </a:prstGeom>
-          <a:noFill/>
-        </p:spPr>
-        <p:txBody>
-          <a:bodyPr wrap="square" lIns="73152" rIns="73152" tIns="36576" bIns="36576">
-            <a:spAutoFit/>
-          </a:bodyPr>
+          <a:bodyPr rtlCol="0" anchor="ctr" wrap="square" lIns="109728" rIns="109728" tIns="73152" bIns="73152"/>
           <a:lstStyle/>
           <a:p>
             <a:pPr algn="l">
@@ -29204,41 +30645,69 @@
               </a:spcAft>
               <a:defRPr sz="1600" b="0">
                 <a:solidFill>
-                  <a:srgbClr val="122C4E"/>
-                </a:solidFill>
-                <a:latin typeface="Noto Sans CJK KR"/>
-              </a:defRPr>
-            </a:pPr>
-            <a:r>
-              <a:t>우선 확인: callback input·조건식·거리 단위를 확인한다.</a:t>
-            </a:r>
-            <a:br/>
-            <a:r>
-              <a:t>수정 후: ros2 topic info /mission_state</a:t>
-            </a:r>
-          </a:p>
-        </p:txBody>
-      </p:sp>
-      <p:sp>
-        <p:nvSpPr>
-          <p:cNvPr id="10" name="Rounded Rectangle 9"/>
+                  <a:srgbClr val="FFFFFF"/>
+                </a:solidFill>
+                <a:latin typeface="DejaVu Sans Mono"/>
+              </a:defRPr>
+            </a:pPr>
+            <a:r>
+              <a:t>ros2 topic info /mission_state</a:t>
+            </a:r>
+          </a:p>
+          <a:p>
+            <a:pPr algn="l">
+              <a:spcAft>
+                <a:spcPts val="0"/>
+              </a:spcAft>
+              <a:defRPr sz="1600" b="0">
+                <a:solidFill>
+                  <a:srgbClr val="FFFFFF"/>
+                </a:solidFill>
+                <a:latin typeface="DejaVu Sans Mono"/>
+              </a:defRPr>
+            </a:pPr>
+            <a:r>
+              <a:t>ros2 topic info /cmd_vel_raw</a:t>
+            </a:r>
+          </a:p>
+          <a:p>
+            <a:pPr algn="l">
+              <a:spcAft>
+                <a:spcPts val="0"/>
+              </a:spcAft>
+              <a:defRPr sz="1600" b="0">
+                <a:solidFill>
+                  <a:srgbClr val="FFFFFF"/>
+                </a:solidFill>
+                <a:latin typeface="DejaVu Sans Mono"/>
+              </a:defRPr>
+            </a:pPr>
+            <a:r>
+              <a:t>ros2 param get /mission_manager stop_distance</a:t>
+            </a:r>
+          </a:p>
+        </p:txBody>
+      </p:sp>
+      <p:sp>
+        <p:nvSpPr>
+          <p:cNvPr id="8" name="Rounded Rectangle 7"/>
           <p:cNvSpPr/>
           <p:nvPr/>
         </p:nvSpPr>
         <p:spPr>
           <a:xfrm>
-            <a:off x="694944" y="3172968"/>
-            <a:ext cx="10972800" cy="1115568"/>
+            <a:off x="658368" y="4206240"/>
+            <a:ext cx="10972800" cy="1554480"/>
           </a:xfrm>
           <a:prstGeom prst="roundRect">
             <a:avLst/>
           </a:prstGeom>
           <a:solidFill>
-            <a:srgbClr val="FFF7F4"/>
+            <a:srgbClr val="F4F7FB"/>
           </a:solidFill>
           <a:ln>
             <a:solidFill>
-              <a:srgbClr val="EDBEB4"/>
+              <a:srgbClr val="D1DFD5"/>
             </a:solidFill>
           </a:ln>
         </p:spPr>
@@ -29257,33 +30726,7 @@
           </a:fontRef>
         </p:style>
         <p:txBody>
-          <a:bodyPr rtlCol="0" anchor="ctr"/>
-          <a:lstStyle/>
-          <a:p>
-            <a:pPr algn="ctr"/>
-          </a:p>
-        </p:txBody>
-      </p:sp>
-      <p:sp>
-        <p:nvSpPr>
-          <p:cNvPr id="11" name="TextBox 10"/>
-          <p:cNvSpPr txBox="1"/>
-          <p:nvPr/>
-        </p:nvSpPr>
-        <p:spPr>
-          <a:xfrm>
-            <a:off x="896112" y="3319272"/>
-            <a:ext cx="2926080" cy="274320"/>
-          </a:xfrm>
-          <a:prstGeom prst="rect">
-            <a:avLst/>
-          </a:prstGeom>
-          <a:noFill/>
-        </p:spPr>
-        <p:txBody>
-          <a:bodyPr wrap="square" lIns="73152" rIns="73152" tIns="36576" bIns="36576">
-            <a:spAutoFit/>
-          </a:bodyPr>
+          <a:bodyPr rtlCol="0" anchor="ctr" wrap="square" lIns="73152" rIns="73152" tIns="36576" bIns="36576"/>
           <a:lstStyle/>
           <a:p>
             <a:pPr algn="l">
@@ -29292,44 +30735,56 @@
               </a:spcAft>
               <a:defRPr sz="1800" b="1">
                 <a:solidFill>
-                  <a:srgbClr val="BE3B3B"/>
-                </a:solidFill>
-                <a:latin typeface="Noto Sans CJK KR"/>
-              </a:defRPr>
-            </a:pPr>
-            <a:r>
-              <a:t>증상 2: SEARCH↔APPROACH 반복</a:t>
-            </a:r>
-          </a:p>
-        </p:txBody>
-      </p:sp>
-      <p:sp>
-        <p:nvSpPr>
-          <p:cNvPr id="12" name="TextBox 11"/>
-          <p:cNvSpPr txBox="1"/>
-          <p:nvPr/>
-        </p:nvSpPr>
-        <p:spPr>
-          <a:xfrm>
-            <a:off x="3794760" y="3300984"/>
-            <a:ext cx="7543800" cy="621792"/>
-          </a:xfrm>
-          <a:prstGeom prst="rect">
-            <a:avLst/>
-          </a:prstGeom>
-          <a:noFill/>
-        </p:spPr>
-        <p:txBody>
-          <a:bodyPr wrap="square" lIns="73152" rIns="73152" tIns="36576" bIns="36576">
-            <a:spAutoFit/>
-          </a:bodyPr>
-          <a:lstStyle/>
-          <a:p>
-            <a:pPr algn="l">
-              <a:spcAft>
-                <a:spcPts val="0"/>
-              </a:spcAft>
-              <a:defRPr sz="1600" b="0">
+                  <a:srgbClr val="2A8B5A"/>
+                </a:solidFill>
+                <a:latin typeface="Noto Sans CJK KR"/>
+              </a:defRPr>
+            </a:pPr>
+            <a:r>
+              <a:t>완료 체크</a:t>
+            </a:r>
+            <a:br/>
+            <a:r>
+              <a:t>□ 명령이 오류 없이 실행된다.</a:t>
+            </a:r>
+            <a:br/>
+            <a:r>
+              <a:t>□ 기대한 파일·topic·frame·parameter 이름이 보인다.</a:t>
+            </a:r>
+            <a:br/>
+            <a:r>
+              <a:t>□ 값의 단위와 방향을 한 문장으로 설명할 수 있다.</a:t>
+            </a:r>
+          </a:p>
+        </p:txBody>
+      </p:sp>
+      <p:sp>
+        <p:nvSpPr>
+          <p:cNvPr id="9" name="TextBox 8"/>
+          <p:cNvSpPr txBox="1"/>
+          <p:nvPr/>
+        </p:nvSpPr>
+        <p:spPr>
+          <a:xfrm>
+            <a:off x="731520" y="5989320"/>
+            <a:ext cx="10789920" cy="237744"/>
+          </a:xfrm>
+          <a:prstGeom prst="rect">
+            <a:avLst/>
+          </a:prstGeom>
+          <a:noFill/>
+        </p:spPr>
+        <p:txBody>
+          <a:bodyPr wrap="square" lIns="73152" rIns="73152" tIns="36576" bIns="36576">
+            <a:spAutoFit/>
+          </a:bodyPr>
+          <a:lstStyle/>
+          <a:p>
+            <a:pPr algn="l">
+              <a:spcAft>
+                <a:spcPts val="0"/>
+              </a:spcAft>
+              <a:defRPr sz="1500" b="1">
                 <a:solidFill>
                   <a:srgbClr val="122C4E"/>
                 </a:solidFill>
@@ -29337,50 +30792,7 @@
               </a:defRPr>
             </a:pPr>
             <a:r>
-              <a:t>우선 확인: detection timeout·hysteresis·우선순위를 추가 점검한다.</a:t>
-            </a:r>
-            <a:br/>
-            <a:r>
-              <a:t>수정 후: ros2 topic info /mission_state</a:t>
-            </a:r>
-          </a:p>
-        </p:txBody>
-      </p:sp>
-      <p:sp>
-        <p:nvSpPr>
-          <p:cNvPr id="13" name="TextBox 12"/>
-          <p:cNvSpPr txBox="1"/>
-          <p:nvPr/>
-        </p:nvSpPr>
-        <p:spPr>
-          <a:xfrm>
-            <a:off x="822960" y="5102352"/>
-            <a:ext cx="10607040" cy="402336"/>
-          </a:xfrm>
-          <a:prstGeom prst="rect">
-            <a:avLst/>
-          </a:prstGeom>
-          <a:noFill/>
-        </p:spPr>
-        <p:txBody>
-          <a:bodyPr wrap="square" lIns="73152" rIns="73152" tIns="36576" bIns="36576">
-            <a:spAutoFit/>
-          </a:bodyPr>
-          <a:lstStyle/>
-          <a:p>
-            <a:pPr algn="ctr">
-              <a:spcAft>
-                <a:spcPts val="0"/>
-              </a:spcAft>
-              <a:defRPr sz="1800" b="1">
-                <a:solidFill>
-                  <a:srgbClr val="DB7E22"/>
-                </a:solidFill>
-                <a:latin typeface="Noto Sans CJK KR"/>
-              </a:defRPr>
-            </a:pPr>
-            <a:r>
-              <a:t>공통 순서: ① 현재 폴더 ② source ③ 파일 경로 ④ 이름/타입/단위 ⑤ build·source 후 재실행</a:t>
+              <a:t>완료 조건: /mission_state 로그와 /cmd_vel_raw가 detection·obstacle input에 따라 바뀌는 구조를 확인한다.</a:t>
             </a:r>
           </a:p>
         </p:txBody>
@@ -29437,7 +30849,7 @@
               </a:defRPr>
             </a:pPr>
             <a:r>
-              <a:t>막혔을 때만: Complete를 복구용으로 사용한다</a:t>
+              <a:t>막히면: 증상 → 우선 확인 → 재검증</a:t>
             </a:r>
           </a:p>
         </p:txBody>
@@ -29476,7 +30888,7 @@
               </a:defRPr>
             </a:pPr>
             <a:r>
-              <a:t>이 슬라이드가 먼저가 아닙니다. 직접 입력·실행을 시도한 뒤에만 내 파일과 Complete를 비교합니다.</a:t>
+              <a:t>오류 메시지를 숨기지 않고 같은 순서로 점검합니다.</a:t>
             </a:r>
           </a:p>
         </p:txBody>
@@ -29612,70 +31024,31 @@
               </a:defRPr>
             </a:pPr>
             <a:r>
-              <a:t>현재 단계 복구용 Complete    |    현재 폴더 ~/ros2_curri    |    현재 터미널</a:t>
-            </a:r>
-          </a:p>
-        </p:txBody>
-      </p:sp>
-      <p:sp>
-        <p:nvSpPr>
-          <p:cNvPr id="7" name="TextBox 6"/>
-          <p:cNvSpPr txBox="1"/>
-          <p:nvPr/>
-        </p:nvSpPr>
-        <p:spPr>
-          <a:xfrm>
-            <a:off x="713232" y="1664208"/>
-            <a:ext cx="10698480" cy="402336"/>
-          </a:xfrm>
-          <a:prstGeom prst="rect">
-            <a:avLst/>
-          </a:prstGeom>
-          <a:noFill/>
-        </p:spPr>
-        <p:txBody>
-          <a:bodyPr wrap="square" lIns="73152" rIns="73152" tIns="36576" bIns="36576">
-            <a:spAutoFit/>
-          </a:bodyPr>
-          <a:lstStyle/>
-          <a:p>
-            <a:pPr algn="ctr">
-              <a:spcAft>
-                <a:spcPts val="0"/>
-              </a:spcAft>
-              <a:defRPr sz="1800" b="1">
-                <a:solidFill>
-                  <a:srgbClr val="DB7E22"/>
-                </a:solidFill>
-                <a:latin typeface="Noto Sans CJK KR"/>
-              </a:defRPr>
-            </a:pPr>
-            <a:r>
-              <a:t>권장 순서: ① 내 오류를 확인  ② Complete와 diff  ③ 꼭 필요할 때만 backup 후 복사</a:t>
-            </a:r>
-          </a:p>
-        </p:txBody>
-      </p:sp>
-      <p:sp>
-        <p:nvSpPr>
-          <p:cNvPr id="8" name="Rounded Rectangle 7"/>
+              <a:t>현재 단계 오류 대응    |    현재 폴더 ~/ros2_curri/my_agv_ws    |    현재 터미널</a:t>
+            </a:r>
+          </a:p>
+        </p:txBody>
+      </p:sp>
+      <p:sp>
+        <p:nvSpPr>
+          <p:cNvPr id="7" name="Rounded Rectangle 6"/>
           <p:cNvSpPr/>
           <p:nvPr/>
         </p:nvSpPr>
         <p:spPr>
           <a:xfrm>
-            <a:off x="676656" y="2423160"/>
-            <a:ext cx="10881360" cy="2606040"/>
+            <a:off x="694944" y="1755648"/>
+            <a:ext cx="10972800" cy="1115568"/>
           </a:xfrm>
           <a:prstGeom prst="roundRect">
             <a:avLst/>
           </a:prstGeom>
           <a:solidFill>
-            <a:srgbClr val="1D232D"/>
+            <a:srgbClr val="FFF7F4"/>
           </a:solidFill>
           <a:ln>
             <a:solidFill>
-              <a:srgbClr val="1D232D"/>
+              <a:srgbClr val="EDBEB4"/>
             </a:solidFill>
           </a:ln>
         </p:spPr>
@@ -29694,52 +31067,232 @@
           </a:fontRef>
         </p:style>
         <p:txBody>
-          <a:bodyPr rtlCol="0" anchor="ctr" wrap="square" lIns="73152" rIns="73152" tIns="36576" bIns="36576"/>
-          <a:lstStyle/>
-          <a:p>
-            <a:pPr algn="l">
-              <a:spcAft>
-                <a:spcPts val="0"/>
-              </a:spcAft>
-              <a:defRPr sz="1400" b="0">
-                <a:solidFill>
-                  <a:srgbClr val="FFFFFF"/>
-                </a:solidFill>
-                <a:latin typeface="DejaVu Sans Mono"/>
-              </a:defRPr>
-            </a:pPr>
-            <a:r>
-              <a:t>cd ~/ros2_curri</a:t>
+          <a:bodyPr rtlCol="0" anchor="ctr"/>
+          <a:lstStyle/>
+          <a:p>
+            <a:pPr algn="ctr"/>
+          </a:p>
+        </p:txBody>
+      </p:sp>
+      <p:sp>
+        <p:nvSpPr>
+          <p:cNvPr id="8" name="TextBox 7"/>
+          <p:cNvSpPr txBox="1"/>
+          <p:nvPr/>
+        </p:nvSpPr>
+        <p:spPr>
+          <a:xfrm>
+            <a:off x="896112" y="1901952"/>
+            <a:ext cx="2926080" cy="274320"/>
+          </a:xfrm>
+          <a:prstGeom prst="rect">
+            <a:avLst/>
+          </a:prstGeom>
+          <a:noFill/>
+        </p:spPr>
+        <p:txBody>
+          <a:bodyPr wrap="square" lIns="73152" rIns="73152" tIns="36576" bIns="36576">
+            <a:spAutoFit/>
+          </a:bodyPr>
+          <a:lstStyle/>
+          <a:p>
+            <a:pPr algn="l">
+              <a:spcAft>
+                <a:spcPts val="0"/>
+              </a:spcAft>
+              <a:defRPr sz="1800" b="1">
+                <a:solidFill>
+                  <a:srgbClr val="BE3B3B"/>
+                </a:solidFill>
+                <a:latin typeface="Noto Sans CJK KR"/>
+              </a:defRPr>
+            </a:pPr>
+            <a:r>
+              <a:t>증상 1: 상태가 전환되지 않음</a:t>
+            </a:r>
+          </a:p>
+        </p:txBody>
+      </p:sp>
+      <p:sp>
+        <p:nvSpPr>
+          <p:cNvPr id="9" name="TextBox 8"/>
+          <p:cNvSpPr txBox="1"/>
+          <p:nvPr/>
+        </p:nvSpPr>
+        <p:spPr>
+          <a:xfrm>
+            <a:off x="3794760" y="1883664"/>
+            <a:ext cx="7543800" cy="621792"/>
+          </a:xfrm>
+          <a:prstGeom prst="rect">
+            <a:avLst/>
+          </a:prstGeom>
+          <a:noFill/>
+        </p:spPr>
+        <p:txBody>
+          <a:bodyPr wrap="square" lIns="73152" rIns="73152" tIns="36576" bIns="36576">
+            <a:spAutoFit/>
+          </a:bodyPr>
+          <a:lstStyle/>
+          <a:p>
+            <a:pPr algn="l">
+              <a:spcAft>
+                <a:spcPts val="0"/>
+              </a:spcAft>
+              <a:defRPr sz="1600" b="0">
+                <a:solidFill>
+                  <a:srgbClr val="122C4E"/>
+                </a:solidFill>
+                <a:latin typeface="Noto Sans CJK KR"/>
+              </a:defRPr>
+            </a:pPr>
+            <a:r>
+              <a:t>우선 확인: callback input·조건식·거리 단위를 확인한다.</a:t>
             </a:r>
             <a:br/>
             <a:r>
-              <a:t>diff -ru my_agv_ws/src blocks/E_autonomy_logic/M19_mission_fsm/complete/agv_ws/src || true</a:t>
+              <a:t>수정 후: ros2 topic info /mission_state</a:t>
+            </a:r>
+          </a:p>
+        </p:txBody>
+      </p:sp>
+      <p:sp>
+        <p:nvSpPr>
+          <p:cNvPr id="10" name="Rounded Rectangle 9"/>
+          <p:cNvSpPr/>
+          <p:nvPr/>
+        </p:nvSpPr>
+        <p:spPr>
+          <a:xfrm>
+            <a:off x="694944" y="3172968"/>
+            <a:ext cx="10972800" cy="1115568"/>
+          </a:xfrm>
+          <a:prstGeom prst="roundRect">
+            <a:avLst/>
+          </a:prstGeom>
+          <a:solidFill>
+            <a:srgbClr val="FFF7F4"/>
+          </a:solidFill>
+          <a:ln>
+            <a:solidFill>
+              <a:srgbClr val="EDBEB4"/>
+            </a:solidFill>
+          </a:ln>
+        </p:spPr>
+        <p:style>
+          <a:lnRef idx="1">
+            <a:schemeClr val="accent1"/>
+          </a:lnRef>
+          <a:fillRef idx="3">
+            <a:schemeClr val="accent1"/>
+          </a:fillRef>
+          <a:effectRef idx="2">
+            <a:schemeClr val="accent1"/>
+          </a:effectRef>
+          <a:fontRef idx="minor">
+            <a:schemeClr val="lt1"/>
+          </a:fontRef>
+        </p:style>
+        <p:txBody>
+          <a:bodyPr rtlCol="0" anchor="ctr"/>
+          <a:lstStyle/>
+          <a:p>
+            <a:pPr algn="ctr"/>
+          </a:p>
+        </p:txBody>
+      </p:sp>
+      <p:sp>
+        <p:nvSpPr>
+          <p:cNvPr id="11" name="TextBox 10"/>
+          <p:cNvSpPr txBox="1"/>
+          <p:nvPr/>
+        </p:nvSpPr>
+        <p:spPr>
+          <a:xfrm>
+            <a:off x="896112" y="3319272"/>
+            <a:ext cx="2926080" cy="274320"/>
+          </a:xfrm>
+          <a:prstGeom prst="rect">
+            <a:avLst/>
+          </a:prstGeom>
+          <a:noFill/>
+        </p:spPr>
+        <p:txBody>
+          <a:bodyPr wrap="square" lIns="73152" rIns="73152" tIns="36576" bIns="36576">
+            <a:spAutoFit/>
+          </a:bodyPr>
+          <a:lstStyle/>
+          <a:p>
+            <a:pPr algn="l">
+              <a:spcAft>
+                <a:spcPts val="0"/>
+              </a:spcAft>
+              <a:defRPr sz="1800" b="1">
+                <a:solidFill>
+                  <a:srgbClr val="BE3B3B"/>
+                </a:solidFill>
+                <a:latin typeface="Noto Sans CJK KR"/>
+              </a:defRPr>
+            </a:pPr>
+            <a:r>
+              <a:t>증상 2: SEARCH↔APPROACH 반복</a:t>
+            </a:r>
+          </a:p>
+        </p:txBody>
+      </p:sp>
+      <p:sp>
+        <p:nvSpPr>
+          <p:cNvPr id="12" name="TextBox 11"/>
+          <p:cNvSpPr txBox="1"/>
+          <p:nvPr/>
+        </p:nvSpPr>
+        <p:spPr>
+          <a:xfrm>
+            <a:off x="3794760" y="3300984"/>
+            <a:ext cx="7543800" cy="621792"/>
+          </a:xfrm>
+          <a:prstGeom prst="rect">
+            <a:avLst/>
+          </a:prstGeom>
+          <a:noFill/>
+        </p:spPr>
+        <p:txBody>
+          <a:bodyPr wrap="square" lIns="73152" rIns="73152" tIns="36576" bIns="36576">
+            <a:spAutoFit/>
+          </a:bodyPr>
+          <a:lstStyle/>
+          <a:p>
+            <a:pPr algn="l">
+              <a:spcAft>
+                <a:spcPts val="0"/>
+              </a:spcAft>
+              <a:defRPr sz="1600" b="0">
+                <a:solidFill>
+                  <a:srgbClr val="122C4E"/>
+                </a:solidFill>
+                <a:latin typeface="Noto Sans CJK KR"/>
+              </a:defRPr>
+            </a:pPr>
+            <a:r>
+              <a:t>우선 확인: detection timeout·hysteresis·우선순위를 추가 점검한다.</a:t>
             </a:r>
             <a:br/>
             <a:r>
-              <a:t>cp -a my_agv_ws/src my_agv_ws/src_before_M19</a:t>
-            </a:r>
-            <a:br/>
-            <a:r>
-              <a:t>cp -a blocks/E_autonomy_logic/M19_mission_fsm/complete/agv_ws/src/. my_agv_ws/src/</a:t>
-            </a:r>
-            <a:br/>
-            <a:r>
-              <a:t>cd my_agv_ws &amp;&amp; colcon build --symlink-install &amp;&amp; source install/setup.bash</a:t>
-            </a:r>
-          </a:p>
-        </p:txBody>
-      </p:sp>
-      <p:sp>
-        <p:nvSpPr>
-          <p:cNvPr id="9" name="TextBox 8"/>
-          <p:cNvSpPr txBox="1"/>
-          <p:nvPr/>
-        </p:nvSpPr>
-        <p:spPr>
-          <a:xfrm>
-            <a:off x="786384" y="5413248"/>
-            <a:ext cx="10424160" cy="429768"/>
+              <a:t>수정 후: ros2 topic info /mission_state</a:t>
+            </a:r>
+          </a:p>
+        </p:txBody>
+      </p:sp>
+      <p:sp>
+        <p:nvSpPr>
+          <p:cNvPr id="13" name="TextBox 12"/>
+          <p:cNvSpPr txBox="1"/>
+          <p:nvPr/>
+        </p:nvSpPr>
+        <p:spPr>
+          <a:xfrm>
+            <a:off x="822960" y="5102352"/>
+            <a:ext cx="10607040" cy="402336"/>
           </a:xfrm>
           <a:prstGeom prst="rect">
             <a:avLst/>
@@ -29756,15 +31309,15 @@
               <a:spcAft>
                 <a:spcPts val="0"/>
               </a:spcAft>
-              <a:defRPr sz="1700" b="1">
-                <a:solidFill>
-                  <a:srgbClr val="2A8B5A"/>
-                </a:solidFill>
-                <a:latin typeface="Noto Sans CJK KR"/>
-              </a:defRPr>
-            </a:pPr>
-            <a:r>
-              <a:t>복구 뒤에는 끝내지 말고, 내 파일과 Complete의 차이를 한 줄씩 설명한 뒤 다시 직접 입력해 봅니다.</a:t>
+              <a:defRPr sz="1800" b="1">
+                <a:solidFill>
+                  <a:srgbClr val="DB7E22"/>
+                </a:solidFill>
+                <a:latin typeface="Noto Sans CJK KR"/>
+              </a:defRPr>
+            </a:pPr>
+            <a:r>
+              <a:t>공통 순서: ① 현재 폴더 ② source ③ 파일 경로 ④ 이름/타입/단위 ⑤ build·source 후 재실행</a:t>
             </a:r>
           </a:p>
         </p:txBody>
@@ -29821,7 +31374,7 @@
               </a:defRPr>
             </a:pPr>
             <a:r>
-              <a:t>미니 실습: 값 하나를 바꾸고 결과를 비교한다</a:t>
+              <a:t>막혔을 때만: Complete를 복구용으로 사용한다</a:t>
             </a:r>
           </a:p>
         </p:txBody>
@@ -29860,7 +31413,7 @@
               </a:defRPr>
             </a:pPr>
             <a:r>
-              <a:t>정상 결과를 만든 뒤에는 한 번에 하나의 값만 바꿉니다.</a:t>
+              <a:t>이 슬라이드가 먼저가 아닙니다. 직접 입력·실행을 시도한 뒤에만 내 파일과 Complete를 비교합니다.</a:t>
             </a:r>
           </a:p>
         </p:txBody>
@@ -29996,31 +31549,70 @@
               </a:defRPr>
             </a:pPr>
             <a:r>
-              <a:t>현재 단계 미니 실습    |    현재 폴더 ~/ros2_curri/my_agv_ws    |    현재 터미널</a:t>
-            </a:r>
-          </a:p>
-        </p:txBody>
-      </p:sp>
-      <p:sp>
-        <p:nvSpPr>
-          <p:cNvPr id="7" name="Rounded Rectangle 6"/>
+              <a:t>현재 단계 복구용 Complete    |    현재 폴더 ~/ros2_curri    |    현재 터미널</a:t>
+            </a:r>
+          </a:p>
+        </p:txBody>
+      </p:sp>
+      <p:sp>
+        <p:nvSpPr>
+          <p:cNvPr id="7" name="TextBox 6"/>
+          <p:cNvSpPr txBox="1"/>
+          <p:nvPr/>
+        </p:nvSpPr>
+        <p:spPr>
+          <a:xfrm>
+            <a:off x="713232" y="1664208"/>
+            <a:ext cx="10698480" cy="402336"/>
+          </a:xfrm>
+          <a:prstGeom prst="rect">
+            <a:avLst/>
+          </a:prstGeom>
+          <a:noFill/>
+        </p:spPr>
+        <p:txBody>
+          <a:bodyPr wrap="square" lIns="73152" rIns="73152" tIns="36576" bIns="36576">
+            <a:spAutoFit/>
+          </a:bodyPr>
+          <a:lstStyle/>
+          <a:p>
+            <a:pPr algn="ctr">
+              <a:spcAft>
+                <a:spcPts val="0"/>
+              </a:spcAft>
+              <a:defRPr sz="1800" b="1">
+                <a:solidFill>
+                  <a:srgbClr val="DB7E22"/>
+                </a:solidFill>
+                <a:latin typeface="Noto Sans CJK KR"/>
+              </a:defRPr>
+            </a:pPr>
+            <a:r>
+              <a:t>권장 순서: ① 내 오류를 확인  ② Complete와 diff  ③ 꼭 필요할 때만 backup 후 복사</a:t>
+            </a:r>
+          </a:p>
+        </p:txBody>
+      </p:sp>
+      <p:sp>
+        <p:nvSpPr>
+          <p:cNvPr id="8" name="Rounded Rectangle 7"/>
           <p:cNvSpPr/>
           <p:nvPr/>
         </p:nvSpPr>
         <p:spPr>
           <a:xfrm>
-            <a:off x="749808" y="1874519"/>
-            <a:ext cx="10652760" cy="1993392"/>
+            <a:off x="676656" y="2423160"/>
+            <a:ext cx="10881360" cy="2606040"/>
           </a:xfrm>
           <a:prstGeom prst="roundRect">
             <a:avLst/>
           </a:prstGeom>
           <a:solidFill>
-            <a:srgbClr val="FFF8EB"/>
+            <a:srgbClr val="1D232D"/>
           </a:solidFill>
           <a:ln>
             <a:solidFill>
-              <a:srgbClr val="ECC680"/>
+              <a:srgbClr val="1D232D"/>
             </a:solidFill>
           </a:ln>
         </p:spPr>
@@ -30039,61 +31631,125 @@
           </a:fontRef>
         </p:style>
         <p:txBody>
-          <a:bodyPr rtlCol="0" anchor="ctr" wrap="square" lIns="73152" rIns="73152" tIns="36576" bIns="36576"/>
+          <a:bodyPr rtlCol="0" anchor="ctr" wrap="square" lIns="109728" rIns="109728" tIns="73152" bIns="73152"/>
+          <a:lstStyle/>
+          <a:p>
+            <a:pPr algn="l">
+              <a:spcAft>
+                <a:spcPts val="0"/>
+              </a:spcAft>
+              <a:defRPr sz="1400" b="0">
+                <a:solidFill>
+                  <a:srgbClr val="FFFFFF"/>
+                </a:solidFill>
+                <a:latin typeface="DejaVu Sans Mono"/>
+              </a:defRPr>
+            </a:pPr>
+            <a:r>
+              <a:t>cd ~/ros2_curri</a:t>
+            </a:r>
+          </a:p>
+          <a:p>
+            <a:pPr algn="l">
+              <a:spcAft>
+                <a:spcPts val="0"/>
+              </a:spcAft>
+              <a:defRPr sz="1400" b="0">
+                <a:solidFill>
+                  <a:srgbClr val="FFFFFF"/>
+                </a:solidFill>
+                <a:latin typeface="DejaVu Sans Mono"/>
+              </a:defRPr>
+            </a:pPr>
+            <a:r>
+              <a:t>diff -ru my_agv_ws/src blocks/E_autonomy_logic/M19_mission_fsm/complete/agv_ws/src || true</a:t>
+            </a:r>
+          </a:p>
+          <a:p>
+            <a:pPr algn="l">
+              <a:spcAft>
+                <a:spcPts val="0"/>
+              </a:spcAft>
+              <a:defRPr sz="1400" b="0">
+                <a:solidFill>
+                  <a:srgbClr val="FFFFFF"/>
+                </a:solidFill>
+                <a:latin typeface="DejaVu Sans Mono"/>
+              </a:defRPr>
+            </a:pPr>
+            <a:r>
+              <a:t>cp -a my_agv_ws/src my_agv_ws/src_before_M19</a:t>
+            </a:r>
+          </a:p>
+          <a:p>
+            <a:pPr algn="l">
+              <a:spcAft>
+                <a:spcPts val="0"/>
+              </a:spcAft>
+              <a:defRPr sz="1400" b="0">
+                <a:solidFill>
+                  <a:srgbClr val="FFFFFF"/>
+                </a:solidFill>
+                <a:latin typeface="DejaVu Sans Mono"/>
+              </a:defRPr>
+            </a:pPr>
+            <a:r>
+              <a:t>cp -a blocks/E_autonomy_logic/M19_mission_fsm/complete/agv_ws/src/. my_agv_ws/src/</a:t>
+            </a:r>
+          </a:p>
+          <a:p>
+            <a:pPr algn="l">
+              <a:spcAft>
+                <a:spcPts val="0"/>
+              </a:spcAft>
+              <a:defRPr sz="1400" b="0">
+                <a:solidFill>
+                  <a:srgbClr val="FFFFFF"/>
+                </a:solidFill>
+                <a:latin typeface="DejaVu Sans Mono"/>
+              </a:defRPr>
+            </a:pPr>
+            <a:r>
+              <a:t>cd my_agv_ws &amp;&amp; colcon build --symlink-install &amp;&amp; source install/setup.bash</a:t>
+            </a:r>
+          </a:p>
+        </p:txBody>
+      </p:sp>
+      <p:sp>
+        <p:nvSpPr>
+          <p:cNvPr id="9" name="TextBox 8"/>
+          <p:cNvSpPr txBox="1"/>
+          <p:nvPr/>
+        </p:nvSpPr>
+        <p:spPr>
+          <a:xfrm>
+            <a:off x="786384" y="5413248"/>
+            <a:ext cx="10424160" cy="429768"/>
+          </a:xfrm>
+          <a:prstGeom prst="rect">
+            <a:avLst/>
+          </a:prstGeom>
+          <a:noFill/>
+        </p:spPr>
+        <p:txBody>
+          <a:bodyPr wrap="square" lIns="73152" rIns="73152" tIns="36576" bIns="36576">
+            <a:spAutoFit/>
+          </a:bodyPr>
           <a:lstStyle/>
           <a:p>
             <a:pPr algn="ctr">
               <a:spcAft>
                 <a:spcPts val="0"/>
               </a:spcAft>
-              <a:defRPr sz="2300" b="1">
-                <a:solidFill>
-                  <a:srgbClr val="122C4E"/>
-                </a:solidFill>
-                <a:latin typeface="Noto Sans CJK KR"/>
-              </a:defRPr>
-            </a:pPr>
-            <a:r>
-              <a:t>target 없음, target 있음, obstacle&lt;0.5 m의 세 입력에 대해 예상 state와 /cmd_vel_raw를 표로 작성한다.</a:t>
-            </a:r>
-          </a:p>
-        </p:txBody>
-      </p:sp>
-      <p:sp>
-        <p:nvSpPr>
-          <p:cNvPr id="8" name="TextBox 7"/>
-          <p:cNvSpPr txBox="1"/>
-          <p:nvPr/>
-        </p:nvSpPr>
-        <p:spPr>
-          <a:xfrm>
-            <a:off x="877824" y="4590288"/>
-            <a:ext cx="10241280" cy="594360"/>
-          </a:xfrm>
-          <a:prstGeom prst="rect">
-            <a:avLst/>
-          </a:prstGeom>
-          <a:noFill/>
-        </p:spPr>
-        <p:txBody>
-          <a:bodyPr wrap="square" lIns="73152" rIns="73152" tIns="36576" bIns="36576">
-            <a:spAutoFit/>
-          </a:bodyPr>
-          <a:lstStyle/>
-          <a:p>
-            <a:pPr algn="ctr">
-              <a:spcAft>
-                <a:spcPts val="0"/>
-              </a:spcAft>
-              <a:defRPr sz="1900" b="1">
-                <a:solidFill>
-                  <a:srgbClr val="DB7E22"/>
-                </a:solidFill>
-                <a:latin typeface="Noto Sans CJK KR"/>
-              </a:defRPr>
-            </a:pPr>
-            <a:r>
-              <a:t>기록할 것: 바꾼 값(단위) · 기대한 변화 · 실제 출력/화면 · 원래 값으로 되돌린 결과</a:t>
+              <a:defRPr sz="1700" b="1">
+                <a:solidFill>
+                  <a:srgbClr val="2A8B5A"/>
+                </a:solidFill>
+                <a:latin typeface="Noto Sans CJK KR"/>
+              </a:defRPr>
+            </a:pPr>
+            <a:r>
+              <a:t>복구 뒤에는 끝내지 말고, 내 파일과 Complete의 차이를 한 줄씩 설명한 뒤 다시 직접 입력해 봅니다.</a:t>
             </a:r>
           </a:p>
         </p:txBody>
@@ -30150,7 +31806,7 @@
               </a:defRPr>
             </a:pPr>
             <a:r>
-              <a:t>내 프로젝트 체크포인트를 저장하고 다음 모듈로 넘긴다</a:t>
+              <a:t>미니 실습: 값 하나를 바꾸고 결과를 비교한다</a:t>
             </a:r>
           </a:p>
         </p:txBody>
@@ -30189,7 +31845,7 @@
               </a:defRPr>
             </a:pPr>
             <a:r>
-              <a:t>Complete는 복구용 비교 기준이고, 다음 단계는 내가 직접 만든 workspace에서 계속합니다.</a:t>
+              <a:t>정상 결과를 만든 뒤에는 한 번에 하나의 값만 바꿉니다.</a:t>
             </a:r>
           </a:p>
         </p:txBody>
@@ -30325,7 +31981,7 @@
               </a:defRPr>
             </a:pPr>
             <a:r>
-              <a:t>현재 단계 체크포인트    |    현재 폴더 ~/ros2_curri/my_agv_ws    |    현재 터미널</a:t>
+              <a:t>현재 단계 미니 실습    |    현재 폴더 ~/ros2_curri/my_agv_ws    |    현재 터미널</a:t>
             </a:r>
           </a:p>
         </p:txBody>
@@ -30338,18 +31994,18 @@
         </p:nvSpPr>
         <p:spPr>
           <a:xfrm>
-            <a:off x="685800" y="1737360"/>
-            <a:ext cx="10972800" cy="3611880"/>
+            <a:off x="749808" y="1874519"/>
+            <a:ext cx="10652760" cy="1993392"/>
           </a:xfrm>
           <a:prstGeom prst="roundRect">
             <a:avLst/>
           </a:prstGeom>
           <a:solidFill>
-            <a:srgbClr val="F4F7FB"/>
+            <a:srgbClr val="FFF8EB"/>
           </a:solidFill>
           <a:ln>
             <a:solidFill>
-              <a:srgbClr val="D2DCE8"/>
+              <a:srgbClr val="ECC680"/>
             </a:solidFill>
           </a:ln>
         </p:spPr>
@@ -30368,10 +32024,23 @@
           </a:fontRef>
         </p:style>
         <p:txBody>
-          <a:bodyPr rtlCol="0" anchor="ctr"/>
-          <a:lstStyle/>
-          <a:p>
-            <a:pPr algn="ctr"/>
+          <a:bodyPr rtlCol="0" anchor="ctr" wrap="square" lIns="73152" rIns="73152" tIns="36576" bIns="36576"/>
+          <a:lstStyle/>
+          <a:p>
+            <a:pPr algn="ctr">
+              <a:spcAft>
+                <a:spcPts val="0"/>
+              </a:spcAft>
+              <a:defRPr sz="2300" b="1">
+                <a:solidFill>
+                  <a:srgbClr val="122C4E"/>
+                </a:solidFill>
+                <a:latin typeface="Noto Sans CJK KR"/>
+              </a:defRPr>
+            </a:pPr>
+            <a:r>
+              <a:t>target 없음, target 있음, obstacle&lt;0.5 m의 세 입력에 대해 예상 state와 /cmd_vel_raw를 표로 작성한다.</a:t>
+            </a:r>
           </a:p>
         </p:txBody>
       </p:sp>
@@ -30383,111 +32052,8 @@
         </p:nvSpPr>
         <p:spPr>
           <a:xfrm>
-            <a:off x="896112" y="1993392"/>
-            <a:ext cx="10332720" cy="2971800"/>
-          </a:xfrm>
-          <a:prstGeom prst="rect">
-            <a:avLst/>
-          </a:prstGeom>
-          <a:noFill/>
-        </p:spPr>
-        <p:txBody>
-          <a:bodyPr wrap="square" lIns="109728" rIns="109728">
-            <a:spAutoFit/>
-          </a:bodyPr>
-          <a:lstStyle/>
-          <a:p>
-            <a:pPr>
-              <a:spcAft>
-                <a:spcPts val="800"/>
-              </a:spcAft>
-              <a:defRPr sz="1800">
-                <a:solidFill>
-                  <a:srgbClr val="122C4E"/>
-                </a:solidFill>
-                <a:latin typeface="Noto Sans CJK KR"/>
-              </a:defRPr>
-            </a:pPr>
-            <a:r>
-              <a:t>• □ 완료 화면: /mission_state 로그와 /cmd_vel_raw가 detection·obstacle input에 따라 바뀌는 구조를 확인한다.</a:t>
-            </a:r>
-          </a:p>
-          <a:p>
-            <a:pPr>
-              <a:spcAft>
-                <a:spcPts val="800"/>
-              </a:spcAft>
-              <a:defRPr sz="1800">
-                <a:solidFill>
-                  <a:srgbClr val="122C4E"/>
-                </a:solidFill>
-                <a:latin typeface="Noto Sans CJK KR"/>
-              </a:defRPr>
-            </a:pPr>
-            <a:r>
-              <a:t>• □ 막혔을 때 비교할 Complete: blocks/E_autonomy_logic/M19_mission_fsm/complete/</a:t>
-            </a:r>
-          </a:p>
-          <a:p>
-            <a:pPr>
-              <a:spcAft>
-                <a:spcPts val="800"/>
-              </a:spcAft>
-              <a:defRPr sz="1800">
-                <a:solidFill>
-                  <a:srgbClr val="122C4E"/>
-                </a:solidFill>
-                <a:latin typeface="Noto Sans CJK KR"/>
-              </a:defRPr>
-            </a:pPr>
-            <a:r>
-              <a:t>• □ 정상 로그·캡처: logs/validation.log, screenshots/validation_terminal.png</a:t>
-            </a:r>
-          </a:p>
-          <a:p>
-            <a:pPr>
-              <a:spcAft>
-                <a:spcPts val="800"/>
-              </a:spcAft>
-              <a:defRPr sz="1800">
-                <a:solidFill>
-                  <a:srgbClr val="122C4E"/>
-                </a:solidFill>
-                <a:latin typeface="Noto Sans CJK KR"/>
-              </a:defRPr>
-            </a:pPr>
-            <a:r>
-              <a:t>• □ 버전 식별: CHECKSUM_or_TAG.txt의 SHA-256 manifest</a:t>
-            </a:r>
-          </a:p>
-          <a:p>
-            <a:pPr>
-              <a:spcAft>
-                <a:spcPts val="800"/>
-              </a:spcAft>
-              <a:defRPr sz="1800">
-                <a:solidFill>
-                  <a:srgbClr val="122C4E"/>
-                </a:solidFill>
-                <a:latin typeface="Noto Sans CJK KR"/>
-              </a:defRPr>
-            </a:pPr>
-            <a:r>
-              <a:t>• □ 다음 시작 조건: M20 PID</a:t>
-            </a:r>
-          </a:p>
-        </p:txBody>
-      </p:sp>
-      <p:sp>
-        <p:nvSpPr>
-          <p:cNvPr id="9" name="TextBox 8"/>
-          <p:cNvSpPr txBox="1"/>
-          <p:nvPr/>
-        </p:nvSpPr>
-        <p:spPr>
-          <a:xfrm>
-            <a:off x="868680" y="5596128"/>
-            <a:ext cx="10515600" cy="338328"/>
+            <a:off x="877824" y="4590288"/>
+            <a:ext cx="10241280" cy="594360"/>
           </a:xfrm>
           <a:prstGeom prst="rect">
             <a:avLst/>
@@ -30504,15 +32070,15 @@
               <a:spcAft>
                 <a:spcPts val="0"/>
               </a:spcAft>
-              <a:defRPr sz="1700" b="1">
-                <a:solidFill>
-                  <a:srgbClr val="2A8B5A"/>
-                </a:solidFill>
-                <a:latin typeface="Noto Sans CJK KR"/>
-              </a:defRPr>
-            </a:pPr>
-            <a:r>
-              <a:t>다음 모듈을 시작하기 전, 내 src의 변경사항을 저장하고 현재 완료 조건을 다시 확인합니다.</a:t>
+              <a:defRPr sz="1900" b="1">
+                <a:solidFill>
+                  <a:srgbClr val="DB7E22"/>
+                </a:solidFill>
+                <a:latin typeface="Noto Sans CJK KR"/>
+              </a:defRPr>
+            </a:pPr>
+            <a:r>
+              <a:t>기록할 것: 바꾼 값(단위) · 기대한 변화 · 실제 출력/화면 · 원래 값으로 되돌린 결과</a:t>
             </a:r>
           </a:p>
         </p:txBody>
@@ -30569,7 +32135,7 @@
               </a:defRPr>
             </a:pPr>
             <a:r>
-              <a:t>공식 참고 자료</a:t>
+              <a:t>내 프로젝트 체크포인트를 저장하고 다음 모듈로 넘긴다</a:t>
             </a:r>
           </a:p>
         </p:txBody>
@@ -30608,7 +32174,7 @@
               </a:defRPr>
             </a:pPr>
             <a:r>
-              <a:t>본문 단계는 링크를 열지 않아도 완료할 수 있으며, 링크는 개념을 더 확인할 때만 사용합니다.</a:t>
+              <a:t>Complete는 복구용 비교 기준이고, 다음 단계는 내가 직접 만든 workspace에서 계속합니다.</a:t>
             </a:r>
           </a:p>
         </p:txBody>
@@ -30693,16 +32259,16 @@
       </p:sp>
       <p:sp>
         <p:nvSpPr>
-          <p:cNvPr id="6" name="Rounded Rectangle 5"/>
+          <p:cNvPr id="6" name="Rectangle 5"/>
           <p:cNvSpPr/>
           <p:nvPr/>
         </p:nvSpPr>
         <p:spPr>
           <a:xfrm>
-            <a:off x="658368" y="1554480"/>
-            <a:ext cx="10972800" cy="4526280"/>
-          </a:xfrm>
-          <a:prstGeom prst="roundRect">
+            <a:off x="566928" y="1188720"/>
+            <a:ext cx="11064240" cy="347472"/>
+          </a:xfrm>
+          <a:prstGeom prst="rect">
             <a:avLst/>
           </a:prstGeom>
           <a:solidFill>
@@ -30710,7 +32276,7 @@
           </a:solidFill>
           <a:ln>
             <a:solidFill>
-              <a:srgbClr val="D7DFE9"/>
+              <a:srgbClr val="F4F7FB"/>
             </a:solidFill>
           </a:ln>
         </p:spPr>
@@ -30729,6 +32295,64 @@
           </a:fontRef>
         </p:style>
         <p:txBody>
+          <a:bodyPr rtlCol="0" anchor="ctr" wrap="square" lIns="73152" rIns="73152" tIns="36576" bIns="36576"/>
+          <a:lstStyle/>
+          <a:p>
+            <a:pPr algn="l">
+              <a:spcAft>
+                <a:spcPts val="0"/>
+              </a:spcAft>
+              <a:defRPr sz="1300" b="1">
+                <a:solidFill>
+                  <a:srgbClr val="122C4E"/>
+                </a:solidFill>
+                <a:latin typeface="Noto Sans CJK KR"/>
+              </a:defRPr>
+            </a:pPr>
+            <a:r>
+              <a:t>현재 단계 체크포인트    |    현재 폴더 ~/ros2_curri/my_agv_ws    |    현재 터미널</a:t>
+            </a:r>
+          </a:p>
+        </p:txBody>
+      </p:sp>
+      <p:sp>
+        <p:nvSpPr>
+          <p:cNvPr id="7" name="Rounded Rectangle 6"/>
+          <p:cNvSpPr/>
+          <p:nvPr/>
+        </p:nvSpPr>
+        <p:spPr>
+          <a:xfrm>
+            <a:off x="685800" y="1737360"/>
+            <a:ext cx="10972800" cy="3611880"/>
+          </a:xfrm>
+          <a:prstGeom prst="roundRect">
+            <a:avLst/>
+          </a:prstGeom>
+          <a:solidFill>
+            <a:srgbClr val="F4F7FB"/>
+          </a:solidFill>
+          <a:ln>
+            <a:solidFill>
+              <a:srgbClr val="D2DCE8"/>
+            </a:solidFill>
+          </a:ln>
+        </p:spPr>
+        <p:style>
+          <a:lnRef idx="1">
+            <a:schemeClr val="accent1"/>
+          </a:lnRef>
+          <a:fillRef idx="3">
+            <a:schemeClr val="accent1"/>
+          </a:fillRef>
+          <a:effectRef idx="2">
+            <a:schemeClr val="accent1"/>
+          </a:effectRef>
+          <a:fontRef idx="minor">
+            <a:schemeClr val="lt1"/>
+          </a:fontRef>
+        </p:style>
+        <p:txBody>
           <a:bodyPr rtlCol="0" anchor="ctr"/>
           <a:lstStyle/>
           <a:p>
@@ -30738,312 +32362,142 @@
       </p:sp>
       <p:sp>
         <p:nvSpPr>
-          <p:cNvPr id="7" name="TextBox 6"/>
-          <p:cNvSpPr txBox="1"/>
-          <p:nvPr/>
-        </p:nvSpPr>
-        <p:spPr>
-          <a:xfrm>
-            <a:off x="914400" y="1773936"/>
-            <a:ext cx="3840480" cy="256032"/>
-          </a:xfrm>
-          <a:prstGeom prst="rect">
-            <a:avLst/>
-          </a:prstGeom>
-          <a:noFill/>
-        </p:spPr>
-        <p:txBody>
-          <a:bodyPr wrap="square" lIns="73152" rIns="73152" tIns="36576" bIns="36576">
-            <a:spAutoFit/>
-          </a:bodyPr>
-          <a:lstStyle/>
-          <a:p>
-            <a:pPr algn="l">
+          <p:cNvPr id="8" name="TextBox 7"/>
+          <p:cNvSpPr txBox="1"/>
+          <p:nvPr/>
+        </p:nvSpPr>
+        <p:spPr>
+          <a:xfrm>
+            <a:off x="896112" y="1993392"/>
+            <a:ext cx="10332720" cy="2971800"/>
+          </a:xfrm>
+          <a:prstGeom prst="rect">
+            <a:avLst/>
+          </a:prstGeom>
+          <a:noFill/>
+        </p:spPr>
+        <p:txBody>
+          <a:bodyPr wrap="square" lIns="109728" rIns="109728">
+            <a:spAutoFit/>
+          </a:bodyPr>
+          <a:lstStyle/>
+          <a:p>
+            <a:pPr>
+              <a:spcAft>
+                <a:spcPts val="800"/>
+              </a:spcAft>
+              <a:defRPr sz="1800">
+                <a:solidFill>
+                  <a:srgbClr val="122C4E"/>
+                </a:solidFill>
+                <a:latin typeface="Noto Sans CJK KR"/>
+              </a:defRPr>
+            </a:pPr>
+            <a:r>
+              <a:t>• □ 완료 화면: /mission_state 로그와 /cmd_vel_raw가 detection·obstacle input에 따라 바뀌는 구조를 확인한다.</a:t>
+            </a:r>
+          </a:p>
+          <a:p>
+            <a:pPr>
+              <a:spcAft>
+                <a:spcPts val="800"/>
+              </a:spcAft>
+              <a:defRPr sz="1800">
+                <a:solidFill>
+                  <a:srgbClr val="122C4E"/>
+                </a:solidFill>
+                <a:latin typeface="Noto Sans CJK KR"/>
+              </a:defRPr>
+            </a:pPr>
+            <a:r>
+              <a:t>• □ 막혔을 때 비교할 Complete: blocks/E_autonomy_logic/M19_mission_fsm/complete/</a:t>
+            </a:r>
+          </a:p>
+          <a:p>
+            <a:pPr>
+              <a:spcAft>
+                <a:spcPts val="800"/>
+              </a:spcAft>
+              <a:defRPr sz="1800">
+                <a:solidFill>
+                  <a:srgbClr val="122C4E"/>
+                </a:solidFill>
+                <a:latin typeface="Noto Sans CJK KR"/>
+              </a:defRPr>
+            </a:pPr>
+            <a:r>
+              <a:t>• □ 정상 로그·캡처: logs/validation.log, screenshots/validation_terminal.png</a:t>
+            </a:r>
+          </a:p>
+          <a:p>
+            <a:pPr>
+              <a:spcAft>
+                <a:spcPts val="800"/>
+              </a:spcAft>
+              <a:defRPr sz="1800">
+                <a:solidFill>
+                  <a:srgbClr val="122C4E"/>
+                </a:solidFill>
+                <a:latin typeface="Noto Sans CJK KR"/>
+              </a:defRPr>
+            </a:pPr>
+            <a:r>
+              <a:t>• □ 버전 식별: CHECKSUM_or_TAG.txt의 SHA-256 manifest</a:t>
+            </a:r>
+          </a:p>
+          <a:p>
+            <a:pPr>
+              <a:spcAft>
+                <a:spcPts val="800"/>
+              </a:spcAft>
+              <a:defRPr sz="1800">
+                <a:solidFill>
+                  <a:srgbClr val="122C4E"/>
+                </a:solidFill>
+                <a:latin typeface="Noto Sans CJK KR"/>
+              </a:defRPr>
+            </a:pPr>
+            <a:r>
+              <a:t>• □ 다음 시작 조건: M20 PID</a:t>
+            </a:r>
+          </a:p>
+        </p:txBody>
+      </p:sp>
+      <p:sp>
+        <p:nvSpPr>
+          <p:cNvPr id="9" name="TextBox 8"/>
+          <p:cNvSpPr txBox="1"/>
+          <p:nvPr/>
+        </p:nvSpPr>
+        <p:spPr>
+          <a:xfrm>
+            <a:off x="868680" y="5596128"/>
+            <a:ext cx="10515600" cy="338328"/>
+          </a:xfrm>
+          <a:prstGeom prst="rect">
+            <a:avLst/>
+          </a:prstGeom>
+          <a:noFill/>
+        </p:spPr>
+        <p:txBody>
+          <a:bodyPr wrap="square" lIns="73152" rIns="73152" tIns="36576" bIns="36576">
+            <a:spAutoFit/>
+          </a:bodyPr>
+          <a:lstStyle/>
+          <a:p>
+            <a:pPr algn="ctr">
               <a:spcAft>
                 <a:spcPts val="0"/>
               </a:spcAft>
               <a:defRPr sz="1700" b="1">
                 <a:solidFill>
-                  <a:srgbClr val="122C4E"/>
-                </a:solidFill>
-                <a:latin typeface="Noto Sans CJK KR"/>
-              </a:defRPr>
-            </a:pPr>
-            <a:r>
-              <a:t>ROS 2 Jazzy — Gazebo Simulation</a:t>
-            </a:r>
-          </a:p>
-        </p:txBody>
-      </p:sp>
-      <p:sp>
-        <p:nvSpPr>
-          <p:cNvPr id="8" name="TextBox 7"/>
-          <p:cNvSpPr txBox="1"/>
-          <p:nvPr/>
-        </p:nvSpPr>
-        <p:spPr>
-          <a:xfrm>
-            <a:off x="914400" y="2048255"/>
-            <a:ext cx="9966960" cy="475488"/>
-          </a:xfrm>
-          <a:prstGeom prst="rect">
-            <a:avLst/>
-          </a:prstGeom>
-          <a:noFill/>
-        </p:spPr>
-        <p:txBody>
-          <a:bodyPr wrap="square" lIns="73152" rIns="73152" tIns="36576" bIns="36576">
-            <a:spAutoFit/>
-          </a:bodyPr>
-          <a:lstStyle/>
-          <a:p>
-            <a:pPr algn="l">
-              <a:spcAft>
-                <a:spcPts val="0"/>
-              </a:spcAft>
-              <a:defRPr sz="1000" b="0">
-                <a:solidFill>
-                  <a:srgbClr val="225B9B"/>
-                </a:solidFill>
-                <a:latin typeface="DejaVu Sans Mono"/>
-              </a:defRPr>
-            </a:pPr>
-            <a:r>
-              <a:t>https://docs.ros.org/en/jazzy/Tutorials/Advanced/Simulators/Gazebo/Simulation-Gazebo.html</a:t>
-            </a:r>
-          </a:p>
-        </p:txBody>
-      </p:sp>
-      <p:sp>
-        <p:nvSpPr>
-          <p:cNvPr id="9" name="TextBox 8"/>
-          <p:cNvSpPr txBox="1"/>
-          <p:nvPr/>
-        </p:nvSpPr>
-        <p:spPr>
-          <a:xfrm>
-            <a:off x="914400" y="2852928"/>
-            <a:ext cx="3840480" cy="256032"/>
-          </a:xfrm>
-          <a:prstGeom prst="rect">
-            <a:avLst/>
-          </a:prstGeom>
-          <a:noFill/>
-        </p:spPr>
-        <p:txBody>
-          <a:bodyPr wrap="square" lIns="73152" rIns="73152" tIns="36576" bIns="36576">
-            <a:spAutoFit/>
-          </a:bodyPr>
-          <a:lstStyle/>
-          <a:p>
-            <a:pPr algn="l">
-              <a:spcAft>
-                <a:spcPts val="0"/>
-              </a:spcAft>
-              <a:defRPr sz="1700" b="1">
-                <a:solidFill>
-                  <a:srgbClr val="122C4E"/>
-                </a:solidFill>
-                <a:latin typeface="Noto Sans CJK KR"/>
-              </a:defRPr>
-            </a:pPr>
-            <a:r>
-              <a:t>ROS 2 Jazzy — URDF / robot_state_publisher</a:t>
-            </a:r>
-          </a:p>
-        </p:txBody>
-      </p:sp>
-      <p:sp>
-        <p:nvSpPr>
-          <p:cNvPr id="10" name="TextBox 9"/>
-          <p:cNvSpPr txBox="1"/>
-          <p:nvPr/>
-        </p:nvSpPr>
-        <p:spPr>
-          <a:xfrm>
-            <a:off x="914400" y="3127248"/>
-            <a:ext cx="9966960" cy="475488"/>
-          </a:xfrm>
-          <a:prstGeom prst="rect">
-            <a:avLst/>
-          </a:prstGeom>
-          <a:noFill/>
-        </p:spPr>
-        <p:txBody>
-          <a:bodyPr wrap="square" lIns="73152" rIns="73152" tIns="36576" bIns="36576">
-            <a:spAutoFit/>
-          </a:bodyPr>
-          <a:lstStyle/>
-          <a:p>
-            <a:pPr algn="l">
-              <a:spcAft>
-                <a:spcPts val="0"/>
-              </a:spcAft>
-              <a:defRPr sz="1000" b="0">
-                <a:solidFill>
-                  <a:srgbClr val="225B9B"/>
-                </a:solidFill>
-                <a:latin typeface="DejaVu Sans Mono"/>
-              </a:defRPr>
-            </a:pPr>
-            <a:r>
-              <a:t>https://docs.ros.org/en/jazzy/Tutorials/Intermediate/URDF/Using-URDF-with-Robot-State-Publisher-py.html</a:t>
-            </a:r>
-          </a:p>
-        </p:txBody>
-      </p:sp>
-      <p:sp>
-        <p:nvSpPr>
-          <p:cNvPr id="11" name="TextBox 10"/>
-          <p:cNvSpPr txBox="1"/>
-          <p:nvPr/>
-        </p:nvSpPr>
-        <p:spPr>
-          <a:xfrm>
-            <a:off x="914400" y="3931920"/>
-            <a:ext cx="3840480" cy="256032"/>
-          </a:xfrm>
-          <a:prstGeom prst="rect">
-            <a:avLst/>
-          </a:prstGeom>
-          <a:noFill/>
-        </p:spPr>
-        <p:txBody>
-          <a:bodyPr wrap="square" lIns="73152" rIns="73152" tIns="36576" bIns="36576">
-            <a:spAutoFit/>
-          </a:bodyPr>
-          <a:lstStyle/>
-          <a:p>
-            <a:pPr algn="l">
-              <a:spcAft>
-                <a:spcPts val="0"/>
-              </a:spcAft>
-              <a:defRPr sz="1700" b="1">
-                <a:solidFill>
-                  <a:srgbClr val="122C4E"/>
-                </a:solidFill>
-                <a:latin typeface="Noto Sans CJK KR"/>
-              </a:defRPr>
-            </a:pPr>
-            <a:r>
-              <a:t>Gazebo — ROS 2 Integration / ros_gz_bridge</a:t>
-            </a:r>
-          </a:p>
-        </p:txBody>
-      </p:sp>
-      <p:sp>
-        <p:nvSpPr>
-          <p:cNvPr id="12" name="TextBox 11"/>
-          <p:cNvSpPr txBox="1"/>
-          <p:nvPr/>
-        </p:nvSpPr>
-        <p:spPr>
-          <a:xfrm>
-            <a:off x="914400" y="4206240"/>
-            <a:ext cx="9966960" cy="475488"/>
-          </a:xfrm>
-          <a:prstGeom prst="rect">
-            <a:avLst/>
-          </a:prstGeom>
-          <a:noFill/>
-        </p:spPr>
-        <p:txBody>
-          <a:bodyPr wrap="square" lIns="73152" rIns="73152" tIns="36576" bIns="36576">
-            <a:spAutoFit/>
-          </a:bodyPr>
-          <a:lstStyle/>
-          <a:p>
-            <a:pPr algn="l">
-              <a:spcAft>
-                <a:spcPts val="0"/>
-              </a:spcAft>
-              <a:defRPr sz="1000" b="0">
-                <a:solidFill>
-                  <a:srgbClr val="225B9B"/>
-                </a:solidFill>
-                <a:latin typeface="DejaVu Sans Mono"/>
-              </a:defRPr>
-            </a:pPr>
-            <a:r>
-              <a:t>https://gazebosim.org/docs/latest/ros2_integration/</a:t>
-            </a:r>
-          </a:p>
-        </p:txBody>
-      </p:sp>
-      <p:sp>
-        <p:nvSpPr>
-          <p:cNvPr id="13" name="TextBox 12"/>
-          <p:cNvSpPr txBox="1"/>
-          <p:nvPr/>
-        </p:nvSpPr>
-        <p:spPr>
-          <a:xfrm>
-            <a:off x="914400" y="5010912"/>
-            <a:ext cx="3840480" cy="256032"/>
-          </a:xfrm>
-          <a:prstGeom prst="rect">
-            <a:avLst/>
-          </a:prstGeom>
-          <a:noFill/>
-        </p:spPr>
-        <p:txBody>
-          <a:bodyPr wrap="square" lIns="73152" rIns="73152" tIns="36576" bIns="36576">
-            <a:spAutoFit/>
-          </a:bodyPr>
-          <a:lstStyle/>
-          <a:p>
-            <a:pPr algn="l">
-              <a:spcAft>
-                <a:spcPts val="0"/>
-              </a:spcAft>
-              <a:defRPr sz="1700" b="1">
-                <a:solidFill>
-                  <a:srgbClr val="122C4E"/>
-                </a:solidFill>
-                <a:latin typeface="Noto Sans CJK KR"/>
-              </a:defRPr>
-            </a:pPr>
-            <a:r>
-              <a:t>ROS 2 Jazzy — rosbag2 Recording and Playback</a:t>
-            </a:r>
-          </a:p>
-        </p:txBody>
-      </p:sp>
-      <p:sp>
-        <p:nvSpPr>
-          <p:cNvPr id="14" name="TextBox 13"/>
-          <p:cNvSpPr txBox="1"/>
-          <p:nvPr/>
-        </p:nvSpPr>
-        <p:spPr>
-          <a:xfrm>
-            <a:off x="914400" y="5285232"/>
-            <a:ext cx="9966960" cy="475488"/>
-          </a:xfrm>
-          <a:prstGeom prst="rect">
-            <a:avLst/>
-          </a:prstGeom>
-          <a:noFill/>
-        </p:spPr>
-        <p:txBody>
-          <a:bodyPr wrap="square" lIns="73152" rIns="73152" tIns="36576" bIns="36576">
-            <a:spAutoFit/>
-          </a:bodyPr>
-          <a:lstStyle/>
-          <a:p>
-            <a:pPr algn="l">
-              <a:spcAft>
-                <a:spcPts val="0"/>
-              </a:spcAft>
-              <a:defRPr sz="1000" b="0">
-                <a:solidFill>
-                  <a:srgbClr val="225B9B"/>
-                </a:solidFill>
-                <a:latin typeface="DejaVu Sans Mono"/>
-              </a:defRPr>
-            </a:pPr>
-            <a:r>
-              <a:t>https://docs.ros.org/en/jazzy/Tutorials/Beginner-CLI-Tools/Recording-And-Playing-Back-Data/Recording-And-Playing-Back-Data.html</a:t>
+                  <a:srgbClr val="2A8B5A"/>
+                </a:solidFill>
+                <a:latin typeface="Noto Sans CJK KR"/>
+              </a:defRPr>
+            </a:pPr>
+            <a:r>
+              <a:t>다음 모듈을 시작하기 전, 내 src의 변경사항을 저장하고 현재 완료 조건을 다시 확인합니다.</a:t>
             </a:r>
           </a:p>
         </p:txBody>
@@ -31684,6 +33138,537 @@
             </a:pPr>
             <a:r>
               <a:t>이번 모듈에서는 4개 파일을 빈 상태에서 직접 만듭니다. 다음 슬라이드의 명령을 입력한 뒤에만 코드를 작성합니다.</a:t>
+            </a:r>
+          </a:p>
+        </p:txBody>
+      </p:sp>
+    </p:spTree>
+  </p:cSld>
+  <p:clrMapOvr>
+    <a:masterClrMapping/>
+  </p:clrMapOvr>
+</p:sld>
+</file>
+
+<file path=ppt/slides/slide50.xml><?xml version="1.0" encoding="utf-8"?>
+<p:sld xmlns:a="http://schemas.openxmlformats.org/drawingml/2006/main" xmlns:p="http://schemas.openxmlformats.org/presentationml/2006/main" xmlns:r="http://schemas.openxmlformats.org/officeDocument/2006/relationships">
+  <p:cSld>
+    <p:spTree>
+      <p:nvGrpSpPr>
+        <p:cNvPr id="1" name=""/>
+        <p:cNvGrpSpPr/>
+        <p:nvPr/>
+      </p:nvGrpSpPr>
+      <p:grpSpPr/>
+      <p:sp>
+        <p:nvSpPr>
+          <p:cNvPr id="2" name="TextBox 1"/>
+          <p:cNvSpPr txBox="1"/>
+          <p:nvPr/>
+        </p:nvSpPr>
+        <p:spPr>
+          <a:xfrm>
+            <a:off x="566928" y="347472"/>
+            <a:ext cx="10881360" cy="438912"/>
+          </a:xfrm>
+          <a:prstGeom prst="rect">
+            <a:avLst/>
+          </a:prstGeom>
+          <a:noFill/>
+        </p:spPr>
+        <p:txBody>
+          <a:bodyPr wrap="square" lIns="73152" rIns="73152" tIns="36576" bIns="36576">
+            <a:spAutoFit/>
+          </a:bodyPr>
+          <a:lstStyle/>
+          <a:p>
+            <a:pPr algn="l">
+              <a:spcAft>
+                <a:spcPts val="0"/>
+              </a:spcAft>
+              <a:defRPr sz="3200" b="1">
+                <a:solidFill>
+                  <a:srgbClr val="122C4E"/>
+                </a:solidFill>
+                <a:latin typeface="Noto Sans CJK KR"/>
+              </a:defRPr>
+            </a:pPr>
+            <a:r>
+              <a:t>공식 참고 자료</a:t>
+            </a:r>
+          </a:p>
+        </p:txBody>
+      </p:sp>
+      <p:sp>
+        <p:nvSpPr>
+          <p:cNvPr id="3" name="TextBox 2"/>
+          <p:cNvSpPr txBox="1"/>
+          <p:nvPr/>
+        </p:nvSpPr>
+        <p:spPr>
+          <a:xfrm>
+            <a:off x="603504" y="859536"/>
+            <a:ext cx="10698480" cy="292608"/>
+          </a:xfrm>
+          <a:prstGeom prst="rect">
+            <a:avLst/>
+          </a:prstGeom>
+          <a:noFill/>
+        </p:spPr>
+        <p:txBody>
+          <a:bodyPr wrap="square" lIns="73152" rIns="73152" tIns="36576" bIns="36576">
+            <a:spAutoFit/>
+          </a:bodyPr>
+          <a:lstStyle/>
+          <a:p>
+            <a:pPr algn="l">
+              <a:spcAft>
+                <a:spcPts val="0"/>
+              </a:spcAft>
+              <a:defRPr sz="1700" b="0">
+                <a:solidFill>
+                  <a:srgbClr val="5C6672"/>
+                </a:solidFill>
+                <a:latin typeface="Noto Sans CJK KR"/>
+              </a:defRPr>
+            </a:pPr>
+            <a:r>
+              <a:t>본문 단계는 링크를 열지 않아도 완료할 수 있으며, 링크는 개념을 더 확인할 때만 사용합니다.</a:t>
+            </a:r>
+          </a:p>
+        </p:txBody>
+      </p:sp>
+      <p:sp>
+        <p:nvSpPr>
+          <p:cNvPr id="4" name="TextBox 3"/>
+          <p:cNvSpPr txBox="1"/>
+          <p:nvPr/>
+        </p:nvSpPr>
+        <p:spPr>
+          <a:xfrm>
+            <a:off x="530352" y="6510528"/>
+            <a:ext cx="7772400" cy="201168"/>
+          </a:xfrm>
+          <a:prstGeom prst="rect">
+            <a:avLst/>
+          </a:prstGeom>
+          <a:noFill/>
+        </p:spPr>
+        <p:txBody>
+          <a:bodyPr wrap="square" lIns="73152" rIns="73152" tIns="36576" bIns="36576">
+            <a:spAutoFit/>
+          </a:bodyPr>
+          <a:lstStyle/>
+          <a:p>
+            <a:pPr algn="l">
+              <a:spcAft>
+                <a:spcPts val="0"/>
+              </a:spcAft>
+              <a:defRPr sz="900" b="0">
+                <a:solidFill>
+                  <a:srgbClr val="5C6672"/>
+                </a:solidFill>
+                <a:latin typeface="Noto Sans CJK KR"/>
+              </a:defRPr>
+            </a:pPr>
+            <a:r>
+              <a:t>ROS 2 기반 AGV End-to-End 개발 커리큘럼 · M19 · Block E</a:t>
+            </a:r>
+          </a:p>
+        </p:txBody>
+      </p:sp>
+      <p:sp>
+        <p:nvSpPr>
+          <p:cNvPr id="5" name="TextBox 4"/>
+          <p:cNvSpPr txBox="1"/>
+          <p:nvPr/>
+        </p:nvSpPr>
+        <p:spPr>
+          <a:xfrm>
+            <a:off x="9144000" y="6510528"/>
+            <a:ext cx="2468880" cy="201168"/>
+          </a:xfrm>
+          <a:prstGeom prst="rect">
+            <a:avLst/>
+          </a:prstGeom>
+          <a:noFill/>
+        </p:spPr>
+        <p:txBody>
+          <a:bodyPr wrap="square" lIns="73152" rIns="73152" tIns="36576" bIns="36576">
+            <a:spAutoFit/>
+          </a:bodyPr>
+          <a:lstStyle/>
+          <a:p>
+            <a:pPr algn="r">
+              <a:spcAft>
+                <a:spcPts val="0"/>
+              </a:spcAft>
+              <a:defRPr sz="1000" b="0">
+                <a:solidFill>
+                  <a:srgbClr val="5C6672"/>
+                </a:solidFill>
+                <a:latin typeface="Noto Sans CJK KR"/>
+              </a:defRPr>
+            </a:pPr>
+            <a:r>
+              <a:t>명령·파일 경로는 슬라이드에서 복사 가능</a:t>
+            </a:r>
+          </a:p>
+        </p:txBody>
+      </p:sp>
+      <p:sp>
+        <p:nvSpPr>
+          <p:cNvPr id="6" name="Rounded Rectangle 5"/>
+          <p:cNvSpPr/>
+          <p:nvPr/>
+        </p:nvSpPr>
+        <p:spPr>
+          <a:xfrm>
+            <a:off x="658368" y="1554480"/>
+            <a:ext cx="10972800" cy="4526280"/>
+          </a:xfrm>
+          <a:prstGeom prst="roundRect">
+            <a:avLst/>
+          </a:prstGeom>
+          <a:solidFill>
+            <a:srgbClr val="F4F7FB"/>
+          </a:solidFill>
+          <a:ln>
+            <a:solidFill>
+              <a:srgbClr val="D7DFE9"/>
+            </a:solidFill>
+          </a:ln>
+        </p:spPr>
+        <p:style>
+          <a:lnRef idx="1">
+            <a:schemeClr val="accent1"/>
+          </a:lnRef>
+          <a:fillRef idx="3">
+            <a:schemeClr val="accent1"/>
+          </a:fillRef>
+          <a:effectRef idx="2">
+            <a:schemeClr val="accent1"/>
+          </a:effectRef>
+          <a:fontRef idx="minor">
+            <a:schemeClr val="lt1"/>
+          </a:fontRef>
+        </p:style>
+        <p:txBody>
+          <a:bodyPr rtlCol="0" anchor="ctr"/>
+          <a:lstStyle/>
+          <a:p>
+            <a:pPr algn="ctr"/>
+          </a:p>
+        </p:txBody>
+      </p:sp>
+      <p:sp>
+        <p:nvSpPr>
+          <p:cNvPr id="7" name="TextBox 6"/>
+          <p:cNvSpPr txBox="1"/>
+          <p:nvPr/>
+        </p:nvSpPr>
+        <p:spPr>
+          <a:xfrm>
+            <a:off x="914400" y="1773936"/>
+            <a:ext cx="3840480" cy="256032"/>
+          </a:xfrm>
+          <a:prstGeom prst="rect">
+            <a:avLst/>
+          </a:prstGeom>
+          <a:noFill/>
+        </p:spPr>
+        <p:txBody>
+          <a:bodyPr wrap="square" lIns="73152" rIns="73152" tIns="36576" bIns="36576">
+            <a:spAutoFit/>
+          </a:bodyPr>
+          <a:lstStyle/>
+          <a:p>
+            <a:pPr algn="l">
+              <a:spcAft>
+                <a:spcPts val="0"/>
+              </a:spcAft>
+              <a:defRPr sz="1700" b="1">
+                <a:solidFill>
+                  <a:srgbClr val="122C4E"/>
+                </a:solidFill>
+                <a:latin typeface="Noto Sans CJK KR"/>
+              </a:defRPr>
+            </a:pPr>
+            <a:r>
+              <a:t>ROS 2 Jazzy — Gazebo Simulation</a:t>
+            </a:r>
+          </a:p>
+        </p:txBody>
+      </p:sp>
+      <p:sp>
+        <p:nvSpPr>
+          <p:cNvPr id="8" name="TextBox 7"/>
+          <p:cNvSpPr txBox="1"/>
+          <p:nvPr/>
+        </p:nvSpPr>
+        <p:spPr>
+          <a:xfrm>
+            <a:off x="914400" y="2048255"/>
+            <a:ext cx="9966960" cy="475488"/>
+          </a:xfrm>
+          <a:prstGeom prst="rect">
+            <a:avLst/>
+          </a:prstGeom>
+          <a:noFill/>
+        </p:spPr>
+        <p:txBody>
+          <a:bodyPr wrap="square" lIns="73152" rIns="73152" tIns="36576" bIns="36576">
+            <a:spAutoFit/>
+          </a:bodyPr>
+          <a:lstStyle/>
+          <a:p>
+            <a:pPr algn="l">
+              <a:spcAft>
+                <a:spcPts val="0"/>
+              </a:spcAft>
+              <a:defRPr sz="1000" b="0">
+                <a:solidFill>
+                  <a:srgbClr val="225B9B"/>
+                </a:solidFill>
+                <a:latin typeface="DejaVu Sans Mono"/>
+              </a:defRPr>
+            </a:pPr>
+            <a:r>
+              <a:t>https://docs.ros.org/en/jazzy/Tutorials/Advanced/Simulators/Gazebo/Simulation-Gazebo.html</a:t>
+            </a:r>
+          </a:p>
+        </p:txBody>
+      </p:sp>
+      <p:sp>
+        <p:nvSpPr>
+          <p:cNvPr id="9" name="TextBox 8"/>
+          <p:cNvSpPr txBox="1"/>
+          <p:nvPr/>
+        </p:nvSpPr>
+        <p:spPr>
+          <a:xfrm>
+            <a:off x="914400" y="2852928"/>
+            <a:ext cx="3840480" cy="256032"/>
+          </a:xfrm>
+          <a:prstGeom prst="rect">
+            <a:avLst/>
+          </a:prstGeom>
+          <a:noFill/>
+        </p:spPr>
+        <p:txBody>
+          <a:bodyPr wrap="square" lIns="73152" rIns="73152" tIns="36576" bIns="36576">
+            <a:spAutoFit/>
+          </a:bodyPr>
+          <a:lstStyle/>
+          <a:p>
+            <a:pPr algn="l">
+              <a:spcAft>
+                <a:spcPts val="0"/>
+              </a:spcAft>
+              <a:defRPr sz="1700" b="1">
+                <a:solidFill>
+                  <a:srgbClr val="122C4E"/>
+                </a:solidFill>
+                <a:latin typeface="Noto Sans CJK KR"/>
+              </a:defRPr>
+            </a:pPr>
+            <a:r>
+              <a:t>ROS 2 Jazzy — URDF / robot_state_publisher</a:t>
+            </a:r>
+          </a:p>
+        </p:txBody>
+      </p:sp>
+      <p:sp>
+        <p:nvSpPr>
+          <p:cNvPr id="10" name="TextBox 9"/>
+          <p:cNvSpPr txBox="1"/>
+          <p:nvPr/>
+        </p:nvSpPr>
+        <p:spPr>
+          <a:xfrm>
+            <a:off x="914400" y="3127248"/>
+            <a:ext cx="9966960" cy="475488"/>
+          </a:xfrm>
+          <a:prstGeom prst="rect">
+            <a:avLst/>
+          </a:prstGeom>
+          <a:noFill/>
+        </p:spPr>
+        <p:txBody>
+          <a:bodyPr wrap="square" lIns="73152" rIns="73152" tIns="36576" bIns="36576">
+            <a:spAutoFit/>
+          </a:bodyPr>
+          <a:lstStyle/>
+          <a:p>
+            <a:pPr algn="l">
+              <a:spcAft>
+                <a:spcPts val="0"/>
+              </a:spcAft>
+              <a:defRPr sz="1000" b="0">
+                <a:solidFill>
+                  <a:srgbClr val="225B9B"/>
+                </a:solidFill>
+                <a:latin typeface="DejaVu Sans Mono"/>
+              </a:defRPr>
+            </a:pPr>
+            <a:r>
+              <a:t>https://docs.ros.org/en/jazzy/Tutorials/Intermediate/URDF/Using-URDF-with-Robot-State-Publisher-py.html</a:t>
+            </a:r>
+          </a:p>
+        </p:txBody>
+      </p:sp>
+      <p:sp>
+        <p:nvSpPr>
+          <p:cNvPr id="11" name="TextBox 10"/>
+          <p:cNvSpPr txBox="1"/>
+          <p:nvPr/>
+        </p:nvSpPr>
+        <p:spPr>
+          <a:xfrm>
+            <a:off x="914400" y="3931920"/>
+            <a:ext cx="3840480" cy="256032"/>
+          </a:xfrm>
+          <a:prstGeom prst="rect">
+            <a:avLst/>
+          </a:prstGeom>
+          <a:noFill/>
+        </p:spPr>
+        <p:txBody>
+          <a:bodyPr wrap="square" lIns="73152" rIns="73152" tIns="36576" bIns="36576">
+            <a:spAutoFit/>
+          </a:bodyPr>
+          <a:lstStyle/>
+          <a:p>
+            <a:pPr algn="l">
+              <a:spcAft>
+                <a:spcPts val="0"/>
+              </a:spcAft>
+              <a:defRPr sz="1700" b="1">
+                <a:solidFill>
+                  <a:srgbClr val="122C4E"/>
+                </a:solidFill>
+                <a:latin typeface="Noto Sans CJK KR"/>
+              </a:defRPr>
+            </a:pPr>
+            <a:r>
+              <a:t>Gazebo — ROS 2 Integration / ros_gz_bridge</a:t>
+            </a:r>
+          </a:p>
+        </p:txBody>
+      </p:sp>
+      <p:sp>
+        <p:nvSpPr>
+          <p:cNvPr id="12" name="TextBox 11"/>
+          <p:cNvSpPr txBox="1"/>
+          <p:nvPr/>
+        </p:nvSpPr>
+        <p:spPr>
+          <a:xfrm>
+            <a:off x="914400" y="4206240"/>
+            <a:ext cx="9966960" cy="475488"/>
+          </a:xfrm>
+          <a:prstGeom prst="rect">
+            <a:avLst/>
+          </a:prstGeom>
+          <a:noFill/>
+        </p:spPr>
+        <p:txBody>
+          <a:bodyPr wrap="square" lIns="73152" rIns="73152" tIns="36576" bIns="36576">
+            <a:spAutoFit/>
+          </a:bodyPr>
+          <a:lstStyle/>
+          <a:p>
+            <a:pPr algn="l">
+              <a:spcAft>
+                <a:spcPts val="0"/>
+              </a:spcAft>
+              <a:defRPr sz="1000" b="0">
+                <a:solidFill>
+                  <a:srgbClr val="225B9B"/>
+                </a:solidFill>
+                <a:latin typeface="DejaVu Sans Mono"/>
+              </a:defRPr>
+            </a:pPr>
+            <a:r>
+              <a:t>https://gazebosim.org/docs/latest/ros2_integration/</a:t>
+            </a:r>
+          </a:p>
+        </p:txBody>
+      </p:sp>
+      <p:sp>
+        <p:nvSpPr>
+          <p:cNvPr id="13" name="TextBox 12"/>
+          <p:cNvSpPr txBox="1"/>
+          <p:nvPr/>
+        </p:nvSpPr>
+        <p:spPr>
+          <a:xfrm>
+            <a:off x="914400" y="5010912"/>
+            <a:ext cx="3840480" cy="256032"/>
+          </a:xfrm>
+          <a:prstGeom prst="rect">
+            <a:avLst/>
+          </a:prstGeom>
+          <a:noFill/>
+        </p:spPr>
+        <p:txBody>
+          <a:bodyPr wrap="square" lIns="73152" rIns="73152" tIns="36576" bIns="36576">
+            <a:spAutoFit/>
+          </a:bodyPr>
+          <a:lstStyle/>
+          <a:p>
+            <a:pPr algn="l">
+              <a:spcAft>
+                <a:spcPts val="0"/>
+              </a:spcAft>
+              <a:defRPr sz="1700" b="1">
+                <a:solidFill>
+                  <a:srgbClr val="122C4E"/>
+                </a:solidFill>
+                <a:latin typeface="Noto Sans CJK KR"/>
+              </a:defRPr>
+            </a:pPr>
+            <a:r>
+              <a:t>ROS 2 Jazzy — rosbag2 Recording and Playback</a:t>
+            </a:r>
+          </a:p>
+        </p:txBody>
+      </p:sp>
+      <p:sp>
+        <p:nvSpPr>
+          <p:cNvPr id="14" name="TextBox 13"/>
+          <p:cNvSpPr txBox="1"/>
+          <p:nvPr/>
+        </p:nvSpPr>
+        <p:spPr>
+          <a:xfrm>
+            <a:off x="914400" y="5285232"/>
+            <a:ext cx="9966960" cy="475488"/>
+          </a:xfrm>
+          <a:prstGeom prst="rect">
+            <a:avLst/>
+          </a:prstGeom>
+          <a:noFill/>
+        </p:spPr>
+        <p:txBody>
+          <a:bodyPr wrap="square" lIns="73152" rIns="73152" tIns="36576" bIns="36576">
+            <a:spAutoFit/>
+          </a:bodyPr>
+          <a:lstStyle/>
+          <a:p>
+            <a:pPr algn="l">
+              <a:spcAft>
+                <a:spcPts val="0"/>
+              </a:spcAft>
+              <a:defRPr sz="1000" b="0">
+                <a:solidFill>
+                  <a:srgbClr val="225B9B"/>
+                </a:solidFill>
+                <a:latin typeface="DejaVu Sans Mono"/>
+              </a:defRPr>
+            </a:pPr>
+            <a:r>
+              <a:t>https://docs.ros.org/en/jazzy/Tutorials/Beginner-CLI-Tools/Recording-And-Playing-Back-Data/Recording-And-Playing-Back-Data.html</a:t>
             </a:r>
           </a:p>
         </p:txBody>
